--- a/lectures/lecture12_13_14/lecture_trees.pptx
+++ b/lectures/lecture12_13_14/lecture_trees.pptx
@@ -28,16 +28,19 @@
     <p:sldId id="276" r:id="rId22"/>
     <p:sldId id="277" r:id="rId23"/>
     <p:sldId id="279" r:id="rId24"/>
-    <p:sldId id="278" r:id="rId25"/>
-    <p:sldId id="280" r:id="rId26"/>
-    <p:sldId id="281" r:id="rId27"/>
-    <p:sldId id="282" r:id="rId28"/>
-    <p:sldId id="283" r:id="rId29"/>
-    <p:sldId id="285" r:id="rId30"/>
-    <p:sldId id="284" r:id="rId31"/>
-    <p:sldId id="286" r:id="rId32"/>
-    <p:sldId id="287" r:id="rId33"/>
-    <p:sldId id="288" r:id="rId34"/>
+    <p:sldId id="291" r:id="rId25"/>
+    <p:sldId id="278" r:id="rId26"/>
+    <p:sldId id="280" r:id="rId27"/>
+    <p:sldId id="281" r:id="rId28"/>
+    <p:sldId id="282" r:id="rId29"/>
+    <p:sldId id="283" r:id="rId30"/>
+    <p:sldId id="285" r:id="rId31"/>
+    <p:sldId id="284" r:id="rId32"/>
+    <p:sldId id="286" r:id="rId33"/>
+    <p:sldId id="287" r:id="rId34"/>
+    <p:sldId id="290" r:id="rId35"/>
+    <p:sldId id="288" r:id="rId36"/>
+    <p:sldId id="289" r:id="rId37"/>
   </p:sldIdLst>
   <p:sldSz cx="12192000" cy="6858000"/>
   <p:notesSz cx="6858000" cy="9144000"/>
@@ -157,12 +160,12 @@
   <pc:docChgLst>
     <pc:chgData name="Toby Donaldson" userId="2e6e5431-bb17-4c41-9985-d39c50d83c73" providerId="ADAL" clId="{F31BC264-820E-54C4-A6D1-F92AF9CC222E}"/>
     <pc:docChg chg="undo custSel addSld delSld modSld sldOrd">
-      <pc:chgData name="Toby Donaldson" userId="2e6e5431-bb17-4c41-9985-d39c50d83c73" providerId="ADAL" clId="{F31BC264-820E-54C4-A6D1-F92AF9CC222E}" dt="2026-06-09T05:46:23.605" v="5061" actId="1076"/>
+      <pc:chgData name="Toby Donaldson" userId="2e6e5431-bb17-4c41-9985-d39c50d83c73" providerId="ADAL" clId="{F31BC264-820E-54C4-A6D1-F92AF9CC222E}" dt="2026-06-09T20:08:00.417" v="6318" actId="20577"/>
       <pc:docMkLst>
         <pc:docMk/>
       </pc:docMkLst>
       <pc:sldChg chg="modSp new mod">
-        <pc:chgData name="Toby Donaldson" userId="2e6e5431-bb17-4c41-9985-d39c50d83c73" providerId="ADAL" clId="{F31BC264-820E-54C4-A6D1-F92AF9CC222E}" dt="2026-06-09T03:27:53.163" v="288" actId="20577"/>
+        <pc:chgData name="Toby Donaldson" userId="2e6e5431-bb17-4c41-9985-d39c50d83c73" providerId="ADAL" clId="{F31BC264-820E-54C4-A6D1-F92AF9CC222E}" dt="2026-06-09T20:08:00.417" v="6318" actId="20577"/>
         <pc:sldMkLst>
           <pc:docMk/>
           <pc:sldMk cId="9530373" sldId="256"/>
@@ -176,7 +179,7 @@
           </ac:spMkLst>
         </pc:spChg>
         <pc:spChg chg="mod">
-          <ac:chgData name="Toby Donaldson" userId="2e6e5431-bb17-4c41-9985-d39c50d83c73" providerId="ADAL" clId="{F31BC264-820E-54C4-A6D1-F92AF9CC222E}" dt="2026-06-09T03:27:53.163" v="288" actId="20577"/>
+          <ac:chgData name="Toby Donaldson" userId="2e6e5431-bb17-4c41-9985-d39c50d83c73" providerId="ADAL" clId="{F31BC264-820E-54C4-A6D1-F92AF9CC222E}" dt="2026-06-09T20:08:00.417" v="6318" actId="20577"/>
           <ac:spMkLst>
             <pc:docMk/>
             <pc:sldMk cId="9530373" sldId="256"/>
@@ -681,7 +684,7 @@
         </pc:sldMkLst>
       </pc:sldChg>
       <pc:sldChg chg="modSp new mod">
-        <pc:chgData name="Toby Donaldson" userId="2e6e5431-bb17-4c41-9985-d39c50d83c73" providerId="ADAL" clId="{F31BC264-820E-54C4-A6D1-F92AF9CC222E}" dt="2026-06-09T04:01:08.669" v="893" actId="20577"/>
+        <pc:chgData name="Toby Donaldson" userId="2e6e5431-bb17-4c41-9985-d39c50d83c73" providerId="ADAL" clId="{F31BC264-820E-54C4-A6D1-F92AF9CC222E}" dt="2026-06-09T19:27:29.300" v="6302" actId="20577"/>
         <pc:sldMkLst>
           <pc:docMk/>
           <pc:sldMk cId="2592607096" sldId="264"/>
@@ -695,7 +698,7 @@
           </ac:spMkLst>
         </pc:spChg>
         <pc:spChg chg="mod">
-          <ac:chgData name="Toby Donaldson" userId="2e6e5431-bb17-4c41-9985-d39c50d83c73" providerId="ADAL" clId="{F31BC264-820E-54C4-A6D1-F92AF9CC222E}" dt="2026-06-09T04:01:08.669" v="893" actId="20577"/>
+          <ac:chgData name="Toby Donaldson" userId="2e6e5431-bb17-4c41-9985-d39c50d83c73" providerId="ADAL" clId="{F31BC264-820E-54C4-A6D1-F92AF9CC222E}" dt="2026-06-09T19:27:29.300" v="6302" actId="20577"/>
           <ac:spMkLst>
             <pc:docMk/>
             <pc:sldMk cId="2592607096" sldId="264"/>
@@ -1178,7 +1181,7 @@
         </pc:spChg>
       </pc:sldChg>
       <pc:sldChg chg="addSp delSp modSp add mod">
-        <pc:chgData name="Toby Donaldson" userId="2e6e5431-bb17-4c41-9985-d39c50d83c73" providerId="ADAL" clId="{F31BC264-820E-54C4-A6D1-F92AF9CC222E}" dt="2026-06-09T04:24:17.158" v="1775" actId="113"/>
+        <pc:chgData name="Toby Donaldson" userId="2e6e5431-bb17-4c41-9985-d39c50d83c73" providerId="ADAL" clId="{F31BC264-820E-54C4-A6D1-F92AF9CC222E}" dt="2026-06-09T19:36:46.591" v="6303" actId="14100"/>
         <pc:sldMkLst>
           <pc:docMk/>
           <pc:sldMk cId="1717266924" sldId="271"/>
@@ -1192,7 +1195,7 @@
           </ac:spMkLst>
         </pc:spChg>
         <pc:spChg chg="mod">
-          <ac:chgData name="Toby Donaldson" userId="2e6e5431-bb17-4c41-9985-d39c50d83c73" providerId="ADAL" clId="{F31BC264-820E-54C4-A6D1-F92AF9CC222E}" dt="2026-06-09T04:24:17.158" v="1775" actId="113"/>
+          <ac:chgData name="Toby Donaldson" userId="2e6e5431-bb17-4c41-9985-d39c50d83c73" providerId="ADAL" clId="{F31BC264-820E-54C4-A6D1-F92AF9CC222E}" dt="2026-06-09T19:36:46.591" v="6303" actId="14100"/>
           <ac:spMkLst>
             <pc:docMk/>
             <pc:sldMk cId="1717266924" sldId="271"/>
@@ -1928,11 +1931,51 @@
         </pc:sldMkLst>
       </pc:sldChg>
       <pc:sldChg chg="delSp modSp add mod ord">
-        <pc:chgData name="Toby Donaldson" userId="2e6e5431-bb17-4c41-9985-d39c50d83c73" providerId="ADAL" clId="{F31BC264-820E-54C4-A6D1-F92AF9CC222E}" dt="2026-06-09T04:58:57.869" v="3057" actId="20578"/>
+        <pc:chgData name="Toby Donaldson" userId="2e6e5431-bb17-4c41-9985-d39c50d83c73" providerId="ADAL" clId="{F31BC264-820E-54C4-A6D1-F92AF9CC222E}" dt="2026-06-09T19:56:36.999" v="6305" actId="21"/>
         <pc:sldMkLst>
           <pc:docMk/>
           <pc:sldMk cId="3867704620" sldId="279"/>
         </pc:sldMkLst>
+        <pc:spChg chg="del">
+          <ac:chgData name="Toby Donaldson" userId="2e6e5431-bb17-4c41-9985-d39c50d83c73" providerId="ADAL" clId="{F31BC264-820E-54C4-A6D1-F92AF9CC222E}" dt="2026-06-09T19:56:36.999" v="6305" actId="21"/>
+          <ac:spMkLst>
+            <pc:docMk/>
+            <pc:sldMk cId="3867704620" sldId="279"/>
+            <ac:spMk id="5" creationId="{FEE32E2D-BE15-1257-E158-B5B61ACB122F}"/>
+          </ac:spMkLst>
+        </pc:spChg>
+        <pc:spChg chg="del">
+          <ac:chgData name="Toby Donaldson" userId="2e6e5431-bb17-4c41-9985-d39c50d83c73" providerId="ADAL" clId="{F31BC264-820E-54C4-A6D1-F92AF9CC222E}" dt="2026-06-09T19:56:36.999" v="6305" actId="21"/>
+          <ac:spMkLst>
+            <pc:docMk/>
+            <pc:sldMk cId="3867704620" sldId="279"/>
+            <ac:spMk id="6" creationId="{98D2C4AA-5106-A9B6-B183-FF21DBF16704}"/>
+          </ac:spMkLst>
+        </pc:spChg>
+        <pc:spChg chg="del">
+          <ac:chgData name="Toby Donaldson" userId="2e6e5431-bb17-4c41-9985-d39c50d83c73" providerId="ADAL" clId="{F31BC264-820E-54C4-A6D1-F92AF9CC222E}" dt="2026-06-09T19:56:36.999" v="6305" actId="21"/>
+          <ac:spMkLst>
+            <pc:docMk/>
+            <pc:sldMk cId="3867704620" sldId="279"/>
+            <ac:spMk id="7" creationId="{61A275E0-7CF1-86E3-AD83-C558F0D82F64}"/>
+          </ac:spMkLst>
+        </pc:spChg>
+        <pc:spChg chg="del">
+          <ac:chgData name="Toby Donaldson" userId="2e6e5431-bb17-4c41-9985-d39c50d83c73" providerId="ADAL" clId="{F31BC264-820E-54C4-A6D1-F92AF9CC222E}" dt="2026-06-09T19:56:36.999" v="6305" actId="21"/>
+          <ac:spMkLst>
+            <pc:docMk/>
+            <pc:sldMk cId="3867704620" sldId="279"/>
+            <ac:spMk id="8" creationId="{8CEDBB7E-832B-CB44-7D27-16995A9F24D5}"/>
+          </ac:spMkLst>
+        </pc:spChg>
+        <pc:spChg chg="del">
+          <ac:chgData name="Toby Donaldson" userId="2e6e5431-bb17-4c41-9985-d39c50d83c73" providerId="ADAL" clId="{F31BC264-820E-54C4-A6D1-F92AF9CC222E}" dt="2026-06-09T19:56:36.999" v="6305" actId="21"/>
+          <ac:spMkLst>
+            <pc:docMk/>
+            <pc:sldMk cId="3867704620" sldId="279"/>
+            <ac:spMk id="9" creationId="{8C9735E2-4A70-68A3-47B5-F7E25D17B7E3}"/>
+          </ac:spMkLst>
+        </pc:spChg>
         <pc:spChg chg="del">
           <ac:chgData name="Toby Donaldson" userId="2e6e5431-bb17-4c41-9985-d39c50d83c73" providerId="ADAL" clId="{F31BC264-820E-54C4-A6D1-F92AF9CC222E}" dt="2026-06-09T04:58:47.009" v="3052" actId="21"/>
           <ac:spMkLst>
@@ -1989,6 +2032,38 @@
             <ac:spMk id="39" creationId="{7B43E780-571A-2A94-C657-A0D6BF801814}"/>
           </ac:spMkLst>
         </pc:spChg>
+        <pc:cxnChg chg="del mod">
+          <ac:chgData name="Toby Donaldson" userId="2e6e5431-bb17-4c41-9985-d39c50d83c73" providerId="ADAL" clId="{F31BC264-820E-54C4-A6D1-F92AF9CC222E}" dt="2026-06-09T19:56:36.999" v="6305" actId="21"/>
+          <ac:cxnSpMkLst>
+            <pc:docMk/>
+            <pc:sldMk cId="3867704620" sldId="279"/>
+            <ac:cxnSpMk id="11" creationId="{A03A6E5A-13DB-7BEC-C50C-8A71D880F91F}"/>
+          </ac:cxnSpMkLst>
+        </pc:cxnChg>
+        <pc:cxnChg chg="del mod">
+          <ac:chgData name="Toby Donaldson" userId="2e6e5431-bb17-4c41-9985-d39c50d83c73" providerId="ADAL" clId="{F31BC264-820E-54C4-A6D1-F92AF9CC222E}" dt="2026-06-09T19:56:36.999" v="6305" actId="21"/>
+          <ac:cxnSpMkLst>
+            <pc:docMk/>
+            <pc:sldMk cId="3867704620" sldId="279"/>
+            <ac:cxnSpMk id="13" creationId="{2CAA00A0-2578-D150-662C-AB6227BC23A9}"/>
+          </ac:cxnSpMkLst>
+        </pc:cxnChg>
+        <pc:cxnChg chg="del mod">
+          <ac:chgData name="Toby Donaldson" userId="2e6e5431-bb17-4c41-9985-d39c50d83c73" providerId="ADAL" clId="{F31BC264-820E-54C4-A6D1-F92AF9CC222E}" dt="2026-06-09T19:56:36.999" v="6305" actId="21"/>
+          <ac:cxnSpMkLst>
+            <pc:docMk/>
+            <pc:sldMk cId="3867704620" sldId="279"/>
+            <ac:cxnSpMk id="15" creationId="{54C3CECE-9CB7-866B-68B4-8BBE8C5744C3}"/>
+          </ac:cxnSpMkLst>
+        </pc:cxnChg>
+        <pc:cxnChg chg="del mod">
+          <ac:chgData name="Toby Donaldson" userId="2e6e5431-bb17-4c41-9985-d39c50d83c73" providerId="ADAL" clId="{F31BC264-820E-54C4-A6D1-F92AF9CC222E}" dt="2026-06-09T19:56:36.999" v="6305" actId="21"/>
+          <ac:cxnSpMkLst>
+            <pc:docMk/>
+            <pc:sldMk cId="3867704620" sldId="279"/>
+            <ac:cxnSpMk id="20" creationId="{16C79E98-8BEF-234D-735D-CD988A278AF1}"/>
+          </ac:cxnSpMkLst>
+        </pc:cxnChg>
       </pc:sldChg>
       <pc:sldChg chg="addSp delSp modSp new mod">
         <pc:chgData name="Toby Donaldson" userId="2e6e5431-bb17-4c41-9985-d39c50d83c73" providerId="ADAL" clId="{F31BC264-820E-54C4-A6D1-F92AF9CC222E}" dt="2026-06-09T05:08:46.690" v="3630" actId="21"/>
@@ -2149,7 +2224,7 @@
         </pc:sldMkLst>
       </pc:sldChg>
       <pc:sldChg chg="addSp delSp modSp add mod">
-        <pc:chgData name="Toby Donaldson" userId="2e6e5431-bb17-4c41-9985-d39c50d83c73" providerId="ADAL" clId="{F31BC264-820E-54C4-A6D1-F92AF9CC222E}" dt="2026-06-09T05:09:50.132" v="3642" actId="1076"/>
+        <pc:chgData name="Toby Donaldson" userId="2e6e5431-bb17-4c41-9985-d39c50d83c73" providerId="ADAL" clId="{F31BC264-820E-54C4-A6D1-F92AF9CC222E}" dt="2026-06-09T19:58:05.487" v="6309" actId="207"/>
         <pc:sldMkLst>
           <pc:docMk/>
           <pc:sldMk cId="851915149" sldId="281"/>
@@ -2163,7 +2238,7 @@
           </ac:spMkLst>
         </pc:spChg>
         <pc:spChg chg="add mod">
-          <ac:chgData name="Toby Donaldson" userId="2e6e5431-bb17-4c41-9985-d39c50d83c73" providerId="ADAL" clId="{F31BC264-820E-54C4-A6D1-F92AF9CC222E}" dt="2026-06-09T05:09:41.364" v="3640" actId="1076"/>
+          <ac:chgData name="Toby Donaldson" userId="2e6e5431-bb17-4c41-9985-d39c50d83c73" providerId="ADAL" clId="{F31BC264-820E-54C4-A6D1-F92AF9CC222E}" dt="2026-06-09T19:57:52.259" v="6306" actId="207"/>
           <ac:spMkLst>
             <pc:docMk/>
             <pc:sldMk cId="851915149" sldId="281"/>
@@ -2171,7 +2246,7 @@
           </ac:spMkLst>
         </pc:spChg>
         <pc:spChg chg="add mod">
-          <ac:chgData name="Toby Donaldson" userId="2e6e5431-bb17-4c41-9985-d39c50d83c73" providerId="ADAL" clId="{F31BC264-820E-54C4-A6D1-F92AF9CC222E}" dt="2026-06-09T05:09:24.282" v="3637" actId="1076"/>
+          <ac:chgData name="Toby Donaldson" userId="2e6e5431-bb17-4c41-9985-d39c50d83c73" providerId="ADAL" clId="{F31BC264-820E-54C4-A6D1-F92AF9CC222E}" dt="2026-06-09T19:57:56.804" v="6307" actId="207"/>
           <ac:spMkLst>
             <pc:docMk/>
             <pc:sldMk cId="851915149" sldId="281"/>
@@ -2179,7 +2254,7 @@
           </ac:spMkLst>
         </pc:spChg>
         <pc:spChg chg="add mod">
-          <ac:chgData name="Toby Donaldson" userId="2e6e5431-bb17-4c41-9985-d39c50d83c73" providerId="ADAL" clId="{F31BC264-820E-54C4-A6D1-F92AF9CC222E}" dt="2026-06-09T05:09:35.948" v="3639" actId="1076"/>
+          <ac:chgData name="Toby Donaldson" userId="2e6e5431-bb17-4c41-9985-d39c50d83c73" providerId="ADAL" clId="{F31BC264-820E-54C4-A6D1-F92AF9CC222E}" dt="2026-06-09T19:58:05.487" v="6309" actId="207"/>
           <ac:spMkLst>
             <pc:docMk/>
             <pc:sldMk cId="851915149" sldId="281"/>
@@ -2187,7 +2262,7 @@
           </ac:spMkLst>
         </pc:spChg>
         <pc:spChg chg="add mod">
-          <ac:chgData name="Toby Donaldson" userId="2e6e5431-bb17-4c41-9985-d39c50d83c73" providerId="ADAL" clId="{F31BC264-820E-54C4-A6D1-F92AF9CC222E}" dt="2026-06-09T05:09:50.132" v="3642" actId="1076"/>
+          <ac:chgData name="Toby Donaldson" userId="2e6e5431-bb17-4c41-9985-d39c50d83c73" providerId="ADAL" clId="{F31BC264-820E-54C4-A6D1-F92AF9CC222E}" dt="2026-06-09T19:58:00.921" v="6308" actId="207"/>
           <ac:spMkLst>
             <pc:docMk/>
             <pc:sldMk cId="851915149" sldId="281"/>
@@ -2210,13 +2285,13 @@
         </pc:sldMkLst>
       </pc:sldChg>
       <pc:sldChg chg="addSp modSp add mod">
-        <pc:chgData name="Toby Donaldson" userId="2e6e5431-bb17-4c41-9985-d39c50d83c73" providerId="ADAL" clId="{F31BC264-820E-54C4-A6D1-F92AF9CC222E}" dt="2026-06-09T05:10:15.273" v="3646" actId="20577"/>
+        <pc:chgData name="Toby Donaldson" userId="2e6e5431-bb17-4c41-9985-d39c50d83c73" providerId="ADAL" clId="{F31BC264-820E-54C4-A6D1-F92AF9CC222E}" dt="2026-06-09T19:58:14.204" v="6310" actId="207"/>
         <pc:sldMkLst>
           <pc:docMk/>
           <pc:sldMk cId="3641487090" sldId="282"/>
         </pc:sldMkLst>
         <pc:spChg chg="add mod">
-          <ac:chgData name="Toby Donaldson" userId="2e6e5431-bb17-4c41-9985-d39c50d83c73" providerId="ADAL" clId="{F31BC264-820E-54C4-A6D1-F92AF9CC222E}" dt="2026-06-09T05:10:15.273" v="3646" actId="20577"/>
+          <ac:chgData name="Toby Donaldson" userId="2e6e5431-bb17-4c41-9985-d39c50d83c73" providerId="ADAL" clId="{F31BC264-820E-54C4-A6D1-F92AF9CC222E}" dt="2026-06-09T19:58:14.204" v="6310" actId="207"/>
           <ac:spMkLst>
             <pc:docMk/>
             <pc:sldMk cId="3641487090" sldId="282"/>
@@ -2232,13 +2307,13 @@
         </pc:sldMkLst>
       </pc:sldChg>
       <pc:sldChg chg="addSp modSp add mod">
-        <pc:chgData name="Toby Donaldson" userId="2e6e5431-bb17-4c41-9985-d39c50d83c73" providerId="ADAL" clId="{F31BC264-820E-54C4-A6D1-F92AF9CC222E}" dt="2026-06-09T05:11:12.092" v="3676" actId="20577"/>
+        <pc:chgData name="Toby Donaldson" userId="2e6e5431-bb17-4c41-9985-d39c50d83c73" providerId="ADAL" clId="{F31BC264-820E-54C4-A6D1-F92AF9CC222E}" dt="2026-06-09T19:58:29.404" v="6312" actId="207"/>
         <pc:sldMkLst>
           <pc:docMk/>
           <pc:sldMk cId="2637133452" sldId="283"/>
         </pc:sldMkLst>
         <pc:spChg chg="add mod">
-          <ac:chgData name="Toby Donaldson" userId="2e6e5431-bb17-4c41-9985-d39c50d83c73" providerId="ADAL" clId="{F31BC264-820E-54C4-A6D1-F92AF9CC222E}" dt="2026-06-09T05:10:42.905" v="3650" actId="20577"/>
+          <ac:chgData name="Toby Donaldson" userId="2e6e5431-bb17-4c41-9985-d39c50d83c73" providerId="ADAL" clId="{F31BC264-820E-54C4-A6D1-F92AF9CC222E}" dt="2026-06-09T19:58:25.837" v="6311" actId="207"/>
           <ac:spMkLst>
             <pc:docMk/>
             <pc:sldMk cId="2637133452" sldId="283"/>
@@ -2246,7 +2321,7 @@
           </ac:spMkLst>
         </pc:spChg>
         <pc:spChg chg="add mod">
-          <ac:chgData name="Toby Donaldson" userId="2e6e5431-bb17-4c41-9985-d39c50d83c73" providerId="ADAL" clId="{F31BC264-820E-54C4-A6D1-F92AF9CC222E}" dt="2026-06-09T05:11:12.092" v="3676" actId="20577"/>
+          <ac:chgData name="Toby Donaldson" userId="2e6e5431-bb17-4c41-9985-d39c50d83c73" providerId="ADAL" clId="{F31BC264-820E-54C4-A6D1-F92AF9CC222E}" dt="2026-06-09T19:58:29.404" v="6312" actId="207"/>
           <ac:spMkLst>
             <pc:docMk/>
             <pc:sldMk cId="2637133452" sldId="283"/>
@@ -2501,11 +2576,64 @@
           <pc:sldMk cId="484083101" sldId="289"/>
         </pc:sldMkLst>
       </pc:sldChg>
+      <pc:sldChg chg="modSp new mod">
+        <pc:chgData name="Toby Donaldson" userId="2e6e5431-bb17-4c41-9985-d39c50d83c73" providerId="ADAL" clId="{F31BC264-820E-54C4-A6D1-F92AF9CC222E}" dt="2026-06-09T06:07:39.679" v="5325" actId="20577"/>
+        <pc:sldMkLst>
+          <pc:docMk/>
+          <pc:sldMk cId="2026226063" sldId="289"/>
+        </pc:sldMkLst>
+        <pc:spChg chg="mod">
+          <ac:chgData name="Toby Donaldson" userId="2e6e5431-bb17-4c41-9985-d39c50d83c73" providerId="ADAL" clId="{F31BC264-820E-54C4-A6D1-F92AF9CC222E}" dt="2026-06-09T06:06:27.114" v="5078" actId="20577"/>
+          <ac:spMkLst>
+            <pc:docMk/>
+            <pc:sldMk cId="2026226063" sldId="289"/>
+            <ac:spMk id="2" creationId="{05DECD98-B151-CEA7-F244-9C8EEFCA8150}"/>
+          </ac:spMkLst>
+        </pc:spChg>
+        <pc:spChg chg="mod">
+          <ac:chgData name="Toby Donaldson" userId="2e6e5431-bb17-4c41-9985-d39c50d83c73" providerId="ADAL" clId="{F31BC264-820E-54C4-A6D1-F92AF9CC222E}" dt="2026-06-09T06:07:39.679" v="5325" actId="20577"/>
+          <ac:spMkLst>
+            <pc:docMk/>
+            <pc:sldMk cId="2026226063" sldId="289"/>
+            <ac:spMk id="3" creationId="{615C2A9D-9CDB-6525-D18D-780832F2BF55}"/>
+          </ac:spMkLst>
+        </pc:spChg>
+      </pc:sldChg>
       <pc:sldChg chg="del">
         <pc:chgData name="Toby Donaldson" userId="2e6e5431-bb17-4c41-9985-d39c50d83c73" providerId="ADAL" clId="{F31BC264-820E-54C4-A6D1-F92AF9CC222E}" dt="2026-06-09T03:27:15.290" v="248" actId="2696"/>
         <pc:sldMkLst>
           <pc:docMk/>
           <pc:sldMk cId="3609491912" sldId="290"/>
+        </pc:sldMkLst>
+      </pc:sldChg>
+      <pc:sldChg chg="modSp new mod">
+        <pc:chgData name="Toby Donaldson" userId="2e6e5431-bb17-4c41-9985-d39c50d83c73" providerId="ADAL" clId="{F31BC264-820E-54C4-A6D1-F92AF9CC222E}" dt="2026-06-09T06:17:04.925" v="6300" actId="20577"/>
+        <pc:sldMkLst>
+          <pc:docMk/>
+          <pc:sldMk cId="4265642692" sldId="290"/>
+        </pc:sldMkLst>
+        <pc:spChg chg="mod">
+          <ac:chgData name="Toby Donaldson" userId="2e6e5431-bb17-4c41-9985-d39c50d83c73" providerId="ADAL" clId="{F31BC264-820E-54C4-A6D1-F92AF9CC222E}" dt="2026-06-09T06:08:12.013" v="5343" actId="20577"/>
+          <ac:spMkLst>
+            <pc:docMk/>
+            <pc:sldMk cId="4265642692" sldId="290"/>
+            <ac:spMk id="2" creationId="{4EA52096-46A2-79F1-F49C-E7DB24133BD4}"/>
+          </ac:spMkLst>
+        </pc:spChg>
+        <pc:spChg chg="mod">
+          <ac:chgData name="Toby Donaldson" userId="2e6e5431-bb17-4c41-9985-d39c50d83c73" providerId="ADAL" clId="{F31BC264-820E-54C4-A6D1-F92AF9CC222E}" dt="2026-06-09T06:17:04.925" v="6300" actId="20577"/>
+          <ac:spMkLst>
+            <pc:docMk/>
+            <pc:sldMk cId="4265642692" sldId="290"/>
+            <ac:spMk id="3" creationId="{5F9456F3-0936-CA29-209F-73228B98BE8C}"/>
+          </ac:spMkLst>
+        </pc:spChg>
+      </pc:sldChg>
+      <pc:sldChg chg="add">
+        <pc:chgData name="Toby Donaldson" userId="2e6e5431-bb17-4c41-9985-d39c50d83c73" providerId="ADAL" clId="{F31BC264-820E-54C4-A6D1-F92AF9CC222E}" dt="2026-06-09T19:56:31.521" v="6304" actId="2890"/>
+        <pc:sldMkLst>
+          <pc:docMk/>
+          <pc:sldMk cId="334443577" sldId="291"/>
         </pc:sldMkLst>
       </pc:sldChg>
       <pc:sldChg chg="modSp del mod">
@@ -5972,12 +6100,9 @@
               <a:t>Chapter 7</a:t>
             </a:r>
             <a:br>
-              <a:rPr lang="en-US" dirty="0"/>
+              <a:rPr lang="en-US"/>
             </a:br>
-            <a:r>
-              <a:rPr lang="en-US" dirty="0"/>
-              <a:t>Sections 7.1, 7.7, 7.3</a:t>
-            </a:r>
+            <a:endParaRPr lang="en-US" dirty="0"/>
           </a:p>
         </p:txBody>
       </p:sp>
@@ -13180,7 +13305,7 @@
         <p:spPr>
           <a:xfrm>
             <a:off x="369093" y="5371882"/>
-            <a:ext cx="5257984" cy="646331"/>
+            <a:ext cx="4273245" cy="646331"/>
           </a:xfrm>
           <a:prstGeom prst="rect">
             <a:avLst/>
@@ -17295,12 +17420,407 @@
           </a:p>
         </p:txBody>
       </p:sp>
+    </p:spTree>
+    <p:extLst>
+      <p:ext uri="{BB962C8B-B14F-4D97-AF65-F5344CB8AC3E}">
+        <p14:creationId xmlns:p14="http://schemas.microsoft.com/office/powerpoint/2010/main" val="3867704620"/>
+      </p:ext>
+    </p:extLst>
+  </p:cSld>
+  <p:clrMapOvr>
+    <a:masterClrMapping/>
+  </p:clrMapOvr>
+</p:sld>
+</file>
+
+<file path=ppt/slides/slide24.xml><?xml version="1.0" encoding="utf-8"?>
+<p:sld xmlns:a="http://schemas.openxmlformats.org/drawingml/2006/main" xmlns:r="http://schemas.openxmlformats.org/officeDocument/2006/relationships" xmlns:p="http://schemas.openxmlformats.org/presentationml/2006/main">
+  <p:cSld>
+    <p:spTree>
+      <p:nvGrpSpPr>
+        <p:cNvPr id="1" name="">
+          <a:extLst>
+            <a:ext uri="{FF2B5EF4-FFF2-40B4-BE49-F238E27FC236}">
+              <a16:creationId xmlns:a16="http://schemas.microsoft.com/office/drawing/2014/main" id="{C82B6201-5263-F662-D9FE-EF12501F896F}"/>
+            </a:ext>
+          </a:extLst>
+        </p:cNvPr>
+        <p:cNvGrpSpPr/>
+        <p:nvPr/>
+      </p:nvGrpSpPr>
+      <p:grpSpPr>
+        <a:xfrm>
+          <a:off x="0" y="0"/>
+          <a:ext cx="0" cy="0"/>
+          <a:chOff x="0" y="0"/>
+          <a:chExt cx="0" cy="0"/>
+        </a:xfrm>
+      </p:grpSpPr>
+      <p:sp>
+        <p:nvSpPr>
+          <p:cNvPr id="2" name="Title 1">
+            <a:extLst>
+              <a:ext uri="{FF2B5EF4-FFF2-40B4-BE49-F238E27FC236}">
+                <a16:creationId xmlns:a16="http://schemas.microsoft.com/office/drawing/2014/main" id="{C5A64800-8B3A-5A2D-561A-AEC424D86051}"/>
+              </a:ext>
+            </a:extLst>
+          </p:cNvPr>
+          <p:cNvSpPr>
+            <a:spLocks noGrp="1"/>
+          </p:cNvSpPr>
+          <p:nvPr>
+            <p:ph type="title"/>
+          </p:nvPr>
+        </p:nvSpPr>
+        <p:spPr>
+          <a:xfrm>
+            <a:off x="838200" y="365125"/>
+            <a:ext cx="2849545" cy="1325563"/>
+          </a:xfrm>
+        </p:spPr>
+        <p:txBody>
+          <a:bodyPr/>
+          <a:lstStyle/>
+          <a:p>
+            <a:r>
+              <a:rPr lang="en-US" dirty="0"/>
+              <a:t>Tree Depth</a:t>
+            </a:r>
+          </a:p>
+        </p:txBody>
+      </p:sp>
+      <p:sp>
+        <p:nvSpPr>
+          <p:cNvPr id="3" name="Content Placeholder 2">
+            <a:extLst>
+              <a:ext uri="{FF2B5EF4-FFF2-40B4-BE49-F238E27FC236}">
+                <a16:creationId xmlns:a16="http://schemas.microsoft.com/office/drawing/2014/main" id="{C2490DBE-9280-98F3-281C-5B6AAECFA01E}"/>
+              </a:ext>
+            </a:extLst>
+          </p:cNvPr>
+          <p:cNvSpPr>
+            <a:spLocks noGrp="1"/>
+          </p:cNvSpPr>
+          <p:nvPr>
+            <p:ph idx="1"/>
+          </p:nvPr>
+        </p:nvSpPr>
+        <p:spPr>
+          <a:xfrm>
+            <a:off x="838200" y="1825625"/>
+            <a:ext cx="5148898" cy="4351338"/>
+          </a:xfrm>
+        </p:spPr>
+        <p:txBody>
+          <a:bodyPr>
+            <a:normAutofit fontScale="92500"/>
+          </a:bodyPr>
+          <a:lstStyle/>
+          <a:p>
+            <a:pPr marL="0" indent="0">
+              <a:buNone/>
+            </a:pPr>
+            <a:r>
+              <a:rPr lang="en-US" dirty="0"/>
+              <a:t>The </a:t>
+            </a:r>
+            <a:r>
+              <a:rPr lang="en-US" b="1" dirty="0"/>
+              <a:t>depth</a:t>
+            </a:r>
+            <a:r>
+              <a:rPr lang="en-US" dirty="0"/>
+              <a:t> of a tree node p is the number of ancestors of p, excluding p itself.</a:t>
+            </a:r>
+          </a:p>
+          <a:p>
+            <a:pPr marL="0" indent="0">
+              <a:buNone/>
+            </a:pPr>
+            <a:r>
+              <a:rPr lang="en-US" dirty="0"/>
+              <a:t>Root of tree always has depth 0</a:t>
+            </a:r>
+          </a:p>
+          <a:p>
+            <a:pPr marL="0" indent="0">
+              <a:buNone/>
+            </a:pPr>
+            <a:endParaRPr lang="en-US" dirty="0"/>
+          </a:p>
+          <a:p>
+            <a:pPr marL="0" indent="0">
+              <a:buNone/>
+            </a:pPr>
+            <a:r>
+              <a:rPr lang="en-US" b="1" dirty="0"/>
+              <a:t>Recursive definition</a:t>
+            </a:r>
+          </a:p>
+          <a:p>
+            <a:r>
+              <a:rPr lang="en-CA" dirty="0"/>
+              <a:t>If p</a:t>
+            </a:r>
+            <a:r>
+              <a:rPr lang="en-CA" i="1" dirty="0"/>
+              <a:t> </a:t>
+            </a:r>
+            <a:r>
+              <a:rPr lang="en-CA" dirty="0"/>
+              <a:t>is the root, then the depth of p</a:t>
+            </a:r>
+            <a:r>
+              <a:rPr lang="en-CA" i="1" dirty="0"/>
+              <a:t> </a:t>
+            </a:r>
+            <a:r>
+              <a:rPr lang="en-CA" dirty="0"/>
+              <a:t>is 0.</a:t>
+            </a:r>
+          </a:p>
+          <a:p>
+            <a:r>
+              <a:rPr lang="en-CA" dirty="0"/>
+              <a:t>Otherwise, the depth of p</a:t>
+            </a:r>
+            <a:r>
+              <a:rPr lang="en-CA" i="1" dirty="0"/>
+              <a:t> </a:t>
+            </a:r>
+            <a:r>
+              <a:rPr lang="en-CA" dirty="0"/>
+              <a:t>is 1 plus the depth of the parent of p</a:t>
+            </a:r>
+          </a:p>
+          <a:p>
+            <a:pPr marL="0" indent="0">
+              <a:buNone/>
+            </a:pPr>
+            <a:endParaRPr lang="en-US" dirty="0"/>
+          </a:p>
+          <a:p>
+            <a:pPr lvl="1"/>
+            <a:endParaRPr lang="en-US" dirty="0"/>
+          </a:p>
+        </p:txBody>
+      </p:sp>
+      <p:sp>
+        <p:nvSpPr>
+          <p:cNvPr id="33" name="TextBox 32">
+            <a:extLst>
+              <a:ext uri="{FF2B5EF4-FFF2-40B4-BE49-F238E27FC236}">
+                <a16:creationId xmlns:a16="http://schemas.microsoft.com/office/drawing/2014/main" id="{D4B85A9C-D2DC-B742-AA83-24A0C31D854B}"/>
+              </a:ext>
+            </a:extLst>
+          </p:cNvPr>
+          <p:cNvSpPr txBox="1"/>
+          <p:nvPr/>
+        </p:nvSpPr>
+        <p:spPr>
+          <a:xfrm>
+            <a:off x="6943411" y="4050901"/>
+            <a:ext cx="4329840" cy="1938992"/>
+          </a:xfrm>
+          <a:prstGeom prst="rect">
+            <a:avLst/>
+          </a:prstGeom>
+          <a:noFill/>
+        </p:spPr>
+        <p:txBody>
+          <a:bodyPr wrap="none" rtlCol="0">
+            <a:spAutoFit/>
+          </a:bodyPr>
+          <a:lstStyle/>
+          <a:p>
+            <a:r>
+              <a:rPr lang="en-US" sz="2400" b="1" dirty="0"/>
+              <a:t>Depth(T, p)</a:t>
+            </a:r>
+          </a:p>
+          <a:p>
+            <a:r>
+              <a:rPr lang="en-US" sz="2400" dirty="0"/>
+              <a:t>   if </a:t>
+            </a:r>
+            <a:r>
+              <a:rPr lang="en-US" sz="2400" dirty="0" err="1"/>
+              <a:t>isRoot</a:t>
+            </a:r>
+            <a:r>
+              <a:rPr lang="en-US" sz="2400" dirty="0"/>
+              <a:t>(p) then</a:t>
+            </a:r>
+            <a:br>
+              <a:rPr lang="en-US" sz="2400" dirty="0"/>
+            </a:br>
+            <a:r>
+              <a:rPr lang="en-US" sz="2400" dirty="0"/>
+              <a:t>      return 0</a:t>
+            </a:r>
+          </a:p>
+          <a:p>
+            <a:r>
+              <a:rPr lang="en-US" sz="2400" dirty="0"/>
+              <a:t>   else</a:t>
+            </a:r>
+          </a:p>
+          <a:p>
+            <a:r>
+              <a:rPr lang="en-US" sz="2400" dirty="0"/>
+              <a:t>      return 1 + depth(T, parent(p))</a:t>
+            </a:r>
+          </a:p>
+        </p:txBody>
+      </p:sp>
+      <p:sp>
+        <p:nvSpPr>
+          <p:cNvPr id="36" name="TextBox 35">
+            <a:extLst>
+              <a:ext uri="{FF2B5EF4-FFF2-40B4-BE49-F238E27FC236}">
+                <a16:creationId xmlns:a16="http://schemas.microsoft.com/office/drawing/2014/main" id="{361320A1-C143-64B7-9B1D-781D886D654B}"/>
+              </a:ext>
+            </a:extLst>
+          </p:cNvPr>
+          <p:cNvSpPr txBox="1"/>
+          <p:nvPr/>
+        </p:nvSpPr>
+        <p:spPr>
+          <a:xfrm>
+            <a:off x="7080422" y="3113903"/>
+            <a:ext cx="184731" cy="369332"/>
+          </a:xfrm>
+          <a:prstGeom prst="rect">
+            <a:avLst/>
+          </a:prstGeom>
+          <a:noFill/>
+        </p:spPr>
+        <p:txBody>
+          <a:bodyPr wrap="none" rtlCol="0">
+            <a:spAutoFit/>
+          </a:bodyPr>
+          <a:lstStyle/>
+          <a:p>
+            <a:endParaRPr lang="en-US" dirty="0"/>
+          </a:p>
+        </p:txBody>
+      </p:sp>
+      <p:sp>
+        <p:nvSpPr>
+          <p:cNvPr id="38" name="TextBox 37">
+            <a:extLst>
+              <a:ext uri="{FF2B5EF4-FFF2-40B4-BE49-F238E27FC236}">
+                <a16:creationId xmlns:a16="http://schemas.microsoft.com/office/drawing/2014/main" id="{833ABE88-F429-9772-4781-2FAA2DC17253}"/>
+              </a:ext>
+            </a:extLst>
+          </p:cNvPr>
+          <p:cNvSpPr txBox="1"/>
+          <p:nvPr/>
+        </p:nvSpPr>
+        <p:spPr>
+          <a:xfrm>
+            <a:off x="6557720" y="221776"/>
+            <a:ext cx="4433330" cy="646331"/>
+          </a:xfrm>
+          <a:prstGeom prst="rect">
+            <a:avLst/>
+          </a:prstGeom>
+          <a:solidFill>
+            <a:schemeClr val="accent2">
+              <a:lumMod val="40000"/>
+              <a:lumOff val="60000"/>
+            </a:schemeClr>
+          </a:solidFill>
+        </p:spPr>
+        <p:txBody>
+          <a:bodyPr wrap="square" rtlCol="0">
+            <a:spAutoFit/>
+          </a:bodyPr>
+          <a:lstStyle/>
+          <a:p>
+            <a:pPr algn="ctr"/>
+            <a:r>
+              <a:rPr lang="en-US" dirty="0"/>
+              <a:t>What’s the </a:t>
+            </a:r>
+            <a:r>
+              <a:rPr lang="en-US" b="1" dirty="0"/>
+              <a:t>maximum possible depth </a:t>
+            </a:r>
+            <a:r>
+              <a:rPr lang="en-US" dirty="0"/>
+              <a:t>of a node in a </a:t>
+            </a:r>
+            <a:r>
+              <a:rPr lang="en-US" b="1" dirty="0"/>
+              <a:t>tree with n nodes</a:t>
+            </a:r>
+            <a:r>
+              <a:rPr lang="en-US" dirty="0"/>
+              <a:t>?</a:t>
+            </a:r>
+          </a:p>
+        </p:txBody>
+      </p:sp>
+      <p:sp>
+        <p:nvSpPr>
+          <p:cNvPr id="39" name="TextBox 38">
+            <a:extLst>
+              <a:ext uri="{FF2B5EF4-FFF2-40B4-BE49-F238E27FC236}">
+                <a16:creationId xmlns:a16="http://schemas.microsoft.com/office/drawing/2014/main" id="{EB8BFE50-CAAB-EF42-F6BC-4CA1F45E7801}"/>
+              </a:ext>
+            </a:extLst>
+          </p:cNvPr>
+          <p:cNvSpPr txBox="1"/>
+          <p:nvPr/>
+        </p:nvSpPr>
+        <p:spPr>
+          <a:xfrm>
+            <a:off x="9704861" y="3919572"/>
+            <a:ext cx="1981371" cy="923330"/>
+          </a:xfrm>
+          <a:prstGeom prst="rect">
+            <a:avLst/>
+          </a:prstGeom>
+          <a:solidFill>
+            <a:schemeClr val="accent2">
+              <a:lumMod val="40000"/>
+              <a:lumOff val="60000"/>
+            </a:schemeClr>
+          </a:solidFill>
+        </p:spPr>
+        <p:txBody>
+          <a:bodyPr wrap="square" rtlCol="0">
+            <a:spAutoFit/>
+          </a:bodyPr>
+          <a:lstStyle/>
+          <a:p>
+            <a:pPr algn="ctr"/>
+            <a:r>
+              <a:rPr lang="en-US" b="1" dirty="0"/>
+              <a:t>Worst-case running time</a:t>
+            </a:r>
+            <a:br>
+              <a:rPr lang="en-US" dirty="0"/>
+            </a:br>
+            <a:r>
+              <a:rPr lang="en-US" dirty="0"/>
+              <a:t>O(height of tree)</a:t>
+            </a:r>
+            <a:endParaRPr lang="en-US" dirty="0">
+              <a:solidFill>
+                <a:srgbClr val="FF0000"/>
+              </a:solidFill>
+            </a:endParaRPr>
+          </a:p>
+        </p:txBody>
+      </p:sp>
       <p:sp>
         <p:nvSpPr>
           <p:cNvPr id="5" name="Oval 4">
             <a:extLst>
               <a:ext uri="{FF2B5EF4-FFF2-40B4-BE49-F238E27FC236}">
-                <a16:creationId xmlns:a16="http://schemas.microsoft.com/office/drawing/2014/main" id="{FEE32E2D-BE15-1257-E158-B5B61ACB122F}"/>
+                <a16:creationId xmlns:a16="http://schemas.microsoft.com/office/drawing/2014/main" id="{4A3DC495-909D-E682-5A80-8E3B42567A63}"/>
               </a:ext>
             </a:extLst>
           </p:cNvPr>
@@ -17355,7 +17875,7 @@
           <p:cNvPr id="6" name="Oval 5">
             <a:extLst>
               <a:ext uri="{FF2B5EF4-FFF2-40B4-BE49-F238E27FC236}">
-                <a16:creationId xmlns:a16="http://schemas.microsoft.com/office/drawing/2014/main" id="{98D2C4AA-5106-A9B6-B183-FF21DBF16704}"/>
+                <a16:creationId xmlns:a16="http://schemas.microsoft.com/office/drawing/2014/main" id="{247326F5-3C62-79DD-F4D6-922F6CDE23E2}"/>
               </a:ext>
             </a:extLst>
           </p:cNvPr>
@@ -17410,7 +17930,7 @@
           <p:cNvPr id="7" name="Oval 6">
             <a:extLst>
               <a:ext uri="{FF2B5EF4-FFF2-40B4-BE49-F238E27FC236}">
-                <a16:creationId xmlns:a16="http://schemas.microsoft.com/office/drawing/2014/main" id="{61A275E0-7CF1-86E3-AD83-C558F0D82F64}"/>
+                <a16:creationId xmlns:a16="http://schemas.microsoft.com/office/drawing/2014/main" id="{1E06EF7C-75EB-88F7-B5A7-5CB2B34112DD}"/>
               </a:ext>
             </a:extLst>
           </p:cNvPr>
@@ -17465,7 +17985,7 @@
           <p:cNvPr id="8" name="Oval 7">
             <a:extLst>
               <a:ext uri="{FF2B5EF4-FFF2-40B4-BE49-F238E27FC236}">
-                <a16:creationId xmlns:a16="http://schemas.microsoft.com/office/drawing/2014/main" id="{8CEDBB7E-832B-CB44-7D27-16995A9F24D5}"/>
+                <a16:creationId xmlns:a16="http://schemas.microsoft.com/office/drawing/2014/main" id="{5F9E3046-CE05-E154-DF2E-AFF971B541A5}"/>
               </a:ext>
             </a:extLst>
           </p:cNvPr>
@@ -17520,7 +18040,7 @@
           <p:cNvPr id="9" name="Oval 8">
             <a:extLst>
               <a:ext uri="{FF2B5EF4-FFF2-40B4-BE49-F238E27FC236}">
-                <a16:creationId xmlns:a16="http://schemas.microsoft.com/office/drawing/2014/main" id="{8C9735E2-4A70-68A3-47B5-F7E25D17B7E3}"/>
+                <a16:creationId xmlns:a16="http://schemas.microsoft.com/office/drawing/2014/main" id="{C99917A4-2F71-230F-92EF-E01BC288D680}"/>
               </a:ext>
             </a:extLst>
           </p:cNvPr>
@@ -17575,7 +18095,7 @@
           <p:cNvPr id="11" name="Straight Connector 10">
             <a:extLst>
               <a:ext uri="{FF2B5EF4-FFF2-40B4-BE49-F238E27FC236}">
-                <a16:creationId xmlns:a16="http://schemas.microsoft.com/office/drawing/2014/main" id="{A03A6E5A-13DB-7BEC-C50C-8A71D880F91F}"/>
+                <a16:creationId xmlns:a16="http://schemas.microsoft.com/office/drawing/2014/main" id="{93664EF9-E4AA-3BB7-E9C8-8CFD892350B4}"/>
               </a:ext>
             </a:extLst>
           </p:cNvPr>
@@ -17614,7 +18134,7 @@
           <p:cNvPr id="13" name="Straight Connector 12">
             <a:extLst>
               <a:ext uri="{FF2B5EF4-FFF2-40B4-BE49-F238E27FC236}">
-                <a16:creationId xmlns:a16="http://schemas.microsoft.com/office/drawing/2014/main" id="{2CAA00A0-2578-D150-662C-AB6227BC23A9}"/>
+                <a16:creationId xmlns:a16="http://schemas.microsoft.com/office/drawing/2014/main" id="{173AC5DE-94CF-9C3E-BD69-B3CA038C8048}"/>
               </a:ext>
             </a:extLst>
           </p:cNvPr>
@@ -17653,7 +18173,7 @@
           <p:cNvPr id="15" name="Straight Connector 14">
             <a:extLst>
               <a:ext uri="{FF2B5EF4-FFF2-40B4-BE49-F238E27FC236}">
-                <a16:creationId xmlns:a16="http://schemas.microsoft.com/office/drawing/2014/main" id="{54C3CECE-9CB7-866B-68B4-8BBE8C5744C3}"/>
+                <a16:creationId xmlns:a16="http://schemas.microsoft.com/office/drawing/2014/main" id="{AC818A77-166B-CB5C-C7AC-5CCF2941AB59}"/>
               </a:ext>
             </a:extLst>
           </p:cNvPr>
@@ -17693,7 +18213,7 @@
           <p:cNvPr id="20" name="Straight Connector 19">
             <a:extLst>
               <a:ext uri="{FF2B5EF4-FFF2-40B4-BE49-F238E27FC236}">
-                <a16:creationId xmlns:a16="http://schemas.microsoft.com/office/drawing/2014/main" id="{16C79E98-8BEF-234D-735D-CD988A278AF1}"/>
+                <a16:creationId xmlns:a16="http://schemas.microsoft.com/office/drawing/2014/main" id="{417CA885-6F43-D6CE-4C3A-29DDE70C673D}"/>
               </a:ext>
             </a:extLst>
           </p:cNvPr>
@@ -17730,7 +18250,7 @@
     </p:spTree>
     <p:extLst>
       <p:ext uri="{BB962C8B-B14F-4D97-AF65-F5344CB8AC3E}">
-        <p14:creationId xmlns:p14="http://schemas.microsoft.com/office/powerpoint/2010/main" val="3867704620"/>
+        <p14:creationId xmlns:p14="http://schemas.microsoft.com/office/powerpoint/2010/main" val="334443577"/>
       </p:ext>
     </p:extLst>
   </p:cSld>
@@ -17740,7 +18260,7 @@
 </p:sld>
 </file>
 
-<file path=ppt/slides/slide24.xml><?xml version="1.0" encoding="utf-8"?>
+<file path=ppt/slides/slide25.xml><?xml version="1.0" encoding="utf-8"?>
 <p:sld xmlns:a="http://schemas.openxmlformats.org/drawingml/2006/main" xmlns:r="http://schemas.openxmlformats.org/officeDocument/2006/relationships" xmlns:p="http://schemas.openxmlformats.org/presentationml/2006/main">
   <p:cSld>
     <p:spTree>
@@ -18798,7 +19318,7 @@
 </p:sld>
 </file>
 
-<file path=ppt/slides/slide25.xml><?xml version="1.0" encoding="utf-8"?>
+<file path=ppt/slides/slide26.xml><?xml version="1.0" encoding="utf-8"?>
 <p:sld xmlns:a="http://schemas.openxmlformats.org/drawingml/2006/main" xmlns:r="http://schemas.openxmlformats.org/officeDocument/2006/relationships" xmlns:p="http://schemas.openxmlformats.org/presentationml/2006/main">
   <p:cSld>
     <p:spTree>
@@ -20069,7 +20589,7 @@
 </p:sld>
 </file>
 
-<file path=ppt/slides/slide26.xml><?xml version="1.0" encoding="utf-8"?>
+<file path=ppt/slides/slide27.xml><?xml version="1.0" encoding="utf-8"?>
 <p:sld xmlns:a="http://schemas.openxmlformats.org/drawingml/2006/main" xmlns:r="http://schemas.openxmlformats.org/officeDocument/2006/relationships" xmlns:p="http://schemas.openxmlformats.org/presentationml/2006/main">
   <p:cSld>
     <p:spTree>
@@ -21358,7 +21878,11 @@
           <a:lstStyle/>
           <a:p>
             <a:r>
-              <a:rPr lang="en-US" dirty="0"/>
+              <a:rPr lang="en-US" dirty="0">
+                <a:solidFill>
+                  <a:srgbClr val="FF0000"/>
+                </a:solidFill>
+              </a:rPr>
               <a:t>0</a:t>
             </a:r>
           </a:p>
@@ -21393,7 +21917,11 @@
           <a:lstStyle/>
           <a:p>
             <a:r>
-              <a:rPr lang="en-US" dirty="0"/>
+              <a:rPr lang="en-US" dirty="0">
+                <a:solidFill>
+                  <a:srgbClr val="FF0000"/>
+                </a:solidFill>
+              </a:rPr>
               <a:t>0</a:t>
             </a:r>
           </a:p>
@@ -21428,7 +21956,11 @@
           <a:lstStyle/>
           <a:p>
             <a:r>
-              <a:rPr lang="en-US" dirty="0"/>
+              <a:rPr lang="en-US" dirty="0">
+                <a:solidFill>
+                  <a:srgbClr val="FF0000"/>
+                </a:solidFill>
+              </a:rPr>
               <a:t>0</a:t>
             </a:r>
           </a:p>
@@ -21463,7 +21995,11 @@
           <a:lstStyle/>
           <a:p>
             <a:r>
-              <a:rPr lang="en-US" dirty="0"/>
+              <a:rPr lang="en-US" dirty="0">
+                <a:solidFill>
+                  <a:srgbClr val="FF0000"/>
+                </a:solidFill>
+              </a:rPr>
               <a:t>0</a:t>
             </a:r>
           </a:p>
@@ -21482,7 +22018,7 @@
 </p:sld>
 </file>
 
-<file path=ppt/slides/slide27.xml><?xml version="1.0" encoding="utf-8"?>
+<file path=ppt/slides/slide28.xml><?xml version="1.0" encoding="utf-8"?>
 <p:sld xmlns:a="http://schemas.openxmlformats.org/drawingml/2006/main" xmlns:r="http://schemas.openxmlformats.org/officeDocument/2006/relationships" xmlns:p="http://schemas.openxmlformats.org/presentationml/2006/main">
   <p:cSld>
     <p:spTree>
@@ -22911,7 +23447,11 @@
           <a:lstStyle/>
           <a:p>
             <a:r>
-              <a:rPr lang="en-US" dirty="0"/>
+              <a:rPr lang="en-US" dirty="0">
+                <a:solidFill>
+                  <a:srgbClr val="FF0000"/>
+                </a:solidFill>
+              </a:rPr>
               <a:t>1</a:t>
             </a:r>
           </a:p>
@@ -22930,7 +23470,7 @@
 </p:sld>
 </file>
 
-<file path=ppt/slides/slide28.xml><?xml version="1.0" encoding="utf-8"?>
+<file path=ppt/slides/slide29.xml><?xml version="1.0" encoding="utf-8"?>
 <p:sld xmlns:a="http://schemas.openxmlformats.org/drawingml/2006/main" xmlns:r="http://schemas.openxmlformats.org/officeDocument/2006/relationships" xmlns:p="http://schemas.openxmlformats.org/presentationml/2006/main">
   <p:cSld>
     <p:spTree>
@@ -24394,7 +24934,11 @@
           <a:lstStyle/>
           <a:p>
             <a:r>
-              <a:rPr lang="en-US" dirty="0"/>
+              <a:rPr lang="en-US" dirty="0">
+                <a:solidFill>
+                  <a:srgbClr val="FF0000"/>
+                </a:solidFill>
+              </a:rPr>
               <a:t>2</a:t>
             </a:r>
           </a:p>
@@ -24429,7 +24973,11 @@
           <a:lstStyle/>
           <a:p>
             <a:r>
-              <a:rPr lang="en-US" dirty="0"/>
+              <a:rPr lang="en-US" dirty="0">
+                <a:solidFill>
+                  <a:srgbClr val="FF0000"/>
+                </a:solidFill>
+              </a:rPr>
               <a:t>3 = height of tree</a:t>
             </a:r>
           </a:p>
@@ -24439,400 +24987,6 @@
     <p:extLst>
       <p:ext uri="{BB962C8B-B14F-4D97-AF65-F5344CB8AC3E}">
         <p14:creationId xmlns:p14="http://schemas.microsoft.com/office/powerpoint/2010/main" val="2637133452"/>
-      </p:ext>
-    </p:extLst>
-  </p:cSld>
-  <p:clrMapOvr>
-    <a:masterClrMapping/>
-  </p:clrMapOvr>
-</p:sld>
-</file>
-
-<file path=ppt/slides/slide29.xml><?xml version="1.0" encoding="utf-8"?>
-<p:sld xmlns:a="http://schemas.openxmlformats.org/drawingml/2006/main" xmlns:r="http://schemas.openxmlformats.org/officeDocument/2006/relationships" xmlns:p="http://schemas.openxmlformats.org/presentationml/2006/main">
-  <p:cSld>
-    <p:spTree>
-      <p:nvGrpSpPr>
-        <p:cNvPr id="1" name="">
-          <a:extLst>
-            <a:ext uri="{FF2B5EF4-FFF2-40B4-BE49-F238E27FC236}">
-              <a16:creationId xmlns:a16="http://schemas.microsoft.com/office/drawing/2014/main" id="{B147A2A4-EC30-68D4-6A5E-82724BC3E8DE}"/>
-            </a:ext>
-          </a:extLst>
-        </p:cNvPr>
-        <p:cNvGrpSpPr/>
-        <p:nvPr/>
-      </p:nvGrpSpPr>
-      <p:grpSpPr>
-        <a:xfrm>
-          <a:off x="0" y="0"/>
-          <a:ext cx="0" cy="0"/>
-          <a:chOff x="0" y="0"/>
-          <a:chExt cx="0" cy="0"/>
-        </a:xfrm>
-      </p:grpSpPr>
-      <p:sp>
-        <p:nvSpPr>
-          <p:cNvPr id="2" name="Title 1">
-            <a:extLst>
-              <a:ext uri="{FF2B5EF4-FFF2-40B4-BE49-F238E27FC236}">
-                <a16:creationId xmlns:a16="http://schemas.microsoft.com/office/drawing/2014/main" id="{731548B5-24CF-2641-DEE8-9EB5F10B12BB}"/>
-              </a:ext>
-            </a:extLst>
-          </p:cNvPr>
-          <p:cNvSpPr>
-            <a:spLocks noGrp="1"/>
-          </p:cNvSpPr>
-          <p:nvPr>
-            <p:ph type="title"/>
-          </p:nvPr>
-        </p:nvSpPr>
-        <p:spPr>
-          <a:xfrm>
-            <a:off x="838200" y="365125"/>
-            <a:ext cx="3110802" cy="1325563"/>
-          </a:xfrm>
-        </p:spPr>
-        <p:txBody>
-          <a:bodyPr/>
-          <a:lstStyle/>
-          <a:p>
-            <a:r>
-              <a:rPr lang="en-US" dirty="0"/>
-              <a:t>Tree Height</a:t>
-            </a:r>
-          </a:p>
-        </p:txBody>
-      </p:sp>
-      <p:sp>
-        <p:nvSpPr>
-          <p:cNvPr id="3" name="Content Placeholder 2">
-            <a:extLst>
-              <a:ext uri="{FF2B5EF4-FFF2-40B4-BE49-F238E27FC236}">
-                <a16:creationId xmlns:a16="http://schemas.microsoft.com/office/drawing/2014/main" id="{4ADC5D41-A810-43C1-7B6D-E5F8597C4F13}"/>
-              </a:ext>
-            </a:extLst>
-          </p:cNvPr>
-          <p:cNvSpPr>
-            <a:spLocks noGrp="1"/>
-          </p:cNvSpPr>
-          <p:nvPr>
-            <p:ph idx="1"/>
-          </p:nvPr>
-        </p:nvSpPr>
-        <p:spPr>
-          <a:xfrm>
-            <a:off x="838200" y="1825625"/>
-            <a:ext cx="4396991" cy="4351338"/>
-          </a:xfrm>
-        </p:spPr>
-        <p:txBody>
-          <a:bodyPr/>
-          <a:lstStyle/>
-          <a:p>
-            <a:pPr marL="0" indent="0">
-              <a:buNone/>
-            </a:pPr>
-            <a:r>
-              <a:rPr lang="en-CA" dirty="0"/>
-              <a:t>The </a:t>
-            </a:r>
-            <a:r>
-              <a:rPr lang="en-CA" b="1" dirty="0"/>
-              <a:t>height</a:t>
-            </a:r>
-            <a:r>
-              <a:rPr lang="en-CA" dirty="0"/>
-              <a:t> of a node p in a tree is:</a:t>
-            </a:r>
-          </a:p>
-          <a:p>
-            <a:r>
-              <a:rPr lang="en-CA" dirty="0"/>
-              <a:t>If p</a:t>
-            </a:r>
-            <a:r>
-              <a:rPr lang="en-CA" i="1" dirty="0"/>
-              <a:t> </a:t>
-            </a:r>
-            <a:r>
-              <a:rPr lang="en-CA" dirty="0"/>
-              <a:t>is a leaf, then the </a:t>
-            </a:r>
-            <a:r>
-              <a:rPr lang="en-CA" b="1" dirty="0"/>
-              <a:t>height</a:t>
-            </a:r>
-            <a:r>
-              <a:rPr lang="en-CA" dirty="0"/>
-              <a:t> of p</a:t>
-            </a:r>
-            <a:r>
-              <a:rPr lang="en-CA" i="1" dirty="0"/>
-              <a:t> </a:t>
-            </a:r>
-            <a:r>
-              <a:rPr lang="en-CA" dirty="0"/>
-              <a:t>is 0</a:t>
-            </a:r>
-          </a:p>
-          <a:p>
-            <a:r>
-              <a:rPr lang="en-CA" dirty="0"/>
-              <a:t>Otherwise, the </a:t>
-            </a:r>
-            <a:r>
-              <a:rPr lang="en-CA" b="1" dirty="0"/>
-              <a:t>height</a:t>
-            </a:r>
-            <a:r>
-              <a:rPr lang="en-CA" dirty="0"/>
-              <a:t> of p</a:t>
-            </a:r>
-            <a:r>
-              <a:rPr lang="en-CA" i="1" dirty="0"/>
-              <a:t> </a:t>
-            </a:r>
-            <a:r>
-              <a:rPr lang="en-CA" dirty="0"/>
-              <a:t>is 1 plus the </a:t>
-            </a:r>
-            <a:r>
-              <a:rPr lang="en-CA" i="1" dirty="0"/>
-              <a:t>maximum</a:t>
-            </a:r>
-            <a:r>
-              <a:rPr lang="en-CA" dirty="0"/>
-              <a:t> height of a child of p</a:t>
-            </a:r>
-          </a:p>
-          <a:p>
-            <a:pPr marL="0" indent="0">
-              <a:buNone/>
-            </a:pPr>
-            <a:r>
-              <a:rPr lang="en-US" dirty="0"/>
-              <a:t>The </a:t>
-            </a:r>
-            <a:r>
-              <a:rPr lang="en-US" b="1" dirty="0"/>
-              <a:t>height of a tree </a:t>
-            </a:r>
-            <a:r>
-              <a:rPr lang="en-US" dirty="0"/>
-              <a:t>T is the the height of T’s root node.</a:t>
-            </a:r>
-          </a:p>
-        </p:txBody>
-      </p:sp>
-      <p:sp>
-        <p:nvSpPr>
-          <p:cNvPr id="33" name="TextBox 32">
-            <a:extLst>
-              <a:ext uri="{FF2B5EF4-FFF2-40B4-BE49-F238E27FC236}">
-                <a16:creationId xmlns:a16="http://schemas.microsoft.com/office/drawing/2014/main" id="{63B6FCA3-7B6A-ABA1-35D6-9FF680B0B753}"/>
-              </a:ext>
-            </a:extLst>
-          </p:cNvPr>
-          <p:cNvSpPr txBox="1"/>
-          <p:nvPr/>
-        </p:nvSpPr>
-        <p:spPr>
-          <a:xfrm>
-            <a:off x="7154427" y="3526972"/>
-            <a:ext cx="4561952" cy="3046988"/>
-          </a:xfrm>
-          <a:prstGeom prst="rect">
-            <a:avLst/>
-          </a:prstGeom>
-          <a:noFill/>
-        </p:spPr>
-        <p:txBody>
-          <a:bodyPr wrap="square" rtlCol="0">
-            <a:spAutoFit/>
-          </a:bodyPr>
-          <a:lstStyle/>
-          <a:p>
-            <a:r>
-              <a:rPr lang="en-US" sz="2400" b="1" dirty="0"/>
-              <a:t>Algorithm</a:t>
-            </a:r>
-            <a:r>
-              <a:rPr lang="en-US" sz="2400" dirty="0"/>
-              <a:t> height2(T, p)</a:t>
-            </a:r>
-            <a:br>
-              <a:rPr lang="en-US" sz="2400" dirty="0"/>
-            </a:br>
-            <a:r>
-              <a:rPr lang="en-US" sz="2400" dirty="0"/>
-              <a:t>   </a:t>
-            </a:r>
-            <a:r>
-              <a:rPr lang="en-CA" sz="2400" b="1" dirty="0"/>
-              <a:t>if </a:t>
-            </a:r>
-            <a:r>
-              <a:rPr lang="en-CA" sz="2400" dirty="0" err="1"/>
-              <a:t>is_leaf</a:t>
-            </a:r>
-            <a:r>
-              <a:rPr lang="en-CA" sz="2400" dirty="0"/>
-              <a:t>(p) </a:t>
-            </a:r>
-            <a:r>
-              <a:rPr lang="en-CA" sz="2400" b="1" dirty="0"/>
-              <a:t>then</a:t>
-            </a:r>
-            <a:endParaRPr lang="en-CA" sz="2400" dirty="0"/>
-          </a:p>
-          <a:p>
-            <a:r>
-              <a:rPr lang="en-CA" sz="2400" b="1" dirty="0"/>
-              <a:t>         return </a:t>
-            </a:r>
-            <a:r>
-              <a:rPr lang="en-CA" sz="2400" dirty="0"/>
-              <a:t>0</a:t>
-            </a:r>
-          </a:p>
-          <a:p>
-            <a:r>
-              <a:rPr lang="en-CA" sz="2400" b="1" dirty="0"/>
-              <a:t>   else</a:t>
-            </a:r>
-            <a:endParaRPr lang="en-CA" sz="2400" dirty="0"/>
-          </a:p>
-          <a:p>
-            <a:r>
-              <a:rPr lang="en-CA" sz="2400" i="1" dirty="0"/>
-              <a:t>         </a:t>
-            </a:r>
-            <a:r>
-              <a:rPr lang="en-CA" sz="2400" dirty="0"/>
-              <a:t>h = 0</a:t>
-            </a:r>
-          </a:p>
-          <a:p>
-            <a:r>
-              <a:rPr lang="en-CA" sz="2400" b="1" dirty="0"/>
-              <a:t>         for </a:t>
-            </a:r>
-            <a:r>
-              <a:rPr lang="en-CA" sz="2400" dirty="0"/>
-              <a:t>each c in children(p) </a:t>
-            </a:r>
-            <a:r>
-              <a:rPr lang="en-CA" sz="2400" b="1" dirty="0"/>
-              <a:t>do</a:t>
-            </a:r>
-            <a:endParaRPr lang="en-CA" sz="2400" dirty="0"/>
-          </a:p>
-          <a:p>
-            <a:r>
-              <a:rPr lang="en-CA" sz="2400" i="1" dirty="0"/>
-              <a:t>               </a:t>
-            </a:r>
-            <a:r>
-              <a:rPr lang="en-CA" sz="2400" dirty="0"/>
-              <a:t>h = max(h, height2(T, c))</a:t>
-            </a:r>
-          </a:p>
-          <a:p>
-            <a:r>
-              <a:rPr lang="en-CA" sz="2400" b="1" dirty="0"/>
-              <a:t>         return </a:t>
-            </a:r>
-            <a:r>
-              <a:rPr lang="en-CA" sz="2400" dirty="0"/>
-              <a:t>1 + h</a:t>
-            </a:r>
-          </a:p>
-        </p:txBody>
-      </p:sp>
-      <p:pic>
-        <p:nvPicPr>
-          <p:cNvPr id="34" name="Picture 33">
-            <a:extLst>
-              <a:ext uri="{FF2B5EF4-FFF2-40B4-BE49-F238E27FC236}">
-                <a16:creationId xmlns:a16="http://schemas.microsoft.com/office/drawing/2014/main" id="{216231C4-71C4-8AF9-9ED2-BD4DBD39E447}"/>
-              </a:ext>
-            </a:extLst>
-          </p:cNvPr>
-          <p:cNvPicPr>
-            <a:picLocks noChangeAspect="1"/>
-          </p:cNvPicPr>
-          <p:nvPr/>
-        </p:nvPicPr>
-        <p:blipFill>
-          <a:blip r:embed="rId2"/>
-          <a:stretch>
-            <a:fillRect/>
-          </a:stretch>
-        </p:blipFill>
-        <p:spPr>
-          <a:xfrm>
-            <a:off x="9083709" y="284040"/>
-            <a:ext cx="2552281" cy="2909713"/>
-          </a:xfrm>
-          <a:prstGeom prst="rect">
-            <a:avLst/>
-          </a:prstGeom>
-        </p:spPr>
-      </p:pic>
-      <p:sp>
-        <p:nvSpPr>
-          <p:cNvPr id="35" name="TextBox 34">
-            <a:extLst>
-              <a:ext uri="{FF2B5EF4-FFF2-40B4-BE49-F238E27FC236}">
-                <a16:creationId xmlns:a16="http://schemas.microsoft.com/office/drawing/2014/main" id="{7802EC82-E412-2FAF-41BF-51A38B539E7F}"/>
-              </a:ext>
-            </a:extLst>
-          </p:cNvPr>
-          <p:cNvSpPr txBox="1"/>
-          <p:nvPr/>
-        </p:nvSpPr>
-        <p:spPr>
-          <a:xfrm>
-            <a:off x="5026745" y="289242"/>
-            <a:ext cx="3634932" cy="923330"/>
-          </a:xfrm>
-          <a:prstGeom prst="rect">
-            <a:avLst/>
-          </a:prstGeom>
-          <a:solidFill>
-            <a:schemeClr val="accent2">
-              <a:lumMod val="40000"/>
-              <a:lumOff val="60000"/>
-            </a:schemeClr>
-          </a:solidFill>
-        </p:spPr>
-        <p:txBody>
-          <a:bodyPr wrap="square" rtlCol="0">
-            <a:spAutoFit/>
-          </a:bodyPr>
-          <a:lstStyle/>
-          <a:p>
-            <a:pPr algn="ctr"/>
-            <a:r>
-              <a:rPr lang="en-US" dirty="0"/>
-              <a:t>Worst-case running time of height2 on a tree with n nodes:</a:t>
-            </a:r>
-          </a:p>
-          <a:p>
-            <a:pPr algn="ctr"/>
-            <a:r>
-              <a:rPr lang="en-US" b="1" dirty="0"/>
-              <a:t>???</a:t>
-            </a:r>
-            <a:endParaRPr lang="en-US" dirty="0"/>
-          </a:p>
-        </p:txBody>
-      </p:sp>
-    </p:spTree>
-    <p:extLst>
-      <p:ext uri="{BB962C8B-B14F-4D97-AF65-F5344CB8AC3E}">
-        <p14:creationId xmlns:p14="http://schemas.microsoft.com/office/powerpoint/2010/main" val="1603748545"/>
       </p:ext>
     </p:extLst>
   </p:cSld>
@@ -24949,6 +25103,400 @@
         <p:cNvPr id="1" name="">
           <a:extLst>
             <a:ext uri="{FF2B5EF4-FFF2-40B4-BE49-F238E27FC236}">
+              <a16:creationId xmlns:a16="http://schemas.microsoft.com/office/drawing/2014/main" id="{B147A2A4-EC30-68D4-6A5E-82724BC3E8DE}"/>
+            </a:ext>
+          </a:extLst>
+        </p:cNvPr>
+        <p:cNvGrpSpPr/>
+        <p:nvPr/>
+      </p:nvGrpSpPr>
+      <p:grpSpPr>
+        <a:xfrm>
+          <a:off x="0" y="0"/>
+          <a:ext cx="0" cy="0"/>
+          <a:chOff x="0" y="0"/>
+          <a:chExt cx="0" cy="0"/>
+        </a:xfrm>
+      </p:grpSpPr>
+      <p:sp>
+        <p:nvSpPr>
+          <p:cNvPr id="2" name="Title 1">
+            <a:extLst>
+              <a:ext uri="{FF2B5EF4-FFF2-40B4-BE49-F238E27FC236}">
+                <a16:creationId xmlns:a16="http://schemas.microsoft.com/office/drawing/2014/main" id="{731548B5-24CF-2641-DEE8-9EB5F10B12BB}"/>
+              </a:ext>
+            </a:extLst>
+          </p:cNvPr>
+          <p:cNvSpPr>
+            <a:spLocks noGrp="1"/>
+          </p:cNvSpPr>
+          <p:nvPr>
+            <p:ph type="title"/>
+          </p:nvPr>
+        </p:nvSpPr>
+        <p:spPr>
+          <a:xfrm>
+            <a:off x="838200" y="365125"/>
+            <a:ext cx="3110802" cy="1325563"/>
+          </a:xfrm>
+        </p:spPr>
+        <p:txBody>
+          <a:bodyPr/>
+          <a:lstStyle/>
+          <a:p>
+            <a:r>
+              <a:rPr lang="en-US" dirty="0"/>
+              <a:t>Tree Height</a:t>
+            </a:r>
+          </a:p>
+        </p:txBody>
+      </p:sp>
+      <p:sp>
+        <p:nvSpPr>
+          <p:cNvPr id="3" name="Content Placeholder 2">
+            <a:extLst>
+              <a:ext uri="{FF2B5EF4-FFF2-40B4-BE49-F238E27FC236}">
+                <a16:creationId xmlns:a16="http://schemas.microsoft.com/office/drawing/2014/main" id="{4ADC5D41-A810-43C1-7B6D-E5F8597C4F13}"/>
+              </a:ext>
+            </a:extLst>
+          </p:cNvPr>
+          <p:cNvSpPr>
+            <a:spLocks noGrp="1"/>
+          </p:cNvSpPr>
+          <p:nvPr>
+            <p:ph idx="1"/>
+          </p:nvPr>
+        </p:nvSpPr>
+        <p:spPr>
+          <a:xfrm>
+            <a:off x="838200" y="1825625"/>
+            <a:ext cx="4396991" cy="4351338"/>
+          </a:xfrm>
+        </p:spPr>
+        <p:txBody>
+          <a:bodyPr/>
+          <a:lstStyle/>
+          <a:p>
+            <a:pPr marL="0" indent="0">
+              <a:buNone/>
+            </a:pPr>
+            <a:r>
+              <a:rPr lang="en-CA" dirty="0"/>
+              <a:t>The </a:t>
+            </a:r>
+            <a:r>
+              <a:rPr lang="en-CA" b="1" dirty="0"/>
+              <a:t>height</a:t>
+            </a:r>
+            <a:r>
+              <a:rPr lang="en-CA" dirty="0"/>
+              <a:t> of a node p in a tree is:</a:t>
+            </a:r>
+          </a:p>
+          <a:p>
+            <a:r>
+              <a:rPr lang="en-CA" dirty="0"/>
+              <a:t>If p</a:t>
+            </a:r>
+            <a:r>
+              <a:rPr lang="en-CA" i="1" dirty="0"/>
+              <a:t> </a:t>
+            </a:r>
+            <a:r>
+              <a:rPr lang="en-CA" dirty="0"/>
+              <a:t>is a leaf, then the </a:t>
+            </a:r>
+            <a:r>
+              <a:rPr lang="en-CA" b="1" dirty="0"/>
+              <a:t>height</a:t>
+            </a:r>
+            <a:r>
+              <a:rPr lang="en-CA" dirty="0"/>
+              <a:t> of p</a:t>
+            </a:r>
+            <a:r>
+              <a:rPr lang="en-CA" i="1" dirty="0"/>
+              <a:t> </a:t>
+            </a:r>
+            <a:r>
+              <a:rPr lang="en-CA" dirty="0"/>
+              <a:t>is 0</a:t>
+            </a:r>
+          </a:p>
+          <a:p>
+            <a:r>
+              <a:rPr lang="en-CA" dirty="0"/>
+              <a:t>Otherwise, the </a:t>
+            </a:r>
+            <a:r>
+              <a:rPr lang="en-CA" b="1" dirty="0"/>
+              <a:t>height</a:t>
+            </a:r>
+            <a:r>
+              <a:rPr lang="en-CA" dirty="0"/>
+              <a:t> of p</a:t>
+            </a:r>
+            <a:r>
+              <a:rPr lang="en-CA" i="1" dirty="0"/>
+              <a:t> </a:t>
+            </a:r>
+            <a:r>
+              <a:rPr lang="en-CA" dirty="0"/>
+              <a:t>is 1 plus the </a:t>
+            </a:r>
+            <a:r>
+              <a:rPr lang="en-CA" i="1" dirty="0"/>
+              <a:t>maximum</a:t>
+            </a:r>
+            <a:r>
+              <a:rPr lang="en-CA" dirty="0"/>
+              <a:t> height of a child of p</a:t>
+            </a:r>
+          </a:p>
+          <a:p>
+            <a:pPr marL="0" indent="0">
+              <a:buNone/>
+            </a:pPr>
+            <a:r>
+              <a:rPr lang="en-US" dirty="0"/>
+              <a:t>The </a:t>
+            </a:r>
+            <a:r>
+              <a:rPr lang="en-US" b="1" dirty="0"/>
+              <a:t>height of a tree </a:t>
+            </a:r>
+            <a:r>
+              <a:rPr lang="en-US" dirty="0"/>
+              <a:t>T is the the height of T’s root node.</a:t>
+            </a:r>
+          </a:p>
+        </p:txBody>
+      </p:sp>
+      <p:sp>
+        <p:nvSpPr>
+          <p:cNvPr id="33" name="TextBox 32">
+            <a:extLst>
+              <a:ext uri="{FF2B5EF4-FFF2-40B4-BE49-F238E27FC236}">
+                <a16:creationId xmlns:a16="http://schemas.microsoft.com/office/drawing/2014/main" id="{63B6FCA3-7B6A-ABA1-35D6-9FF680B0B753}"/>
+              </a:ext>
+            </a:extLst>
+          </p:cNvPr>
+          <p:cNvSpPr txBox="1"/>
+          <p:nvPr/>
+        </p:nvSpPr>
+        <p:spPr>
+          <a:xfrm>
+            <a:off x="7154427" y="3526972"/>
+            <a:ext cx="4561952" cy="3046988"/>
+          </a:xfrm>
+          <a:prstGeom prst="rect">
+            <a:avLst/>
+          </a:prstGeom>
+          <a:noFill/>
+        </p:spPr>
+        <p:txBody>
+          <a:bodyPr wrap="square" rtlCol="0">
+            <a:spAutoFit/>
+          </a:bodyPr>
+          <a:lstStyle/>
+          <a:p>
+            <a:r>
+              <a:rPr lang="en-US" sz="2400" b="1" dirty="0"/>
+              <a:t>Algorithm</a:t>
+            </a:r>
+            <a:r>
+              <a:rPr lang="en-US" sz="2400" dirty="0"/>
+              <a:t> height2(T, p)</a:t>
+            </a:r>
+            <a:br>
+              <a:rPr lang="en-US" sz="2400" dirty="0"/>
+            </a:br>
+            <a:r>
+              <a:rPr lang="en-US" sz="2400" dirty="0"/>
+              <a:t>   </a:t>
+            </a:r>
+            <a:r>
+              <a:rPr lang="en-CA" sz="2400" b="1" dirty="0"/>
+              <a:t>if </a:t>
+            </a:r>
+            <a:r>
+              <a:rPr lang="en-CA" sz="2400" dirty="0" err="1"/>
+              <a:t>is_leaf</a:t>
+            </a:r>
+            <a:r>
+              <a:rPr lang="en-CA" sz="2400" dirty="0"/>
+              <a:t>(p) </a:t>
+            </a:r>
+            <a:r>
+              <a:rPr lang="en-CA" sz="2400" b="1" dirty="0"/>
+              <a:t>then</a:t>
+            </a:r>
+            <a:endParaRPr lang="en-CA" sz="2400" dirty="0"/>
+          </a:p>
+          <a:p>
+            <a:r>
+              <a:rPr lang="en-CA" sz="2400" b="1" dirty="0"/>
+              <a:t>         return </a:t>
+            </a:r>
+            <a:r>
+              <a:rPr lang="en-CA" sz="2400" dirty="0"/>
+              <a:t>0</a:t>
+            </a:r>
+          </a:p>
+          <a:p>
+            <a:r>
+              <a:rPr lang="en-CA" sz="2400" b="1" dirty="0"/>
+              <a:t>   else</a:t>
+            </a:r>
+            <a:endParaRPr lang="en-CA" sz="2400" dirty="0"/>
+          </a:p>
+          <a:p>
+            <a:r>
+              <a:rPr lang="en-CA" sz="2400" i="1" dirty="0"/>
+              <a:t>         </a:t>
+            </a:r>
+            <a:r>
+              <a:rPr lang="en-CA" sz="2400" dirty="0"/>
+              <a:t>h = 0</a:t>
+            </a:r>
+          </a:p>
+          <a:p>
+            <a:r>
+              <a:rPr lang="en-CA" sz="2400" b="1" dirty="0"/>
+              <a:t>         for </a:t>
+            </a:r>
+            <a:r>
+              <a:rPr lang="en-CA" sz="2400" dirty="0"/>
+              <a:t>each c in children(p) </a:t>
+            </a:r>
+            <a:r>
+              <a:rPr lang="en-CA" sz="2400" b="1" dirty="0"/>
+              <a:t>do</a:t>
+            </a:r>
+            <a:endParaRPr lang="en-CA" sz="2400" dirty="0"/>
+          </a:p>
+          <a:p>
+            <a:r>
+              <a:rPr lang="en-CA" sz="2400" i="1" dirty="0"/>
+              <a:t>               </a:t>
+            </a:r>
+            <a:r>
+              <a:rPr lang="en-CA" sz="2400" dirty="0"/>
+              <a:t>h = max(h, height2(T, c))</a:t>
+            </a:r>
+          </a:p>
+          <a:p>
+            <a:r>
+              <a:rPr lang="en-CA" sz="2400" b="1" dirty="0"/>
+              <a:t>         return </a:t>
+            </a:r>
+            <a:r>
+              <a:rPr lang="en-CA" sz="2400" dirty="0"/>
+              <a:t>1 + h</a:t>
+            </a:r>
+          </a:p>
+        </p:txBody>
+      </p:sp>
+      <p:pic>
+        <p:nvPicPr>
+          <p:cNvPr id="34" name="Picture 33">
+            <a:extLst>
+              <a:ext uri="{FF2B5EF4-FFF2-40B4-BE49-F238E27FC236}">
+                <a16:creationId xmlns:a16="http://schemas.microsoft.com/office/drawing/2014/main" id="{216231C4-71C4-8AF9-9ED2-BD4DBD39E447}"/>
+              </a:ext>
+            </a:extLst>
+          </p:cNvPr>
+          <p:cNvPicPr>
+            <a:picLocks noChangeAspect="1"/>
+          </p:cNvPicPr>
+          <p:nvPr/>
+        </p:nvPicPr>
+        <p:blipFill>
+          <a:blip r:embed="rId2"/>
+          <a:stretch>
+            <a:fillRect/>
+          </a:stretch>
+        </p:blipFill>
+        <p:spPr>
+          <a:xfrm>
+            <a:off x="9083709" y="284040"/>
+            <a:ext cx="2552281" cy="2909713"/>
+          </a:xfrm>
+          <a:prstGeom prst="rect">
+            <a:avLst/>
+          </a:prstGeom>
+        </p:spPr>
+      </p:pic>
+      <p:sp>
+        <p:nvSpPr>
+          <p:cNvPr id="35" name="TextBox 34">
+            <a:extLst>
+              <a:ext uri="{FF2B5EF4-FFF2-40B4-BE49-F238E27FC236}">
+                <a16:creationId xmlns:a16="http://schemas.microsoft.com/office/drawing/2014/main" id="{7802EC82-E412-2FAF-41BF-51A38B539E7F}"/>
+              </a:ext>
+            </a:extLst>
+          </p:cNvPr>
+          <p:cNvSpPr txBox="1"/>
+          <p:nvPr/>
+        </p:nvSpPr>
+        <p:spPr>
+          <a:xfrm>
+            <a:off x="5026745" y="289242"/>
+            <a:ext cx="3634932" cy="923330"/>
+          </a:xfrm>
+          <a:prstGeom prst="rect">
+            <a:avLst/>
+          </a:prstGeom>
+          <a:solidFill>
+            <a:schemeClr val="accent2">
+              <a:lumMod val="40000"/>
+              <a:lumOff val="60000"/>
+            </a:schemeClr>
+          </a:solidFill>
+        </p:spPr>
+        <p:txBody>
+          <a:bodyPr wrap="square" rtlCol="0">
+            <a:spAutoFit/>
+          </a:bodyPr>
+          <a:lstStyle/>
+          <a:p>
+            <a:pPr algn="ctr"/>
+            <a:r>
+              <a:rPr lang="en-US" dirty="0"/>
+              <a:t>Worst-case running time of height2 on a tree with n nodes:</a:t>
+            </a:r>
+          </a:p>
+          <a:p>
+            <a:pPr algn="ctr"/>
+            <a:r>
+              <a:rPr lang="en-US" b="1" dirty="0"/>
+              <a:t>???</a:t>
+            </a:r>
+            <a:endParaRPr lang="en-US" dirty="0"/>
+          </a:p>
+        </p:txBody>
+      </p:sp>
+    </p:spTree>
+    <p:extLst>
+      <p:ext uri="{BB962C8B-B14F-4D97-AF65-F5344CB8AC3E}">
+        <p14:creationId xmlns:p14="http://schemas.microsoft.com/office/powerpoint/2010/main" val="1603748545"/>
+      </p:ext>
+    </p:extLst>
+  </p:cSld>
+  <p:clrMapOvr>
+    <a:masterClrMapping/>
+  </p:clrMapOvr>
+</p:sld>
+</file>
+
+<file path=ppt/slides/slide31.xml><?xml version="1.0" encoding="utf-8"?>
+<p:sld xmlns:a="http://schemas.openxmlformats.org/drawingml/2006/main" xmlns:r="http://schemas.openxmlformats.org/officeDocument/2006/relationships" xmlns:p="http://schemas.openxmlformats.org/presentationml/2006/main">
+  <p:cSld>
+    <p:spTree>
+      <p:nvGrpSpPr>
+        <p:cNvPr id="1" name="">
+          <a:extLst>
+            <a:ext uri="{FF2B5EF4-FFF2-40B4-BE49-F238E27FC236}">
               <a16:creationId xmlns:a16="http://schemas.microsoft.com/office/drawing/2014/main" id="{F28473CE-E631-04B6-7A01-BFBF4315EBB7}"/>
             </a:ext>
           </a:extLst>
@@ -25341,7 +25889,7 @@
 </p:sld>
 </file>
 
-<file path=ppt/slides/slide31.xml><?xml version="1.0" encoding="utf-8"?>
+<file path=ppt/slides/slide32.xml><?xml version="1.0" encoding="utf-8"?>
 <p:sld xmlns:a="http://schemas.openxmlformats.org/drawingml/2006/main" xmlns:r="http://schemas.openxmlformats.org/officeDocument/2006/relationships" xmlns:p="http://schemas.openxmlformats.org/presentationml/2006/main">
   <p:cSld>
     <p:spTree>
@@ -25503,7 +26051,7 @@
 </p:sld>
 </file>
 
-<file path=ppt/slides/slide32.xml><?xml version="1.0" encoding="utf-8"?>
+<file path=ppt/slides/slide33.xml><?xml version="1.0" encoding="utf-8"?>
 <p:sld xmlns:a="http://schemas.openxmlformats.org/drawingml/2006/main" xmlns:r="http://schemas.openxmlformats.org/officeDocument/2006/relationships" xmlns:p="http://schemas.openxmlformats.org/presentationml/2006/main">
   <p:cSld>
     <p:spTree>
@@ -25922,7 +26470,158 @@
 </p:sld>
 </file>
 
-<file path=ppt/slides/slide33.xml><?xml version="1.0" encoding="utf-8"?>
+<file path=ppt/slides/slide34.xml><?xml version="1.0" encoding="utf-8"?>
+<p:sld xmlns:a="http://schemas.openxmlformats.org/drawingml/2006/main" xmlns:r="http://schemas.openxmlformats.org/officeDocument/2006/relationships" xmlns:p="http://schemas.openxmlformats.org/presentationml/2006/main">
+  <p:cSld>
+    <p:spTree>
+      <p:nvGrpSpPr>
+        <p:cNvPr id="1" name=""/>
+        <p:cNvGrpSpPr/>
+        <p:nvPr/>
+      </p:nvGrpSpPr>
+      <p:grpSpPr>
+        <a:xfrm>
+          <a:off x="0" y="0"/>
+          <a:ext cx="0" cy="0"/>
+          <a:chOff x="0" y="0"/>
+          <a:chExt cx="0" cy="0"/>
+        </a:xfrm>
+      </p:grpSpPr>
+      <p:sp>
+        <p:nvSpPr>
+          <p:cNvPr id="2" name="Title 1">
+            <a:extLst>
+              <a:ext uri="{FF2B5EF4-FFF2-40B4-BE49-F238E27FC236}">
+                <a16:creationId xmlns:a16="http://schemas.microsoft.com/office/drawing/2014/main" id="{4EA52096-46A2-79F1-F49C-E7DB24133BD4}"/>
+              </a:ext>
+            </a:extLst>
+          </p:cNvPr>
+          <p:cNvSpPr>
+            <a:spLocks noGrp="1"/>
+          </p:cNvSpPr>
+          <p:nvPr>
+            <p:ph type="title"/>
+          </p:nvPr>
+        </p:nvSpPr>
+        <p:spPr/>
+        <p:txBody>
+          <a:bodyPr/>
+          <a:lstStyle/>
+          <a:p>
+            <a:r>
+              <a:rPr lang="en-US" dirty="0"/>
+              <a:t>Binary Tree Facts</a:t>
+            </a:r>
+          </a:p>
+        </p:txBody>
+      </p:sp>
+      <p:sp>
+        <p:nvSpPr>
+          <p:cNvPr id="3" name="Content Placeholder 2">
+            <a:extLst>
+              <a:ext uri="{FF2B5EF4-FFF2-40B4-BE49-F238E27FC236}">
+                <a16:creationId xmlns:a16="http://schemas.microsoft.com/office/drawing/2014/main" id="{5F9456F3-0936-CA29-209F-73228B98BE8C}"/>
+              </a:ext>
+            </a:extLst>
+          </p:cNvPr>
+          <p:cNvSpPr>
+            <a:spLocks noGrp="1"/>
+          </p:cNvSpPr>
+          <p:nvPr>
+            <p:ph idx="1"/>
+          </p:nvPr>
+        </p:nvSpPr>
+        <p:spPr/>
+        <p:txBody>
+          <a:bodyPr>
+            <a:normAutofit fontScale="92500" lnSpcReduction="10000"/>
+          </a:bodyPr>
+          <a:lstStyle/>
+          <a:p>
+            <a:r>
+              <a:rPr lang="en-US" dirty="0"/>
+              <a:t>A binary tree is called </a:t>
+            </a:r>
+            <a:r>
+              <a:rPr lang="en-US" b="1" dirty="0"/>
+              <a:t>proper</a:t>
+            </a:r>
+            <a:r>
+              <a:rPr lang="en-US" dirty="0"/>
+              <a:t> if every node has either 0 children or 2 children (no nodes have 1 child).</a:t>
+            </a:r>
+          </a:p>
+          <a:p>
+            <a:pPr lvl="1"/>
+            <a:r>
+              <a:rPr lang="en-US" dirty="0"/>
+              <a:t>Every internal node in a proper binary tree has exactly 2 children.</a:t>
+            </a:r>
+          </a:p>
+          <a:p>
+            <a:r>
+              <a:rPr lang="en-US" dirty="0"/>
+              <a:t>See proposition 7.10 (p. 287 – 288) for a list of useful facts about binary trees.</a:t>
+            </a:r>
+          </a:p>
+          <a:p>
+            <a:r>
+              <a:rPr lang="en-US" dirty="0"/>
+              <a:t>Roughly speaking:</a:t>
+            </a:r>
+          </a:p>
+          <a:p>
+            <a:pPr lvl="1"/>
+            <a:r>
+              <a:rPr lang="en-US" dirty="0"/>
+              <a:t>A binary tree with n nodes has min height log n and max height n</a:t>
+            </a:r>
+          </a:p>
+          <a:p>
+            <a:pPr lvl="1"/>
+            <a:r>
+              <a:rPr lang="en-US" dirty="0"/>
+              <a:t>So an algorithm (like height or depth) that does O(height) work is somewhere between O(log n) and O(n)</a:t>
+            </a:r>
+          </a:p>
+          <a:p>
+            <a:pPr lvl="1"/>
+            <a:r>
+              <a:rPr lang="en-US" dirty="0"/>
+              <a:t>At worst, O(n) … but if you can </a:t>
+            </a:r>
+            <a:r>
+              <a:rPr lang="en-US" b="1" dirty="0"/>
+              <a:t>somehow</a:t>
+            </a:r>
+            <a:r>
+              <a:rPr lang="en-US" dirty="0"/>
+              <a:t> ensure the tree is short, you can get O(log n) performance</a:t>
+            </a:r>
+          </a:p>
+          <a:p>
+            <a:pPr lvl="2"/>
+            <a:r>
+              <a:rPr lang="en-US" dirty="0"/>
+              <a:t>Foreshadowing!</a:t>
+            </a:r>
+          </a:p>
+        </p:txBody>
+      </p:sp>
+    </p:spTree>
+    <p:extLst>
+      <p:ext uri="{BB962C8B-B14F-4D97-AF65-F5344CB8AC3E}">
+        <p14:creationId xmlns:p14="http://schemas.microsoft.com/office/powerpoint/2010/main" val="4265642692"/>
+      </p:ext>
+    </p:extLst>
+  </p:cSld>
+  <p:clrMapOvr>
+    <a:masterClrMapping/>
+  </p:clrMapOvr>
+</p:sld>
+</file>
+
+<file path=ppt/slides/slide35.xml><?xml version="1.0" encoding="utf-8"?>
 <p:sld xmlns:a="http://schemas.openxmlformats.org/drawingml/2006/main" xmlns:r="http://schemas.openxmlformats.org/officeDocument/2006/relationships" xmlns:p="http://schemas.openxmlformats.org/presentationml/2006/main">
   <p:cSld>
     <p:spTree>
@@ -26240,6 +26939,114 @@
     <p:extLst>
       <p:ext uri="{BB962C8B-B14F-4D97-AF65-F5344CB8AC3E}">
         <p14:creationId xmlns:p14="http://schemas.microsoft.com/office/powerpoint/2010/main" val="455429676"/>
+      </p:ext>
+    </p:extLst>
+  </p:cSld>
+  <p:clrMapOvr>
+    <a:masterClrMapping/>
+  </p:clrMapOvr>
+</p:sld>
+</file>
+
+<file path=ppt/slides/slide36.xml><?xml version="1.0" encoding="utf-8"?>
+<p:sld xmlns:a="http://schemas.openxmlformats.org/drawingml/2006/main" xmlns:r="http://schemas.openxmlformats.org/officeDocument/2006/relationships" xmlns:p="http://schemas.openxmlformats.org/presentationml/2006/main">
+  <p:cSld>
+    <p:spTree>
+      <p:nvGrpSpPr>
+        <p:cNvPr id="1" name=""/>
+        <p:cNvGrpSpPr/>
+        <p:nvPr/>
+      </p:nvGrpSpPr>
+      <p:grpSpPr>
+        <a:xfrm>
+          <a:off x="0" y="0"/>
+          <a:ext cx="0" cy="0"/>
+          <a:chOff x="0" y="0"/>
+          <a:chExt cx="0" cy="0"/>
+        </a:xfrm>
+      </p:grpSpPr>
+      <p:sp>
+        <p:nvSpPr>
+          <p:cNvPr id="2" name="Title 1">
+            <a:extLst>
+              <a:ext uri="{FF2B5EF4-FFF2-40B4-BE49-F238E27FC236}">
+                <a16:creationId xmlns:a16="http://schemas.microsoft.com/office/drawing/2014/main" id="{05DECD98-B151-CEA7-F244-9C8EEFCA8150}"/>
+              </a:ext>
+            </a:extLst>
+          </p:cNvPr>
+          <p:cNvSpPr>
+            <a:spLocks noGrp="1"/>
+          </p:cNvSpPr>
+          <p:nvPr>
+            <p:ph type="title"/>
+          </p:nvPr>
+        </p:nvSpPr>
+        <p:spPr/>
+        <p:txBody>
+          <a:bodyPr/>
+          <a:lstStyle/>
+          <a:p>
+            <a:r>
+              <a:rPr lang="en-US" dirty="0"/>
+              <a:t>Binary Tree Code</a:t>
+            </a:r>
+          </a:p>
+        </p:txBody>
+      </p:sp>
+      <p:sp>
+        <p:nvSpPr>
+          <p:cNvPr id="3" name="Content Placeholder 2">
+            <a:extLst>
+              <a:ext uri="{FF2B5EF4-FFF2-40B4-BE49-F238E27FC236}">
+                <a16:creationId xmlns:a16="http://schemas.microsoft.com/office/drawing/2014/main" id="{615C2A9D-9CDB-6525-D18D-780832F2BF55}"/>
+              </a:ext>
+            </a:extLst>
+          </p:cNvPr>
+          <p:cNvSpPr>
+            <a:spLocks noGrp="1"/>
+          </p:cNvSpPr>
+          <p:nvPr>
+            <p:ph idx="1"/>
+          </p:nvPr>
+        </p:nvSpPr>
+        <p:spPr/>
+        <p:txBody>
+          <a:bodyPr/>
+          <a:lstStyle/>
+          <a:p>
+            <a:r>
+              <a:rPr lang="en-US" dirty="0"/>
+              <a:t>See notes for binary tree implementation code …</a:t>
+            </a:r>
+          </a:p>
+          <a:p>
+            <a:r>
+              <a:rPr lang="en-US" dirty="0"/>
+              <a:t>Make sure you know how to visit the nodes of a binary tree using preorder traversal, </a:t>
+            </a:r>
+            <a:r>
+              <a:rPr lang="en-US" dirty="0" err="1"/>
+              <a:t>inorder</a:t>
+            </a:r>
+            <a:r>
+              <a:rPr lang="en-US" dirty="0"/>
+              <a:t> traversal, and </a:t>
+            </a:r>
+            <a:r>
+              <a:rPr lang="en-US" dirty="0" err="1"/>
+              <a:t>postorder</a:t>
+            </a:r>
+            <a:r>
+              <a:rPr lang="en-US" dirty="0"/>
+              <a:t> traversal!</a:t>
+            </a:r>
+          </a:p>
+        </p:txBody>
+      </p:sp>
+    </p:spTree>
+    <p:extLst>
+      <p:ext uri="{BB962C8B-B14F-4D97-AF65-F5344CB8AC3E}">
+        <p14:creationId xmlns:p14="http://schemas.microsoft.com/office/powerpoint/2010/main" val="2026226063"/>
       </p:ext>
     </p:extLst>
   </p:cSld>
@@ -28102,7 +28909,7 @@
             </a:r>
             <a:r>
               <a:rPr lang="en-US" dirty="0"/>
-              <a:t> T is a set of nodes storing elements on a parent-child relationship with the following properties:</a:t>
+              <a:t> T is a set of nodes storing elements in a parent-child relationship with the following properties:</a:t>
             </a:r>
           </a:p>
           <a:p>

--- a/lectures/lecture12_13_14/lecture_trees.pptx
+++ b/lectures/lecture12_13_14/lecture_trees.pptx
@@ -150,7 +150,7 @@
 <file path=ppt/revisionInfo.xml><?xml version="1.0" encoding="utf-8"?>
 <p1510:revInfo xmlns:a="http://schemas.openxmlformats.org/drawingml/2006/main" xmlns:r="http://schemas.openxmlformats.org/officeDocument/2006/relationships" xmlns:p1510="http://schemas.microsoft.com/office/powerpoint/2015/10/main">
   <p1510:revLst>
-    <p1510:client id="{6FCAF34C-9882-874F-A274-460BA42E4592}" v="103" dt="2026-06-09T05:45:15.747"/>
+    <p1510:client id="{6FCAF34C-9882-874F-A274-460BA42E4592}" v="104" dt="2026-06-09T21:36:42.642"/>
   </p1510:revLst>
 </p1510:revInfo>
 </file>
@@ -160,7 +160,7 @@
   <pc:docChgLst>
     <pc:chgData name="Toby Donaldson" userId="2e6e5431-bb17-4c41-9985-d39c50d83c73" providerId="ADAL" clId="{F31BC264-820E-54C4-A6D1-F92AF9CC222E}"/>
     <pc:docChg chg="undo custSel addSld delSld modSld sldOrd">
-      <pc:chgData name="Toby Donaldson" userId="2e6e5431-bb17-4c41-9985-d39c50d83c73" providerId="ADAL" clId="{F31BC264-820E-54C4-A6D1-F92AF9CC222E}" dt="2026-06-09T20:08:00.417" v="6318" actId="20577"/>
+      <pc:chgData name="Toby Donaldson" userId="2e6e5431-bb17-4c41-9985-d39c50d83c73" providerId="ADAL" clId="{F31BC264-820E-54C4-A6D1-F92AF9CC222E}" dt="2026-06-09T21:36:42.635" v="6319"/>
       <pc:docMkLst>
         <pc:docMk/>
       </pc:docMkLst>
@@ -714,7 +714,7 @@
         </pc:sldMkLst>
       </pc:sldChg>
       <pc:sldChg chg="addSp delSp modSp add mod">
-        <pc:chgData name="Toby Donaldson" userId="2e6e5431-bb17-4c41-9985-d39c50d83c73" providerId="ADAL" clId="{F31BC264-820E-54C4-A6D1-F92AF9CC222E}" dt="2026-06-09T04:11:07.472" v="1307" actId="1076"/>
+        <pc:chgData name="Toby Donaldson" userId="2e6e5431-bb17-4c41-9985-d39c50d83c73" providerId="ADAL" clId="{F31BC264-820E-54C4-A6D1-F92AF9CC222E}" dt="2026-06-09T21:36:42.635" v="6319"/>
         <pc:sldMkLst>
           <pc:docMk/>
           <pc:sldMk cId="2251480560" sldId="265"/>
@@ -919,6 +919,14 @@
             <ac:grpSpMk id="37" creationId="{DFCA06D3-EB82-C13B-A675-86CEB104E923}"/>
           </ac:grpSpMkLst>
         </pc:grpChg>
+        <pc:inkChg chg="add">
+          <ac:chgData name="Toby Donaldson" userId="2e6e5431-bb17-4c41-9985-d39c50d83c73" providerId="ADAL" clId="{F31BC264-820E-54C4-A6D1-F92AF9CC222E}" dt="2026-06-09T21:36:42.635" v="6319"/>
+          <ac:inkMkLst>
+            <pc:docMk/>
+            <pc:sldMk cId="2251480560" sldId="265"/>
+            <ac:inkMk id="41" creationId="{CC06B238-D079-1448-9D8D-D188BD08C8EF}"/>
+          </ac:inkMkLst>
+        </pc:inkChg>
         <pc:cxnChg chg="mod">
           <ac:chgData name="Toby Donaldson" userId="2e6e5431-bb17-4c41-9985-d39c50d83c73" providerId="ADAL" clId="{F31BC264-820E-54C4-A6D1-F92AF9CC222E}" dt="2026-06-09T04:04:27.913" v="922" actId="1076"/>
           <ac:cxnSpMkLst>
@@ -1158,7 +1166,7 @@
         </pc:sldMkLst>
       </pc:sldChg>
       <pc:sldChg chg="addSp modSp add mod">
-        <pc:chgData name="Toby Donaldson" userId="2e6e5431-bb17-4c41-9985-d39c50d83c73" providerId="ADAL" clId="{F31BC264-820E-54C4-A6D1-F92AF9CC222E}" dt="2026-06-09T04:20:06.578" v="1659" actId="113"/>
+        <pc:chgData name="Toby Donaldson" userId="2e6e5431-bb17-4c41-9985-d39c50d83c73" providerId="ADAL" clId="{F31BC264-820E-54C4-A6D1-F92AF9CC222E}" dt="2026-06-09T21:36:42.635" v="6319"/>
         <pc:sldMkLst>
           <pc:docMk/>
           <pc:sldMk cId="1532730266" sldId="270"/>
@@ -1179,9 +1187,17 @@
             <ac:spMk id="5" creationId="{0598A421-3EF1-4043-A6E0-68931280F01D}"/>
           </ac:spMkLst>
         </pc:spChg>
+        <pc:inkChg chg="add">
+          <ac:chgData name="Toby Donaldson" userId="2e6e5431-bb17-4c41-9985-d39c50d83c73" providerId="ADAL" clId="{F31BC264-820E-54C4-A6D1-F92AF9CC222E}" dt="2026-06-09T21:36:42.635" v="6319"/>
+          <ac:inkMkLst>
+            <pc:docMk/>
+            <pc:sldMk cId="1532730266" sldId="270"/>
+            <ac:inkMk id="6" creationId="{C9E84BBD-0E79-1AE4-A076-693DF624BA00}"/>
+          </ac:inkMkLst>
+        </pc:inkChg>
       </pc:sldChg>
       <pc:sldChg chg="addSp delSp modSp add mod">
-        <pc:chgData name="Toby Donaldson" userId="2e6e5431-bb17-4c41-9985-d39c50d83c73" providerId="ADAL" clId="{F31BC264-820E-54C4-A6D1-F92AF9CC222E}" dt="2026-06-09T19:36:46.591" v="6303" actId="14100"/>
+        <pc:chgData name="Toby Donaldson" userId="2e6e5431-bb17-4c41-9985-d39c50d83c73" providerId="ADAL" clId="{F31BC264-820E-54C4-A6D1-F92AF9CC222E}" dt="2026-06-09T21:36:42.635" v="6319"/>
         <pc:sldMkLst>
           <pc:docMk/>
           <pc:sldMk cId="1717266924" sldId="271"/>
@@ -1226,6 +1242,14 @@
             <ac:picMk id="4" creationId="{5EB941F1-4347-7B87-94F4-4B41EFCF8CC3}"/>
           </ac:picMkLst>
         </pc:picChg>
+        <pc:inkChg chg="add">
+          <ac:chgData name="Toby Donaldson" userId="2e6e5431-bb17-4c41-9985-d39c50d83c73" providerId="ADAL" clId="{F31BC264-820E-54C4-A6D1-F92AF9CC222E}" dt="2026-06-09T21:36:42.635" v="6319"/>
+          <ac:inkMkLst>
+            <pc:docMk/>
+            <pc:sldMk cId="1717266924" sldId="271"/>
+            <ac:inkMk id="8" creationId="{C0FE7310-64AA-F9FA-E8EF-DD638D6A01DC}"/>
+          </ac:inkMkLst>
+        </pc:inkChg>
       </pc:sldChg>
       <pc:sldChg chg="del">
         <pc:chgData name="Toby Donaldson" userId="2e6e5431-bb17-4c41-9985-d39c50d83c73" providerId="ADAL" clId="{F31BC264-820E-54C4-A6D1-F92AF9CC222E}" dt="2026-06-09T03:27:15.290" v="248" actId="2696"/>
@@ -1242,7 +1266,7 @@
         </pc:sldMkLst>
       </pc:sldChg>
       <pc:sldChg chg="addSp modSp add mod">
-        <pc:chgData name="Toby Donaldson" userId="2e6e5431-bb17-4c41-9985-d39c50d83c73" providerId="ADAL" clId="{F31BC264-820E-54C4-A6D1-F92AF9CC222E}" dt="2026-06-09T04:31:41.660" v="2033" actId="20577"/>
+        <pc:chgData name="Toby Donaldson" userId="2e6e5431-bb17-4c41-9985-d39c50d83c73" providerId="ADAL" clId="{F31BC264-820E-54C4-A6D1-F92AF9CC222E}" dt="2026-06-09T21:36:42.635" v="6319"/>
         <pc:sldMkLst>
           <pc:docMk/>
           <pc:sldMk cId="1403331413" sldId="272"/>
@@ -1359,9 +1383,17 @@
             <ac:picMk id="11" creationId="{8CE70EF5-9E5F-3AA5-23C1-75D757D7C089}"/>
           </ac:picMkLst>
         </pc:picChg>
+        <pc:inkChg chg="add">
+          <ac:chgData name="Toby Donaldson" userId="2e6e5431-bb17-4c41-9985-d39c50d83c73" providerId="ADAL" clId="{F31BC264-820E-54C4-A6D1-F92AF9CC222E}" dt="2026-06-09T21:36:42.635" v="6319"/>
+          <ac:inkMkLst>
+            <pc:docMk/>
+            <pc:sldMk cId="1403331413" sldId="272"/>
+            <ac:inkMk id="17" creationId="{301C84DB-9A1D-22E2-D66B-066171E1DC48}"/>
+          </ac:inkMkLst>
+        </pc:inkChg>
       </pc:sldChg>
       <pc:sldChg chg="addSp delSp modSp add mod">
-        <pc:chgData name="Toby Donaldson" userId="2e6e5431-bb17-4c41-9985-d39c50d83c73" providerId="ADAL" clId="{F31BC264-820E-54C4-A6D1-F92AF9CC222E}" dt="2026-06-09T04:36:00.337" v="2233" actId="692"/>
+        <pc:chgData name="Toby Donaldson" userId="2e6e5431-bb17-4c41-9985-d39c50d83c73" providerId="ADAL" clId="{F31BC264-820E-54C4-A6D1-F92AF9CC222E}" dt="2026-06-09T21:36:42.635" v="6319"/>
         <pc:sldMkLst>
           <pc:docMk/>
           <pc:sldMk cId="1675940344" sldId="273"/>
@@ -1406,6 +1438,14 @@
             <ac:picMk id="3" creationId="{C2992BF4-3CB4-2590-02B3-A09C9DA4DDD0}"/>
           </ac:picMkLst>
         </pc:picChg>
+        <pc:inkChg chg="add">
+          <ac:chgData name="Toby Donaldson" userId="2e6e5431-bb17-4c41-9985-d39c50d83c73" providerId="ADAL" clId="{F31BC264-820E-54C4-A6D1-F92AF9CC222E}" dt="2026-06-09T21:36:42.635" v="6319"/>
+          <ac:inkMkLst>
+            <pc:docMk/>
+            <pc:sldMk cId="1675940344" sldId="273"/>
+            <ac:inkMk id="8" creationId="{63B89271-34E6-9666-A2EA-8AA3F66D0ED4}"/>
+          </ac:inkMkLst>
+        </pc:inkChg>
       </pc:sldChg>
       <pc:sldChg chg="del">
         <pc:chgData name="Toby Donaldson" userId="2e6e5431-bb17-4c41-9985-d39c50d83c73" providerId="ADAL" clId="{F31BC264-820E-54C4-A6D1-F92AF9CC222E}" dt="2026-06-09T03:27:15.290" v="248" actId="2696"/>
@@ -1421,12 +1461,20 @@
           <pc:sldMk cId="2286729824" sldId="274"/>
         </pc:sldMkLst>
       </pc:sldChg>
-      <pc:sldChg chg="add">
-        <pc:chgData name="Toby Donaldson" userId="2e6e5431-bb17-4c41-9985-d39c50d83c73" providerId="ADAL" clId="{F31BC264-820E-54C4-A6D1-F92AF9CC222E}" dt="2026-06-09T04:36:57.453" v="2235"/>
+      <pc:sldChg chg="addSp add">
+        <pc:chgData name="Toby Donaldson" userId="2e6e5431-bb17-4c41-9985-d39c50d83c73" providerId="ADAL" clId="{F31BC264-820E-54C4-A6D1-F92AF9CC222E}" dt="2026-06-09T21:36:42.635" v="6319"/>
         <pc:sldMkLst>
           <pc:docMk/>
           <pc:sldMk cId="2779663032" sldId="274"/>
         </pc:sldMkLst>
+        <pc:inkChg chg="add">
+          <ac:chgData name="Toby Donaldson" userId="2e6e5431-bb17-4c41-9985-d39c50d83c73" providerId="ADAL" clId="{F31BC264-820E-54C4-A6D1-F92AF9CC222E}" dt="2026-06-09T21:36:42.635" v="6319"/>
+          <ac:inkMkLst>
+            <pc:docMk/>
+            <pc:sldMk cId="2779663032" sldId="274"/>
+            <ac:inkMk id="4" creationId="{772A9A47-9788-6967-F4E8-F7A76298BC22}"/>
+          </ac:inkMkLst>
+        </pc:inkChg>
       </pc:sldChg>
       <pc:sldChg chg="add del">
         <pc:chgData name="Toby Donaldson" userId="2e6e5431-bb17-4c41-9985-d39c50d83c73" providerId="ADAL" clId="{F31BC264-820E-54C4-A6D1-F92AF9CC222E}" dt="2026-06-09T04:33:19.156" v="2037"/>
@@ -1443,7 +1491,7 @@
         </pc:sldMkLst>
       </pc:sldChg>
       <pc:sldChg chg="addSp modSp new mod">
-        <pc:chgData name="Toby Donaldson" userId="2e6e5431-bb17-4c41-9985-d39c50d83c73" providerId="ADAL" clId="{F31BC264-820E-54C4-A6D1-F92AF9CC222E}" dt="2026-06-09T05:05:46.131" v="3414"/>
+        <pc:chgData name="Toby Donaldson" userId="2e6e5431-bb17-4c41-9985-d39c50d83c73" providerId="ADAL" clId="{F31BC264-820E-54C4-A6D1-F92AF9CC222E}" dt="2026-06-09T21:36:42.635" v="6319"/>
         <pc:sldMkLst>
           <pc:docMk/>
           <pc:sldMk cId="829582894" sldId="275"/>
@@ -1552,9 +1600,17 @@
             <ac:grpSpMk id="4" creationId="{4A9C4A4E-1118-1AD3-9D41-9C3B64870900}"/>
           </ac:grpSpMkLst>
         </pc:grpChg>
+        <pc:inkChg chg="add">
+          <ac:chgData name="Toby Donaldson" userId="2e6e5431-bb17-4c41-9985-d39c50d83c73" providerId="ADAL" clId="{F31BC264-820E-54C4-A6D1-F92AF9CC222E}" dt="2026-06-09T21:36:42.635" v="6319"/>
+          <ac:inkMkLst>
+            <pc:docMk/>
+            <pc:sldMk cId="829582894" sldId="275"/>
+            <ac:inkMk id="32" creationId="{6286591E-2310-9BDA-8421-1CF787324066}"/>
+          </ac:inkMkLst>
+        </pc:inkChg>
       </pc:sldChg>
       <pc:sldChg chg="addSp delSp modSp add mod">
-        <pc:chgData name="Toby Donaldson" userId="2e6e5431-bb17-4c41-9985-d39c50d83c73" providerId="ADAL" clId="{F31BC264-820E-54C4-A6D1-F92AF9CC222E}" dt="2026-06-09T05:05:25.320" v="3412" actId="20577"/>
+        <pc:chgData name="Toby Donaldson" userId="2e6e5431-bb17-4c41-9985-d39c50d83c73" providerId="ADAL" clId="{F31BC264-820E-54C4-A6D1-F92AF9CC222E}" dt="2026-06-09T21:36:42.635" v="6319"/>
         <pc:sldMkLst>
           <pc:docMk/>
           <pc:sldMk cId="1525370219" sldId="276"/>
@@ -1639,6 +1695,14 @@
             <ac:picMk id="32" creationId="{C0AE5C66-7B5D-4A8D-C761-8ACC320855E8}"/>
           </ac:picMkLst>
         </pc:picChg>
+        <pc:inkChg chg="add">
+          <ac:chgData name="Toby Donaldson" userId="2e6e5431-bb17-4c41-9985-d39c50d83c73" providerId="ADAL" clId="{F31BC264-820E-54C4-A6D1-F92AF9CC222E}" dt="2026-06-09T21:36:42.635" v="6319"/>
+          <ac:inkMkLst>
+            <pc:docMk/>
+            <pc:sldMk cId="1525370219" sldId="276"/>
+            <ac:inkMk id="40" creationId="{7E787FCB-3BD6-2E6E-8461-39D82D9C5C26}"/>
+          </ac:inkMkLst>
+        </pc:inkChg>
         <pc:cxnChg chg="mod">
           <ac:chgData name="Toby Donaldson" userId="2e6e5431-bb17-4c41-9985-d39c50d83c73" providerId="ADAL" clId="{F31BC264-820E-54C4-A6D1-F92AF9CC222E}" dt="2026-06-09T04:42:57.573" v="2491" actId="21"/>
           <ac:cxnSpMkLst>
@@ -2224,7 +2288,7 @@
         </pc:sldMkLst>
       </pc:sldChg>
       <pc:sldChg chg="addSp delSp modSp add mod">
-        <pc:chgData name="Toby Donaldson" userId="2e6e5431-bb17-4c41-9985-d39c50d83c73" providerId="ADAL" clId="{F31BC264-820E-54C4-A6D1-F92AF9CC222E}" dt="2026-06-09T19:58:05.487" v="6309" actId="207"/>
+        <pc:chgData name="Toby Donaldson" userId="2e6e5431-bb17-4c41-9985-d39c50d83c73" providerId="ADAL" clId="{F31BC264-820E-54C4-A6D1-F92AF9CC222E}" dt="2026-06-09T21:36:42.635" v="6319"/>
         <pc:sldMkLst>
           <pc:docMk/>
           <pc:sldMk cId="851915149" sldId="281"/>
@@ -2269,6 +2333,14 @@
             <ac:spMk id="37" creationId="{FED4B989-29B0-8A31-595F-35B0C4813A18}"/>
           </ac:spMkLst>
         </pc:spChg>
+        <pc:inkChg chg="add">
+          <ac:chgData name="Toby Donaldson" userId="2e6e5431-bb17-4c41-9985-d39c50d83c73" providerId="ADAL" clId="{F31BC264-820E-54C4-A6D1-F92AF9CC222E}" dt="2026-06-09T21:36:42.635" v="6319"/>
+          <ac:inkMkLst>
+            <pc:docMk/>
+            <pc:sldMk cId="851915149" sldId="281"/>
+            <ac:inkMk id="38" creationId="{CA43A210-3631-41AD-F67F-9F2D4348475D}"/>
+          </ac:inkMkLst>
+        </pc:inkChg>
       </pc:sldChg>
       <pc:sldChg chg="del">
         <pc:chgData name="Toby Donaldson" userId="2e6e5431-bb17-4c41-9985-d39c50d83c73" providerId="ADAL" clId="{F31BC264-820E-54C4-A6D1-F92AF9CC222E}" dt="2026-06-09T03:27:15.290" v="248" actId="2696"/>
@@ -2285,7 +2357,7 @@
         </pc:sldMkLst>
       </pc:sldChg>
       <pc:sldChg chg="addSp modSp add mod">
-        <pc:chgData name="Toby Donaldson" userId="2e6e5431-bb17-4c41-9985-d39c50d83c73" providerId="ADAL" clId="{F31BC264-820E-54C4-A6D1-F92AF9CC222E}" dt="2026-06-09T19:58:14.204" v="6310" actId="207"/>
+        <pc:chgData name="Toby Donaldson" userId="2e6e5431-bb17-4c41-9985-d39c50d83c73" providerId="ADAL" clId="{F31BC264-820E-54C4-A6D1-F92AF9CC222E}" dt="2026-06-09T21:36:42.635" v="6319"/>
         <pc:sldMkLst>
           <pc:docMk/>
           <pc:sldMk cId="3641487090" sldId="282"/>
@@ -2298,6 +2370,14 @@
             <ac:spMk id="4" creationId="{7D3ECEBB-029F-42CF-D799-D3DF8272003C}"/>
           </ac:spMkLst>
         </pc:spChg>
+        <pc:inkChg chg="add">
+          <ac:chgData name="Toby Donaldson" userId="2e6e5431-bb17-4c41-9985-d39c50d83c73" providerId="ADAL" clId="{F31BC264-820E-54C4-A6D1-F92AF9CC222E}" dt="2026-06-09T21:36:42.635" v="6319"/>
+          <ac:inkMkLst>
+            <pc:docMk/>
+            <pc:sldMk cId="3641487090" sldId="282"/>
+            <ac:inkMk id="38" creationId="{C16120D3-233B-3D42-2A56-CAF926169AD0}"/>
+          </ac:inkMkLst>
+        </pc:inkChg>
       </pc:sldChg>
       <pc:sldChg chg="del">
         <pc:chgData name="Toby Donaldson" userId="2e6e5431-bb17-4c41-9985-d39c50d83c73" providerId="ADAL" clId="{F31BC264-820E-54C4-A6D1-F92AF9CC222E}" dt="2026-06-09T03:27:15.290" v="248" actId="2696"/>
@@ -2424,8 +2504,8 @@
           </ac:cxnSpMkLst>
         </pc:cxnChg>
       </pc:sldChg>
-      <pc:sldChg chg="modSp add mod ord">
-        <pc:chgData name="Toby Donaldson" userId="2e6e5431-bb17-4c41-9985-d39c50d83c73" providerId="ADAL" clId="{F31BC264-820E-54C4-A6D1-F92AF9CC222E}" dt="2026-06-09T05:22:19.230" v="4004" actId="20578"/>
+      <pc:sldChg chg="addSp modSp add mod ord">
+        <pc:chgData name="Toby Donaldson" userId="2e6e5431-bb17-4c41-9985-d39c50d83c73" providerId="ADAL" clId="{F31BC264-820E-54C4-A6D1-F92AF9CC222E}" dt="2026-06-09T21:36:42.635" v="6319"/>
         <pc:sldMkLst>
           <pc:docMk/>
           <pc:sldMk cId="1603748545" sldId="285"/>
@@ -2438,9 +2518,17 @@
             <ac:spMk id="35" creationId="{7802EC82-E412-2FAF-41BF-51A38B539E7F}"/>
           </ac:spMkLst>
         </pc:spChg>
+        <pc:inkChg chg="add">
+          <ac:chgData name="Toby Donaldson" userId="2e6e5431-bb17-4c41-9985-d39c50d83c73" providerId="ADAL" clId="{F31BC264-820E-54C4-A6D1-F92AF9CC222E}" dt="2026-06-09T21:36:42.635" v="6319"/>
+          <ac:inkMkLst>
+            <pc:docMk/>
+            <pc:sldMk cId="1603748545" sldId="285"/>
+            <ac:inkMk id="4" creationId="{558A236A-6042-6A42-6002-ED1BE7AACD55}"/>
+          </ac:inkMkLst>
+        </pc:inkChg>
       </pc:sldChg>
       <pc:sldChg chg="addSp modSp new mod">
-        <pc:chgData name="Toby Donaldson" userId="2e6e5431-bb17-4c41-9985-d39c50d83c73" providerId="ADAL" clId="{F31BC264-820E-54C4-A6D1-F92AF9CC222E}" dt="2026-06-09T05:37:30.070" v="4644" actId="14"/>
+        <pc:chgData name="Toby Donaldson" userId="2e6e5431-bb17-4c41-9985-d39c50d83c73" providerId="ADAL" clId="{F31BC264-820E-54C4-A6D1-F92AF9CC222E}" dt="2026-06-09T21:36:42.635" v="6319"/>
         <pc:sldMkLst>
           <pc:docMk/>
           <pc:sldMk cId="1809626557" sldId="286"/>
@@ -2469,6 +2557,14 @@
             <ac:picMk id="4" creationId="{55007378-0E01-706E-8AAB-A51BFA57BF4B}"/>
           </ac:picMkLst>
         </pc:picChg>
+        <pc:inkChg chg="add">
+          <ac:chgData name="Toby Donaldson" userId="2e6e5431-bb17-4c41-9985-d39c50d83c73" providerId="ADAL" clId="{F31BC264-820E-54C4-A6D1-F92AF9CC222E}" dt="2026-06-09T21:36:42.635" v="6319"/>
+          <ac:inkMkLst>
+            <pc:docMk/>
+            <pc:sldMk cId="1809626557" sldId="286"/>
+            <ac:inkMk id="5" creationId="{C44B00DA-E1B1-5360-0DA3-7EA015E1524F}"/>
+          </ac:inkMkLst>
+        </pc:inkChg>
       </pc:sldChg>
       <pc:sldChg chg="del">
         <pc:chgData name="Toby Donaldson" userId="2e6e5431-bb17-4c41-9985-d39c50d83c73" providerId="ADAL" clId="{F31BC264-820E-54C4-A6D1-F92AF9CC222E}" dt="2026-06-09T03:27:15.290" v="248" actId="2696"/>
@@ -2478,7 +2574,7 @@
         </pc:sldMkLst>
       </pc:sldChg>
       <pc:sldChg chg="addSp modSp add mod">
-        <pc:chgData name="Toby Donaldson" userId="2e6e5431-bb17-4c41-9985-d39c50d83c73" providerId="ADAL" clId="{F31BC264-820E-54C4-A6D1-F92AF9CC222E}" dt="2026-06-09T05:37:22.111" v="4643" actId="14"/>
+        <pc:chgData name="Toby Donaldson" userId="2e6e5431-bb17-4c41-9985-d39c50d83c73" providerId="ADAL" clId="{F31BC264-820E-54C4-A6D1-F92AF9CC222E}" dt="2026-06-09T21:36:42.635" v="6319"/>
         <pc:sldMkLst>
           <pc:docMk/>
           <pc:sldMk cId="2038838820" sldId="287"/>
@@ -2507,6 +2603,14 @@
             <ac:picMk id="4" creationId="{E789445C-9B5E-4F10-1762-342201564576}"/>
           </ac:picMkLst>
         </pc:picChg>
+        <pc:inkChg chg="add">
+          <ac:chgData name="Toby Donaldson" userId="2e6e5431-bb17-4c41-9985-d39c50d83c73" providerId="ADAL" clId="{F31BC264-820E-54C4-A6D1-F92AF9CC222E}" dt="2026-06-09T21:36:42.635" v="6319"/>
+          <ac:inkMkLst>
+            <pc:docMk/>
+            <pc:sldMk cId="2038838820" sldId="287"/>
+            <ac:inkMk id="6" creationId="{0AE8F9E5-62CD-70AC-5935-6951B894C302}"/>
+          </ac:inkMkLst>
+        </pc:inkChg>
       </pc:sldChg>
       <pc:sldChg chg="del">
         <pc:chgData name="Toby Donaldson" userId="2e6e5431-bb17-4c41-9985-d39c50d83c73" providerId="ADAL" clId="{F31BC264-820E-54C4-A6D1-F92AF9CC222E}" dt="2026-06-09T03:27:15.290" v="248" actId="2696"/>
@@ -2606,8 +2710,8 @@
           <pc:sldMk cId="3609491912" sldId="290"/>
         </pc:sldMkLst>
       </pc:sldChg>
-      <pc:sldChg chg="modSp new mod">
-        <pc:chgData name="Toby Donaldson" userId="2e6e5431-bb17-4c41-9985-d39c50d83c73" providerId="ADAL" clId="{F31BC264-820E-54C4-A6D1-F92AF9CC222E}" dt="2026-06-09T06:17:04.925" v="6300" actId="20577"/>
+      <pc:sldChg chg="addSp modSp new mod">
+        <pc:chgData name="Toby Donaldson" userId="2e6e5431-bb17-4c41-9985-d39c50d83c73" providerId="ADAL" clId="{F31BC264-820E-54C4-A6D1-F92AF9CC222E}" dt="2026-06-09T21:36:42.635" v="6319"/>
         <pc:sldMkLst>
           <pc:docMk/>
           <pc:sldMk cId="4265642692" sldId="290"/>
@@ -2628,6 +2732,14 @@
             <ac:spMk id="3" creationId="{5F9456F3-0936-CA29-209F-73228B98BE8C}"/>
           </ac:spMkLst>
         </pc:spChg>
+        <pc:inkChg chg="add">
+          <ac:chgData name="Toby Donaldson" userId="2e6e5431-bb17-4c41-9985-d39c50d83c73" providerId="ADAL" clId="{F31BC264-820E-54C4-A6D1-F92AF9CC222E}" dt="2026-06-09T21:36:42.635" v="6319"/>
+          <ac:inkMkLst>
+            <pc:docMk/>
+            <pc:sldMk cId="4265642692" sldId="290"/>
+            <ac:inkMk id="4" creationId="{DC8F3783-1757-DBE1-526E-741D70CBF9AB}"/>
+          </ac:inkMkLst>
+        </pc:inkChg>
       </pc:sldChg>
       <pc:sldChg chg="add">
         <pc:chgData name="Toby Donaldson" userId="2e6e5431-bb17-4c41-9985-d39c50d83c73" providerId="ADAL" clId="{F31BC264-820E-54C4-A6D1-F92AF9CC222E}" dt="2026-06-09T19:56:31.521" v="6304" actId="2890"/>
@@ -2830,6 +2942,435 @@
     </pc:docChg>
   </pc:docChgLst>
 </pc:chgInfo>
+</file>
+
+<file path=ppt/ink/ink1.xml><?xml version="1.0" encoding="utf-8"?>
+<inkml:ink xmlns:inkml="http://www.w3.org/2003/InkML">
+  <inkml:definitions>
+    <inkml:context xml:id="ctx0">
+      <inkml:inkSource xml:id="inkSrc0">
+        <inkml:traceFormat>
+          <inkml:channel name="X" type="integer" min="-2.14748E9" max="2.14748E9" units="cm"/>
+          <inkml:channel name="Y" type="integer" min="-2.14748E9" max="2.14748E9" units="cm"/>
+          <inkml:channel name="F" type="integer" max="32767" units="dev"/>
+        </inkml:traceFormat>
+        <inkml:channelProperties>
+          <inkml:channelProperty channel="X" name="resolution" value="1000" units="1/cm"/>
+          <inkml:channelProperty channel="Y" name="resolution" value="1000" units="1/cm"/>
+          <inkml:channelProperty channel="F" name="resolution" value="0" units="1/dev"/>
+        </inkml:channelProperties>
+      </inkml:inkSource>
+      <inkml:timestamp xml:id="ts0" timeString="2026-06-09T20:42:23.242"/>
+    </inkml:context>
+    <inkml:brush xml:id="br0">
+      <inkml:brushProperty name="width" value="0.05292" units="cm"/>
+      <inkml:brushProperty name="height" value="0.05292" units="cm"/>
+      <inkml:brushProperty name="color" value="#FF0000"/>
+    </inkml:brush>
+  </inkml:definitions>
+  <inkml:trace contextRef="#ctx0" brushRef="#br0">24483 5909 24575,'41'0'0,"-2"0"0,-9 0 0,1 0 0,-4 0 0,-1 0 0,1 0 0,-1 0 0,19 0 0,-18 0 0,-11 0 0,-8 0 0,17 0 0,11 0 0,5 0 0,-3 0 0,2 0 0,8 0 0,0 0 0,-12 0 0,-3 0 0,4 0 0,4 0 0,-6 0 0,10 0 0,-7 0 0,1 0 0,-6 0 0,1 0 0,5 1 0,0-2 0,-4-7 0,-1 0 0,-7 6 0,0 0 0,8-6 0,-1 1 0,-7 6 0,1 2 0,6-1 0,0 0 0,-6 0 0,-1 0 0,8 0 0,-1 0 0,5 0 0,10 0 0,-29 0 0,-3 0 0,-9 0 0,8 0 0,-12 0 0,19 0 0,-21 0 0,22 0 0,-12 0 0,5 0 0,7 15 0,-20-11 0,27 12 0,-19-16 0,29 0 0,-4 0 0,8 0 0,-10 0 0,-1 0 0,-7 8 0,-7-6 0,-4 6 0</inkml:trace>
+  <inkml:trace contextRef="#ctx0" brushRef="#br0" timeOffset="131521">21078 13458 24575,'26'0'0,"8"0"0,6 0 0,-8 0 0,2 0 0,2 0-755,2 0 1,1 0 0,3 0-1,-2 0 755,0 0 0,0 0 0,1 0 0,-1 0 0,0 0 0,0 0 0,0 0 0,-1 0-68,6 0 1,-1 0-1,0 0 68,2 0 0,0 0 0,-1 0 0,-8 0 0,-1 0 0,1 0 0,3 0 0,1 0 0,-1 0 0,1 0 0,0 0 0,-1 0 215,-5 0 0,-2 0 0,1 0-215,15 0 0,-2 0 0,-12 0 0,-2 0 0,-5 0 0,-3 0 1485,12 0-1485,-11 0 966,-3 0-966,-19 0 125,12 0-125,0 0 0,-12 0 0,35 0 0,-25 0 0,27 0 0,-22 8 0,15-6 0,-15 6 0,-1-8 0,-10 0 0</inkml:trace>
+  <inkml:trace contextRef="#ctx0" brushRef="#br0" timeOffset="135617">24324 9525 24575,'38'0'0,"0"0"0,0 0 0,-1 0 0,3 0 0,0 0 0,-1 0 0,-1 0 0,-11 0 0,1 0 0,16 0 0,4 0 0,-7 0 0,2 0 0,-6 0 0,1 0 0,1 0 0,-4 1 0,1-1 0,-1-1 0,13-6 0,1-2 0,-9 6 0,1 0 0,-2-2 0,4-12 0,0 0 0,-6 12 0,1 2 0,-3-1 0,-2-4 0,-1 1 0,3 6 0,-2 2 0,12-1 0,-9 0 0,-19 0 0,-9 0 0,8 0 0,-12 0 0,27 0 0,-19 0 0,14 0 0,5 0 0,10 0 0,0 0 0,2 0 0,-10-4 0,-1 0 0,0 3 0,-1 0 0,12-7 0,-10 8 0,-21 0 0,3 0 0,-15 0 0,0 0 0</inkml:trace>
+  <inkml:trace contextRef="#ctx0" brushRef="#br0" timeOffset="136882">26617 13141 24575,'33'0'0,"1"0"0,3 0 0,4 0 0,2 0 0,-2 0 0,2 0 0,1 0 0,1 0-820,1 0 1,2 0 0,0 0 0,0 0 664,2 0 1,0 0 0,0 0-1,-2 0 155,2 0 0,-3 0 0,1 0 110,2 0 0,0 0 1,-3 0-111,5 0 0,-4 0 414,-7 0 0,-4 0-414,6 0 0,-25 0 0,-10 16 493,-8-12 0,0 11 1,0-15-1</inkml:trace>
+  <inkml:trace contextRef="#ctx0" brushRef="#br0" timeOffset="138069">31944 12876 24575,'0'-19'0,"16"3"0,11 16 0,-2 0 0,3 0 0,4 0 0,-1 0 0,16 0 0,-14 0 0,-9 0 0,-20 0 0,19 0 0,-21 0 0,6 16 0,-8-12 0,0 11 0</inkml:trace>
+</inkml:ink>
+</file>
+
+<file path=ppt/ink/ink10.xml><?xml version="1.0" encoding="utf-8"?>
+<inkml:ink xmlns:inkml="http://www.w3.org/2003/InkML">
+  <inkml:definitions>
+    <inkml:context xml:id="ctx0">
+      <inkml:inkSource xml:id="inkSrc0">
+        <inkml:traceFormat>
+          <inkml:channel name="X" type="integer" min="-2.14748E9" max="2.14748E9" units="cm"/>
+          <inkml:channel name="Y" type="integer" min="-2.14748E9" max="2.14748E9" units="cm"/>
+          <inkml:channel name="F" type="integer" max="32767" units="dev"/>
+        </inkml:traceFormat>
+        <inkml:channelProperties>
+          <inkml:channelProperty channel="X" name="resolution" value="1000" units="1/cm"/>
+          <inkml:channelProperty channel="Y" name="resolution" value="1000" units="1/cm"/>
+          <inkml:channelProperty channel="F" name="resolution" value="0" units="1/dev"/>
+        </inkml:channelProperties>
+      </inkml:inkSource>
+      <inkml:timestamp xml:id="ts0" timeString="2026-06-09T21:11:34.272"/>
+    </inkml:context>
+    <inkml:brush xml:id="br0">
+      <inkml:brushProperty name="width" value="0.05292" units="cm"/>
+      <inkml:brushProperty name="height" value="0.05292" units="cm"/>
+      <inkml:brushProperty name="color" value="#FF0000"/>
+    </inkml:brush>
+  </inkml:definitions>
+  <inkml:trace contextRef="#ctx0" brushRef="#br0">27411 7391 24575,'43'0'0,"2"0"0,-11 0 0,1 0 0,-6 0 0,-2 0 0,0 0 0,-1 0 0,16 0 0,-15 0 0,0 0 0,7 0 0,-15 0 0,22 0 0,-11 0 0,-3 0 0,-3 0 0,-7 0 0,-5 8 0,20-7 0,-28 23 0,11-20 0,-15 12 0,0-16 0,8 0 0,-6 0 0,6 7 0,-8-5 0,16 6 0,-5 8 0,7-12 0,-10 19 0,-8-21 0,0 6 0</inkml:trace>
+</inkml:ink>
+</file>
+
+<file path=ppt/ink/ink11.xml><?xml version="1.0" encoding="utf-8"?>
+<inkml:ink xmlns:inkml="http://www.w3.org/2003/InkML">
+  <inkml:definitions>
+    <inkml:context xml:id="ctx0">
+      <inkml:inkSource xml:id="inkSrc0">
+        <inkml:traceFormat>
+          <inkml:channel name="X" type="integer" min="-2.14748E9" max="2.14748E9" units="cm"/>
+          <inkml:channel name="Y" type="integer" min="-2.14748E9" max="2.14748E9" units="cm"/>
+          <inkml:channel name="F" type="integer" max="32767" units="dev"/>
+        </inkml:traceFormat>
+        <inkml:channelProperties>
+          <inkml:channelProperty channel="X" name="resolution" value="1000" units="1/cm"/>
+          <inkml:channelProperty channel="Y" name="resolution" value="1000" units="1/cm"/>
+          <inkml:channelProperty channel="F" name="resolution" value="0" units="1/dev"/>
+        </inkml:channelProperties>
+      </inkml:inkSource>
+      <inkml:timestamp xml:id="ts0" timeString="2026-06-09T21:12:46.019"/>
+    </inkml:context>
+    <inkml:brush xml:id="br0">
+      <inkml:brushProperty name="width" value="0.05292" units="cm"/>
+      <inkml:brushProperty name="height" value="0.05292" units="cm"/>
+      <inkml:brushProperty name="color" value="#FF0000"/>
+    </inkml:brush>
+  </inkml:definitions>
+  <inkml:trace contextRef="#ctx0" brushRef="#br0">19209 9384 24575,'0'27'0,"0"6"0,0 7 0,0-5 0,0 3 0,0 4-656,0-1 1,0 2-1,0 4 1,0 1 0,0 1 108,0-3 1,0 2 0,0 1 0,0 1 0,0 1 0,0 1 136,0-7 0,0 1 1,0 1-1,0 1 1,0 0-1,0 0 0,0 0 1,0 0 339,0 0 1,0 0 0,0 0 0,0 0 0,0 0 0,0 0 0,0 0 0,0 0 69,0 1 0,0-1 0,0 1 0,0 0 0,0-1 0,0 1 0,0-1 0,0 0-130,0-1 0,0-1 1,0 0-1,0 1 0,0-1 1,0-1-1,0 1 0,0 0 130,-1-2 0,1 0 0,-1 0 0,0 0 0,0 0 0,0 0 0,-1 0 0,1 0 0,-1 2 0,0-1 0,0 0 0,-1 1 0,1-1 0,-1 2 0,1 0 0,0 1 0,1-4 0,-1 1 0,1 2 0,0 0 0,0 0 0,0 0 0,0 0 0,0-1 0,0-1 0,0-1 0,-2 7 0,1 0 0,-1-2 0,1-1 0,-1 1 0,1-1 0,1 2 0,0-2 0,1 0 0,1 1 0,-1 1 0,1-1 0,-1-2 0,0-1 0,-1-2 0,-2 8 0,0-3 0,-1-2 0,1 0 0,0 1-301,2 1 1,1 1 0,0-1 0,-1 1 0,-1-1 300,-1-2 0,-2 0 0,0-1 0,-1 1 0,2 1 82,0-7 1,1 2 0,0-1 0,0 0 0,1 0 0,-1-1-83,1 3 0,0-1 0,0 0 0,-1-1 0,0-1 569,-2 8 0,-2-2 0,0 0 1,3-2-570,2-4 0,2-1 0,0-1 0,0-2 0,-2 5 0,-1-3 0,0 2 0,-2 4 0,0 1 0,-1 0 0,3-1 0,0 0 0,-2 2 0,-3-6 0,-1 0 0,0 1 0,1 1 0,4 0 0,2 1 0,0 0 0,-2-1 0,-1 0 0,-2 0 0,1-1 0,1 1 0,4-3 0,1 0 0,1 1 0,-3-2 0,-3 1 0,-2-1 0,0 0 0,2-2 0,4 3 0,1-1 0,-2 0 0,-8 6 0,-2 1 0,2 0 0,8 1 0,2 0 0,-2 0 0,-5-1 0,-2-1 0,2 1 0,5 5 0,2 0 0,0-6 1638,-4-5 0,0-3-1571,4 2 0,0-6 2664,0-13-2731,0 13 2662,0-21-2662,0 27 1346,0 6-1346,0-4 0,0 6 0,0-11 0,0 2 0,0 3 0,0-1-667,0 3 0,0-1 1,0 2-1,0 2 667,0-3 0,0 3 0,0 0 0,0 0 0,0 0 0,0-3 0,0 0 0,0 0 0,0-1 0,0 1 0,0-1 0,0 2 0,0-1 0,0-1 0,0-2 0,0 3 0,-1-2 0,1-1 0,1-1-80,1 4 0,1-2 0,0-4 80,-3 1 0,2-7 0,6-4 0,-8-11 0,0-16 0,15 0 2630,-11 0-2630,12 0 277,0-16-277,-5 13 0,18-8 0,7-2 0,3 4 0,4 0 0,-1 3 0,3 0 0,2-1-468,-7-1 0,2-1 0,0 0 0,0 1 468,0 3 0,0 0 0,1 1 0,1-1 0,-5-1 0,0-2 0,2 1 0,-1 0 0,1 2-432,-1 1 1,1 2 0,0 1-1,0-1 1,-1-1 431,0-3 0,-1-1 0,0 0 0,1 0 0,0 2 0,4 3 0,2 2 0,-1 0 0,0 0 0,-1-1 0,4-5 0,-1 0 0,0-1 0,1 2 0,-7 4 0,2 1 0,-1 0 0,1 1 0,-2-3 0,4-3 0,0-2 0,-1 0 0,0 3-274,-2 2 1,1 1-1,-2 1 1,0-1 273,4-4 0,-1-1 0,0 1 0,1 1 0,1 2 0,0 0 0,3 2 0,0 0 0,2-2 0,-10-3 0,1-1 0,1-1 0,1 2-433,-2 3 1,1 1 0,2 1 0,-1 0-1,0-1 433,0-3 0,0-1 0,1 0 0,0 0 0,0 0 0,-3 2 0,0-1 0,0 1 0,1 1 0,0-1 0,0 1-188,1-1 0,0 2 0,0-1 0,1 0 0,-1 0 1,0 0 187,-1-2 0,1 1 0,-1-2 0,0 1 0,0 0 0,0 0 0,6 0 0,1 1 0,-1-1 0,1 1 0,-2 0 0,0 0 0,-1 1 0,1 0 0,-2-1 0,1 1-17,-4-1 1,0-1-1,-1 1 1,1-1 0,-1 2 16,1 1 0,-1 1 0,0 0 0,1 1 0,-1-1 0,0 0 0,0 0 0,-1 0 0,1 0 0,1 0 0,0 0 0,1 0 0,0 0 0,0 0 0,0 0 0,1 0 0,-1 0 0,1 0 0,0 0 0,0 0 0,-1 0 0,0 0 0,1 0 0,-1 0 0,0 0 0,0 0 0,0 1 0,0-1 0,-1 0 0,0-1 0,6-2 0,1-1 0,-2 0 0,1-1 0,-2 3 0,-1 0 0,1 0 0,-1-3 0,0-4 0,0-2 0,-1 0 0,0 1-17,-4 2 0,-1 2 0,0-1 1,0-2 16,1-2 0,1-2 0,0-1 0,-1 1 0,1 2 0,0 0 0,0 0 0,-1-1 0,-2 0 0,-2-2 0,1 1 0,1-1 0,2 1 0,0 0 0,1 0 0,-2-1 0,-2 1 0,0 0 0,-1-1 0,1 1 0,5 0 0,1 0 0,0 0 0,0-1 96,-4-1 1,0-1 0,0 0-1,2 3-96,-2 3 0,1 3 0,1 0 0,0 0 0,-1-1 0,7-5 0,-1-1 0,0 1 0,1 4 0,-6 4 0,0 3 0,1 0 0,0 1 0,-1-1 0,-1-3 0,0 0 0,-1 0 0,0 0 0,0 1 0,5 3 0,0 1 0,-1 1 0,0-3 280,2-3 1,0-1 0,0-1 0,-2 2-281,-4 3 0,-2 2 0,0-1 0,-1 0 285,13-4 1,0-1 0,-1 1-286,-2 4 0,0 2 0,-2-1 0,-5 0 0,-1 0 0,0 0 154,7 0 1,0 0-1,-1 0-154,-7 0 0,-2 0 0,0 0 0,2 0 0,1 0 0,-2 0 938,4-1 0,-2 2-938,-4 7 0,-1 0 855,0-6 0,0 0-855,5 6 0,3-1 0,-6-5 0,2-3 0,1 0 117,2 1 1,1 0-1,1 0-117,3 0 0,1 0 0,1 0 0,1 0 0,1 0 0,0 0 0,-3 1 0,0-1 0,2-1-246,-7-1 1,1-3 0,1 1 0,-1 0 245,1 1 0,0 1 0,0-1 0,3-1-522,-2-2 1,1-2 0,2-1-1,0 0 1,0 0 521,-1 0 0,-1 0 0,1-1 0,0 1 0,1 1 0,-5 1 0,1 1 0,0-1 0,1 1 0,-1 0 0,-1-1 0,4-3 0,-1-1 0,0 1 0,0 0 0,0 2 0,0 2 0,0 3 0,0 0 0,-1 0 0,-1-2-354,7-3 0,-2-1 0,0 0 1,-2 2 353,-5 3 0,-1 1 0,-2 1 0,0-1 218,6-3 0,-1 0 0,-4 2-218,3 4 0,-5 0 727,-11 0 0,-1 0-727,15 0 2726,-22 0-2726,-1 0 1915,5 0-1915,-19 0 48,12 0-48,-16-8 0,0-9 0,0 5 0,0-12 0,-16-9 0,10-8 0,1-12 0,-2 13 0,-1-4 0,-2-5 0,1-2 0,1-4-328,4 16 0,0-2 0,0-1 1,0-2-1,1-2 0,-1 0 1,1-2-1,0-1 0,-1 0 1,0-2 108,1 8 1,0-1-1,-1-1 1,1-1-1,-1 0 1,1-2-1,0 0 1,-1-1-1,0 0 1,1 0 0,-1-1-1,1 0 1,-1 0-1,0 0 1,0 0 35,1 4 1,-1 0 0,1 0 0,-1-1 0,0 0 0,0 0 0,1-1 0,-1 0 0,0 0 0,0 0 0,0 0 0,0 0 0,0-1 0,0 1 0,0 0 0,1 0 0,-1-1 0,0 1 99,0 0 0,0-1 0,0 0 1,0-1-1,0 1 0,0-1 0,0 0 1,0 1-1,0-1 0,0 1 0,0-1 1,0 1-1,0 0 0,0 1 0,0 0 1,0 0-1,-1 0 0,1 2-120,0-6 1,-1 1 0,0 0 0,0 1-1,0-1 1,0 1 0,0 0 0,0 1-1,0 0 1,0 0 0,0 1 0,1 1 0,-1 1-1,0 0 1,1 2 202,-1-6 0,0 1 0,0 0 0,0 2 0,0 0 0,0 1 0,0 1 0,1 0 0,-1 2 0,0 0 0,1 1-98,-2-12 0,0 1 0,0 2 0,0 1 0,0 2 0,0 3 0,1 3 98,-2-5 0,0 3 0,0 4 0,0 2 898,1 1 0,-1 3 0,1 3-898,-3 5 0,2 1 3276,-1-18-2524,6-2 2524,-6 8-528,8 12-453,0 1-2295,-15-19 0,12 7 0,2-8 0,-4 2 0,-1-6 0,-1-4 0,1 0-547,3 9 1,0 0 0,0-2 0,1-1 0,-1 0 0,-1-2 403,0 1 1,-1-1-1,0 0 1,-1-2 0,1 0-1,0 0 1,0 0-268,2 5 0,0-1 1,1-1-1,-1 1 1,1-1-1,0 1 0,-1 0 1,0 1 328,-1-4 1,-1 1 0,0 0 0,0 0 0,1 1 0,-1-1 0,1 1 80,1-1 0,0 0 0,1 0 0,-1 0 0,1 1 0,0-1 0,0 1 0,0 2 0,0 0 0,0 1 0,1 0 0,-1-1 0,1 1 0,-1 0-325,0-1 0,-1 1 1,1-1-1,-1 1 0,1 0 1,0 0-1,0 2 325,2-1 0,0 0 0,0 1 0,1 0 0,-1 2 0,-1-1-148,-1-4 0,-2 0 0,1 1 0,-1 1 0,2 3 148,0-12 0,2 5 0,-2 3 1233,-7-3 1,2 5-1234,6 11 0,2 5 3276,-1 15-2883,-8-5 2883,6 16-3064,-6 0 1289,8 0-1501,-15 0 0,11 0 0,-12 0 0,-7 16 0,-1-11 0,-5 1 0,-7 10 0,-6 5 0,-2-1-755,3-5 1,-3-1 0,-2-1 0,-1 2 754,2 0 0,0 1 0,-2 0 0,0 1 0,-1 0-521,8-3 0,-2 0 0,1 1 0,-1-1 0,0 1 0,1-1 521,-2 0 0,1-1 0,0 1 0,0-1 0,-1 0 0,0 0 0,-3 1 0,0-1 0,-1 1 0,0-1 0,1 1 0,-1-2 0,4 1 0,-1-1 0,1 0 0,-1 0 0,1-1 0,-2 0 0,3-2 0,0-1 0,-1 0 0,0-1 0,1 0 0,-1 0 0,2 0 0,-3 1 0,0 0 0,1-1 0,0 1 0,1-2 0,-1 0-307,-6-1 0,1 0 0,-1-2 0,2 0 0,1 1 307,-2 0 0,0 0 0,3 0 0,0-1-141,5 0 0,1-1 0,0 0 0,2-1 141,-5 0 0,2-1 0,-1 1 0,-3 2 0,1 0 0,-2-1 0,-4-1 0,-1-2 0,0 1 260,12 0 1,0 0 0,0 0 0,-1 0-261,0 0 0,-2-1 0,1 1 0,2 1 0,-8 4 0,3 1 0,-2-1 786,-1-4 1,0 0 0,1 1-787,9 2 0,0 3 0,-1-3 0,-2-2 0,-2-2 0,0-1 0,1 0 90,-7 1 1,2 0-1,-2 0-90,1 0 0,-2 0 0,-1 0 0,2 0 0,5 0 0,2 0 0,0 0 0,-1 0 0,-4 0 0,-1 0 0,0 0 0,1 0 0,0 0 0,1 0 0,0 0 0,0 0 0,0 0 0,0 0 0,-1 0 0,0 0 0,-3 0 0,0 0 0,0 0 0,0 0 0,1 1 0,1-1 0,-1 0 0,1-1 0,-1-2 0,0-1 0,1-1 0,-1 2 0,3 1 0,0 2 0,0 0 0,0-2 0,2-3 0,0-1 0,1-1 0,-1 1 0,2 2 0,0 0 0,-2 0 0,-2-2 0,2 0 0,-2-3 0,-3 0 0,1 0 0,-1 0 0,2 1 0,-2 0 0,1 1 0,1 1 0,-2 0 0,-1-1-294,7 1 0,-2 0 0,-1 0 1,-1 0-1,1 0 0,1 0 0,1 1 294,-7-1 0,2 1 0,0 0 0,1 1 0,0 1 0,3 1 0,0 2 0,1 0 0,-1-1 0,1 0-204,-4-3 0,1-1 0,-1-1 0,0 1 0,1 1 204,2 3 0,0 1 0,1 1 0,-1-1 0,1-2 0,-1-1 0,1-3 0,-1 1 0,1-1 0,0 3 0,1 1 0,1 1 0,-1 1 0,1 0 0,0-1-235,-9-3 0,0 0 1,1 0-1,0 0 235,3 1 0,0 1 0,1 1 0,0-1 0,0 2 0,-1 0 0,2 0 0,0-2 51,5-2 1,0-3 0,1 1 0,-1 0-52,-3 1 0,0 0 0,-1 0 0,2 0 0,-7-1 0,2-1 0,-1 1 0,8-1 0,-1 1 0,0-1 0,1 3 568,-8 2 0,2 2 0,0 0-568,3-2 0,-1-2 0,0 2 0,-4 2 0,0 0 0,1 0 0,7 0 0,3 0 0,-2 0 0,-4 0 0,0 0 0,2 0 1104,-11 0 0,2 0-1104,-1 0 0,1 0 0,12 0 0,0 0 0,-10 0 0,0 0 0,5 0 0,0 0 0,2 2 0,-3 0 0,1 2 291,0 1 0,-1 1 0,0 1-291,-5 1 0,-1 2 0,1-1 0,3 0 0,0-1 0,-1 3 0,-1 2 0,-1 1 0,1 0 0,2-4 0,-1-1 0,1 1 0,-3 2 0,-1 1 0,2-3 0,3-2 0,1-3 0,1 0 418,2-1 0,1-2 0,2 0-418,-7-2 0,5 0 481,11 0 1,1 0-482,-15 0 110,29 0-110,-27 0 1118,18 0-1118,-15 0 147,3 0-147,21 0 0,-3 0 0,7 0 0,6 16 0,-6-13 0,8 13 0,0-16 0,-16 8 0,5-6 0,-31 6 0,13-8 0,2 15 0,11-11 0,16 12 0,0-16 0</inkml:trace>
+  <inkml:trace contextRef="#ctx0" brushRef="#br0" timeOffset="19417">23107 16140 24575,'43'0'0,"2"0"0,-8 0 0,3 0 0,-4 0 0,2 0 0,-4 0 0,1 0 0,0 0 0,13 0 0,2 0-383,-10 0 0,1 0 0,-1 0 383,-3 0 0,-1 0 0,1 0 0,8 0 0,2 0 0,-2 0 0,-7 0 0,-2 0 0,0 0 0,5 0 0,0 0 0,-1 0 0,9 0 0,0 0 0,-15 0 0,1 0 0,0 0 0,10 0 0,0 0 188,-5 0 0,0 0-188,3 0 0,-2 0 95,-8 0 0,-1 0-95,11 0 0,0 0 0,-10 0 0,-1 0 0,10 1 0,0-2 291,-13-7 1,-1 0-292,6 6 0,1 0 0,-9-6 0,1 0 0,6 7 0,2 2 0,1-1 0,1 0 0,2 0 0,2 0 0,2 0 0,0 0 0,-2 0 0,-1 0 0,-4 0 0,0 0 0,-1 0 0,-1 0 0,-4 0 0,0 0 0,5 0 0,1 0 0,7 0 0,2 0 0,-10 0 0,0 0 0,1 0-337,2 1 0,0-1 0,2-1 337,3-1 0,2-1 0,-2 0 0,-6 3 0,-1-1 0,1 1 0,3-3 0,0 0 0,-1 1 0,7 1 0,-2 2 0,1-1 0,-1 0 0,-1 0 0,0 0 0,1 0 0,0 0 0,5 0 0,0 0 0,0-1 0,0 2 0,0 2 0,-2 2 0,-6-5 0,-2 1 0,4 4 0,1-2 0,0-2 0,0-2 0,0 1 0,2 0 0,-12 0 0,2 0 0,-2 0 0,11 0 0,0 0 0,3 0 0,0 0 0,-7 0 0,-2 0 0,4 0 0,1 0 0,-1 0 0,2 0 0,4 0 0,0 0 0,0 0 0,0 0 0,-1 0 0,0 0 0,-7 0 0,-2 0 0,-3 0 0,-1 0 0,3 0 0,0 0 0,-1 0 0,-1 0 0,-1 0 0,2 0 0,9 0 0,0 0 0,-5 0 0,1 0 0,7 0 0,0 0 505,-8 0 1,-2 0-506,-3 0 0,-3 0 0,12 0 0,-10 0 0,6 0 0,4 0 0,-17 0 0,-1 0 0,18 0 0,4 0 0,-19 0 0,5 0 0,14 0 0,-26 0 0,26 0 0,-29 0 0,-2 0 0,5 0 0,-19 0 0,12 0 0,-8 0 0,9 0 0,11-8 0,-1 7 0,6-7 0,-13 8 0,13 0 0,-13 0 0,13 0 0,-13 0 0,13 0 0,-5 0 0,-1 0 0,14 0 0,-11 0 0,5 0 0,-18 0 0,-9 0 0</inkml:trace>
+  <inkml:trace contextRef="#ctx0" brushRef="#br0" timeOffset="25368">21184 14693 24575,'0'26'0,"0"4"0,0 6 0,0-2 0,0 2 0,0 2-730,0 6 1,0 3-1,0-1 730,0 4 0,0 1 0,0-3 0,0-8 0,0-1 0,0-2 351,0 9 0,0-4-351,0-10 0,0-3 362,0 6-362,0-2 0,0-21 0,0 12 1125,0-22-1125,0 6 0,0 7 0,0 28 0,0-16 0,0 3 0,0 15 0,0 4 0,0-10 0,-1 2 0,2 1-366,4 3 1,1 1 0,-1 0 365,-3 1 0,-2 1 0,2 0 0,3-1 0,1 0 0,-1-4 0,-5 1 0,0-4 0,3-4 0,1-3 0,-2 8 0,6-21 0,8-3 0,-12 7 1096,12-20-1096,-16 12 0,0-16 0,0 7 0,0-5 0,0 6 0,0 8 0,7-12 0,-5 11 0,6-15 0,-8 0 0</inkml:trace>
+  <inkml:trace contextRef="#ctx0" brushRef="#br0" timeOffset="154434">24077 17410 24575,'37'0'0,"12"0"0,-11 0 0,-5 0 0,2 0 0,-6 0 0,-1 0 0,3-8 0,-1 0 0,5 4 0,-2-12 0,3 16 0,1 0 0,-2 0 0,-2 0 0,-13 0 0,-2 0 0,-10 0 0,7 0 0,-11-8 0,20 7 0,-7-23 0,19 4 0,-15 6 0,3 1 0,2 4 0,1 0 0,-4-3 0,-1 1 0,13 7 0,-2-12 0,-13 8 0,13 6 0,-5-5 0,-1 7 0,6 0 0,-13 0 0,13 0 0,-21 0 0,12 7 0,-23-5 0,23 6 0,-12-8 0,21 0 0,-5 0 0,-1 16 0,-9-12 0,5 11 0,-11-15 0,29 0 0,-12 0 0,-3 0 0,-1 0 0,13 0 0,-13 0 0,1 0 0,3 0 0,-4 0 0,-1 0 0,-20 0 0,12 0 0,-16 0 0</inkml:trace>
+</inkml:ink>
+</file>
+
+<file path=ppt/ink/ink12.xml><?xml version="1.0" encoding="utf-8"?>
+<inkml:ink xmlns:inkml="http://www.w3.org/2003/InkML">
+  <inkml:definitions>
+    <inkml:context xml:id="ctx0">
+      <inkml:inkSource xml:id="inkSrc0">
+        <inkml:traceFormat>
+          <inkml:channel name="X" type="integer" min="-2.14748E9" max="2.14748E9" units="cm"/>
+          <inkml:channel name="Y" type="integer" min="-2.14748E9" max="2.14748E9" units="cm"/>
+          <inkml:channel name="F" type="integer" max="32767" units="dev"/>
+        </inkml:traceFormat>
+        <inkml:channelProperties>
+          <inkml:channelProperty channel="X" name="resolution" value="1000" units="1/cm"/>
+          <inkml:channelProperty channel="Y" name="resolution" value="1000" units="1/cm"/>
+          <inkml:channelProperty channel="F" name="resolution" value="0" units="1/dev"/>
+        </inkml:channelProperties>
+      </inkml:inkSource>
+      <inkml:timestamp xml:id="ts0" timeString="2026-06-09T21:17:07.087"/>
+    </inkml:context>
+    <inkml:brush xml:id="br0">
+      <inkml:brushProperty name="width" value="0.05292" units="cm"/>
+      <inkml:brushProperty name="height" value="0.05292" units="cm"/>
+      <inkml:brushProperty name="color" value="#FF0000"/>
+    </inkml:brush>
+  </inkml:definitions>
+  <inkml:trace contextRef="#ctx0" brushRef="#br0">22754 4004 24575,'0'27'0,"0"7"0,0 1 0,0 10 0,0 0 0,0-19 0,0-1 0,0 5 0,0 11 0,0-22 0,0 30 0,0-9 0,0 4 0,0 4 0,1-14 0,-2 0 0,-6 10 0,-2-2 0,6 4 0,-13-5 0,16-30 0,0 5 0,16-32 0,-13 13 0,21-13 0,-6 16 0,-7 0 0,21 0 0,-20 0 0,21-8 0,-21 6 0,11-6 0,-21 8 0,22 0 0,-13 0 0,23 0 0,-15 0 0,-1 0 0,5 0 0,-3 0 0,0 0 0,-5 0 0,-15 0 0,0 0 0,0 0 0</inkml:trace>
+  <inkml:trace contextRef="#ctx0" brushRef="#br0" timeOffset="1317">27640 3792 24575,'0'26'0,"0"1"0,0 5 0,0 3 0,0 4 0,0-3 0,0 3 0,0 0-328,0-3 1,0 0 0,0 0 327,0 1 0,0 2 0,0-2 0,0-1 0,0-1 0,0 0 0,0 15 0,0-2 161,0-7 0,0-2-161,0-3 0,0-3 163,0 12-163,0-17 0,0-5 0,0-29 0,0 12 0,0-14 0</inkml:trace>
+  <inkml:trace contextRef="#ctx0" brushRef="#br0" timeOffset="4183">27658 3810 24575,'19'0'0,"5"0"0,-6 16 0,9-12 0,0 11 0,7-7 0,-23-6 0,13 22 0,-22-20 0,6 27 0,-8-27 0,0 19 0,0-5 0,0-6 0,0 11 0,0-21 0,0 22 0,0-20 0,0 19 0,0-5 0,0-6 0,-8 11 0,-10 10 0,-1 7 0,1-18 0,2 1 0,5 18 0,-21-22 0,28-1 0,-19-10 0,21-8 0,-6 0 0,-8 0 0,12 0 0,-19 0 0,21 0 0,-22 0 0,21 0 0,-13 0 0,16 0 0,0 0 0,16 0 0,-13 0 0,21 0 0,-6 0 0,1 0 0,30 0 0,-25 0 0,25 0 0,-30 0 0,22 0 0,-3 16 0,-5-4 0,2 3 0,-6 2 0,-1 3 0,7 5 0,-1 1 0,-7-3 0,-1-1 0,-3-3 0,-1 0 0,0 3 0,-1-3 0,-2-8 0,5 13 0,-22-22 0,6 6 0,-8 7 0,0-11 0,0 12 0,0 0 0,0-12 0,0 11 0,0-7 0,0-6 0,15 22 0,-11-20 0,12 11 0,-16-7 0,0-6 0,0 6 0,0-8 0,0 0 0,0 0 0</inkml:trace>
+</inkml:ink>
+</file>
+
+<file path=ppt/ink/ink13.xml><?xml version="1.0" encoding="utf-8"?>
+<inkml:ink xmlns:inkml="http://www.w3.org/2003/InkML">
+  <inkml:definitions>
+    <inkml:context xml:id="ctx0">
+      <inkml:inkSource xml:id="inkSrc0">
+        <inkml:traceFormat>
+          <inkml:channel name="X" type="integer" min="-2.14748E9" max="2.14748E9" units="cm"/>
+          <inkml:channel name="Y" type="integer" min="-2.14748E9" max="2.14748E9" units="cm"/>
+          <inkml:channel name="F" type="integer" max="32767" units="dev"/>
+        </inkml:traceFormat>
+        <inkml:channelProperties>
+          <inkml:channelProperty channel="X" name="resolution" value="1000" units="1/cm"/>
+          <inkml:channelProperty channel="Y" name="resolution" value="1000" units="1/cm"/>
+          <inkml:channelProperty channel="F" name="resolution" value="0" units="1/dev"/>
+        </inkml:channelProperties>
+      </inkml:inkSource>
+      <inkml:timestamp xml:id="ts0" timeString="2026-06-09T21:18:07.253"/>
+    </inkml:context>
+    <inkml:brush xml:id="br0">
+      <inkml:brushProperty name="width" value="0.05292" units="cm"/>
+      <inkml:brushProperty name="height" value="0.05292" units="cm"/>
+      <inkml:brushProperty name="color" value="#FF0000"/>
+    </inkml:brush>
+  </inkml:definitions>
+  <inkml:trace contextRef="#ctx0" brushRef="#br0">24694 1094 24575,'0'43'0,"0"-10"0,0 5 0,0-1 0,0 0 0,0 2 0,0 2 0,0 4 0,0-6 0,-1-5 0,2-5 0,15 8 0,-4-5 0,37-30 0,-10 21 0,-6-17 0,3 0 0,-2 10 0,2 1 0,0-9 0,2-3 0,0 2 0,-6 4 0,-1 1 0,2-2 0,6-5 0,2-3 0,-1 3 0,-7 5 0,-2 2 0,1-3 0,12-6 0,2-2 0,-12 4 0,0 1 0,2-1-267,1-2 0,1 0 0,0-1 267,-1-1 0,-1-1 0,1 1 0,4 1 0,1 1 0,-3 0 0,3-3 0,-2 0 0,-1 0 0,-2 0 0,8 0 0,-9 0 0,5-8 0,-12-10 400,-4 5 1,1-1-401,11-14 0,-12 11 0,1 1 0,19-4 0,-7-13 0,-13 21 0,-1-11 0,-5 5 0,9-17 0,-11 13 0,-1-1 0,-6-11 0,0-1 0,7 6 0,-1 1 0,-9 1 0,-2 1 0,10-15 0,-15 29 0,0-3 0,0 15 0,-15-16 0,3 12 0,-29-19 0,11-3 0,9 12 0,-1-1 0,-5-21 0,-7 3 0,23 21 0,-13-11 0,7 21 0,-3-22 0,-13 20 0,15-14 0,0-3 0,-27 0 0,19 3 0,-1 0 0,-18 1 0,19 5 0,1 0 0,-4 1 0,0 3 0,1-2 0,5-14 0,-5 22 0,-1 0 0,-1-13 0,-5 15 0,2 0 0,13 0 0,-29 0 0,10-8 0,-6 6 0,4-6 0,5 8 0,-9 0 0,12 0 0,-2 0 0,6 4 0,1 0 0,1-3 0,1 0 0,-15 7-820,29-8 1,-4 0 0,16 0 0</inkml:trace>
+  <inkml:trace contextRef="#ctx0" brushRef="#br0" timeOffset="3816">21519 1887 24575,'-11'34'0,"-1"-1"0,-1-5 0,-3 1 0,0 4 0,-2 6 0,-1 4 0,-1 2 0,-4 1-547,4-12 1,-2 1 0,-1 0 0,-1 2 0,0-1 0,0 2 77,2 0 1,1 0 0,-1 2 0,0 0 0,0 0 0,0 0 0,-2-1 328,1-2 0,-1-1 0,-1 1 1,0-1-1,0 0 0,1-1 0,0 0 140,-2 4 0,0-1 0,1 1 0,0-2 0,1 1 0,1-1-11,-1 3 1,0 1 0,2-1 0,0-1 0,0-1 10,0 2 0,0-2 0,1 0 0,-2 1 0,-2 2 0,-1 0 0,0 1 0,1-2 190,6-4 0,1 0 1,-1-1-1,-1-1-190,-5-1 0,-2-2 0,1-1 0,2 2 0,1 8 0,3 1 0,-2-1 0,-5 1 0,-2-1 0,1 1 0,1 0 0,1 0 0,-1 2-346,6-11 1,-1 1-1,-1 1 1,-1-1-1,0 0 346,-2-2 0,0 0 0,-1-1 0,0 1 0,0 1 0,-2 4 0,1 2 0,-1 1 0,1 0 0,-1-1 0,-1-2 0,0 0 0,0-1 0,0 0 0,1 1 0,1 0 0,1-1 0,0 1 0,1 0 0,0-1 0,3 0 0,-1-1 0,2 0 0,-1-1 0,0-2 556,-4 0 0,1-2 0,-1-1 0,3 2-556,-4 12 0,3 1 0,-3-3 0,0-8 0,-1-3 0,0 2 0,2 6 0,2 2 0,-3-1 0,-3-5 0,-2-1 0,1 1 0,1 1 0,2 2 0,-1-2 0,0-4 0,0 0 0,2 0 530,5-3 0,3 0 1,0-1-531,-10 9 0,1-1 0,6 0 0,1 0 0,-4-2 0,-1 1 0,9-3 0,1 2 0,-1 0-92,-4 0 1,-1 0 0,-1 2 91,5 0 0,0 3 0,-1 1 0,-2 0-141,1-5 0,-1 0 0,-2 1 0,1 0 0,-1 3 141,3-1 0,-1 3 0,0 0 0,0 1 0,-1 1 0,0-1-368,1-4 0,0 1 1,-1 0-1,-1 0 1,1 0-1,1 0 1,-1 1 367,2 0 0,0 0 0,0 1 0,1 0 0,-1 0 0,1-1 0,-1-1 0,-1 2 0,-1-1 0,1 0 0,-1-1 0,2-1 0,1-1-84,-4 11 0,1 0 0,1-3 0,3-5 84,-5 6 0,3-6 467,-4-1 0,11-9-467,25-16 2551,-22 3-2551,26-15 3276,-7 0-2197,10-15-295,9 11-784,16-12 0,2 8 0,-15 0 0,1-1 0,10-1 0,4 0-626,-4-1 0,4-1 1,1 2 625,-6 4 0,2 1 0,1 1 0,2-1-656,1-1 1,2-1-1,2 0 1,0 0 0,-1 1 630,-7 1 1,-1 0-1,1 0 1,0 1 0,0 0-1,2-1 25,-2 1 0,2 1 0,-1-1 0,2 1 0,-1-1 0,0 0 0,0-1 0,5-1 0,0-1 0,0 0 0,0 0 0,0 0 0,0 0 0,-7 1 0,1 2 0,0-1 0,0 0 0,0 0 0,0-1 0,0 0 0,-1-3 0,1 0 0,0-1 0,0-1 0,-1 1 0,0-1 0,1 2 0,4-1 0,1 1 0,0 0 0,-1 0 0,0-1 0,0 0 0,-3-1 0,-1 0 0,0-1 0,0 0 0,0 0 0,-1 1 0,1 2 0,-1 0 0,0 0 0,0 0 0,0 1 0,-2 0-378,4-2 0,-1 1 0,0 0 0,-1 0 1,0 0 377,7 0 0,0 0 0,0 1 0,0-1 0,-9 2 0,0 1 0,-1-1 0,1 1 0,-1-1 0,6-2 0,-1 1 0,1-1 0,-1 0-277,3-1 0,-1 0 0,1 1 0,-1 0 277,-1 2 0,-1 0 0,0 0 0,0 1 0,-2 0 0,-1 0 0,1 0 0,-1 0 0,1 2 0,0-1 0,0 1 0,-1 0 0,-1-1 0,0 1 0,0-1 0,1-1 0,0-2 0,1 0 0,0-1 0,-1 1 0,1 2 0,0 2 0,0 0 0,-1-2 0,8-5 0,-2-1 0,2 2 0,-7 6 0,2 2 0,-1 0 0,-2-2 0,3-6 0,-2-2 0,2 3 0,-3 6 0,2 3 0,1 0 0,-2-1 0,7-4 0,-1-1 0,0 1 0,-8 4 0,0 1 0,0 1 0,-1-1 0,11 0 0,0 0 0,-1 0 0,-4 0 0,-1 0 0,0 0 169,3 0 1,-1 0 0,0 0-170,-1 0 0,-1 0 0,1 0 0,1 0 0,2 0 0,-1 0 0,0 0 0,0 0 0,0 0 0,-2 0 0,-1 0 0,0 0 0,3 0 0,0 0 0,-2 0 0,-5 0 0,-1 0 0,0 0 0,5-1 0,0 1 0,-3 1 1431,3 6 0,-3 2-1431,3 0 0,-4 2 2212,-3 8-2212,-13-7 0,1 0 807,0-3 1,3-1-808,18-1 0,4-2 0,-12 1 0,2 0 0,0-2 79,1-3 0,1-2 0,0 1-79,-1 0 0,0 0 0,-1 0 0,-5 0 0,0 0 0,0 0 0,5 0 0,1 0 0,0 0 0,1 0 0,-1 0 0,1 0 0,0 0 0,0 1 0,0-2 0,-3-4 0,0-1 0,-4 1 0,-1 3 0,-3 0 0,0-5 0,-5-2 0,-6 2 0,-3 5 0,-9-22 0,-8 20 863,0-27-863,-8 19 0,6-21 0,-21 13 0,11-13 0,-21 21 0,13-11 0,-13 5 0,15-5 0,0-5 0,-4-6 0,-1-5 0,5 4 0,1-4 0,-1 0-424,1-5 1,0 0 0,-1-2 423,1 11 0,0-1 0,0 0 0,-1 0 0,0-1 0,0-1 0,0 1 0,-1 0 0,0 3 0,0 1 0,-1 0 0,-2 0 0,-2-2 0,-2 0 0,0 1 0,0-1 0,3 2 0,1-1 0,0 1 0,-3 0-486,0 3 1,-2 1 0,-1-1 0,-1 0 0,1 0 485,-2-3 0,1 0 0,-1 0 0,-1-1 0,0 0-533,1 3 0,0-1 1,-1 0-1,0-1 0,-1 0 1,0 0 532,1 2 0,0 0 0,0-1 0,-1 1 0,0-1 0,0 0 0,1 0 0,1 0 0,0 0 0,1 0 0,0 0 0,-1 0 0,1 0 0,-2 0 0,1 1 0,-1-1 0,0 0 0,0 1 0,-1 0 0,1 0 0,0 0 0,-4-4 0,-1 1 0,1 0 0,0 0 0,0 1 0,1 1 0,-3-4 0,1 1 0,0 1 0,0 0 0,-1 2-306,0 4 0,-2 1 0,1 0 1,-1 2-1,2-1 306,3 2 0,1-1 0,0 1 0,0 1 0,-1 2 0,-6-1 0,0 2 0,-1 1 0,2-3 0,-2-2 0,1-2 0,1-1 0,0 0 0,1 1 0,1 0 0,0 0 0,0-1 0,0-1 0,0-1 0,-1 0 0,1-1 0,4 2 0,0-1 0,-1-1 0,1 0 0,-1 0 0,2 1 0,0 0 0,1 0 0,-2 0 0,-1 0-270,0 2 1,-1-1 0,-2 1 0,1-1 0,-1 0 0,2-1 269,1 1 0,2-1 0,-1-1 0,0 1 0,0 0 0,-2 0 0,2 3 0,-2 1 0,-1 0 0,0 0 0,1 0 0,-1-1 0,2 0 0,-4-6 0,0 0 0,0 0 0,1-1 0,1 0 0,0 1 0,1-1 0,1 1 0,0-1 0,0 1 0,0-1 0,1 1 0,0 2 0,0 1 0,1 0 0,0 0 0,1-1 0,2-1 2,-1-5 0,3-1 1,0-1-1,1 2 1,-1 1-3,-8-3 0,-1 3 0,1 0 0,3-2 375,6-1 1,2-2-1,1 0 1,-2 3-376,1 6 0,0 3 0,-1-1 0,2-1 0,2-1 0,1-2 0,0 0 0,1 1 330,-5-5 1,1 2 0,-1-1-331,-1 0 0,-2 1 0,3 0 0,-1-7 0,1 4 1495,1 14 1,3 3-1496,4-3 2283,32 40-2283,-12-12 1458,27 20-1458,-27-22 0,12 5 0,-16-7 0</inkml:trace>
+  <inkml:trace contextRef="#ctx0" brushRef="#br0" timeOffset="9082">29316 2028 24575,'-30'27'0,"0"0"0,0 0 0,0 0 0,-1 2 0,-2 0 0,-1 1 0,0 2 0,0 1 0,1 1 0,-1 1 0,1 1 0,-1 1 0,1 0 0,0 0-547,2-2 1,0 0 0,0 0 0,1 0 0,0-1 0,1-1 180,-4 4 0,1-2 0,0 1 0,2-2 1,4-1 365,-4 10 0,4-2 0,1-4 771,-3-3 0,3-3-771,12 8 0,1-5 828,-12-19-828,18 13 0,1-1 0,-13-13 0,6 9 0,0 3 2736,-7 11-2736,-1-4 0,-3 3 0,0-1 0,1 2-514,2 1 0,1 3 1,-3 0 513,2-10 0,-2 1 0,0-1 0,0 2 0,-1 4 0,1 2 0,-1-1 0,-1-1 0,-4-2 0,-1-2 0,-1 0 0,3-1 0,-2 7 0,2 0 0,1-3 0,1-8 0,1-1 0,4-2 0,5 8 0,3-5 0,-12 0 0,22-5 0,-6-21 0,8 6 1541,-15-8-1541,-13 23 0,-1-3 0,-3 5 0,6 6 0,0 5 0,-2 1-532,1-4 1,-2 0 0,0 2 0,0 0 531,2 2 0,0 2 0,0 0 0,-1-2 0,-3 0 0,0-2 0,0 0 0,2 0-312,0 6 1,3 0 0,-1-2 311,-4-5 0,-1-2 0,3 0-39,-1 9 1,3-2 38,-4-2 0,1-5 0,12-13 0,1-1 0,-3 11 0,-1-1 1004,-5-8 0,-1-1-1004,-1 14 0,-1 3 0,1-12 0,-2-1 0,4 0 0,4 10 0,2-1 519,-13 3 0,2-1-519,15-12 0,2 1 45,-3 2 0,-1 1-45,1 4 0,1 1 0,-2-3 0,0 0 0,0-1 0,-1-1 0,-8 15 0,11-21 0,16-2 0,0 5 0,0-19 0,0 12 0,-8-8 0,6 9 0,-21 11 0,9-4 0,0 3 0,1-4 0,-3 1 0,-13 13 0,1 2 0,16-10 0,1-1 0,-15 3 0,3-1 0,11 5 0,-4-17 0,16-11 0,0-7 0,0 16 0,0-12 0,0 20 0,0-22 0,0 5 0,0 9 0,0-12 0,0 12 0,0-8 0,0-7 0,16 7 0,-12 24 0,4-8 0,-1 7 0,-7 0 0,-5 6 0,-4 4 0,0 2-547,-1-1 1,-3 1 0,-1 4 0,-2 0 0,0 3 0,1 0 260,2-9 0,1 1 0,-1 2 1,0 1-1,0 0 0,-1 0 1,0 1-1,-1-2 0,0 0 286,-1-2 0,0 0 0,-2-1 0,1 0 0,-1 1 0,0-1 0,1 0 0,0 0 0,1 0-352,0 4 1,1 1 0,0 0-1,1 0 1,0 0 0,1-2-1,-1-1 1,0-2 351,-2 1 0,-1 0 0,1-2 0,0-2 0,2-1 0,1-1-100,-1 4 1,2-2 0,1-1 0,0-1 99,-1 8 0,0 0 0,1-7 0,1-6 0,5-11 0,5-16 3276,0 8-1986,15-28 1986,-3 0-2749,6 5 161,5-23-688,-11 23 0,13-1 0,7 0 0,6-1 0,4 1-821,1 0 0,5 0 1,2-2 820,-12 3 0,1-1 0,1-1 0,2 0 0,1 2-547,-1 1 1,1 0 0,1 1 0,0 1 0,2-1 0,0 0 483,-3 0 0,0 0 0,1 0 0,1 0 0,0 1 1,1-1-1,-1 1-393,4 0 1,-1 0-1,2 1 1,-1-1-1,1 1 1,0 0-1,-1-1 456,-5 1 0,0 1 0,0-1 0,0 1 0,0-1 0,0 0 0,1 1 0,-1-1-347,1 1 1,0-1 0,0 0 0,0 1 0,0-1 0,1 1 0,-1-1 0,0 0 346,-1 1 0,0-1 0,1 0 0,-1 0 0,0 1 0,1-1 0,-1 1 0,0-1 0,1 1 0,-1 0 0,1 1 0,-1-1 0,0 0 0,0 1 0,0-1 0,-1 1 0,3 0 0,-1 0 0,-1 0 0,0 0 0,0 0 0,0 0 0,1 0-87,-1-1 1,1 0 0,0 0 0,0 0 0,0 0 0,-1 0 0,-1 1 86,5 0 0,-2 0 0,0 1 0,0-1 0,0 0 0,-1-1 0,-3 0 0,0-2 0,0 0 0,0 1 0,-1-1 0,1 2 188,6 1 0,2 1 0,-1 1 0,-2 0 0,0-1-188,2-2 0,-2-1 0,-1 1 0,0 1 420,-5 4 0,-1 1 1,0 1-1,-1-3-420,1-3 0,-1-1 0,0-1 0,-4 2 1638,13 3 0,-2 0-1637,-7-3 0,2-1 0,-3 1-1,3 1 0,0 0 0,-7 4 0,2 0 0,-2-2 0,12-9 0,-2-1 0,5 7 0,-2-2 1536,-10-9 1,-1-1-1537,2 8 0,0-2 0,-2-13 0,-1-1 0,5 13 0,0 1 1031,0-14 0,1 1-1031,-1 14 0,-2 0 734,-14-7 0,-1 1-734,3 9 0,-3 2 237,-3-11-237,13 8 0,2 6 0,-13-9 0,1-1 0,14 9 0,3 2 0,-3-9 0,0-3 0,-5 2 0,0-1 0,0 1 0,9 0 0,-1-1 0,-4-5 0,-2 0 0,-6 4 0,-3 3 0,10 6 0,-17-12 0,-10 16 0,8-8 0,3 6 0,24-21 0,-16 17 0,-1 0 0,-2-10 0,-1-1 0,20 5 0,-9-4 0,-23 16 0,5-7 0,-16 5 0,0-6 0,-16-8 0,5-3 0,-31-9 0,25 8 0,-3-1 0,-20-4 0,-4-3-745,16-1 1,2-3 0,-4-3 744,2 8 0,-3-1 0,-1-2 0,0-1 0,2-2-547,3 0 1,2-2 0,-1-1 0,1-2 0,0 0 0,-2-2 428,3 6 0,-1-2 0,-1-1 0,0-1 0,0 0 0,0 0 0,1-1 0,1 0-292,0-2 0,1 0 1,0-1-1,1 0 1,0 0-1,0 0 0,0 0 1,0 0 385,0 2 1,-1-1 0,1 1-1,-1 0 1,1-1 0,1 1 0,0 1-1,0-1 24,1-2 0,1 0 0,0 0 0,1 1 0,-1 0 0,0 1 0,0 2-221,-2-1 0,-1 1 0,0 1 0,0 1 0,1 0 0,0 0 221,-1-3 0,1-1 0,0 1 0,0 1 0,-2 0 0,-1 4 0,-2 0 0,-1 1 0,0 0 0,2 1 0,-5-6 0,1 1 0,0 0 0,-1 0 0,-2-1 0,-1 1 0,0 0 0,0 0 0,5 7 0,0 0 0,0 1 0,0-2 0,1 0 0,-1-3 0,2-1 0,-1 0 0,0 0 0,-1 0-90,-2-1 1,-2 1 0,0 0 0,1-1 0,0-1 89,5 5 0,1-1 0,0-1 0,0 0 0,0 0 0,0-1 104,-3-1 1,1-1 0,0 0-1,-1 1 1,0-1 0,-1 1-105,0 1 0,-1 0 0,0 1 0,0-1 0,1 1 0,1-1 0,1 0 0,1 0 0,1-1 0,-1 1 0,1 0 0,-1 1 324,-5-3 0,-1 2 0,0-1 0,1 2 0,2 0-324,-1-3 0,1 0 0,1 2 0,-1 1 405,-6-4 1,-1 3-1,2 2-405,6 6 0,2 1 0,-1 3 1099,-9-1 0,4 3-1099,12-2 0,2 2 3094,-23-6-3094,22 9 2335,1-5-2335,-6 19 599,20-12-599,-11 16 0,15-8 0,0 6 0,0-5 0</inkml:trace>
+  <inkml:trace contextRef="#ctx0" brushRef="#br0" timeOffset="11233">29475 2170 24575,'33'11'0,"0"1"0,-2 2 0,3 3 0,2 1 0,0 2 0,1-1 0,0 2 0,2 1 0,0 1 0,1 1-547,0 1 1,2 2 0,0 0 0,0 1 0,0-1 0,-1-2 44,-2-3 0,-1-2 1,0 0-1,0 0 1,-2 0-1,-1 0 502,8 8 0,-3 2 0,-1-2 0,0-5 533,5-2 0,-1-5 0,-5 0-533,-4 3 0,-3-2 1060,14 0-1060,-22-9 0,-7 8 0,-4-12 3276,21 27-3161,-13-27 3,6 14 1,4 3-119,2-6 0,1 0 0,12 2 0,0 3 0,-4 5 0,-1-1 0,-5-10 0,-2 1 0,-10 10 0,-1 1 0,4-7 0,-1-1 0,-2 11 0,-1 1 0,5-7 0,-1 1 0,0 13 0,1 3 0,7-4 0,1 0-245,-11-9 0,0-1 0,0 2 245,3 0 0,0 1 0,0 0 0,-4-2 0,1 0 0,-1-1 0,3 1 0,0-1 0,-1 2 0,-6 0 0,-1 1 0,1 0 0,4-2 0,1 0 0,-2-1 0,2 10 0,-3 1 0,-4-2 0,1-2 0,2-10 0,2-1 0,3 7 0,2 1 0,8 1 0,3 1-374,-7-7 0,2 2 1,-1 1 373,1 5 0,0 3 0,-1-1 0,1 1 0,-1-1 0,1 2 0,-7-9 0,0 1 0,1 0 0,-2 0-298,5 9 0,-1 0 0,2 0 298,-2-6 0,1-1 0,1 2 0,-1 0-591,-3 3 1,0 2 0,0 0 0,1 1 590,-3-7 0,0 1 0,1 0 0,1 1 0,-1 1 0,0 0-507,1 5 1,0 0 0,0 1 0,-1 1 0,1 0-1,0 0 507,-3-4 0,0 0 0,1 0 0,-1 1 0,1-1 0,-1 1 0,0 0 0,1 0 0,-1 0 0,0 1 0,1-1 0,-2 0 0,1 0 0,-2 0 0,2 3 0,0-1 0,-1-1 0,-1 1 0,-1 0 0,-2 1-85,-2 1 1,-1 2-1,-1 1 1,-2-1 0,-2-3-1,0-4 85,1 7 0,-3-5 0,-5 0 202,-4 7 1,-6 0-1,-10-8-202,-8-16 0,-9-7 0,-2 2 0,0 6 0,-3 2 0,-2 2 0,-3 2-226,9-6 1,-2 2 0,-1 1 0,-2 1-1,0 0 1,-1-1 0,0-1 225,2-2 0,-1-1 0,0 0 0,-1 0 0,-1 0 0,1-1 0,-1 1 0,1 0 0,0 1 0,0 1 0,-1 0 0,1 0 0,-1 0 0,1-2 0,0 0 0,1-2 0,-7 1 0,-1-2 0,1-1 0,1 0 0,1-1 0,2 1 334,0 2 1,2 1 0,1 0-1,1-2 1,3-3-335,-10 1 0,3-4 0,3 1 416,7 2 0,1 1 0,2-4-416,-5-4 0,-1 0 0,-6 10 0,-6 1 0,13-11 0,-4-1 0,-2 0 0,-3 0-235,4 1 1,-4 0 0,-1 1 0,-1 0 0,2-1 0,5-1 0,-13 2 0,4-1 0,0 0 0,3-2 0,1 0 0,0 0 0,0 0 0</inkml:trace>
+</inkml:ink>
+</file>
+
+<file path=ppt/ink/ink14.xml><?xml version="1.0" encoding="utf-8"?>
+<inkml:ink xmlns:inkml="http://www.w3.org/2003/InkML">
+  <inkml:definitions>
+    <inkml:context xml:id="ctx0">
+      <inkml:inkSource xml:id="inkSrc0">
+        <inkml:traceFormat>
+          <inkml:channel name="X" type="integer" min="-2.14748E9" max="2.14748E9" units="cm"/>
+          <inkml:channel name="Y" type="integer" min="-2.14748E9" max="2.14748E9" units="cm"/>
+          <inkml:channel name="F" type="integer" max="32767" units="dev"/>
+        </inkml:traceFormat>
+        <inkml:channelProperties>
+          <inkml:channelProperty channel="X" name="resolution" value="1000" units="1/cm"/>
+          <inkml:channelProperty channel="Y" name="resolution" value="1000" units="1/cm"/>
+          <inkml:channelProperty channel="F" name="resolution" value="0" units="1/dev"/>
+        </inkml:channelProperties>
+      </inkml:inkSource>
+      <inkml:timestamp xml:id="ts0" timeString="2026-06-09T21:20:00.619"/>
+    </inkml:context>
+    <inkml:brush xml:id="br0">
+      <inkml:brushProperty name="width" value="0.05292" units="cm"/>
+      <inkml:brushProperty name="height" value="0.05292" units="cm"/>
+      <inkml:brushProperty name="color" value="#FF0000"/>
+    </inkml:brush>
+  </inkml:definitions>
+  <inkml:trace contextRef="#ctx0" brushRef="#br0">9190 11942 24575,'27'15'0,"1"-13"0,1 0 0,12 14 0,0-15 0,3-2 0,-12 1 0,0 0 0,8 0 0,-1 0 0,-8 0 0,0 0 0,1 0 0,-3 0 0,8 0 0,12 0 0,-22 0 0,-1 0 0,23 0 0,-23 0 0,-1 0 0,9 0 0,-15 0 0,14 8 0,3-6 0,1 5 0,-11-6 0,-1-2 0,4 1 0,12 16 0,-21-12 0,13 12 0,-13-16 0,13 0 0,-5 0 0,-9 0 0,5 0 0,-6 0 0,1 0 0,14 0 0,-13 0 0,-2 0 0,5 0 0,-11 0 0,21 0 0,-21 0 0,19 0 0,-19 0 0,6 0 0,5 0 0,-11 0 0,6 0 0,-10 0 0,-8 0 0,15 0 0,-11 0 0,20 0 0,-7 0 0,19 0 0,1 0 0,-2 0 0,-2 0 0,-13 0 0,13 0 0,-13 0 0,-2 0 0,5 0 0,-19 0 0,20 0 0,-23 8 0,7-6 0,8 5 0,11-7 0,2 8 0,3 0 0,0-6 0,1 0 0,6 6 0,0 0 0,-6-8 0,-3 0 0,15 0 0,-19 0 0,-19 0 0,-7 0 0,0 0 0,0 0 0</inkml:trace>
+  <inkml:trace contextRef="#ctx0" brushRef="#br0" timeOffset="4401">14552 12153 24575,'27'0'0,"-1"0"0,0 0 0,1 0 0,-1 0 0,1 0 0,-1 0 0,1 0 0,-1 0 0,1 0 0,6 0 0,2 0 0,1 0 0,1 0 0,3 0 0,0 0 0,-4 0 0,-1 0 0,0 0 0,-2 0 0,6 0 0,10 0 0,-13 0 0,-11 0 0,3 0 0,6 0 0,2 0 0,7-1 0,2 2 0,-10 4 0,1 1 0,-1-1-175,1-3 1,0-2 0,0 2 174,2 3 0,0 1 0,0-2 0,-3-2 0,0-3 0,1 0 0,-1 1 0,0 0 0,0 0 0,3 0 0,1 0 0,-2 0 0,9 0 0,0 0 0,-7 0 0,2 0 0,-3 0 0,1 0 0,-2 0 0,7 0 0,-2 0 0,-11 0 0,-1 0 0,1 0 0,-1 0 0,-3 0 0,1 0 0,2 0 0,1 0 0,-1 0 0,0 0 261,5 0 1,1 0-262,8 0 0,0 0 0,-7 0 0,1 0 0,8 0 0,0 0 0,-10 0 0,0 0 0,0 0 0,1 0 0,5 0 0,0 0 0,-13 0 0,-1 0 0,10 0 0,0 0 0,-3 0 0,1 0 0,4 0 0,0 0 0,1 0 0,-1 0 0,-5 0 0,0 0 0,4 0 0,-1 0 0,-10 0 0,0 0 0,3 2 0,-1-4 0,-4-5 0,-1-1 0,20 4 0,-19-4 0,1 0 0,7 7 0,1 2 0,-3-1 0,0 0 0,11 0 0,1 0 0,-12 0 0,0 0 0,11 0 0,-1 0 0,-14 0 0,0 0 0,14 1 0,1-2 0,-11-3 0,0 0 0,3 3 0,1 0 0,3-3 0,-2 1 0,-8 2 0,-1 2 0,14-1 0,0 0 0,-5 0 0,-1 0 0,1 0 0,-2 0 0,-7 0 0,-3 0 0,24 0 0,-19 0 0,5 0 0,-2 0 0,-5 0 0,-9 0 0,5 0 0,-6 0 0,-7 7 0,13-5 0,-22 6 0,6 8 0,-8-12 0,15 11 0,-11-15 0,12 0 0,-16 0 0,8 0 0,-6 0 0,6 0 0,-8 0 0,0 16 0,0-12 0,0 12 0,0-16 0,0 0 0,0 8 0,0-6 0,0 5 0,0-7 0,-8 0 0,6-7 0,-22-11 0,20 6 0,-11-4 0</inkml:trace>
+  <inkml:trace contextRef="#ctx0" brushRef="#br0" timeOffset="38183">25030 12330 24575,'19'0'0,"5"0"0,1 0 0,12 0 0,8 0 0,-9 0 0,13 0 0,-10 0 0,-5 0 0,1 0 0,-8 0 0,0 0 0,8 0 0,-1 0 0,5 0 0,-10 0 0,-1 0 0,9 0 0,-3 0 0,1 0 0,-7 0 0,1 0 0,5 0 0,0 0 0,-7 0 0,-1 0 0,19 0 0,-9 0 0,-19 0 0,-9 0 0,-8 0 0,0 0 0</inkml:trace>
+</inkml:ink>
+</file>
+
+<file path=ppt/ink/ink2.xml><?xml version="1.0" encoding="utf-8"?>
+<inkml:ink xmlns:inkml="http://www.w3.org/2003/InkML">
+  <inkml:definitions>
+    <inkml:context xml:id="ctx0">
+      <inkml:inkSource xml:id="inkSrc0">
+        <inkml:traceFormat>
+          <inkml:channel name="X" type="integer" min="-2.14748E9" max="2.14748E9" units="cm"/>
+          <inkml:channel name="Y" type="integer" min="-2.14748E9" max="2.14748E9" units="cm"/>
+          <inkml:channel name="F" type="integer" max="32767" units="dev"/>
+        </inkml:traceFormat>
+        <inkml:channelProperties>
+          <inkml:channelProperty channel="X" name="resolution" value="1000" units="1/cm"/>
+          <inkml:channelProperty channel="Y" name="resolution" value="1000" units="1/cm"/>
+          <inkml:channelProperty channel="F" name="resolution" value="0" units="1/dev"/>
+        </inkml:channelProperties>
+      </inkml:inkSource>
+      <inkml:timestamp xml:id="ts0" timeString="2026-06-09T20:51:26.491"/>
+    </inkml:context>
+    <inkml:brush xml:id="br0">
+      <inkml:brushProperty name="width" value="0.05292" units="cm"/>
+      <inkml:brushProperty name="height" value="0.05292" units="cm"/>
+      <inkml:brushProperty name="color" value="#FF0000"/>
+    </inkml:brush>
+  </inkml:definitions>
+  <inkml:trace contextRef="#ctx0" brushRef="#br0">27993 11465 24575,'0'34'0,"0"-1"0,0 10 0,0 4 0,0-8 0,0 3 0,0 3-820,0-1 1,0 3 0,0 1 0,0 1 491,0-9 1,0 1-1,0 1 1,0 0-1,0 0 328,0 6 0,0 0 0,0 1 0,0-1 0,0 0 0,0-1 0,0-1 0,0 0 0,0 0 0,0-1 0,0-2 0,0 0 0,0-1 0,0-1 0,0-1-10,0 3 0,-1-3 0,1 0 0,1 0 10,2 1 0,2 1 0,-1-1 0,0-2 0,-3 2 0,-1-3 0,3 0 347,4 1 0,2 0 0,-2-3-347,-6 5 0,0-2 0,10 5 0,2-3 0,-8-13 0,1 1 1218,11 12 0,0 2-1218,-11-11 0,-1 0 694,7 12 0,0-1-694,-3-10 0,0-2 45,0 5 0,1-3-45,8 12 0,-14-19 0,0-1 0,11 4 0,-13 0 0,0-1 0,14-4 0,-7 3 0,-2 3 0,-6-4 0,1 1 0,10 0 0,0 2 0,-10 13 0,-2 1 0,3-11 0,2 0 0,3 11 0,-1 1 0,-5-4 0,0 0 0,10 8 0,0 0 0,-11-3 0,0 0 0,6-11 0,2 1 0,-2 0 0,-5 14 0,0 0 0,5-14 0,3 0 0,-3 1 0,-6-1 0,-2 0 0,3 1-217,5 1 0,2 1 0,-2 0 217,-4-2 0,-3 0 0,1 0 0,4 7 0,1 0 0,-1 0 0,-2-3 0,0-2 0,-1 2 0,-1 6 0,-1 1 0,1-1 0,1-1 0,1-1 0,0 0 0,-3 4 0,0-1 0,0 0 0,0-4 0,0-1 0,0-2 0,0 11 0,0-4 0,0-10 0,0-5 0,0-5 0,0-3 0,0-22 0,0 5 0,0 17 651,0 21-651,-3-7 0,-2 4 0,-1-6 0,0 3 0,0 0-518,0 4 0,0 1 0,-2 2 518,1-5 0,-2 0 0,0 2 0,1-1 0,3 0 0,0 1 0,1 0 0,-1-1 0,-3-1 0,-1-1 0,0 0 0,1 0 0,2 3 0,2 1 0,-1-1 0,1-2 0,-2 0 0,0-1 0,0 0-63,-2 4 1,-1 0 0,2-3 62,6 2 0,-1-5 0,-7-10 0,2-3 0,7 0 0,16-1 0,-13-20 1539,37 19-1539,-11-5 101,-4-2 0,3 3-101,5 3 0,3 1 0,3 4 0,2-1 0,-1-3 0,2-1-174,-6-4 1,1-1 0,0-1 173,9 4 0,0-3 0,-9-4 0,2-1 0,-1-1 0,-3-4 0,0-1 0,1-2 0,1 0 0,1-2 0,0 0 0,-1-1 0,-1-2 0,-1 1 0,14 0 0,0 0 0,-12 0 0,0 0 0,-1 0 0,9 0 0,2 0 0,-5 0 0,2 0 0,-1 0-318,-1 0 1,-1 1-1,2-2 318,6 0 0,1-1 0,0-3 0,-2-4 0,0-4 0,-1 2 0,-2 4 0,0 1 0,-2-5 0,-4-6 0,-1-4 0,-1 3-75,7 2 0,0 2 75,0-2 0,-2-3 0,-10-2 0,1 1 0,9 5 0,0 0 0,-13-6 0,-1-1 245,6 8 1,1 1-246,-9-8 0,0 1 0,8 5 0,1 0 0,4-9 0,2-3 7,-9 7 0,0 0 0,2 0-7,6-1 0,2 0 0,-2-2 0,-2-5 0,-2-2 0,0 2 0,-3 5 0,0 3 0,-1-2 51,-4-1 0,-2 0 1,-4 0-52,-6 0 0,-3 1 0,11-13 0,-24 2 0,0 13 0,0-13 0,0-6 0,0-8 0,0-6-656,0 14 1,0-4-1,0-3 1,0-2 0,0 0 627,0 8 1,0-2 0,0-1 0,0 0 0,0-1 0,0-2 0,0 0-383,0-1 0,0-1 1,0-2-1,0 0 1,1-1-1,-1-1 0,-1 1 1,1 1 255,0 3 1,-1 1 0,1 0 0,-1-1 0,0 0 0,0 0 0,0 1 0,0-1-1,-1 0 154,0 0 0,0 0 0,-1 0 0,1-1 0,-1 1 0,0 0 0,0 1 0,-1-1 0,1 2-342,-1-3 0,-1 1 0,1 0 1,-1 0-1,1 1 0,-1 0 1,0 0-1,-1 0 342,0-4 0,0 1 0,0-1 0,-1 1 0,1 0 0,-1 1 0,0 0-189,1 4 1,-1 0-1,1 1 1,-1 0-1,1 1 1,0 0-1,1 1 189,0-11 0,2 2 0,0 0 0,0 1 0,-2 1 0,-2 3 0,-2 0 0,0 1 0,1 1 0,1 2 371,3-1 0,2 2 1,0 0-1,-3 1-371,-4 1 0,-2 1 0,-1 0 0,3 2 1092,2 1 0,1 1 0,-1 0-1040,-4-1 1,0-1 0,0 3 1585,0-1 0,2 1-1341,-1-10 1,2 0-298,4 10 0,1-1 0,2 1 0,1-2 0,1-2 507,-1-6 0,0-2 1,0-1-508,0 7 0,0 0 0,0-1 0,0-1 0,0-5 0,0-1 0,0-1 0,0 1 0,0-1 0,0 1 0,0 0 0,0 0 0,0 3 0,0 0 0,0 1 0,0 0 0,0 3 0,1 1 0,-1 1 0,-1 0 204,-3-8 1,-2 2 0,0 2-205,-3-10 0,-2 4 128,2 5 0,-1 3-128,-2 4 0,0 2 0,3 2 0,1 1 0,-1 2 0,-2 1 722,-6 4 0,1 1-722,6-4 0,0 3 508,-23 9-508,21-9 0,-12 23 0,22 0 0,-21 0 0,-5 0 0,-17 0 0,20 0 0,-2 0 0,-7 1 0,-1-2 0,-1-6 0,-1-2 0,-2 3 0,-2 0 0,-2-3 0,0 1 0,3 4 0,-1 0 0,-6-4 0,-2 0 0,4 6 0,0 0 0,1-6 0,0 1 0,-3 6 0,0 2-387,-1-1 0,-2 0 387,12 0 0,0 0 0,-2 0 0,0 0 0,-2 0 0,1 0 0,-3 0 0,0 0 0,1 0 0,3 0 0,2 1 0,-2-2 0,-6-4 0,0-1 0,1 1 0,8 3 0,1 2 0,-1-2 0,-4-3 0,0-1 0,2 1 0,-11 4 0,2 2 0,13-1 0,0 0 0,1 0 0,-15 0 0,0 0 0,14 0 0,-1 0 0,1 0 0,-14 0 0,0 0-70,0 0 1,2 0 69,6 0 0,1 0 0,5 0 0,0 0 0,-1 0 0,3 0 0,-6 0 0,-10 0 768,30 16-768,1-12 145,10 12-145,8-16 0,0 0 0,-16 0 0,12 0 0,-35 0 0,10 0 0,4 0 0,-3 0 0,-6-1 0,-1 2 0,3 6 0,0 1 0,-12-6 0,1 0 0,14 6 0,2 0 0,-17-8 0,29 0 0,15 0 0,0 0 0,0 0 0</inkml:trace>
+</inkml:ink>
+</file>
+
+<file path=ppt/ink/ink3.xml><?xml version="1.0" encoding="utf-8"?>
+<inkml:ink xmlns:inkml="http://www.w3.org/2003/InkML">
+  <inkml:definitions>
+    <inkml:context xml:id="ctx0">
+      <inkml:inkSource xml:id="inkSrc0">
+        <inkml:traceFormat>
+          <inkml:channel name="X" type="integer" min="-2.14748E9" max="2.14748E9" units="cm"/>
+          <inkml:channel name="Y" type="integer" min="-2.14748E9" max="2.14748E9" units="cm"/>
+          <inkml:channel name="F" type="integer" max="32767" units="dev"/>
+        </inkml:traceFormat>
+        <inkml:channelProperties>
+          <inkml:channelProperty channel="X" name="resolution" value="1000" units="1/cm"/>
+          <inkml:channelProperty channel="Y" name="resolution" value="1000" units="1/cm"/>
+          <inkml:channelProperty channel="F" name="resolution" value="0" units="1/dev"/>
+        </inkml:channelProperties>
+      </inkml:inkSource>
+      <inkml:timestamp xml:id="ts0" timeString="2026-06-09T20:52:06.557"/>
+    </inkml:context>
+    <inkml:brush xml:id="br0">
+      <inkml:brushProperty name="width" value="0.05292" units="cm"/>
+      <inkml:brushProperty name="height" value="0.05292" units="cm"/>
+      <inkml:brushProperty name="color" value="#FF0000"/>
+    </inkml:brush>
+  </inkml:definitions>
+  <inkml:trace contextRef="#ctx0" brushRef="#br0">23054 2117 24575,'-38'0'0,"0"0"0,-10 0 0,-2 0 0,9 0 0,-1 0 0,-1 0-814,-6 0 0,-1 0 0,0 0 814,2 0 0,0 0 0,1 0 0,2-1 0,1 1 0,0 1 48,2 0 0,2 2 1,0 1-49,-10 3 0,2 3 230,7-2 1,2 4-231,-3 12 0,0 1 0,5-14 0,1 1 0,0 16 0,0 1 0,-3-10 0,1-1 0,3 11 0,0 3 0,7-11 0,-2-1 0,0 2-473,-7 5 0,-1 2 0,-1 1 473,8-6 0,0 0 0,-1 1 0,0 0 0,-2 1 0,-2 1 0,1 0 0,-1 1-165,-1 4 1,0 1 0,0 1 0,-1-4 164,3-5 0,-2-2 0,1-1 0,1 2 0,1 4 0,1 1 0,0-1 0,0-3 1,-6-1 1,1-4 0,1 1-2,7 0 0,1 0 0,0-3 39,-6 0 0,0 0-39,4 0 0,0 3 0,0-3 0,-3-6 0,0 1 0,5 10 0,0 4 0,1-4 0,-8-12 0,3 1 686,5 16 0,1 1-686,-6-10 0,-2-1 0,7-1 0,-1 0 0,-1 2 214,-2 3 1,-1 1 0,-2 1-215,4-5 0,-2 1 0,0 0 0,-1 1 0,-1 1 0,0 0 0,-1 1 0,1 0 0,-1 1 0,1 0 0,-1 0 0,0 0 0,-1 0 0,0 1 0,-1-1 0,1-1 0,0 0 0,-1 0 0,1-1 0,0 0 0,1 1 0,1-1 0,-1 0 0,0 0 0,-2 0 0,-2 0 0,1 0 0,-1-2 0,1-3 0,-1-1 0,0-1 0,0 1 0,2 2 0,0 0 0,0-1 0,0-1 0,-3-2 0,-1-1 0,0 0 0,2 0 0,3 0 0,1 0 0,1 0 0,0 1 0,-10 3 0,0 0 0,2 2 0,1 0 0,2 2 0,0 0 0,4-3 0,1 0 0,0 0 0,-3 4 0,0 2 0,1-1-62,0 0 1,1 1 0,1 0 61,2-3 0,0 1 0,1-1 0,-1 2 0,2 1 0,1-2-19,-3 1 1,1-1 18,-10 4 0,0-1 0,5-3 0,1 1 0,-4 2 0,0 3-248,11-6 1,1 1 0,-1 1 247,-1-3 0,1 0 0,-1 1 0,0 4 0,0 0 0,0 1 0,1-4 0,0 1 0,-1-1 0,-4 3 0,0 0 0,0 1 0,3 1 0,1 1 0,-1 2-106,4-4 1,-2 1 0,0 1 0,0 0 105,-3 4 0,0 0 0,-1 0 0,1 2 0,2 0 0,0 0 0,1 1 0,-2 1-270,4-6 1,-1 1 0,0-1 0,0 1 0,0-1 269,-3 2 0,0 0 0,0 0 0,1 3 0,2 1 0,0 2 0,0 2 0,0-1 0,1-3 0,-2-3 0,1-3 0,0 0 0,1 2 0,-1 8 0,2 4 0,0-2 0,2-3-201,0-6 0,1-2 0,2 0 201,2 2 0,2 1 0,0 0 0,-1-5 0,0-1 0,1 2 0,1 5 0,2 2 0,-1-1 0,-5 1 0,0 0 0,1 2-169,6-4 1,2 1-1,0 1 1,-1 0 168,-4 0 0,-2 0 0,0 0 0,1 1 0,3 2 0,0 1 0,1 0 0,-1-1 0,-1-2 0,-1-2 0,0 1 0,3-1 0,2 1 0,3 0 0,-1-1 0,-1-1 273,-6 7 1,-1-2 0,1 1-274,6-1 0,1 0 0,-1-2 0,-4-3 0,-1-1 0,1 0 0,4-2 0,1 0 0,0-1 579,-1 1 0,-1-1 1,-1-1-580,-6 10 0,1-2 356,2 1 0,0-1-356,3-7 0,-1-1 805,0-8 1,2-1-806,7 19 734,-19-22-734,5 23 102,5-20 0,-1 1-102,0 7 0,0 2 0,-2-1 0,-1 1 0,0 6 0,-1 1 0,-5-3 0,1 0 0,4 0 0,-2 1 0,-9 1 0,2 0 0,15-6 0,0-1 0,-12-8 0,-1 1 0,6 12 0,3 0 0,2-15 0,-2-1 0,-8 14 0,-1 1 0,11-8 0,-1-1 0,-10 1 0,-1-1 0,7 0 0,1 1 0,0-5 0,1 1 0,-1 2 0,2 1 0,-3 11 0,1-2 0,-5 6 0,11-11 0,-3-5 0,-4 1 0,2-4 0,-1 1 0,0 11 0,-1 1 0,-7-7 0,1 0 0,10 9 0,1 3 0,-10 2 0,-1 2-209,9-14 1,2 1-1,-2 0 209,-2 4 0,0 0 0,0 1 0,2-1 0,1 1 0,1-3 0,-8 5 0,2-2 0,11 4 0,-1-3 0,-7-14 0,0-1 0,8 3 0,-1 1 0,-6-1 0,-1 3 0,-1 14 0,0 2 0,-4-6 0,-1 0-247,6-2 1,-1 1-1,0 0 247,1-4 0,-1 0 0,0-1 0,3-1 0,0 0 0,0-1 281,-7 14 1,1-2-282,7-2 0,1-3 0,-4-8 0,0-1 0,7 3 0,1-2 0,-9-1 0,10-5 762,-7-5-762,3 10 20,-3-7 1,-3 1-21,-18 7 0,18-4 0,-1-1 0,-16 5 0,1 7 0,15-3 0,-14-21 0,21 19 0,-4-27 0,16 12 0</inkml:trace>
+</inkml:ink>
+</file>
+
+<file path=ppt/ink/ink4.xml><?xml version="1.0" encoding="utf-8"?>
+<inkml:ink xmlns:inkml="http://www.w3.org/2003/InkML">
+  <inkml:definitions>
+    <inkml:context xml:id="ctx0">
+      <inkml:inkSource xml:id="inkSrc0">
+        <inkml:traceFormat>
+          <inkml:channel name="X" type="integer" min="-2.14748E9" max="2.14748E9" units="cm"/>
+          <inkml:channel name="Y" type="integer" min="-2.14748E9" max="2.14748E9" units="cm"/>
+          <inkml:channel name="F" type="integer" max="32767" units="dev"/>
+        </inkml:traceFormat>
+        <inkml:channelProperties>
+          <inkml:channelProperty channel="X" name="resolution" value="1000" units="1/cm"/>
+          <inkml:channelProperty channel="Y" name="resolution" value="1000" units="1/cm"/>
+          <inkml:channelProperty channel="F" name="resolution" value="0" units="1/dev"/>
+        </inkml:channelProperties>
+      </inkml:inkSource>
+      <inkml:timestamp xml:id="ts0" timeString="2026-06-09T20:53:30.490"/>
+    </inkml:context>
+    <inkml:brush xml:id="br0">
+      <inkml:brushProperty name="width" value="0.05292" units="cm"/>
+      <inkml:brushProperty name="height" value="0.05292" units="cm"/>
+      <inkml:brushProperty name="color" value="#FF0000"/>
+    </inkml:brush>
+  </inkml:definitions>
+  <inkml:trace contextRef="#ctx0" brushRef="#br0">21273 1517 24575,'0'26'0,"0"1"0,0-1 0,0 1 0,0-1 0,0 1 0,-8 7 0,0 0 0,6-2 0,0 1 0,-9 8 0,-2 4 0,5-3 0,0 2 0,-1-2 0,-6 0 0,1 0 0,4 1 0,2 4 0,-2-6 0,-7-8 0,3-1 0,11 10 0,2 2 0,-11 0 0,0 0 0,10 2 0,2-2 0,-4-3 0,0-1 0,4-5 0,0-2 0,0 12 0,0-9 0,0-3 0,0-13 0,0 13 0,0-6 0,8 1 0,10 13 0,9-4 0,-13-11 0,0 1 0,3 3 0,-1 1 0,-6-4 0,0 1 0,10 6 0,1 0 0,-6-6 0,-1-1 0,8 11 0,-1 1 0,-7-11 0,0 1 0,3 5 0,-1 0 0,4 11 0,13-10 0,-13-1 0,13-7 0,-13 1 0,3-11 0,3-1 0,13 4 0,-10-4 0,3 1 0,-2 1 0,0-1 0,2-2 0,-1 0 0,0 5 0,1 1 0,-2-7 0,1-1 0,-5 1 0,0 0 0,8 3 0,1-1 0,-3-9 0,1-2 0,2 3 0,0-1 0,-4-2 0,-1-2 0,0-2 0,1 0 0,0 2 0,0 2 0,8 3 0,1 0 0,0-6 0,0 0 0,8 6 0,0-1 0,1-6 0,0-2-149,-14 1 0,1 0 0,-1 0 149,0 0 0,0 0 0,1 0 0,1 0 0,1 0 0,1 0 0,-1 0 0,0 0 0,1 0 0,2 1 0,1 0 0,-1-3 0,-2-1 0,-1-3 0,0 0 0,-2-2 0,0-2 0,-2 0 0,12-2 0,-4-5 0,-5-11 0,-3-1 0,-3 10 0,-1-1 0,2-12 0,-4-5 0,-6-3 0,-4-6-755,-5 11 0,0-2 0,0-3 1,-3-3 754,-4 0 0,-2-3 0,-1-3 0,-1-1 0,2-1-469,1 5 1,1-1 0,0-1 0,0-2 0,1-1 0,-1 0 0,-1-1 252,0 6 0,-1 0 0,0-2 0,0 0 0,-1 0 0,1-1 0,0 0 0,1-1 0,0 1-112,0 1 0,0 0 0,1-1 1,1 0-1,-1 0 0,0-1 1,1 1-1,-1 0 0,0 0 1,0 1 281,0 1 1,0 1-1,-1 0 1,1-1 0,0 1-1,-1 0 1,0 1 0,1-1-1,-1 1 1,0 0 45,0-2 0,0 0 0,0 0 0,0 1 0,0 0 0,0 0 0,0 1 0,0 1 0,0 1-203,2-5 0,1 1 0,0 2 0,-1 0 0,1 0 0,-2 2 1,-1 0 202,0-9 0,-3 1 0,0 2 0,0 1 0,1 1 170,3 0 1,1 2-1,-1 1 1,-1 2-171,-4-6 0,-1 1 0,-1 5 1621,-1-1 0,-4 5-1621,-5 11 0,-4 1 1638,-1 0 0,-5 3-659,-8 7 0,-3 3 659,2-1 0,-2 1-1604,-1 3 1,-2 1 0,1 4-35,-10 7 0,1 2 0,-5-8 0,0 2 650,9 13 0,2 2-650,2-11 0,-1 0 0,-6 8 0,-4 3-221,9-6 1,-1-2-1,-1 1 221,3-1 0,-1 1 0,1 2 0,-2 4 0,0 3 0,0-1 0,-2 1 0,0-1 0,1 3-413,-1 2 0,2 2 0,-2 1 413,4-2 0,-1 0 0,-1 0 0,0-1 0,2-3 0,0 0 0,0-1 0,1 2 0,-1 4 0,1 1 0,0 0 0,0-2 0,0-5 0,0-1 0,0 0 0,1-1 0,-7 5 0,2 0 0,1-1-38,2-2 0,0 0 1,2-4 37,-7-1 0,4 0 0,13 7 0,3-1 0,-20-4 616,21 20-616,-21-29 636,15 8 1,-1 2-637,-11-1 0,-4 1 0,5 3 0,-2 2 0,1 1-110,1 5 1,0 1 0,1-1 109,3-5 0,0 0 0,1 0 0,2 1 0,1 0 0,4-3 0,-7 2 0,1-1 0,31 5 0,0-19 0,0 12 0,0-8 453,0-6-453,0 6 0,0 7 0,0-11 0,-8 20 0,6-7 0,-5-5 0,7 19 0,0-27 0,0 20 0,0-22 0,0 6 0,0 7 0,0-11 0,0 12 0,0-16 0,0 0 0</inkml:trace>
+  <inkml:trace contextRef="#ctx0" brushRef="#br0" timeOffset="8067">26123 10072 24575,'0'43'0,"0"2"0,0-11 0,0 1 0,0-4 0,0 2 0,1 10 0,-2 1 0,-2-5 0,-2 2 0,-3 6 0,-1 2 0,0-1 0,-2 2-289,-4-10 1,-3 1 0,2-1 288,8-3 0,1 0 0,-1-1 0,-8 3 0,-3-1 0,5-1 0,7 8 0,2-2 0,-8 1 0,2-2 0,11-9 0,-2-1 0,-9 3 0,-1-1 0,10-8 0,0 0 0,-10 0 0,0 1 0,11 7 0,0 1 432,-10-7 1,-1 1-433,9 13 0,2 0 0,-7-14 0,0 1 0,3 13 0,2 0 0,3-13 0,-1-1 0,-4 7 0,2-1 0,3 11 0,0-19 0,0-1 0,0 4 0,8 12 0,-7-29 0,23 11 0,-12-5 0,21 2 0,-21 13 0,11-6 0,-5-7 0,-6 4 0,11-7 0,-5-5 0,9 4 0,1-16 0,-11 8 0,7-7 0,-12 23 0,21-20 0,-13 19 0,13-21 0,-13 22 0,13-12 0,-6 5 0,16-9 0,-13-8 0,-6 8 0,1 0 0,4-4 0,-4 4 0,1-1 0,19-7 0,-19 8 0,1 0 0,0-6 0,-1 0 0,0 6 0,1 0 0,4-7 0,-1-2 0,9 1 0,10 0 0,-14 8 0,-5-7 0,11 7 0,-22-8 0,15 0 0,-7 0 0,1 0 0,-11 0 0,7 0 0,-20 0 0,19 0 0,-21-8 0,6 7 0,8-7 0,-12-8 0,11 12 0,-15-27 0,0 19 0,0-6 0,0-5 0,8 11 0,-6-21 0,6-3 0,8-9 0,-13 0 0,9 20 0,0-1 0,-10-19 0,6 8 0,0 12 0,-1 1 0,-3-5 0,5 4 0,-2-1 0,-7-19 0,-1 11 0,2-1 0,7-1 0,0 0 0,-6-5 0,0 1 0,6 4 0,-1 2 0,-6 7 0,-2 1 0,1 0 0,0 1 0,0-20 0,0 18 0,0 1 0,0-19 0,0 19 0,0 1 0,0-13 0,0 3 0,0-6 0,0 12 0,0 1 0,0-3 0,0 0 0,0-1 0,1-11 0,-2-2 0,-5 0 0,-3 0 0,0-4 0,-2 2 0,-3 10 0,1 1 0,4 0 0,0 4 0,-15-6 0,13-3 0,-23 6 0,15-2 0,1 1 0,-5 3 0,11 14 0,-21-15 0,21 22 0,-20-3 0,29 15 0,-21 0 0,6 0 0,-1 0 0,-15 0 0,15-8 0,-22 6 0,19-10 0,-1 0 0,-8 11 0,-1-1 0,1-14 0,-1 0 0,-7 14 0,2 0 0,12-10 0,1 1 0,-11 10 0,3 0 0,3-23 0,-20 20 0,19-19 0,-5 21 0,2-6 0,5 8 0,1-16 0,-6 12 0,13-11 0,-13 15 0,13-8 0,2 6 0,-5-6 0,19 8 0,-12 0 0,16 0 0,0-16 0,0 12 0,0-11 0,0 15 0,0-8 0,0 6 0,0-6 0,0-8 0,-8 13 0,6-13 0,-5 16 0,7 0 0,0 0 0,-16 0 0,12 0 0,-12 0 0,16-16 0,0 12 0,0-19 0,0 21 0,0-6 0</inkml:trace>
+  <inkml:trace contextRef="#ctx0" brushRef="#br0" timeOffset="22867">26106 12788 24575,'0'20'0,"0"3"0,0 3 0,0 3 0,0-4 0,0 1 0,0 19 0,0 0 0,0-9 0,0-19 0,0 7 0,0-20 0,0 19 0,0-21 0,7 22 0,-5-5 0,6 9 0,-8 5 0,0-13 0,0-3 0,0 7 0,0-20 0,16 19 0,-12-21 0,11 6 0,-15 8 0,0-5 0,0 23 0,8-22 0,-6 19 0,6-27 0,-8-4 0,0-4 0,0-12 0,0 1 0,0 11 0,0-20 0,0 6 0,0-1 0,0 1 0,0-5 0,0 11 0,0-6 0,0-5 0,0 19 0,0-20 0,0 22 0,0-5 0,0-9 0,0 12 0,0-12 0,16 1 0,-12 11 0,19-12 0,-21 16 0,6 0 0,8 0 0,-12 0 0,27 0 0,-19 0 0,5 0 0,7 0 0,-12 0 0,21 0 0,-13 0 0,-3 0 0,7 0 0,-13 0 0,23 0 0,-22 0 0,19 0 0,-27 0 0,19 0 0,-21 0 0,6 16 0,8-12 0,-12 11 0,11 1 0,-15-4 0,0 5 0,0 7 0,0-12 0,0 21 0,0-21 0,0 11 0,0-5 0,0 1 0,0-1 0,0 6 0,-15-20 0,11 27 0,-12-19 0,8 21 0,6-13 0,-21 13 0,3-21 0,-7 11 0,9-5 0,-5-6 0,19 3 0,-20-15 0,22 0 0,-21 0 0,19 8 0,-20-6 0,7 6 0,-3-8 0,-13 0 0,5 0 0,1 0 0,-6 0 0,13 0 0,2 0 0,-5 0 0,19 0 0,-12-8 0,16 6 0,0-6 0,0-7 0,0 11 0,0-12 0,0 16 0,0-8 0,0 6 0,0-6 0</inkml:trace>
+  <inkml:trace contextRef="#ctx0" brushRef="#br0" timeOffset="41068">26793 7355 24575,'0'44'0,"0"-19"0,0 2 0,0 15 0,0 3 0,0 0 0,0 2 0,0-13 0,0 2 0,0 0-393,1 1 0,0 0 0,-3 0 393,-2-1 0,-2 0 0,1 0 0,3 5 0,3 0 0,-4 1 0,-6 1 0,-3 1 0,2 0 0,5-5 0,1 0 0,1 1 0,-2 3 0,-1 1 0,-1-2 0,-5 5 0,1-2 0,8-11 0,3 1 0,-1-2 192,-7 0 1,0-1-193,7 2 0,2 0 98,-1-7 0,0-1-98,0 1 0,0-1 0,0-1 0,0 3 0,0 6 0,0 4 0,0-2 0,0-3 0,0 0 199,0 2 0,0 3 1,0-3-200,0 1 0,0-3 0,0 8 0,7-8 0,2-1 0,2-3 0,-2-4 0,0 1 0,15 11 0,3-2 0,10-1 0,-1-22 0,-3 11 0,-14-21 0,15 6 0,-15 8 0,15-13 0,1 13 0,2-32 0,-2 13 0,-14-16 0,0-2 0,8 8 0,-12-15 0,1-1 0,7 17 0,-1 0 0,-12-15 0,0-3 0,13 12 0,-1-1 0,-12-26 0,-1 12 0,1-1 0,-2 7 0,-2-2 0,-2-13 0,0-3 0,1 10 0,1-2 0,0-2-567,-2 1 1,0-1 0,0-2-1,2 0 567,1-5 0,3-2 0,-1 0 0,2 0 0,-3 6 0,1 0 0,1-1 0,-1 1 0,-1-1 0,0 1 0,-1 0 0,0 0 0,0 0 0,0 0 0,-1 2 0,1 1 0,0-1 0,-1 1 0,-1 1 0,-1-2 0,-1 1 0,-1 1 0,0 1 0,2-11 0,1 1 0,-2 6 0,0 11 0,-2 4 0,-3-5 0,0 5 0,0 6 0,0-13 0,-8 13 2266,-10-13-2266,-1-2 0,-15-3 0,25 12 0,-1 1 0,-24-4 0,17 8 0,-1 1 0,-19 0 0,2 3 0,1-7 0,15 20 0,-15-27 0,-1 19 0,-10-6 0,19 13 0,-1 3 0,1 1 0,-1 2 0,1-1 0,-1 0 0,-6 0 0,-2 0 0,-1 0 0,-1 0 0,1 0 0,0 0 0,1 0 0,1 0 0,7 0 0,1 0 0,-19 0 0,18 0 0,3 0 0,22 0 0,-21 0 0,19 0 0,-12 0 0,16 0 0,0 7 0,0-5 0,0 22 0,0-20 0,16 12 0,-12-16 0,19 0 0,-21 0 0,6 0 0,-8 0 0,16 0 0,-12 0 0,11 0 0,-15 0 0,0 0 0</inkml:trace>
+  <inkml:trace contextRef="#ctx0" brushRef="#br0" timeOffset="73101">21872 1376 24575,'0'25'0,"1"-1"0,-2 3 0,-2 8 0,-2 3 0,0-2 0,-1 3 0,0-1-624,2-1 0,1-1 1,-2 1 623,-5 10 0,-2 2 0,3 0 0,4-4 0,2-1 0,-1 2 0,-3-4 0,-2 1 0,-1 1 0,3 2 0,1-4 0,2 3 0,1 0 0,0-1 0,-1-3 0,-1 0 0,1-2 0,-1-1 0,1 1 0,1 4 0,1 1 0,1-2 0,-1-4 0,2 7 0,0-4 302,0-1 0,0 0-302,3 0 0,2 1 0,0-8 0,1 2 0,1-1 0,2 4 0,2 0 0,-1-2 0,2 2 0,-1-2 154,3 6 1,-1-2-155,2 0 0,-2 1 0,-5 3 0,1-4 0,15 1 479,-19-10 0,2-5-479,10-14 0,7 19 0,-20-27 0,19 12 0,-5-16 0,1 7 0,15-5 0,1 22 0,10-20 0,-19 7 0,1 1 0,7-2 0,1-2 0,-7-2 0,1 0 0,5 2 0,0-1 0,-7-6 0,-1-2 0,1 1 0,-1 0 0,3 0 0,11 0 0,-21 0 0,24 0 0,-13-15 0,-6 10 0,1-2 0,12-26 0,8 21 0,-19-7 0,-1-1 0,20-2 0,-19 5 0,1-1 0,-1-3 0,1 1 0,3 2 0,1-2 0,0-13 0,0-2 0,1 6 0,-1 1 0,0-6 0,-1-1 0,-7 8 0,-1 1 0,0 4 0,-1-1 0,-7-2 0,-1-1 0,21-11 0,-23 2 0,5-6 0,-16 4 0,0 11 0,0-1 0,1-7 0,-2-1 0,-6-4 0,-2-2 0,5 5 0,1-3 0,-1 0-413,-2-4 0,0-2 1,0 0 412,0 6 0,0-1 0,0 0 0,1 0 0,0 1 0,0 1 0,0 0 0,0 0 0,-1 0 0,-1 0 0,0 1 0,0 1 0,-4-3 0,-1 1 0,1 0 0,4-5 0,2 0 0,-2 1 0,-3 3 0,-2 0 0,0 0 0,0-3 0,0 1 0,1-2 0,2-3 0,1-1 0,-4 3-250,-6 6 1,-2 2-1,1 0 250,5-2 0,2-1 0,-1 2 0,-9-5 0,-1 4 0,-2 10 0,1 3 0,9 3 0,0 3 0,-20 7 595,11 4 0,-1 1-595,-14 7 398,9 0 1,-1 0-399,1 0 0,-1 0 0,-4 0 0,0 0 0,2 0 0,1 0 0,-3 0 0,1 0 0,-11 0 0,10 0 0,2 15 0,5-11 0,1 20 0,-14-22 0,3 6 0,12-8 0,-1 0 0,-18 0 0,2 0 0,24 15 0,3-11 0,16 20 0,0-22 0,0 21 0,0-19 0,0 27 0,0-27 0,0 12 0,16-16 0,-12 0-820,27 0 1,-27 0 0,12 0 0</inkml:trace>
+</inkml:ink>
+</file>
+
+<file path=ppt/ink/ink5.xml><?xml version="1.0" encoding="utf-8"?>
+<inkml:ink xmlns:inkml="http://www.w3.org/2003/InkML">
+  <inkml:definitions>
+    <inkml:context xml:id="ctx0">
+      <inkml:inkSource xml:id="inkSrc0">
+        <inkml:traceFormat>
+          <inkml:channel name="X" type="integer" min="-2.14748E9" max="2.14748E9" units="cm"/>
+          <inkml:channel name="Y" type="integer" min="-2.14748E9" max="2.14748E9" units="cm"/>
+          <inkml:channel name="F" type="integer" max="32767" units="dev"/>
+        </inkml:traceFormat>
+        <inkml:channelProperties>
+          <inkml:channelProperty channel="X" name="resolution" value="1000" units="1/cm"/>
+          <inkml:channelProperty channel="Y" name="resolution" value="1000" units="1/cm"/>
+          <inkml:channelProperty channel="F" name="resolution" value="0" units="1/dev"/>
+        </inkml:channelProperties>
+      </inkml:inkSource>
+      <inkml:timestamp xml:id="ts0" timeString="2026-06-09T20:57:16.156"/>
+    </inkml:context>
+    <inkml:brush xml:id="br0">
+      <inkml:brushProperty name="width" value="0.05292" units="cm"/>
+      <inkml:brushProperty name="height" value="0.05292" units="cm"/>
+      <inkml:brushProperty name="color" value="#FF0000"/>
+    </inkml:brush>
+  </inkml:definitions>
+  <inkml:trace contextRef="#ctx0" brushRef="#br0">1041 17374 24575,'40'0'0,"0"0"0,-7 0 0,2 0 0,-1 0 0,12 0 0,0 0 0,-9 0 0,2 0 0,-1 0 0,11 0 0,0 0 0,-15 0 0,1 0 0,0 0-618,2 0 0,1 0 0,0 0 618,5 0 0,2 0 0,1 0-482,-6 0 1,1 0 0,1 0 0,1 0 481,3 0 0,0 0 0,1 0 0,0 0 0,2 0 0,0 0 0,0 0 0,0 0 0,0 0 0,-1 1 0,1-1 0,-1-1 0,-8 0 0,0-1 0,0 1 0,0-1 0,0 0 0,1 2 0,0 0 0,0-1 0,0 1 0,-1 0 0,8-2 0,0-1 0,-1 1 0,0 1 0,1 0 0,0 1 0,0 0 0,-2 1 0,-3-1 0,-1 0 0,-1 0 0,0 0-54,8 0 1,-1 0-1,0 0 54,-9 0 0,0 1 0,0-1 0,-1-1 0,2-4 0,-2-1 0,1 1 0,7 4 0,1 1 0,-2-3 0,-8-6 0,-2-4 0,2 4 0,6 6 0,1 3 0,-1-1 0,-5-4 0,0-1 0,1 1 0,9 4 0,2 1 0,-1 1 0,-3-1 0,-1 0 0,1 0 0,-4 0 0,2 0 0,-1 0 0,1 0-371,-2 0 0,0 1 0,0-1 0,0-1 371,4 0 0,1-2 0,0 1 0,0 0 0,1 2 0,1-1 0,0 1 0,-1-1 0,-3 0 0,-1-2 0,0 1 0,1 0 0,1 2 0,0 0 0,0 0 0,-2 0 0,-4 0 0,-2 0 0,0 0 0,-1 0 67,11 0 1,0 0 0,-3 0-68,-8 0 0,-2 0 0,-1 0 849,15 0 1,-4 0-850,-12 0 0,-1 0 530,10 0 1,0 0-531,-5 0 0,-1 0 888,3 0 0,2 0-888,2 0 0,0 0 0,-2 0 0,-1 0 0,-1 0 0,2 0 0,6 0 0,0 0 0,-6 0 0,0 0 0,-7 0 0,1 0 0,0 0 68,0 0 0,1 0 1,-1 0-69,1 0 0,0 0 0,0 0 0,14 0 0,-2 0 0,-4 0 0,-2 0 0,-10 0 0,-1 0 0,-1 0 0,1 0 0,-1 0 0,0 0 0,5 0 0,1 0 0,7 0 0,2 0 0,-11 0 0,2 0 0,0 0-223,2 0 0,0 0 0,2 0 223,3 0 0,1 0 0,0 0 0,0 0 0,0 0 0,1 0-215,4 0 0,1 0 1,0 0 214,-2 0 0,0 0 0,-1 0 0,-2 0 0,0 0 0,-2 0 0,-2 0 0,-1 0 0,1 0-214,5 2 1,1 0 0,-3 2 213,1 5 0,0 0-61,-4-5 0,3-1 0,-5 2 61,-6 2 0,-2 1 0,12 1 0,1-2 0,0-5 0,0 0 0,1 6 0,0 0 0,-1-7 0,0-2 309,-4 1 1,-1 0-310,-4 0 0,0 0 547,-3 1 1,-1-2-548,-4-7 0,-1 0 694,9 4-694,-11-4 0,1 0 208,14 8-208,6-15 0,4 11 0,-19-12 0,5 16 0,-2 0 0,-5 0 0,-9 0 0,5 0 0,-22 0 0,21 0 0,-11 0 0,21 0 0,-13 0 0,13 0 0,-13 0 0,-2 0 0,5 0 0,-19 0 0,27 0 0,-27 0 0,12 0 0,-8 0 0,-6 0 0,21 0 0,-19 0 0,12 0 0,-16 0 0,8 0 0,9 0 0,3 0 0,-2 0 0,5 0 0,-11 0 0,21 0 0,-21 0 0,4 0 0,-16 0 0,0 0 0,0 0 0</inkml:trace>
+</inkml:ink>
+</file>
+
+<file path=ppt/ink/ink6.xml><?xml version="1.0" encoding="utf-8"?>
+<inkml:ink xmlns:inkml="http://www.w3.org/2003/InkML">
+  <inkml:definitions>
+    <inkml:context xml:id="ctx0">
+      <inkml:inkSource xml:id="inkSrc0">
+        <inkml:traceFormat>
+          <inkml:channel name="X" type="integer" min="-2.14748E9" max="2.14748E9" units="cm"/>
+          <inkml:channel name="Y" type="integer" min="-2.14748E9" max="2.14748E9" units="cm"/>
+          <inkml:channel name="F" type="integer" max="32767" units="dev"/>
+        </inkml:traceFormat>
+        <inkml:channelProperties>
+          <inkml:channelProperty channel="X" name="resolution" value="1000" units="1/cm"/>
+          <inkml:channelProperty channel="Y" name="resolution" value="1000" units="1/cm"/>
+          <inkml:channelProperty channel="F" name="resolution" value="0" units="1/dev"/>
+        </inkml:channelProperties>
+      </inkml:inkSource>
+      <inkml:timestamp xml:id="ts0" timeString="2026-06-09T20:58:22.755"/>
+    </inkml:context>
+    <inkml:brush xml:id="br0">
+      <inkml:brushProperty name="width" value="0.05292" units="cm"/>
+      <inkml:brushProperty name="height" value="0.05292" units="cm"/>
+      <inkml:brushProperty name="color" value="#FF0000"/>
+    </inkml:brush>
+  </inkml:definitions>
+  <inkml:trace contextRef="#ctx0" brushRef="#br0">3493 8837 24575,'33'0'0,"4"0"0,3 0 0,4 0 0,-2 0 0,1 0 0,-7 0 0,2 0 0,1 0-464,2 0 1,0 0 0,-1 0 463,-3 0 0,-1 0 0,1 0 0,1 0 0,0 1 0,-1-2 211,8-2 0,-2-2-211,1-3 0,-1-1 118,-10 4 1,-2-2-119,4-9 0,-1 0 0,11 13 0,-19-6 0,-1 2 706,12 7-706,-2 0 25,-17 0-25,6 0 0,-13 0 0,23 0 0,-15-8 0,15 6 0,1-6 0,2 8 0,-11 0 0,-1 0 0,4 0 0,-3 0 0,-3 0 0,-19 0 0,12 0 0</inkml:trace>
+  <inkml:trace contextRef="#ctx0" brushRef="#br0" timeOffset="1185">9737 8625 24575,'49'0'0,"0"0"0,0 0 0,0 0 0,0 0 0,0 0 0,0 0 0,-2 0 0,0 0 0,1 0 0,0 0 0,0 0 0,1 0 0,-1 0 0,1 0-365,-5 0 1,0 0 0,1 0 0,-1 0 0,1 0 0,-1 0 0,1 0 0,0 0 0,1 0-1,0 0 1,1 0 0,0 0 0,1 0 0,-1 0 0,0 0 0,1 0 0,-1 0 0,1 0-1,0 0 1,0 0 0,1 0 0,-1 0 0,0 0 0,0 0 0,0 0 0,-2 0 0,0 0 338,5 0 1,0 0 0,-2 0-1,0 0 1,0 0 0,-1 0-1,0 0 32,-1 0 0,0 0 0,0 0 0,0 0 0,-2 0 1,-1 0-1,-2 0-6,4 0 0,-1 0 0,-3 0 0,-1 0 0,-1 0 393,2 0 1,-1 0-1,-2 0 1,-2 0-394,0 0 0,-2-1 0,-3 2 0,-4 3 0,-3 0 0,0-2 3276,-17 22-1736,-8-20-784,0 19 1,0-21 0,0 6-1</inkml:trace>
+  <inkml:trace contextRef="#ctx0" brushRef="#br0" timeOffset="2502">21361 8502 24575,'8'20'0,"12"-11"0,9-3 0,5-4 0,8-3 0,3 0-656,-5 1 1,4 0-1,2 0 1,3 0 0,1 0 245,-7 0 0,1 0 1,2 0-1,2 0 1,0 0-1,1 0 0,1 0 1,-1 0 171,-3 0 1,1 0 0,0 0 0,0 0 0,0 0 0,2 0 0,0 0 0,2 0 0,1 0 237,-8 0 0,3 0 0,0 0 0,2 0 0,1 0 0,0 0 0,0 0 0,0 0 0,-1 0 0,-1 0 0,-1 0 0,-2 0 0,-2 0 0,9 0 0,-3 0 0,-2 0 0,0 0 0,-2 0 0,1 0 0,0 0 0,2 0 0,0 0 0,2 0 0,2 0 0,0 0 0,-1 0 0,-1 0 0,-4 0 0,-4 0 0,-5 0 740,12 0 1,-8 0-1,-2 0-740,-3 0 0,-1 0 0,-4 0 697,-4 0 1,-3 0-698,3 0 0,-9 0 0,-10 0 0,-8 0 0</inkml:trace>
+  <inkml:trace contextRef="#ctx0" brushRef="#br0" timeOffset="3834">26158 8643 24575,'42'0'0,"0"0"0,0 0 0,-2 0 0,3 0 0,2 0 0,3 0 0,1 0 0,-3 0 0,1 0 0,2 0 0,1 0 0,1 0 0,2 0 0,0 0-328,-9 0 0,2 0 0,0 0 1,1 0-1,0 0 0,1 0 1,0 0-1,1 0 0,-1 0 1,0 0-1,0 0 0,1 0 0,1 0 1,-1 0-1,1 0 0,-1 0 1,1 0-1,-1 0 0,0 0 1,-1 0-1,-1 0 0,0 0 0,0 0 1,-1 0-1,1 0 0,-1 0 1,0 0-1,-1 0 0,0 0 1,0 0 109,6 0 0,0 0 0,0 0 0,-1 0 0,-1 0 0,-1 0 0,0 0 0,-2 0 218,6 0 0,-2 0 0,-1 1 0,-1-1 0,0 0 0,-1-1 99,-2 0 1,-1 1 0,0-1 0,0-1 0,-3 0 0,0 0-100,6-1 0,-2-2 0,-1 0 0,0 1-76,-2-1 1,1 0-1,-2 0 1,-2 0 75,-1-1 0,-3 0 0,-1 0 1638,11 1 0,-3 3-997,-11 1 0,-2 2 2635,16-1-3127,-1 0 2495,-25 0-2644,5 0 651,-22 0-651,5 0 0,9 0 0,12 0 0,17 0 0,-19-8 0,1 0 0,-1 6 0,1 0 0,-1-6 0,0 0 0,1 7 0,-1 2 0,19-1 0,-17 0 0,-5 0 0,-21 16 0,6-12 0,-8 12 0,-8-16 0,6 0 0,-5 0 0</inkml:trace>
+</inkml:ink>
+</file>
+
+<file path=ppt/ink/ink7.xml><?xml version="1.0" encoding="utf-8"?>
+<inkml:ink xmlns:inkml="http://www.w3.org/2003/InkML">
+  <inkml:definitions>
+    <inkml:context xml:id="ctx0">
+      <inkml:inkSource xml:id="inkSrc0">
+        <inkml:traceFormat>
+          <inkml:channel name="X" type="integer" min="-2.14748E9" max="2.14748E9" units="cm"/>
+          <inkml:channel name="Y" type="integer" min="-2.14748E9" max="2.14748E9" units="cm"/>
+          <inkml:channel name="F" type="integer" max="32767" units="dev"/>
+        </inkml:traceFormat>
+        <inkml:channelProperties>
+          <inkml:channelProperty channel="X" name="resolution" value="1000" units="1/cm"/>
+          <inkml:channelProperty channel="Y" name="resolution" value="1000" units="1/cm"/>
+          <inkml:channelProperty channel="F" name="resolution" value="0" units="1/dev"/>
+        </inkml:channelProperties>
+      </inkml:inkSource>
+      <inkml:timestamp xml:id="ts0" timeString="2026-06-09T20:59:39.291"/>
+    </inkml:context>
+    <inkml:brush xml:id="br0">
+      <inkml:brushProperty name="width" value="0.05292" units="cm"/>
+      <inkml:brushProperty name="height" value="0.05292" units="cm"/>
+      <inkml:brushProperty name="color" value="#FF0000"/>
+    </inkml:brush>
+  </inkml:definitions>
+  <inkml:trace contextRef="#ctx0" brushRef="#br0">12206 6033 24575,'43'0'0,"2"0"0,-8 0 0,3 0 0,-4 0 0,2 0 0,10 0 0,0 0 0,-10 0 0,-3 0 0,-8 0 0,-1 0 0,15-8 0,-29 6 0,3-6 0,1 8 0,-12 0 0,12 0 0,-16 0 0,0 8 0,0-6 0,0 6 0,0-8 0,0 0 0,0 15 0,0-11 0,0 12 0</inkml:trace>
+  <inkml:trace contextRef="#ctx0" brushRef="#br0" timeOffset="4915">24571 12136 24575,'42'-8'0,"0"0"0,2 4 0,3 1 0,1-2 0,-11-2 0,1-2 0,-1 0 0,2 1-593,6 2 0,3 2 0,-2 0 0,-2-2 593,0-5 0,-3-1 0,-1 2 0,11 4 0,-6 0 379,-17-2 0,-3 0-379,16 8 391,-21 0-391,-3 0 0,23 0 0,-9 0 611,-2 1 1,3-2-612,-2-2 0,0-1 0,5 3 0,1 0 0,3-10 0,2-2 0,7 3 0,0 1 0,-3-4 0,1-2 0,-12 4 0,1-1 0,-1 2 0,11 0 0,1 0-272,-10-1 0,1-1 0,1 2 272,0 3 0,1 1 0,0-1 0,5-3 0,0-2 0,1 1 0,2 1 0,1 2 0,-2-1 0,-3-1 0,-2 1 0,1 0 0,-1 3 0,1 1 0,-4-2 0,5-5 0,-3 1 0,-4 10 0,-4-2 0,3-21 0,-1 23 0,-23-23 0,13 12 0,-22-21 816,21-2-816,-13 5 0,0-1 0,3 3 0,2-1 0,2-5 0,-1-1 0,-10 8 0,0 2 0,9-21 0,-15 11 0,0 18 0,0-7 0,0 12 0,0-21 0,0-2 0,-7 5 0,-1-1 0,2-1 0,0-1 0,-10-9 0,-1-2 0,3 4 0,0 0 0,0 8 0,-1 0 0,1 0 0,4 0 0,1-1 0,-1 0-428,-5-7 1,-2-1-1,0 0 428,-1-3 0,0-1 0,1 1 0,1 1 0,0 1 0,-1-1 0,0 9 0,-1-1 0,1 0 0,2 2 0,0-14 0,1 2 0,-7 5 0,0 2 0,13 6 0,-3 5 0,-9 12 0,-1 1 0,7-15 0,-2 1 0,-16 8 0,-2 1 641,9-11 1,1-1-642,-10 4 0,-1 1 0,0-8 0,1-1 0,3 3 0,-2 0 0,5 8 0,-2 1 0,2-1 0,0-2 0,2 0 0,-1 2 0,-9-5 0,0 1 0,-3-3 0,1 1 0,11 4 0,-1 1 0,-8 3 0,-4-1-349,9 1 1,-1-2 0,-1 1 348,-5 3 0,-1 2 0,-2 0 0,-3-5 0,-1-1 0,1 2 0,5 3 0,0 1 0,1 2 0,2 5 0,1 2 0,3 0 0,2-5 0,3 4 0,-3 9 0,3 2 0,7-1 0,-29 0 0,10 0 522,6 0 1,-3 0-523,2 0 0,-2 0 0,-4 0 0,0 0 0,2 0 0,3 0 0,8-1 0,1 2 0,-15 15 0,21-12 0,3 19 0,-7-21 0,5 6 0,-9 8 0,-5-5 0,13 23 0,3-15 0,9-1 0,8 21 0,-16-23 0,11 11 0,-2 3 0,-26 7 0,15-12 0,1 3 0,-1 6 0,-1 0 0,-8 2 0,3 1 0,8 3 0,2 0 0,-7 1 0,1-3 0,9-14 0,2-1 0,1 3 0,-1-3 0,-15-4 0,20 15 0,-11-15 0,15 15 0,-8-15 0,8 8 0,-2 3 0,-22 11 0,22 4 0,0 2 0,-13-10 0,-1 1 0,13-5 0,4 2 0,-3 1 0,-5-1 0,-2 1 0,2-2 0,5 13 0,2-1 0,-3-12 0,0 0 0,1 0 0,1 7 0,2-2 0,-1-2 0,0-2 0,0-7 0,0-3 0,0 16 0,0-21 0,0-2 0,0 5 0,0 5 0,8 17 0,-1-13 0,3 4 0,1-3 0,1 2 0,1 1-587,-1 5 1,0 1 0,1 3 586,-1-5 0,1 2 0,0 0 0,0 0 0,-1-1 0,-1-1 0,0 0 0,0 0 0,1 9 0,0-1 0,1-2 0,1-9 0,0-1 0,-1-3 0,1 3 0,0-4 0,-1-8 0,1-4 0,4-1 0,5-3 0,-19-16 1759,12 0-1759,-16 0 0,8 8 0,-6 9 0,21 19 0,-11 9 0,6 0 0,5-10 0,-19-2 0,20-13 0,-22-2 0,5 5 0,-7-19 0,0 12 0,0-16 0,0 0 0</inkml:trace>
+  <inkml:trace contextRef="#ctx0" brushRef="#br0" timeOffset="24749">25964 8431 24575,'0'-27'0,"0"-6"0,0 13 0,0-13 0,0 5 0,0 1 0,8-14 0,10 3 0,-2 6 0,3-4 0,2-4 0,3-1 0,-2 10 0,1-2 0,1 0-460,0-7 0,0-1 0,0 0 460,1 0 0,-1-1 0,0 0 0,-6 7 0,-1-1 0,0 0 0,0 1 0,3-7 0,-1 0 0,2 1 0,2 0 0,0 1 0,2 0 0,-4 9 0,1 1 0,1-1 0,-1 1 0,0-1 0,0-1 0,1 1 0,0 0 0,2-1 0,2 1 0,-1-1 0,0 1 0,-1 1 0,0-1 0,-1 1 0,0 0 0,7-9 0,-1 1 0,-1 1-27,-1 6 1,-1 0 0,-3 1 26,-1-15 0,-1 4 0,-1 13 0,-1 3 0,-1-11 0,15 3 0,-23 6 1374,13-1-1374,-22-5 85,21 21-85,-19-4 0,-4 9 0,-11-11 0,-15 2 0,-5-3 0,10-6 0,1-5 0,-4 0-657,-11 0 0,-5 0 1,1-4 656,8-1 0,0-5 0,0-1 0,-1 3 0,1 2 0,-1 2 0,1 1 0,0-2 0,-1 0 0,1-1 0,1 0 0,1 2 0,0-3 0,3 2 0,-1 1 0,0 4 0,0 0 0,4 4 0,-6-13 0,8 18 0,3 3 0,6 0 0,-21-1 0,13-23 985,-4 28 0,-1-1-985,13-10 0,1-1 0,-13 7 0,-1 1 0,3-10 0,0-3 0,3 4 0,-2-2 0,-1-1-478,-5-5 0,0-1 1,0-3 477,7 4 0,0-3 0,0 0 0,0 0 0,-1 2 0,-2 0 0,1 0 0,2 1 0,-3-9 0,3 2 0,-2 3 0,1 10 0,0 2 0,2 2 0,5-9 0,1 11 0,-3 27 0,16-16 0,0 36 0,0-22 0,0 6 0,0-8 0</inkml:trace>
+  <inkml:trace contextRef="#ctx0" brushRef="#br0" timeOffset="120199">15893 4833 24575,'0'41'0,"0"6"0,0-9 0,0 3 0,0-8 0,0 2 0,0 1-706,0-1 1,0 1-1,0 2 706,0-1 0,0 3 0,0-1 0,0 0 0,0 7 0,0-1 0,0 1 0,0 4 0,0 0 0,0-1 0,0-2 0,0-1 0,0 0 0,-1 1 0,1 0 0,1 1 0,1-1 0,1 0 0,-1 2-345,-1-9 1,-2 2 0,2-1 0,0 0 344,4-2 0,1-1 0,1 0 0,-1 0 0,-1 3 0,0 1 0,0 0 0,0 0 0,-1-4 0,2 0 0,-1-1 0,-1 1 40,2 12 1,0 1 0,-2-3-41,-3-11 0,-2-1 0,1 0 0,-1 7 0,1 0 0,1-3-15,3-2 1,0 0 14,-3-5 0,-1 2 0,1-1 0,3 7 0,-1-2 479,-3-2 0,0-1-479,8-1 0,0-1 1614,-4 11-1614,12-10 794,-16-17-794,0 5 35,0-19-35,0 12 0,0-16 0,0 7 0,0-5 0,0 6 0,0-8 0,0 0 0,0 16 0,0-12 0,0 12 0,0-9 0,0-5 0,0 22 0,8-12 0,-6 5 0,5 7 0,-7-20 0,0 27 0,0-27 0,0 20 0,0-23 0,0 7 0,0 8 0,0-12 0,0 12 0,0-32 0,0-12 0,-7-17 0,-2 20 0,0-3 0,-1-18 0,0 0 0,-7 7 0,13 8 0,0-1 0</inkml:trace>
+  <inkml:trace contextRef="#ctx0" brushRef="#br0" timeOffset="130215">2011 11853 24575,'0'43'0,"0"-13"0,0 1 0,0 1 0,0 1 0,0 9 0,0 2 0,0-4 0,0 0 0,0 0 0,0 1 0,0 2 0,0 0 0,0-3 0,0 0 0,0 8 0,0 0 0,0-2 0,0-1 0,0-5 0,0 0 0,0-2 0,0 0 0,0 6 0,0-1 0,0-6 0,0 2 0,0-4 0,-1 3 0,2-1-207,3 12 0,0 0 207,-3-14 0,-1 1 0,1 1-305,1 5 0,0 1 0,1 1 305,3 0 0,0 0 0,-2 1 0,-2 2 0,-2 1 0,2 0 0,2-9 0,0 1 0,1-1 0,-2 0 0,-2 9 0,-2-1 0,1 1 0,-1 2 0,1 0 0,1-1 0,1-6 0,1-1 0,0-1 0,-3 8 0,2 0-61,5-16 1,2 1-1,-2-2 61,-5 6 0,0-1 0,6 10 0,0 2 0,-4-1 0,0 0 0,-4 1 0,1 0 0,6-16 0,3 0 0,-3-1 0,-5 12 0,0 0 0,5-10 0,3 1 0,-4-2 0,-4 5 0,-2 1 0,2-4 0,1 3 0,0-2 0,5 6 0,0-1 0,-6 8 0,0-2 0,6-18 0,0-1 195,-8 2 1,0-4-196,0-6 925,15-2-925,-11 5 195,12-19-195,-16 12 0,0 7 0,0 7 0,0 3 0,0 2 0,0-6 0,0-1 0,0 4 0,0-3 0,0-2 0,0-3 0,0-22 0,0 21 0,0-19 0,0 12 0,0-16 0,0 8 0,0-6 0,0 5 0,0 9 0,0 12 0,0 17 0,0-19 0,0 1 0,0 18 0,0-10 0,0-2 0,0-21 0,0 12 0,0-23 0,0 7 0</inkml:trace>
+  <inkml:trace contextRef="#ctx0" brushRef="#br0" timeOffset="148481">24818 9490 24575,'-20'19'0,"5"13"0,15-21 0,0 23 0,0-15 0,0 23 0,0-13 0,1 3 0,-2 3 0,-7-8 0,0 2 0,3 17 0,-2 2 0,-3-15 0,-2 0 0,1-1 0,1 14 0,0 1 0,0-13 0,-2 0 0,1-1 0,2 9 0,-2-3 0,-5-3 0,-1 0 0,8-1 0,-2-1 0,-13 5 0,-1-2 0,17-7 0,1-1 0,-9 7 0,0-3 0,9 2 0,5-17 0,-6 5 0,8-19 0,0 20 0,0-7 0,0 7 0,0 3 0,0 22 0,0-11 0,0 1 0,0-4 0,0 0 0,-1-2 0,2-1 0,3 3 0,0-1 0,-4-8 0,2 0 0,8 6 0,3-3 0,7 10 0,-11-13 0,1-3 0,14-3 0,-22 13 0,21-13 0,-11-2 0,6 5 0,5-19 0,-19 12 0,20-9 0,-7 11 0,19-6 0,-14 4 0,1-1 0,22-3 0,-10 21 0,-2-21 0,3 12 0,-7-22 0,3 9 0,1 1 0,8-8 0,-7 4 0,0 0 0,-7-8 0,-1 0 0,4 0 0,1 0 0,-1 0 0,3 0 0,-1 0 0,2 0 0,2 0 0,2 0 0,1 0 0,1 0-276,7 0 0,2 0 1,-2 0 275,-2 0 0,0 0 0,-1 0 0,0 0 0,0 0 0,-3 0 0,2 0 0,-2 0 0,7 0 0,-4 0 0,-16 0 0,-1 0 0,17-7 0,4-2 0,-13 6 0,1 0 0,1-3-506,7-6 0,1-3 1,1 1 505,-9 6 0,1 2 0,0-1 0,-2-1 0,9-8 0,-1-2 0,1 1 0,1 2 0,1 0 0,-1 0-328,-6-2 1,-2-1 0,1 0 327,5 0 0,-1 1 0,0-1 0,-6-2 0,-2-1 0,1 1 135,-3 2 1,0 0 0,-1-1-136,-2-1 0,0-1 0,-4 1 0,-5 2 0,-3-1 0,0-2 0,-5 1 1469,-13 0-1469,0-13 1089,0 6-1089,0 7 361,0-3-361,-15 21 0,11-22 0,-28-3 0,30 2 0,0-3 0,-16-3 0,-3-1 0,14-3 0,1-1 0,-14 4 0,-2 2 0,5-1 0,-1 1 0,-3-1 0,-3 1 0,-2 3 0,-1-1 0,1-2 0,-1 0 0,-7 0 0,0-1 0,5-4 0,1-1-235,0 10 0,-1 0 0,1-2 235,6-3 0,1-2 0,0 1 0,-2 1 0,-1 2 0,0-1 0,1 0 0,0 0 0,1 2 0,-6-9 0,1 3 0,-3 7 0,-1 1 0,4 0 0,1 1 0,0 5 0,-1 3 0,1 2 0,-1 2 0,1 0 0,-1 3 0,-6 9 0,-2 0 0,-5-11 0,-1 0 0,-6 10 0,-4 1-54,12-4 0,-3-2 0,2 3 54,3 3 0,1 1 0,-1 1 0,-5-1 0,-2 0 0,1 0 0,4 0 0,1 0 0,-1 0 0,-2 0 0,0 0 0,0 0 0,1 0 0,2 0 0,0 0 0,-12 0 0,2 0 0,12 0 0,1 0 0,6 0 0,0 0 0,-2 0 0,1 0 0,2 0 0,-1 0 0,-5 0 0,0 0 433,6 0 1,3 0-434,-20 0 0,9 0 0,19 0 0,-7 0 0,20 0 0,-12 0 0,9 0 0,5 0 0,-6 0 0,-8 0 0,12 0 0,-19 0 0,5 0 0,-9 16 0,7-13 0,-3 13 0,21-16 0,-6 0 0,8-16 0,0 13 0,8-21 0,-6 22 0,5-6 0</inkml:trace>
+  <inkml:trace contextRef="#ctx0" brushRef="#br0" timeOffset="152599">22013 9719 24575,'0'41'0,"0"6"0,0-9 0,0 3 0,0-1 0,0 0 0,0-4 0,0 0 0,0 3 0,0-1 0,4-10 0,0-1 0,-3 7 0,0 0 0,3-6 0,0-1 0,-3 4 0,-2-1 0,1 7 0,0 4 0,0-21 0,0 29 0,0-25 0,0 9 0,0-10 0,0-19 0,0 20 0,0-22 0,0 6 0,0 7 0,0-11 0,0 12 0,0-16 0</inkml:trace>
+  <inkml:trace contextRef="#ctx0" brushRef="#br0" timeOffset="159882">28628 5327 24575,'-20'0'0,"-3"0"0,5 8 0,-17 9 0,12 0 0,1 2 0,-1-2 0,1 3 0,4 6 0,0-1 0,-2-10 0,-1-1 0,6 10 0,1 1 0,-3-2 0,-1-1 0,0-3 0,2 2 0,3 7 0,-1 0 0,-7-9 0,-1 0 0,-1 20 0,1 6 0,2-15 0,0 0 0,-1 2-428,-2 10 0,-1 3 0,0-1 428,5-10 0,-2 0 0,1-1 0,0 0 0,-5 7 0,1-1 0,0-1 0,6-5 0,0 0 0,2-3 0,-7 7 0,4-5 0,8-3 0,-5 3 0,16-30 0,0 5 0,0 17 0,0 3 0,0 7 0,0-1 0,1 3 0,-2 2-105,-2 0 0,-1 1 0,-1 2 0,1 0 105,1 3 0,0 1 0,1 0 0,-1 0 0,-2-1 0,0 1 0,1-1 0,0 1 0,1 1 0,1 1 0,0-1 0,1-3 0,1-1 0,0-2 0,0 0-47,0 3 0,0 0 1,0-4 46,0-5 0,0-3 0,-1 0 0,2-1 0,7 5 0,25-2 0,-9 2 0,3-9 0,3 1 0,-4 8 0,0 1 0,10-3 0,1-1 0,0 0 0,-1-4 845,-9-12 1,-2-4-846,17 3 153,-23-15-153,22 0 0,-5 0 0,5 0 0,-9 0 0,2 0 0,2 0-364,9 0 1,3 0 0,0 0 363,1 0 0,1 0 0,0 0 0,-2 1 0,-1 0 0,1-3 0,2-1 0,0-2 0,-1-2 0,-4-1 0,-2-1 0,2-2 0,-7 1 0,1-1 0,0-1 0,0 0-420,1-1 1,0 0-1,0 0 1,1-1 419,-1 1 0,1 0 0,0 0 0,-1-1 0,0 1 0,1 1 0,-2-2 0,-2 1-168,3-5 1,-2 0 0,0 1 167,-3 2 0,0 0 0,-1 0 0,6-11 0,0 1 0,3 2 0,0 0 0,-3-3 0,1 0 0,-10 8 0,1 1 0,1-1 0,0-2 0,0-1 0,-1 1 0,10-7 0,-2-1 0,-3-2 0,-6-1 0,-3-6 968,-5-4-968,-5 6 1722,-6-3-1722,-3 13 0,-3-1 580,-6-3-580,0-12 0,0 6 0,0-11 0,0 10 0,0-4 0,0 5 0,0-3 0,0-3-464,0 3 0,0-1 1,0-3-1,0 1 464,0-5 0,0-2 0,0 1 0,0 0 0,0 0 0,0 0 0,0 1 0,0-1 0,0 1 0,0-1 0,0 1 0,0 3 0,1 0 0,0 4 0,-3 0 0,-2 0 0,-1 1 0,-1 5 0,2 4 0,-4 5 0,-25-4 0,-3-3 0,7 19 0,1 5 0,-1-3 927,10-6 1,-1 0-928,-10 6 0,-1-1 0,5-13 0,-1-3 0,-7 5 0,0-1 0,2-11 0,-1-1 0,5 13 0,-1 1 0,0-1 0,2-1 0,0 0 0,0-1 0,1 0 0,-1 0 0,0 3 0,-8 1 0,0 1 0,-4-7 0,1 3 0,10 16 0,-1 2 0,-5-3 0,0 1 0,-1 6 0,1 2 0,6-5 0,-1 0 0,-5 3 0,0 0 0,-1-3 0,1 0 0,-2 4 0,0 0 0,-4 0 0,-1 0 0,-2 0 0,0 0 0,10 0 0,1 0 0,-2 0 0,0 0 0,7 0 0,1 0 0,-1 0 0,1 0 0,0 0 0,-1 0 0,-4 1 0,1-2 0,-9-15 0,-10 12 0,29-11 0,-13 15 0,13 0 0,-13 0 0,14 0 0,-15 0 0,7 0 0,7 0 0,5 0 0,46 0 0,-23 0 0,23 0 0,-31 15 0,0-11 0,0 12 0,0-16 0,0 0 0,0-16 0,0 12 0,0-11 0</inkml:trace>
+  <inkml:trace contextRef="#ctx0" brushRef="#br0" timeOffset="161532">31944 4674 24575,'0'10'0,"0"21"0,0 15 0,0-1 0,0 6 0,0-11 0,1 2 0,-2 1-571,-1 4 1,-1 1-1,0 0 571,2 2 0,1 1 0,-1-3 0,-1-10 0,-1-2 0,0 0 207,3 13 0,0-4-207,0-14 0,0-1 0,0 0 0,0 0 0,0 1 0,0 1 0,0 7 0,0 0 0,0 2 0,0-1 649,0 0 0,0 0-649,0-4 0,0-1 0,0-7 0,0-3 0,0 2 0,-15-3 0,11-22 0,-12-2 0,16-2 0,0-6 0</inkml:trace>
+  <inkml:trace contextRef="#ctx0" brushRef="#br0" timeOffset="164531">26723 1817 8191,'-8'-20'0,"-10"5"3276,-17 15-1489,-10 0-378,19 0 0,-1 0-1409,-9 0 0,-4 0 0,4 0 0,-2 0 0,-2 0 44,2 0 0,-1 0 0,-2 0 0,-2 0-44,3-1 0,-2 0 0,-1 1 0,0 0 0,0 2 0,0 1 0,0 1 0,0 2 0,0-1 0,-1 0 0,-3-1 0,-1 0 0,0 0 0,1 0 0,2 2 0,-3 2 0,2 1 0,1 1 0,2-2 0,-7-1 0,3-1 0,3-1 1638,-6-1 0,7-1 1106,6-3-2744,9 8 0,-1 0 0,-10-4 0,10 7 0,-3 1 0,2-2 0,0-2 1153,-2-3 1,1 2-1154,-4 9 0,-1-1 0,-3-9 0,0 0 0,-1 10 0,0 1 0,2-7 0,3 0 0,8 6 0,1 1 0,-15 3 0,29 21 0,-3 4 0,11-8 0,0 4 0,-3-7 0,-2 2 0,-1 0-581,-3 7 1,-3 2 0,0 1 580,3-6 0,-1 2 0,0 0 0,0 0 0,2-3 0,1 0 0,0 0 0,0-1-193,0 0 0,0 0 0,0-1 0,3-1 193,3 4 0,2-2 0,-1-2 0,-4 6 0,1-4 0,6-11 0,2-1 0,-1 15 0,0-29 1669,15 3-1669,-3-7 844,21 10-844,-22 5 0,-2 5 0,15 6 0,1 4 0,-11-2 0,-3 4 0,3-2-324,5-1 1,3-2-1,-2 3 324,-2 7 0,-1 3 0,1-4 0,-1-11 0,1-3 0,0 1-50,-3 1 0,-1 0 0,2-2 50,10 10 0,-1-3 0,-11-13 0,1 1 0,9 9 0,1-2 0,12-2 0,-4-9 0,3-1 481,0-9 1,1-3-482,-2 1 0,2 0 0,8 6 0,2 1-242,-15-4 0,1 0 0,0 2 242,8 3 0,1 1 0,1 2-316,-7-4 0,1 2 1,1 0-1,0-2 316,-3-1 0,1-2 0,0 1 0,0-1 0,1 1 0,1-1 0,-1 0 0,0 0 0,5 2 0,0 0 0,-1-2-121,0-2 0,0-3 1,-1 0 120,-5-1 0,0-1 0,0-1 0,5-1 0,1-2 0,0 0 0,-4-1 0,-1-1 0,1-1 0,3-1 0,1 0 0,-1-2 0,-1 0 0,-2-2 0,1-2 0,-2-1 0,-1-3 0,2-2-373,5-4 0,2-3 1,-1-1 372,-3 2 0,-2-1 0,2-2 0,-8 2 0,2-1 0,-1 0 0,-1 1 0,2-2 0,0 2 0,-2 0 253,-2 0 0,-1 0 1,-2 2-254,1 1 0,-3 1 606,-2 1 1,-3-2-607,0-17 0,2 4 0,3-6 0,-10 0 0,-1-4 0,4-3-616,0 8 1,2-1-1,3-2 1,-1-2-1,-1 0 616,-4 2 0,0-2 0,0-2 0,0 1 0,-1-1 0,2 0 0,0-1 0,2-1 0,0 0 0,-1 0 0,0 0 0,-2 1 0,-2 1 0,0-1 0,-2 1 0,0 0 0,0 2 0,-1 0-39,-1 0 1,0 0-1,0 2 1,-1 1 0,-1 1 38,3-2 0,-1 0 0,0 3 0,-3 1 0,-2-16 0,-1 6 0,4 17 0,-2 3 0,-7-24 0,0 20 1638,-7-3 0,-2-3-1569,4 7 0,-1-1-69,-14-13 0,-2-2 0,8 3 0,-1 2 0,-10 2 0,-1 1 755,8 0 0,-1 3-755,-7 10 0,1 1 0,-4-13 0,-13 17 0,7-5 0,-10 11 0,19 3 0,-1 1 0,1 3 0,-1 2 0,-7-5 0,0 0 0,5 6 0,1 0 0,-7-6 0,1 0 0,-11 8 0,10 0 0,1 0 0,15 0 0,-14 0 0,-3 0 0,-9 0 0,19 0 0,-1 0 0,-18 0 0,19 8 0,1 0 0,-12-4 0,10 12 0,3-8 0,22-6 0,-6 5 0</inkml:trace>
+  <inkml:trace contextRef="#ctx0" brushRef="#br0" timeOffset="167464">28240 1482 24575,'0'19'0,"0"-3"0,0-8 0,0 17 0,0 5 0,0 5 0,0 6 0,-16-12 0,12 15 0,-11-17 0,15 6 0,0-21 0,0 12 0,0-22 0,0 21 0,0-19 0,0 12 0,0-8 0,15-6 0,-11 21 0,28-19 0,-29 12 0,13-16 0,-8 0 0,-6 0 0,21 0 0,-19 0 0,20 0 0,-6-16 0,1 12 0,22-12 0,4 16 0,-14 0 0,1 0 0,0 1 0,-1-2 0,-4-2 0,-1-1 0,9 2 0,-2-6 0,-21 8 0,4 0 0,-16-16 0,0 12 0,0-19 0,15 5 0,-11 6 0,12-11 0,-16 21 0,-16-22 0,12 5 0,-27-1 0,19-4 0,-5 7 0,-7-3 0,12-13 0,-5 13 0,-7-13 0,20 13 0,-19-13 0,21 21 0,-22-3 0,20 15 0,-19 0 0,-10-16 0,9 12 0,-1-4 0,1 0 0,12 8 0,-11 0 0,21 0 0,-22 0 0,13 0 0,-31 0 0,13 0 0,4 0 0,-1 0 0,-11 0 0,9 0 0,13 0 0,15 0 0</inkml:trace>
+  <inkml:trace contextRef="#ctx0" brushRef="#br0" timeOffset="168815">28293 2469 24575,'26'0'0,"1"0"0,14-2 0,2-3 0,-9-3 0,1-2 0,-3 1 0,4-1 0,-3 2 0,9-3 0,-3 2 0,-10 0 0,-1 2 0,2 6 0,-3 2 0,-8-1 0,-1 0 0,-10 0 0</inkml:trace>
+  <inkml:trace contextRef="#ctx0" brushRef="#br0" timeOffset="169880">31556 7056 24575,'0'0'0</inkml:trace>
+</inkml:ink>
+</file>
+
+<file path=ppt/ink/ink8.xml><?xml version="1.0" encoding="utf-8"?>
+<inkml:ink xmlns:inkml="http://www.w3.org/2003/InkML">
+  <inkml:definitions>
+    <inkml:context xml:id="ctx0">
+      <inkml:inkSource xml:id="inkSrc0">
+        <inkml:traceFormat>
+          <inkml:channel name="X" type="integer" min="-2.14748E9" max="2.14748E9" units="cm"/>
+          <inkml:channel name="Y" type="integer" min="-2.14748E9" max="2.14748E9" units="cm"/>
+          <inkml:channel name="F" type="integer" max="32767" units="dev"/>
+        </inkml:traceFormat>
+        <inkml:channelProperties>
+          <inkml:channelProperty channel="X" name="resolution" value="1000" units="1/cm"/>
+          <inkml:channelProperty channel="Y" name="resolution" value="1000" units="1/cm"/>
+          <inkml:channelProperty channel="F" name="resolution" value="0" units="1/dev"/>
+        </inkml:channelProperties>
+      </inkml:inkSource>
+      <inkml:timestamp xml:id="ts0" timeString="2026-06-09T21:03:40.572"/>
+    </inkml:context>
+    <inkml:brush xml:id="br0">
+      <inkml:brushProperty name="width" value="0.05292" units="cm"/>
+      <inkml:brushProperty name="height" value="0.05292" units="cm"/>
+      <inkml:brushProperty name="color" value="#FF0000"/>
+    </inkml:brush>
+  </inkml:definitions>
+  <inkml:trace contextRef="#ctx0" brushRef="#br0">21819 1517 24575,'-19'0'0,"-5"0"0,7 8 0,0 9 0,-2 7 0,-1 2 0,-3 4 0,-2 2-820,-3 4 1,-3 3 0,0 2 0,-1 2 499,5-4 0,0 2 1,-1 1-1,0 0 0,-1 0 320,2-6 0,-1 0 0,-1 0 0,1-1 0,0 1 0,1 0-135,-1 5 1,1 1 0,1-1 0,0-1-1,0-2 135,-3 0 0,0-2 0,0-2 0,2 1-173,6-2 0,1-1 0,0 0 1,1-1 172,-3 2 0,0-2 0,-2 3-58,-2 0 0,-1 2 0,-1 1 1,1 1 57,-1 2 0,0 1 0,0 0 0,-2-1 0,4-9 0,-1-1 0,-1-1 0,1 0 0,0 1 391,-6 8 1,2 1 0,-1-1 0,0-2-392,4-7 0,1-2 0,-1 1 0,-2 2 0,2 0 0,-2 2 0,-1 2 0,-1 1 0,2-2 0,0-1 0,-5 5 0,1-2 0,-1-1 0,0 3 0,2-1 0,-2 3 0,0 0 0,1-2 0,3-4 0,-4 2 0,4-4 0,1-1 606,4-5 0,2-1 0,1 0-606,-4 10 0,1 0 0,2 1 0,-1-1 0,-1-3 0,-1 3-216,5 0 1,-2 4-1,-2-1 216,0-9 0,-3-2 0,0 1 0,1 2 0,2 4 0,1 3 0,0 0 0,-1 0 0,-4 1 0,-1 0 0,0 1 0,2-1 0,3-1 0,1-1 0,1 1 0,1 0 0,0-1 0,1 1 0,0-1 0,1 0 0,-2 0 0,1 0 0,1 0 0,0-1 0,-1 10 0,1 1 0,0 0 0,3-9 0,0 1 0,1 0 0,1 2 0,2 1 0,1 1 0,1 1 0,-2 1-367,1-5 0,0 1 0,-1 1 0,0-1 0,0-1 367,-4 8 0,0 0 0,-1-1 0,1 1 0,3-8 0,1 0 0,0 1 0,-1-1 0,0-1 149,-2 2 0,0-1 0,-1-1 1,2 0-150,-3 8 0,1 0 0,2-2 8,6-9 0,1-1 0,-1-2-8,-12 5 0,4-4 1384,14 12-1384,-11-1 1197,3-21 1,0 1-1198,6 6 0,-1 2 0,-16 12 0,-3 1 0,7 0 0,0 4-46,5-16 0,-1 3 0,-1 0 0,1 0 46,-4 7 0,0 0 0,2 1 0,4-6 0,2 1 0,1 0 0,-1-2-109,-4 7 0,0-1 0,3-1 109,6 10 0,1-4 0,-4-11 0,2-4 0,7 4 0,0-19 0,0 7 1328,0 3-1328,-4 2 0,0 3 175,3-4 0,0 1-175,-2 16 0,-2 2 0,-3-6 0,1 0 0,5-7 0,2 2 0,-2 0-210,-5 2 0,-3 0 0,3 0 210,5 0 0,2 0 0,0 1-433,-2 9 0,-1 2 0,0-1 433,3 0 0,0-1 0,0 0 0,0-8 0,0 0 0,0 0 0,0-1 0,0 12 0,0-1 0,0-2 0,0-10 0,0-1 0,0-2 0,0 13 0,0-2 0,0-9 0,0-5 0,0-1 0,2-4 0,4 1 0,13-3 0,3 3 0,-6 2 0,-1 4 0,3 0-164,5-5 0,4-1 0,1 1 0,-4 2 164,-3 3 0,-3 1 0,0 1 0,2-2 0,4 0 0,2 0 0,1-1 0,-2 0 0,3 9 0,-2 1 0,0-3 0,-2-6 0,0-1 0,1-2 357,-3-4 0,1-1 0,0-2-357,11 8 0,1-4 0,-4-7 0,2-2 0,9 7 0,3-3 0,-2-13 0,2-1 0,-9 1 0,2 2 0,2-1-404,3 2 0,1-1 1,2-1 403,-8-4 0,2 0 0,1 0 0,-1 1 0,-1 2 0,1 0 0,0 1 0,1-1 0,4 0 0,1-2 0,0 1 0,0 0-399,-2 0 1,1 0 0,-1 1 0,1-1 398,0 0 0,-1 0 0,1-1 0,-1 1 0,0 0 0,0 0 0,0 0 0,-1-3 0,-5-1 0,0-3 0,-1 0 0,1 1 0,1 1 0,0 1 0,1-1 0,-2-1 0,10-2 0,0-2 0,-1 1 68,3 0 1,0 0-1,-1 0-68,-1 0 0,-1 0 0,0 0 0,-5 0 0,-1 0 0,1 0 0,4 1 0,0-1 0,-1-1 0,-8-3 0,-1-2 0,1 0-106,3 3 1,2 0-1,-3-3 106,-5-4 0,-2-2 0,0 1 0,3 4 0,0 2 0,-1-3 0,11-8 0,0-1 0,-10 7 0,0 2 0,-1-1 0,-1 0 0,-1 0 0,1-1 0,7-3 0,1-1 0,0 0 0,-5 2 0,0 0 0,2-1 7,7-4 0,1 0 0,0-2-7,-4-1 0,-1-1 0,1 1 0,-7 6 0,1 1 0,-1-1 0,0 0 0,8-6 0,-2-2 0,1 4 0,-1 4 0,0 3 0,-2-2 443,-5-1 1,-2 0-1,0 1-443,13 3 0,-2 1 0,1-8 0,-1 0 0,-4 3 0,2 1 0,7-1 0,0 0 0,-3-3 0,0 1 0,-11 9 0,1 1 0,0-1 0,-2-3 0,-1-1 0,1-1 59,6 0 1,2 0 0,1 1-60,-1 1 0,0 2 0,2-4 0,-6-1 0,0-2 0,1-1 0,-1 4 0,6 3 0,0 3 0,-2-3 0,1-6 0,-1-4 0,-2 4 259,2 5 1,-2 1-260,-4-9 0,-1 2 605,-8 10 1,1 0-606,6-5 0,2-1 140,1 2 1,1 2-141,3 3 0,0-1 0,3-7 0,0 2 444,-2 9 1,-1 2-445,0-3 0,0-2 0,7-2 0,0-1 0,-7-1 0,3-2 0,-6 1 0,4-1 0,1 0 0,-4 0 0,-5 1 0,-2 0 0,1 0 0,5 0 0,3-1 0,-1 1 0,-6 0 0,1 1 0,-3-1 0,4-7 0,-1 0 0,-7 8 0,-2-1 0,1-7 0,1 0 0,7 3 0,1 1 0,-7 0 0,1-1 0,12-6 0,2-2 0,-3-3 0,0-3 0,-10 10 0,1-1 0,-1 0 0,0-4 0,0-1 0,-2 2 0,5-1 0,-4 1 0,-5 3 0,-4 3 0,-3-2 0,-9-5 0,-8 11 0,0-22 0,-8-1 0,1 6 0,-3-3 0,-10-9 0,-4-6-792,9 12 0,0-3 0,-1-2 0,0-2 792,0 2 0,0-1 0,0-2 0,0-1 0,-1-1-546,2 0 1,-1-2-1,0-1 1,0 0 0,0 0-1,-1 0 546,3 7 0,0-1 0,0 1 0,0 0 0,0 0 0,0 0 0,0-1 0,0 1 0,0-1 0,0 0 0,0 1 0,0-1 0,0 2 0,0 0 0,-2-8 0,-1 1 0,1 1 0,1 1 0,-1 0-223,2 5 0,-1 0 1,1 1-1,1 1 0,0 1 223,-2-12 0,1 1 0,-2 4-133,-1 8 0,-1 2 0,2 0 133,6 0 0,1 1 0,-1-2 0,-5-2 0,-2-1 0,0-2 62,3 1 1,1-2 0,0-2 0,0-1-63,2 2 0,0 0 0,0-3 0,0 0 0,-2-1 27,0 2 0,-1-1 0,-1-1 0,0 0 0,1 0 0,1-1-27,2 1 0,1-1 0,2 0 0,-1 0 0,0 1 0,-1-1 0,-1 0 0,0 0 0,0 0 0,-1 0 0,0 0 0,1 2 0,-1 2 0,1 0 0,-1 1 0,1 0 0,-1 0 0,1 1-201,-2-8 0,1 1 1,0 0-1,-1 1 0,-2 0 201,-1 0 0,-1 1 0,0 0 0,-1 0 0,0-1 0,4 7 0,-1 0 0,1-1 0,0 1 0,-1-1 0,-1 0-381,-2-1 1,0 0 0,-1 0-1,0 0 1,-1-1 0,0 0 380,2 1 0,-1 1 0,0-2 0,-1 1 0,1-2 0,0 0 0,0 0-209,1 0 0,0 0 0,0 0 1,0-2-1,1 1 0,-1-1 0,0 0 1,0 0 208,1 4 0,1 0 0,-1-1 0,0 0 0,1 0 0,-1 0 0,1 1 0,-1-1 0,1 0 0,0 0 0,0 1 0,0-1 0,0 0 0,1 0 0,-1 0 0,0 1 0,1 0 0,0 1-62,-1-2 0,0 0 0,0 0 0,1 1 0,-1 0 0,1 1 0,-1 0 0,0 1 62,-1-3 0,0 1 0,0 1 0,0 0 0,-1 0 0,1 1 0,-1 0-19,-3-7 0,0 1 1,0 0-1,-1 1 1,0 1-1,-1 1 19,-1-1 0,-1 1 0,-1 1 0,0 1 0,0-1 201,0 0 1,0-1-1,0 1 1,-1 1-1,-1 4-201,-4 0 0,0 4 0,-1 1 0,0 0 0,5 2 0,-1 1 0,1 1 0,-2 2 942,-10-3 1,-2 2 0,0 2-943,4 1 0,0 1 0,-1 2 0,-4 4 0,-2 2 0,3 2 0,10 0 0,1 1 0,0 1 1638,-16 1 0,0 3-1604,12 3 1,2 0 1386,5-4 0,1 0-1421,-4 7 0,1-2 1066,3-9 1,1 1-1067,-1 9 0,1 2 950,-3-8-950,-10 8 0,35 0 0,-12 0 0,16 0 0,0 8 0,0-6 0,-8 21 0,6-11 0,-6 6 0,8-10 0,0 7 0,0-11 0,0 12 0</inkml:trace>
+  <inkml:trace contextRef="#ctx0" brushRef="#br0" timeOffset="2584">21519 2134 24575,'0'-9'0,"0"-15"0,0 20 0,-15-19 0,3 21 0,-21-22 0,21 20 0,-4-12 0,8 16 0,6 16 0,-5-4 0,7 21 0,0-13 0,7-3 0,11 7 0,-6-20 0,11 12 0,-5-16 0,-6 0 0,3-16 0,-15 12 0,0-20 0,0 7 0,0-3 0,0 3 0,0-7 0,-15 20 0,11-12 0,-20 16 0,22 0 0,-5 16 0,7-4 0,0 21 0,0-13 0,0-3 0,7 7 0,-5-20 0,22 12 0,-20-32 0,11 12 0,-15-20 0,8 7 0,-6 5 0,6-11 0,-8 21 0,-8-6 0,-9 8 0,-3 0 0,2 0 0,-5 0 0,19 8 0,-12-6 0,16 21 0,0-11 0,16 5 0,-12-9 0,19-8 0,3 0 0,-12 0 0,9 0 0,-23-8 0,0-9 0,0 5 0,0-11 0,0 21 0,-8-6 0,6 8 0,-6 0 0,8 0 0</inkml:trace>
+  <inkml:trace contextRef="#ctx0" brushRef="#br0" timeOffset="10100">19844 8625 24575,'0'10'0,"0"14"0,0-20 0,0 11 0,-16-15 0,12 8 0,-19-6 0,-3 22 0,-3-20 0,4 6 0,-1 3 0,-11 5 0,9-7 0,12 21 0,9-28 0,5 11 0,-6-7 0,8-6 0,0 6 0,0 8 0,0-12 0,0 11 0,0-15 0,0 8 0,0-6 0,8 6 0,-6-8 0,5 0 0,-7 0 0,16 0 0,-12 16 0,27-12 0,-27 11 0,12-7 0,-8-6 0,-6 22 0,21-20 0,-19 19 0,20-21 0,-22 6 0,21 8 0,-19-13 0,20 13 0,-22 0 0,21-12 0,-19 19 0,20-21 0,-22 6 0,21 8 0,-19-12 0,27 11 0,-19-15 0,6 0 0,5 0 0,-11 0 0,6 0 0,13 0 0,-25 0 0,33 0 0,-27 0 0,5 0 0,-9 0 0,8-15 0,4 11 0,-1-12 0,5 8 0,-22 6 0,21-21 0,-19 19 0,12-12 0,-16 0 0,8 13 0,-6-21 0,5 6 0,-7 7 0,0-29 0,0 27 0,0-28 0,0 21 0,0 2 0,0-5 0,0 19 0,0-28 0,-7 21 0,5-23 0,-6 15 0,-8 1 0,12-5 0,-19 19 0,21-12 0,-22 16 0,20 0 0,-27 0 0,27 0 0,-12 0 0,8 0 0,7 0 0,-7 0 0,-8 0 0,12 0 0,-12 0 0,9 0 0,5 0 0,-6 0 0,-8 0 0,12 0 0,-11 0 0,15 0 0,-8 0 0,6 0 0,-6 0 0,8 0 0,0-8 0,0 6 0,0-6 0,0-7 0,0 11-820,0-12 1,0 16 0,0 0 0</inkml:trace>
+  <inkml:trace contextRef="#ctx0" brushRef="#br0" timeOffset="43634">19068 11412 24575,'0'30'0,"0"-1"0,0 2 0,0 4 0,0 3 0,0 6 0,0 5 0,0 3 0,0 3-469,0-14 1,0 2 0,0 1 0,0 2 0,0 1 0,0 1 0,0 0 103,0-3 1,0 1 0,0 0 0,0 1 0,0 1 0,0 1 0,0 0 0,0 0 0,0 0 36,0-2 0,0 1 0,0 1 1,0 0-1,0 0 0,0 1 1,0-1-1,0 1 0,0-1 1,0 1 48,0-5 1,0 1 0,0 0 0,0 0 0,0 0 0,0 1 0,0-1 0,0-1 0,0 1 0,0-1 0,0 0 210,0 2 0,0 0 0,0 0 0,0-1 0,0 1 1,0-1-1,0 0 0,0-1 0,0 0 0,0 0 68,0 1 0,0 0 0,0 0 0,0 0 0,0-1 0,0 0 0,0-1 0,0 0 0,0 0-190,0 1 1,0-1 0,0 1 0,0-1 0,0-1 0,0 0 0,0 0 0,0 0 189,0 4 0,0 0 0,0-1 0,0 0 0,0 0 0,0 0 0,0 0 0,-1-2 0,0 1 0,0-1 0,0 0 0,0 0 0,-1 0 0,1 0 0,-1 2 0,0-1 0,0 0 0,0 0 0,-1 0 0,0 1 0,-1 0 0,0-3 0,-1 0 0,0 1 0,-1 0 0,0 0 0,0 0 0,0-1 0,1 1 0,-1 4 0,1 0 0,0-1 0,-1 1 0,1-1 0,-1 1 0,0-1 0,-1 0 0,0 1 0,0-1 0,-1 0 0,0 0 0,1-1 0,0-1 195,-1 4 1,1-1 0,-1-1 0,1 0 0,0-1 0,1-2-196,0-1 0,1 0 0,-1-1 0,1-3 0,-3-1 1079,-5 13 1,-3-3 0,4-6-1080,6 0 0,0-7 3276,-9 6-2553,15-29 2553,0 4-2681,15-16 2168,-3 0-2763,20 0 0,9 0 0,2 0 0,6 0-725,-8-1 1,4 0 0,3 1 0,0 2 724,-4 1 0,1 2 0,1 0 0,1 1 0,2-2-469,-6-1 1,0-2 0,2 1 0,1-1 0,0 0 0,0 2 0,1 0 347,-4 1 0,1 0 0,0 1 0,1 1 1,-1 0-1,2-1 0,-1 1 0,1-1-289,2 0 0,1-1 1,1 1-1,0-1 1,0 0-1,0 0 0,0 1 1,0-1 379,-4 0 1,0 0-1,0 1 1,-1-1 0,1 0-1,1 0 1,-1 0-1,0 0 1,0 0 29,1 0 0,0 0 0,0 0 0,0 0 0,0 0 0,0 0 0,0-1 0,0 2 0,0-1 0,0 0 0,-1 1 0,1-1 0,-1 1 0,1 0 0,-1 0 0,0-1 0,0 1 0,1-1 0,-1-1 0,0 1 0,0-1 0,1-1 0,-1 1 0,0 0 0,0 0 0,-1 1 0,0 0 0,4 2 0,-1 0 0,0 0 0,0 1 0,-1 0 0,0 0 0,0-1 0,0 0 0,3 0 0,0 0 0,0-1 0,-1 0 0,0 0 0,0 0 0,-2 0-255,-2 1 0,-2-1 0,0 0 0,0 1 0,-1-1 1,0 0-1,0-1 255,4 0 0,0-1 0,-1 0 0,0 0 0,0-1 0,-1 0 16,5 1 1,-1-2 0,0 1 0,-1-1 0,0 0-17,-2 0 0,-1-1 0,0 0 0,0-1 0,0 1 0,3 0 0,-1 0 0,1 0 0,0 0 0,0 0 0,-1 0 0,-1 0 0,1 0 0,0 0 0,2 0 55,-4 0 0,0 0 0,2 0 0,-1 0 1,2 0-1,-1 0-55,-3 0 0,0 0 0,1 0 0,0 0 0,0 0 0,1 0 0,0 0 0,3 0 0,1 0 0,0 0 0,1 0 0,-1 0 0,1 0 0,0 0 55,-6 0 1,1 0 0,-1 0-1,1 0 1,-1 0 0,1 0 0,0 0-1,0 0-55,0 0 0,0 0 0,0 0 0,1 0 0,-1 0 0,0 0 0,0 0 0,-1 0 0,4 0 0,-1 0 0,0 0 0,-1 0 0,0 0 0,1 0 0,0 0 0,0 0 0,1 0 0,0 0 0,0 0 0,-1 0 0,0 0 0,-1 0 0,2 0 0,-1 0 0,0 0 0,-1 0 0,0 0 0,0 0 38,0 0 0,-1 0 0,1 0 0,-1 0 0,0 0 0,-2 0-38,6 0 0,-2 0 0,-1 0 0,1 0 0,0 0 0,0 0 0,0 0 0,0 0 0,1 0 0,0 0 0,-6 0 0,0 0 0,1 1 0,0-1 0,0 0 0,1-1 0,2 0 0,0 0 0,1-1 0,0 1 0,1-1 0,0 1-162,-4 1 0,0 0 1,1 0-1,1 0 1,-1 0-1,1 0 1,-1-2 161,2 0 0,-1-1 0,1 0 0,0-1 0,0 0 0,1 0 0,0 1 0,-4 0 0,0 1 0,1-1 0,1 1 0,-1-1 0,0 1 0,1 0 0,-1-1 0,1 1 0,1-1 0,-1 1 0,0-1 0,1 1 0,-1-1 0,0 1 0,1 0 0,-2-1 0,1 1 0,0 0 0,0 0 0,0 0 0,-1 0 0,0 0 0,0 1 0,3 0 0,0 1 0,-1 0 0,0 1 0,0-1 0,-1 0 0,0 0 67,5-1 0,0 0 0,-1-1 0,-1 1 1,-1-1-1,-1 1-67,2 1 0,-3 0 0,0 0 0,0 0 0,-1-2 326,-2-1 1,0-3 0,-1 1 0,-1-1 0,-1 3-327,2 1 0,-1 2 0,-1 0 0,-2-2 581,8-5 0,-2-1 1,-3-1-582,5 1 0,-3-1 1638,-7-1 0,-4 0-1171,-2-8 2714,9-5-3181,-28-5 1530,7-9-1530,6 2 310,-20 2-310,11 21 0,-15-12 0,-15 22 0,11-5 0,-20-33 0,11 14 0,1-5 0,1-10 0,2-7 0,-1 0-576,-2 3 1,0-1 0,1-2 575,5 2 0,1-2 0,2-1 0,-1 2 0,1-3 0,1 1 0,0 1-209,-4-2 1,0 0-1,2 3 209,3-3 0,-2 2 0,-13 0 0,1 2 0,12 13 0,2 1 0,-7-2 0,0 0 0,7-1 0,2 1 834,-1 6 0,0-1-834,0-5 0,0 0 342,0 7 0,0 1-342,0 0 0,0-1 0,0-15 0,0 0 0,0 8 0,0-1 0,0 2 0,1-2 0,-2 1 0,-3-8 0,0 4 0,3 8 0,0 3 0,-7-14 0,8 17 0,0 12 0,-7-13 0,-1-6 0,1-11 0,2-5 0,1 12 0,-1-3 0,1-3 0,-1-3-469,2 4 1,-1-4 0,0-2 0,1-2 0,0 1 0,-1 0 0,2 3 311,-1 1 1,2 1 0,-1 2 0,1-1-1,-1-1 1,-1-1 156,-1-2 0,-1-2 0,0-2 0,0 0 0,-1 2 0,2 2 0,0 6-120,-1-15 0,2 7 0,-1 3 120,-1 7 0,-1 2 0,1 5 0,-3-13 0,6 25 0,-5 18 0,7 2 3276,-16 22-2431,-12-13-845,-1 1 0,-9 3 0,-2 0 0,1-3 0,-3 2 0,-2-1 0,-2 0-547,6-1 1,-2 0 0,-1 0 0,-1 0 0,-1 1 0,0-1 536,-1 1 1,-2 1 0,1 0-1,-1 0 1,-1-1 0,1-1 9,0 0 0,0-1 0,-1-1 0,1 1 0,-1-2 0,1 1 0,1-1 0,0 1 0,1-1 0,-1-1 0,1 0 0,-1-1 0,1-1 0,0-1 0,0-1 0,0 0 0,1 0 0,0 0 0,2 2 0,1 0 0,0 0 0,1 0 0,-1-1 0,1 0-427,-8-2 1,0-1-1,0 0 1,0 0 0,2 0 426,2 3 0,1 0 0,0 1 0,0-1 0,1-2 0,2-2 0,0-1 0,0 0 0,0 0 0,-1 1 0,0 2 0,0 2 0,-1 1 0,2-1 0,0-1 0,-5 0 0,2-1 0,0-1 0,-1 1-334,-2 1 0,-1 0 0,0 1 0,1 0 334,6 1 0,1 0 0,0 1 0,-1-3 0,-4-2 0,-2-2 0,1 0 0,1 2 0,4 3 0,1 2 0,1 0 0,-1-2 0,0-3 0,0-2 0,0-1 0,1 2-268,-9 1 1,1 1 0,1 0 267,-1-2 0,0-1 0,2-1 0,5-2 0,1 0 0,0 1 939,0 2 1,1 0 0,1-2-940,-5-9 0,4-2 1116,6 9 0,3-3-1116,-6-27 1764,17 22-1764,10-11 1242,8 21-1242,0-22 0,0-3 0,0-18 0,0 19 0,0-1 0,4 0 0,0 1 0,-2-19 0,2 19 0,0 1 0,-4-12 0,0 12 0,0-1 0,0-7 0,0-3 0,0 3 0,0-2 0,0-3-519,0 3 1,0-3-1,0 0 1,0-1 518,0-5 0,0 0 0,0-1 0,0-1 0,0 7 0,0-2 0,0 0 0,0 1 0,0-1 0,0-8 0,0 0 0,0 0 0,0 0 0,0 1 0,0-1 0,0 0 0,0 1 0,0 3 0,0 1 0,0 0 0,0 1-260,0 2 1,0 1 0,0 1 0,0 0 259,0-6 0,0 0 0,0 2-118,0 2 1,0 0 0,0 1 117,0 5 0,0 0 0,0 0 0,0-6 0,0 0 0,0 1 0,0 6 0,0 0 0,0 0 0,0-6 0,1 0 0,-2 1 0,-2-7 0,-2 1 0,0 11 0,-1-1 0,0 1 0,-3-12 0,-2 1 0,-6 5 0,1 0 0,10-3 0,0 2 959,-10 12 0,1 1-959,12-6 0,2-1 565,-11 8 0,0 1-565,11 0 0,0 0 207,-10-1 1,-1 1-208,9 0 0,2-1 0,-7-7 0,0-1 0,7-1 0,2 0 0,0-1 0,-2 1 0,-3 0 0,0 3 0,2-4 0,-6-12 0,-7 36 0,11-27 0,-20 36 0,22-11 0,-5 15 0,-9 0 0,4 0 0,-37 0 0,2 0 0,6 0 0,-4 0 0,-3 0 0,-2 0-269,12 0 1,0 0-1,-2 0 269,-3 0 0,0 0 0,-2 0-531,7 0 1,-1 0-1,0 0 1,-2 0 530,-4 0 0,-1 0 0,-2 0 0,1 0 0,6-1 0,0 1 0,0 0 0,0 0 0,-1 1 0,0 1 0,-1 1 0,0 1 0,1-1 0,0 0 0,-5 0 0,0-1 0,1 1 0,0 1 0,0 3 0,0 2 0,0 0 0,2-1-268,-6 0 1,2-2-1,1 0 268,2 0 0,1-1 0,2 2 0,5 1 0,3 1 0,1-3 0,-4-4 0,1 0 343,-2 10 0,0 0-343,6-11 0,1 0 1054,0 3 0,-1-1-1054,2-2 0,0-2 468,3 1 1,1 0-469,-8-1 0,-1 2 0,3 7 0,-1 0 0,-12-6 0,-4 0 0,0 6 0,0 0 0,4-7 0,-2-2 0,9 0 0,-3 1 0,3 1 0,-9 3 0,2 0 0,7-4 0,0 0 0,0 2-220,3 5 0,0 2 1,-1-2 219,-4-4 0,-1-3 0,1 1 0,-2 3 0,0 2 0,0 0 0,1-1 0,-1 1 0,0-2-349,-6-2 1,-1-2 0,1 2 348,5 3 0,1 1 0,-1-1 0,-6-2 0,-1 0 0,0-1 0,3-1 0,0-1 0,0 1 0,3 1 0,-1 0 0,1 2 0,-3 1 0,0 1 0,2-2 0,5-2 0,1-2 0,0 2 0,-4 3 0,0 1 0,0-1 0,4-4 0,1-2 0,-1 1 0,-4 0 0,-1 0 0,0 0 0,0 0 0,-1 0 0,1 0 0,-3 0 0,0 0 0,-1 0 0,-1 0 0,-1 0 0,1 0 0,1 0 0,0 1 0,0-2 0,10-2 0,-1-2 0,-1 1 0,1 0-337,-1 3 0,0 1 1,1-1-1,-1-1 337,0-3 0,0-2 0,0 1 0,-1 1 0,-4 3 0,-1 2 0,0 0 0,1 0-431,4-2 0,1 0 0,0 0 1,-2 0 430,-5 1 0,-1 1 0,0 1 0,1-1 0,6 0 0,1 0 0,0 0 0,-2 0-188,-3 0 1,-2-1-1,1 1 1,2 1 187,-3 1 0,2 1 0,0 0 261,0-3 0,0-1 0,6 4-261,5 9 0,3-1 608,0-9 0,5 0-608,7 14 1861,1-16-1861,10 0 1600,8 0-1600,0 0 64,0 8-64,0-6 0,-16 21 0,5-11 0,-7 21 0,-6-13 0,21-3 0,-13 7 0,16-20 0,16 12 0,-13-16 0,21 15 0,-22-11 0,21 20 0,-19-22 0,12 21 0,-16-19 0,8 20 0,-6-22 0,6 5 0,-8-7 0,0 0 0,15 16 0,-11-12 0,12 20 0,-8-7 0,-6-5 0,21 11 0,-19-5 0,12 10 0,-8-1 0,-6-9 0,6 5 0,-8-19 0,15 12 0,-11-8 0,12-6 0,-16 5 0,0 9 0,0-12 0,0 12 0,16-16 0,-13 0 0,13 0 0,-16 0 0,0 0 0</inkml:trace>
+  <inkml:trace contextRef="#ctx0" brushRef="#br0" timeOffset="80151">27587 16739 24575,'26'0'0,"9"0"0,10 0 0,-19 0 0,1 0 0,7 0 0,1 0 0,-3 0 0,0 0 0,8 0 0,-1 0 0,-8 0 0,0 0 0,0 0 0,-1 0 0,-4 0 0,1 0 0,6 0 0,3 0 0,3 0 0,2 0 0,0 0 0,0 0 0,6 0 0,0 0 0,-6 0 0,-1 0 0,0 0 0,0 0 0,4 0 0,-2 0 0,-9 0 0,-1 0 0,-1 0 0,-1 0 0,-4 1 0,-1-2 0,4-7 0,12 7 0,-5-7 0,9 8 0,0 0 0,-20 0 0,1 0 0,19 0 0,0 0 0,-19 0 0,-1 0 0,4 0 0,12 0 0,-5 0 0,-7-16 0,0 14 0,-1 0 0,-5-14 0,26 9 0,-13 5 0,9-6 0,-12 0 0,2 0 0,-6 7 0,-1-2 0,10-12 0,1-1 0,-4 9 0,0 2 0,-3-3 0,1-2 0,10-2 0,-2 1 0,0 7 0,-2-4 0,-5 0 0,-19 8 0,25 0 0,-38 0 0,21 0 0,-19 0 0,12 0 0,-16 16 0,0-12 0,0 12 0,-16-9 0,12-5 0,-12 6 0,16-8 0,0 0 0,-7 0 0,5 0 0,-6 0 0</inkml:trace>
+</inkml:ink>
+</file>
+
+<file path=ppt/ink/ink9.xml><?xml version="1.0" encoding="utf-8"?>
+<inkml:ink xmlns:inkml="http://www.w3.org/2003/InkML">
+  <inkml:definitions>
+    <inkml:context xml:id="ctx0">
+      <inkml:inkSource xml:id="inkSrc0">
+        <inkml:traceFormat>
+          <inkml:channel name="X" type="integer" min="-2.14748E9" max="2.14748E9" units="cm"/>
+          <inkml:channel name="Y" type="integer" min="-2.14748E9" max="2.14748E9" units="cm"/>
+          <inkml:channel name="F" type="integer" max="32767" units="dev"/>
+        </inkml:traceFormat>
+        <inkml:channelProperties>
+          <inkml:channelProperty channel="X" name="resolution" value="1000" units="1/cm"/>
+          <inkml:channelProperty channel="Y" name="resolution" value="1000" units="1/cm"/>
+          <inkml:channelProperty channel="F" name="resolution" value="0" units="1/dev"/>
+        </inkml:channelProperties>
+      </inkml:inkSource>
+      <inkml:timestamp xml:id="ts0" timeString="2026-06-09T21:11:24.255"/>
+    </inkml:context>
+    <inkml:brush xml:id="br0">
+      <inkml:brushProperty name="width" value="0.05292" units="cm"/>
+      <inkml:brushProperty name="height" value="0.05292" units="cm"/>
+      <inkml:brushProperty name="color" value="#FF0000"/>
+    </inkml:brush>
+  </inkml:definitions>
+  <inkml:trace contextRef="#ctx0" brushRef="#br0">4163 12541 24575,'35'0'0,"-3"0"0,3 0 0,1 0 0,2 0 0,-4 0 0,2 0 0,0 0-382,2 0 1,0 0 0,0 0 381,0 0 0,0 0 0,1 0-383,4 0 0,1 0 0,1 0 383,1 0 0,1 0 0,1 0 0,-9 0 0,0 0 0,2 0 0,-2 0 0,2 0 0,-1 1 0,0-1 0,0-1 0,0 0 0,0-2 0,0 1 0,-1 0 0,11 2 0,0-1 0,-1 0 0,-4 0 0,-1-2 0,0 0 0,2-2 0,0-1 0,1 1 0,3 3 0,0 2 0,-1-2 0,-3-3 0,0-1 0,-1 1 0,5 2 0,0 0 0,-3 1 0,-7 2 0,-2-1 0,0 1 95,0-3 1,1 0-1,-2 1-95,13 1 0,-2 2 0,-3-1 0,-2 0 0,-7 0 0,-2 0 0,2 0 0,-3 0 539,6 0-539,10 0 1181,-29 0-1181,-2 0 287,5 0-287,-11 0 0,21 0 0,2 8 0,-5-7 0,1-1 0,1 5 0,1-2 0,9-2 0,2-2 0,-10 1 0,0 0 0,2 0-305,2 0 1,2 0 0,0 0 304,3 0 0,2 0 0,0 0 0,1 1 0,1-1 0,-1-1 0,-1-1 0,-1-1 0,0 0 0,-2 3 0,0 0 0,0-1 0,3-6 0,1-2 0,0 1 0,-2 1 0,-1 1 0,3-1-584,-2 1 1,2 0 0,0-1 0,0-1 583,0-2 0,-1-1 0,1 1 0,0 0 0,2 2 0,1 1 0,0 0 0,-1-1-303,-5 0 1,-1-1-1,-1 0 1,-1 0 302,9-3 0,-2 0 0,-2 3-25,-7 4 0,-3 2 0,0-1 25,14-8 0,-4 1 372,-13 9 0,-1 2-372,-1-4 0,1 0 1130,3 3 0,0 2-1130,1-1 0,3 0 0,-3 0 0,4 1 0,-1-2 189,-2-3 0,0-2 0,1 0-189,9 0 0,1 0 0,-1-2 0,-1 0 0,-1-2 0,1 1 0,2 3 0,0 0 0,0 0 0,-5-2 0,0-1 0,-1 3 0,0 4 0,0 2 0,-1-2 0,-4-5 0,-2-3 0,2 3 0,2 5 0,0 3 0,-1-2-51,10-3 0,-2 1 51,-10 2 0,1 1 0,-5 1 0,18-1 0,-19 0 0,-3 0 0,1 0 0,-9 0 215,-3 0 0,-16 0 0,0 0 1</inkml:trace>
+</inkml:ink>
 </file>
 
 <file path=ppt/slideLayouts/slideLayout1.xml><?xml version="1.0" encoding="utf-8"?>
@@ -6100,7 +6641,7 @@
               <a:t>Chapter 7</a:t>
             </a:r>
             <a:br>
-              <a:rPr lang="en-US"/>
+              <a:rPr lang="en-US" dirty="0"/>
             </a:br>
             <a:endParaRPr lang="en-US" dirty="0"/>
           </a:p>
@@ -7581,6 +8122,57 @@
           </a:p>
         </p:txBody>
       </p:sp>
+      <mc:AlternateContent xmlns:mc="http://schemas.openxmlformats.org/markup-compatibility/2006">
+        <mc:Choice xmlns:p14="http://schemas.microsoft.com/office/powerpoint/2010/main" Requires="p14">
+          <p:contentPart p14:bwMode="auto" r:id="rId2">
+            <p14:nvContentPartPr>
+              <p14:cNvPr id="41" name="Ink 40">
+                <a:extLst>
+                  <a:ext uri="{FF2B5EF4-FFF2-40B4-BE49-F238E27FC236}">
+                    <a16:creationId xmlns:a16="http://schemas.microsoft.com/office/drawing/2014/main" id="{CC06B238-D079-1448-9D8D-D188BD08C8EF}"/>
+                  </a:ext>
+                </a:extLst>
+              </p14:cNvPr>
+              <p14:cNvContentPartPr/>
+              <p14:nvPr/>
+            </p14:nvContentPartPr>
+            <p14:xfrm>
+              <a:off x="7588080" y="2114280"/>
+              <a:ext cx="4020120" cy="2737440"/>
+            </p14:xfrm>
+          </p:contentPart>
+        </mc:Choice>
+        <mc:Fallback>
+          <p:pic>
+            <p:nvPicPr>
+              <p:cNvPr id="41" name="Ink 40">
+                <a:extLst>
+                  <a:ext uri="{FF2B5EF4-FFF2-40B4-BE49-F238E27FC236}">
+                    <a16:creationId xmlns:a16="http://schemas.microsoft.com/office/drawing/2014/main" id="{CC06B238-D079-1448-9D8D-D188BD08C8EF}"/>
+                  </a:ext>
+                </a:extLst>
+              </p:cNvPr>
+              <p:cNvPicPr/>
+              <p:nvPr/>
+            </p:nvPicPr>
+            <p:blipFill>
+              <a:blip r:embed="rId3"/>
+              <a:stretch>
+                <a:fillRect/>
+              </a:stretch>
+            </p:blipFill>
+            <p:spPr>
+              <a:xfrm>
+                <a:off x="7578720" y="2104920"/>
+                <a:ext cx="4038840" cy="2756160"/>
+              </a:xfrm>
+              <a:prstGeom prst="rect">
+                <a:avLst/>
+              </a:prstGeom>
+            </p:spPr>
+          </p:pic>
+        </mc:Fallback>
+      </mc:AlternateContent>
     </p:spTree>
     <p:extLst>
       <p:ext uri="{BB962C8B-B14F-4D97-AF65-F5344CB8AC3E}">
@@ -13190,6 +13782,57 @@
           </a:p>
         </p:txBody>
       </p:sp>
+      <mc:AlternateContent xmlns:mc="http://schemas.openxmlformats.org/markup-compatibility/2006">
+        <mc:Choice xmlns:p14="http://schemas.microsoft.com/office/powerpoint/2010/main" Requires="p14">
+          <p:contentPart p14:bwMode="auto" r:id="rId3">
+            <p14:nvContentPartPr>
+              <p14:cNvPr id="6" name="Ink 5">
+                <a:extLst>
+                  <a:ext uri="{FF2B5EF4-FFF2-40B4-BE49-F238E27FC236}">
+                    <a16:creationId xmlns:a16="http://schemas.microsoft.com/office/drawing/2014/main" id="{C9E84BBD-0E79-1AE4-A076-693DF624BA00}"/>
+                  </a:ext>
+                </a:extLst>
+              </p14:cNvPr>
+              <p14:cNvContentPartPr/>
+              <p14:nvPr/>
+            </p14:nvContentPartPr>
+            <p14:xfrm>
+              <a:off x="9956880" y="4127040"/>
+              <a:ext cx="1404000" cy="2484000"/>
+            </p14:xfrm>
+          </p:contentPart>
+        </mc:Choice>
+        <mc:Fallback>
+          <p:pic>
+            <p:nvPicPr>
+              <p:cNvPr id="6" name="Ink 5">
+                <a:extLst>
+                  <a:ext uri="{FF2B5EF4-FFF2-40B4-BE49-F238E27FC236}">
+                    <a16:creationId xmlns:a16="http://schemas.microsoft.com/office/drawing/2014/main" id="{C9E84BBD-0E79-1AE4-A076-693DF624BA00}"/>
+                  </a:ext>
+                </a:extLst>
+              </p:cNvPr>
+              <p:cNvPicPr/>
+              <p:nvPr/>
+            </p:nvPicPr>
+            <p:blipFill>
+              <a:blip r:embed="rId4"/>
+              <a:stretch>
+                <a:fillRect/>
+              </a:stretch>
+            </p:blipFill>
+            <p:spPr>
+              <a:xfrm>
+                <a:off x="9947520" y="4117680"/>
+                <a:ext cx="1422720" cy="2502720"/>
+              </a:xfrm>
+              <a:prstGeom prst="rect">
+                <a:avLst/>
+              </a:prstGeom>
+            </p:spPr>
+          </p:pic>
+        </mc:Fallback>
+      </mc:AlternateContent>
     </p:spTree>
     <p:extLst>
       <p:ext uri="{BB962C8B-B14F-4D97-AF65-F5344CB8AC3E}">
@@ -13526,6 +14169,57 @@
           </a:p>
         </p:txBody>
       </p:sp>
+      <mc:AlternateContent xmlns:mc="http://schemas.openxmlformats.org/markup-compatibility/2006">
+        <mc:Choice xmlns:p14="http://schemas.microsoft.com/office/powerpoint/2010/main" Requires="p14">
+          <p:contentPart p14:bwMode="auto" r:id="rId3">
+            <p14:nvContentPartPr>
+              <p14:cNvPr id="8" name="Ink 7">
+                <a:extLst>
+                  <a:ext uri="{FF2B5EF4-FFF2-40B4-BE49-F238E27FC236}">
+                    <a16:creationId xmlns:a16="http://schemas.microsoft.com/office/drawing/2014/main" id="{C0FE7310-64AA-F9FA-E8EF-DD638D6A01DC}"/>
+                  </a:ext>
+                </a:extLst>
+              </p14:cNvPr>
+              <p14:cNvContentPartPr/>
+              <p14:nvPr/>
+            </p14:nvContentPartPr>
+            <p14:xfrm>
+              <a:off x="4622760" y="761760"/>
+              <a:ext cx="3677040" cy="3639240"/>
+            </p14:xfrm>
+          </p:contentPart>
+        </mc:Choice>
+        <mc:Fallback>
+          <p:pic>
+            <p:nvPicPr>
+              <p:cNvPr id="8" name="Ink 7">
+                <a:extLst>
+                  <a:ext uri="{FF2B5EF4-FFF2-40B4-BE49-F238E27FC236}">
+                    <a16:creationId xmlns:a16="http://schemas.microsoft.com/office/drawing/2014/main" id="{C0FE7310-64AA-F9FA-E8EF-DD638D6A01DC}"/>
+                  </a:ext>
+                </a:extLst>
+              </p:cNvPr>
+              <p:cNvPicPr/>
+              <p:nvPr/>
+            </p:nvPicPr>
+            <p:blipFill>
+              <a:blip r:embed="rId4"/>
+              <a:stretch>
+                <a:fillRect/>
+              </a:stretch>
+            </p:blipFill>
+            <p:spPr>
+              <a:xfrm>
+                <a:off x="4613400" y="752400"/>
+                <a:ext cx="3695760" cy="3657960"/>
+              </a:xfrm>
+              <a:prstGeom prst="rect">
+                <a:avLst/>
+              </a:prstGeom>
+            </p:spPr>
+          </p:pic>
+        </mc:Fallback>
+      </mc:AlternateContent>
     </p:spTree>
     <p:extLst>
       <p:ext uri="{BB962C8B-B14F-4D97-AF65-F5344CB8AC3E}">
@@ -13925,6 +14619,57 @@
           </a:p>
         </p:txBody>
       </p:sp>
+      <mc:AlternateContent xmlns:mc="http://schemas.openxmlformats.org/markup-compatibility/2006">
+        <mc:Choice xmlns:p14="http://schemas.microsoft.com/office/powerpoint/2010/main" Requires="p14">
+          <p:contentPart p14:bwMode="auto" r:id="rId3">
+            <p14:nvContentPartPr>
+              <p14:cNvPr id="17" name="Ink 16">
+                <a:extLst>
+                  <a:ext uri="{FF2B5EF4-FFF2-40B4-BE49-F238E27FC236}">
+                    <a16:creationId xmlns:a16="http://schemas.microsoft.com/office/drawing/2014/main" id="{301C84DB-9A1D-22E2-D66B-066171E1DC48}"/>
+                  </a:ext>
+                </a:extLst>
+              </p14:cNvPr>
+              <p14:cNvContentPartPr/>
+              <p14:nvPr/>
+            </p14:nvContentPartPr>
+            <p14:xfrm>
+              <a:off x="7588080" y="16200"/>
+              <a:ext cx="2369160" cy="4892760"/>
+            </p14:xfrm>
+          </p:contentPart>
+        </mc:Choice>
+        <mc:Fallback>
+          <p:pic>
+            <p:nvPicPr>
+              <p:cNvPr id="17" name="Ink 16">
+                <a:extLst>
+                  <a:ext uri="{FF2B5EF4-FFF2-40B4-BE49-F238E27FC236}">
+                    <a16:creationId xmlns:a16="http://schemas.microsoft.com/office/drawing/2014/main" id="{301C84DB-9A1D-22E2-D66B-066171E1DC48}"/>
+                  </a:ext>
+                </a:extLst>
+              </p:cNvPr>
+              <p:cNvPicPr/>
+              <p:nvPr/>
+            </p:nvPicPr>
+            <p:blipFill>
+              <a:blip r:embed="rId4"/>
+              <a:stretch>
+                <a:fillRect/>
+              </a:stretch>
+            </p:blipFill>
+            <p:spPr>
+              <a:xfrm>
+                <a:off x="7578720" y="6840"/>
+                <a:ext cx="2387880" cy="4911480"/>
+              </a:xfrm>
+              <a:prstGeom prst="rect">
+                <a:avLst/>
+              </a:prstGeom>
+            </p:spPr>
+          </p:pic>
+        </mc:Fallback>
+      </mc:AlternateContent>
     </p:spTree>
     <p:extLst>
       <p:ext uri="{BB962C8B-B14F-4D97-AF65-F5344CB8AC3E}">
@@ -14219,6 +14964,57 @@
           </a:p>
         </p:txBody>
       </p:sp>
+      <mc:AlternateContent xmlns:mc="http://schemas.openxmlformats.org/markup-compatibility/2006">
+        <mc:Choice xmlns:p14="http://schemas.microsoft.com/office/powerpoint/2010/main" Requires="p14">
+          <p:contentPart p14:bwMode="auto" r:id="rId3">
+            <p14:nvContentPartPr>
+              <p14:cNvPr id="8" name="Ink 7">
+                <a:extLst>
+                  <a:ext uri="{FF2B5EF4-FFF2-40B4-BE49-F238E27FC236}">
+                    <a16:creationId xmlns:a16="http://schemas.microsoft.com/office/drawing/2014/main" id="{63B89271-34E6-9666-A2EA-8AA3F66D0ED4}"/>
+                  </a:ext>
+                </a:extLst>
+              </p14:cNvPr>
+              <p14:cNvContentPartPr/>
+              <p14:nvPr/>
+            </p14:nvContentPartPr>
+            <p14:xfrm>
+              <a:off x="374760" y="6216480"/>
+              <a:ext cx="3518280" cy="38880"/>
+            </p14:xfrm>
+          </p:contentPart>
+        </mc:Choice>
+        <mc:Fallback>
+          <p:pic>
+            <p:nvPicPr>
+              <p:cNvPr id="8" name="Ink 7">
+                <a:extLst>
+                  <a:ext uri="{FF2B5EF4-FFF2-40B4-BE49-F238E27FC236}">
+                    <a16:creationId xmlns:a16="http://schemas.microsoft.com/office/drawing/2014/main" id="{63B89271-34E6-9666-A2EA-8AA3F66D0ED4}"/>
+                  </a:ext>
+                </a:extLst>
+              </p:cNvPr>
+              <p:cNvPicPr/>
+              <p:nvPr/>
+            </p:nvPicPr>
+            <p:blipFill>
+              <a:blip r:embed="rId4"/>
+              <a:stretch>
+                <a:fillRect/>
+              </a:stretch>
+            </p:blipFill>
+            <p:spPr>
+              <a:xfrm>
+                <a:off x="365400" y="6207120"/>
+                <a:ext cx="3537000" cy="57600"/>
+              </a:xfrm>
+              <a:prstGeom prst="rect">
+                <a:avLst/>
+              </a:prstGeom>
+            </p:spPr>
+          </p:pic>
+        </mc:Fallback>
+      </mc:AlternateContent>
     </p:spTree>
     <p:extLst>
       <p:ext uri="{BB962C8B-B14F-4D97-AF65-F5344CB8AC3E}">
@@ -14366,6 +15162,57 @@
           </a:p>
         </p:txBody>
       </p:sp>
+      <mc:AlternateContent xmlns:mc="http://schemas.openxmlformats.org/markup-compatibility/2006">
+        <mc:Choice xmlns:p14="http://schemas.microsoft.com/office/powerpoint/2010/main" Requires="p14">
+          <p:contentPart p14:bwMode="auto" r:id="rId3">
+            <p14:nvContentPartPr>
+              <p14:cNvPr id="4" name="Ink 3">
+                <a:extLst>
+                  <a:ext uri="{FF2B5EF4-FFF2-40B4-BE49-F238E27FC236}">
+                    <a16:creationId xmlns:a16="http://schemas.microsoft.com/office/drawing/2014/main" id="{772A9A47-9788-6967-F4E8-F7A76298BC22}"/>
+                  </a:ext>
+                </a:extLst>
+              </p14:cNvPr>
+              <p14:cNvContentPartPr/>
+              <p14:nvPr/>
+            </p14:nvContentPartPr>
+            <p14:xfrm>
+              <a:off x="1257480" y="3060720"/>
+              <a:ext cx="9677520" cy="121320"/>
+            </p14:xfrm>
+          </p:contentPart>
+        </mc:Choice>
+        <mc:Fallback>
+          <p:pic>
+            <p:nvPicPr>
+              <p:cNvPr id="4" name="Ink 3">
+                <a:extLst>
+                  <a:ext uri="{FF2B5EF4-FFF2-40B4-BE49-F238E27FC236}">
+                    <a16:creationId xmlns:a16="http://schemas.microsoft.com/office/drawing/2014/main" id="{772A9A47-9788-6967-F4E8-F7A76298BC22}"/>
+                  </a:ext>
+                </a:extLst>
+              </p:cNvPr>
+              <p:cNvPicPr/>
+              <p:nvPr/>
+            </p:nvPicPr>
+            <p:blipFill>
+              <a:blip r:embed="rId4"/>
+              <a:stretch>
+                <a:fillRect/>
+              </a:stretch>
+            </p:blipFill>
+            <p:spPr>
+              <a:xfrm>
+                <a:off x="1248120" y="3051360"/>
+                <a:ext cx="9696240" cy="140040"/>
+              </a:xfrm>
+              <a:prstGeom prst="rect">
+                <a:avLst/>
+              </a:prstGeom>
+            </p:spPr>
+          </p:pic>
+        </mc:Fallback>
+      </mc:AlternateContent>
     </p:spTree>
     <p:extLst>
       <p:ext uri="{BB962C8B-B14F-4D97-AF65-F5344CB8AC3E}">
@@ -15683,6 +16530,57 @@
           </p:style>
         </p:cxnSp>
       </p:grpSp>
+      <mc:AlternateContent xmlns:mc="http://schemas.openxmlformats.org/markup-compatibility/2006">
+        <mc:Choice xmlns:p14="http://schemas.microsoft.com/office/powerpoint/2010/main" Requires="p14">
+          <p:contentPart p14:bwMode="auto" r:id="rId2">
+            <p14:nvContentPartPr>
+              <p14:cNvPr id="32" name="Ink 31">
+                <a:extLst>
+                  <a:ext uri="{FF2B5EF4-FFF2-40B4-BE49-F238E27FC236}">
+                    <a16:creationId xmlns:a16="http://schemas.microsoft.com/office/drawing/2014/main" id="{6286591E-2310-9BDA-8421-1CF787324066}"/>
+                  </a:ext>
+                </a:extLst>
+              </p14:cNvPr>
+              <p14:cNvContentPartPr/>
+              <p14:nvPr/>
+            </p14:nvContentPartPr>
+            <p14:xfrm>
+              <a:off x="723600" y="520560"/>
+              <a:ext cx="10776960" cy="5347080"/>
+            </p14:xfrm>
+          </p:contentPart>
+        </mc:Choice>
+        <mc:Fallback>
+          <p:pic>
+            <p:nvPicPr>
+              <p:cNvPr id="32" name="Ink 31">
+                <a:extLst>
+                  <a:ext uri="{FF2B5EF4-FFF2-40B4-BE49-F238E27FC236}">
+                    <a16:creationId xmlns:a16="http://schemas.microsoft.com/office/drawing/2014/main" id="{6286591E-2310-9BDA-8421-1CF787324066}"/>
+                  </a:ext>
+                </a:extLst>
+              </p:cNvPr>
+              <p:cNvPicPr/>
+              <p:nvPr/>
+            </p:nvPicPr>
+            <p:blipFill>
+              <a:blip r:embed="rId3"/>
+              <a:stretch>
+                <a:fillRect/>
+              </a:stretch>
+            </p:blipFill>
+            <p:spPr>
+              <a:xfrm>
+                <a:off x="714240" y="511200"/>
+                <a:ext cx="10795680" cy="5365800"/>
+              </a:xfrm>
+              <a:prstGeom prst="rect">
+                <a:avLst/>
+              </a:prstGeom>
+            </p:spPr>
+          </p:pic>
+        </mc:Fallback>
+      </mc:AlternateContent>
     </p:spTree>
     <p:extLst>
       <p:ext uri="{BB962C8B-B14F-4D97-AF65-F5344CB8AC3E}">
@@ -16356,6 +17254,57 @@
           </a:p>
         </p:txBody>
       </p:sp>
+      <mc:AlternateContent xmlns:mc="http://schemas.openxmlformats.org/markup-compatibility/2006">
+        <mc:Choice xmlns:p14="http://schemas.microsoft.com/office/powerpoint/2010/main" Requires="p14">
+          <p:contentPart p14:bwMode="auto" r:id="rId3">
+            <p14:nvContentPartPr>
+              <p14:cNvPr id="40" name="Ink 39">
+                <a:extLst>
+                  <a:ext uri="{FF2B5EF4-FFF2-40B4-BE49-F238E27FC236}">
+                    <a16:creationId xmlns:a16="http://schemas.microsoft.com/office/drawing/2014/main" id="{7E787FCB-3BD6-2E6E-8461-39D82D9C5C26}"/>
+                  </a:ext>
+                </a:extLst>
+              </p14:cNvPr>
+              <p14:cNvContentPartPr/>
+              <p14:nvPr/>
+            </p14:nvContentPartPr>
+            <p14:xfrm>
+              <a:off x="6375240" y="387360"/>
+              <a:ext cx="4997880" cy="6045840"/>
+            </p14:xfrm>
+          </p:contentPart>
+        </mc:Choice>
+        <mc:Fallback>
+          <p:pic>
+            <p:nvPicPr>
+              <p:cNvPr id="40" name="Ink 39">
+                <a:extLst>
+                  <a:ext uri="{FF2B5EF4-FFF2-40B4-BE49-F238E27FC236}">
+                    <a16:creationId xmlns:a16="http://schemas.microsoft.com/office/drawing/2014/main" id="{7E787FCB-3BD6-2E6E-8461-39D82D9C5C26}"/>
+                  </a:ext>
+                </a:extLst>
+              </p:cNvPr>
+              <p:cNvPicPr/>
+              <p:nvPr/>
+            </p:nvPicPr>
+            <p:blipFill>
+              <a:blip r:embed="rId4"/>
+              <a:stretch>
+                <a:fillRect/>
+              </a:stretch>
+            </p:blipFill>
+            <p:spPr>
+              <a:xfrm>
+                <a:off x="6365880" y="378000"/>
+                <a:ext cx="5016600" cy="6064560"/>
+              </a:xfrm>
+              <a:prstGeom prst="rect">
+                <a:avLst/>
+              </a:prstGeom>
+            </p:spPr>
+          </p:pic>
+        </mc:Fallback>
+      </mc:AlternateContent>
     </p:spTree>
     <p:extLst>
       <p:ext uri="{BB962C8B-B14F-4D97-AF65-F5344CB8AC3E}">
@@ -22005,6 +22954,57 @@
           </a:p>
         </p:txBody>
       </p:sp>
+      <mc:AlternateContent xmlns:mc="http://schemas.openxmlformats.org/markup-compatibility/2006">
+        <mc:Choice xmlns:p14="http://schemas.microsoft.com/office/powerpoint/2010/main" Requires="p14">
+          <p:contentPart p14:bwMode="auto" r:id="rId2">
+            <p14:nvContentPartPr>
+              <p14:cNvPr id="38" name="Ink 37">
+                <a:extLst>
+                  <a:ext uri="{FF2B5EF4-FFF2-40B4-BE49-F238E27FC236}">
+                    <a16:creationId xmlns:a16="http://schemas.microsoft.com/office/drawing/2014/main" id="{CA43A210-3631-41AD-F67F-9F2D4348475D}"/>
+                  </a:ext>
+                </a:extLst>
+              </p14:cNvPr>
+              <p14:cNvContentPartPr/>
+              <p14:nvPr/>
+            </p14:nvContentPartPr>
+            <p14:xfrm>
+              <a:off x="1498680" y="4349520"/>
+              <a:ext cx="2495880" cy="165960"/>
+            </p14:xfrm>
+          </p:contentPart>
+        </mc:Choice>
+        <mc:Fallback>
+          <p:pic>
+            <p:nvPicPr>
+              <p:cNvPr id="38" name="Ink 37">
+                <a:extLst>
+                  <a:ext uri="{FF2B5EF4-FFF2-40B4-BE49-F238E27FC236}">
+                    <a16:creationId xmlns:a16="http://schemas.microsoft.com/office/drawing/2014/main" id="{CA43A210-3631-41AD-F67F-9F2D4348475D}"/>
+                  </a:ext>
+                </a:extLst>
+              </p:cNvPr>
+              <p:cNvPicPr/>
+              <p:nvPr/>
+            </p:nvPicPr>
+            <p:blipFill>
+              <a:blip r:embed="rId3"/>
+              <a:stretch>
+                <a:fillRect/>
+              </a:stretch>
+            </p:blipFill>
+            <p:spPr>
+              <a:xfrm>
+                <a:off x="1489320" y="4340160"/>
+                <a:ext cx="2514600" cy="184680"/>
+              </a:xfrm>
+              <a:prstGeom prst="rect">
+                <a:avLst/>
+              </a:prstGeom>
+            </p:spPr>
+          </p:pic>
+        </mc:Fallback>
+      </mc:AlternateContent>
     </p:spTree>
     <p:extLst>
       <p:ext uri="{BB962C8B-B14F-4D97-AF65-F5344CB8AC3E}">
@@ -23457,6 +24457,57 @@
           </a:p>
         </p:txBody>
       </p:sp>
+      <mc:AlternateContent xmlns:mc="http://schemas.openxmlformats.org/markup-compatibility/2006">
+        <mc:Choice xmlns:p14="http://schemas.microsoft.com/office/powerpoint/2010/main" Requires="p14">
+          <p:contentPart p14:bwMode="auto" r:id="rId2">
+            <p14:nvContentPartPr>
+              <p14:cNvPr id="38" name="Ink 37">
+                <a:extLst>
+                  <a:ext uri="{FF2B5EF4-FFF2-40B4-BE49-F238E27FC236}">
+                    <a16:creationId xmlns:a16="http://schemas.microsoft.com/office/drawing/2014/main" id="{C16120D3-233B-3D42-2A56-CAF926169AD0}"/>
+                  </a:ext>
+                </a:extLst>
+              </p14:cNvPr>
+              <p14:cNvContentPartPr/>
+              <p14:nvPr/>
+            </p14:nvContentPartPr>
+            <p14:xfrm>
+              <a:off x="9867960" y="2660760"/>
+              <a:ext cx="248040" cy="44640"/>
+            </p14:xfrm>
+          </p:contentPart>
+        </mc:Choice>
+        <mc:Fallback>
+          <p:pic>
+            <p:nvPicPr>
+              <p:cNvPr id="38" name="Ink 37">
+                <a:extLst>
+                  <a:ext uri="{FF2B5EF4-FFF2-40B4-BE49-F238E27FC236}">
+                    <a16:creationId xmlns:a16="http://schemas.microsoft.com/office/drawing/2014/main" id="{C16120D3-233B-3D42-2A56-CAF926169AD0}"/>
+                  </a:ext>
+                </a:extLst>
+              </p:cNvPr>
+              <p:cNvPicPr/>
+              <p:nvPr/>
+            </p:nvPicPr>
+            <p:blipFill>
+              <a:blip r:embed="rId3"/>
+              <a:stretch>
+                <a:fillRect/>
+              </a:stretch>
+            </p:blipFill>
+            <p:spPr>
+              <a:xfrm>
+                <a:off x="9858600" y="2651400"/>
+                <a:ext cx="266760" cy="63360"/>
+              </a:xfrm>
+              <a:prstGeom prst="rect">
+                <a:avLst/>
+              </a:prstGeom>
+            </p:spPr>
+          </p:pic>
+        </mc:Fallback>
+      </mc:AlternateContent>
     </p:spTree>
     <p:extLst>
       <p:ext uri="{BB962C8B-B14F-4D97-AF65-F5344CB8AC3E}">
@@ -25476,6 +26527,57 @@
           </a:p>
         </p:txBody>
       </p:sp>
+      <mc:AlternateContent xmlns:mc="http://schemas.openxmlformats.org/markup-compatibility/2006">
+        <mc:Choice xmlns:p14="http://schemas.microsoft.com/office/powerpoint/2010/main" Requires="p14">
+          <p:contentPart p14:bwMode="auto" r:id="rId3">
+            <p14:nvContentPartPr>
+              <p14:cNvPr id="4" name="Ink 3">
+                <a:extLst>
+                  <a:ext uri="{FF2B5EF4-FFF2-40B4-BE49-F238E27FC236}">
+                    <a16:creationId xmlns:a16="http://schemas.microsoft.com/office/drawing/2014/main" id="{558A236A-6042-6A42-6002-ED1BE7AACD55}"/>
+                  </a:ext>
+                </a:extLst>
+              </p14:cNvPr>
+              <p14:cNvContentPartPr/>
+              <p14:nvPr/>
+            </p14:nvContentPartPr>
+            <p14:xfrm>
+              <a:off x="6787800" y="3111480"/>
+              <a:ext cx="4782240" cy="3638880"/>
+            </p14:xfrm>
+          </p:contentPart>
+        </mc:Choice>
+        <mc:Fallback>
+          <p:pic>
+            <p:nvPicPr>
+              <p:cNvPr id="4" name="Ink 3">
+                <a:extLst>
+                  <a:ext uri="{FF2B5EF4-FFF2-40B4-BE49-F238E27FC236}">
+                    <a16:creationId xmlns:a16="http://schemas.microsoft.com/office/drawing/2014/main" id="{558A236A-6042-6A42-6002-ED1BE7AACD55}"/>
+                  </a:ext>
+                </a:extLst>
+              </p:cNvPr>
+              <p:cNvPicPr/>
+              <p:nvPr/>
+            </p:nvPicPr>
+            <p:blipFill>
+              <a:blip r:embed="rId4"/>
+              <a:stretch>
+                <a:fillRect/>
+              </a:stretch>
+            </p:blipFill>
+            <p:spPr>
+              <a:xfrm>
+                <a:off x="6778440" y="3102120"/>
+                <a:ext cx="4800960" cy="3657600"/>
+              </a:xfrm>
+              <a:prstGeom prst="rect">
+                <a:avLst/>
+              </a:prstGeom>
+            </p:spPr>
+          </p:pic>
+        </mc:Fallback>
+      </mc:AlternateContent>
     </p:spTree>
     <p:extLst>
       <p:ext uri="{BB962C8B-B14F-4D97-AF65-F5344CB8AC3E}">
@@ -26038,6 +27140,57 @@
           </a:prstGeom>
         </p:spPr>
       </p:pic>
+      <mc:AlternateContent xmlns:mc="http://schemas.openxmlformats.org/markup-compatibility/2006">
+        <mc:Choice xmlns:p14="http://schemas.microsoft.com/office/powerpoint/2010/main" Requires="p14">
+          <p:contentPart p14:bwMode="auto" r:id="rId3">
+            <p14:nvContentPartPr>
+              <p14:cNvPr id="5" name="Ink 4">
+                <a:extLst>
+                  <a:ext uri="{FF2B5EF4-FFF2-40B4-BE49-F238E27FC236}">
+                    <a16:creationId xmlns:a16="http://schemas.microsoft.com/office/drawing/2014/main" id="{C44B00DA-E1B1-5360-0DA3-7EA015E1524F}"/>
+                  </a:ext>
+                </a:extLst>
+              </p14:cNvPr>
+              <p14:cNvContentPartPr/>
+              <p14:nvPr/>
+            </p14:nvContentPartPr>
+            <p14:xfrm>
+              <a:off x="8178840" y="1365120"/>
+              <a:ext cx="2019600" cy="356040"/>
+            </p14:xfrm>
+          </p:contentPart>
+        </mc:Choice>
+        <mc:Fallback>
+          <p:pic>
+            <p:nvPicPr>
+              <p:cNvPr id="5" name="Ink 4">
+                <a:extLst>
+                  <a:ext uri="{FF2B5EF4-FFF2-40B4-BE49-F238E27FC236}">
+                    <a16:creationId xmlns:a16="http://schemas.microsoft.com/office/drawing/2014/main" id="{C44B00DA-E1B1-5360-0DA3-7EA015E1524F}"/>
+                  </a:ext>
+                </a:extLst>
+              </p:cNvPr>
+              <p:cNvPicPr/>
+              <p:nvPr/>
+            </p:nvPicPr>
+            <p:blipFill>
+              <a:blip r:embed="rId4"/>
+              <a:stretch>
+                <a:fillRect/>
+              </a:stretch>
+            </p:blipFill>
+            <p:spPr>
+              <a:xfrm>
+                <a:off x="8169480" y="1355760"/>
+                <a:ext cx="2038320" cy="374760"/>
+              </a:xfrm>
+              <a:prstGeom prst="rect">
+                <a:avLst/>
+              </a:prstGeom>
+            </p:spPr>
+          </p:pic>
+        </mc:Fallback>
+      </mc:AlternateContent>
     </p:spTree>
     <p:extLst>
       <p:ext uri="{BB962C8B-B14F-4D97-AF65-F5344CB8AC3E}">
@@ -26457,6 +27610,57 @@
           </a:p>
         </p:txBody>
       </p:sp>
+      <mc:AlternateContent xmlns:mc="http://schemas.openxmlformats.org/markup-compatibility/2006">
+        <mc:Choice xmlns:p14="http://schemas.microsoft.com/office/powerpoint/2010/main" Requires="p14">
+          <p:contentPart p14:bwMode="auto" r:id="rId3">
+            <p14:nvContentPartPr>
+              <p14:cNvPr id="6" name="Ink 5">
+                <a:extLst>
+                  <a:ext uri="{FF2B5EF4-FFF2-40B4-BE49-F238E27FC236}">
+                    <a16:creationId xmlns:a16="http://schemas.microsoft.com/office/drawing/2014/main" id="{0AE8F9E5-62CD-70AC-5935-6951B894C302}"/>
+                  </a:ext>
+                </a:extLst>
+              </p14:cNvPr>
+              <p14:cNvContentPartPr/>
+              <p14:nvPr/>
+            </p14:nvContentPartPr>
+            <p14:xfrm>
+              <a:off x="6249240" y="279360"/>
+              <a:ext cx="5919120" cy="2889000"/>
+            </p14:xfrm>
+          </p:contentPart>
+        </mc:Choice>
+        <mc:Fallback>
+          <p:pic>
+            <p:nvPicPr>
+              <p:cNvPr id="6" name="Ink 5">
+                <a:extLst>
+                  <a:ext uri="{FF2B5EF4-FFF2-40B4-BE49-F238E27FC236}">
+                    <a16:creationId xmlns:a16="http://schemas.microsoft.com/office/drawing/2014/main" id="{0AE8F9E5-62CD-70AC-5935-6951B894C302}"/>
+                  </a:ext>
+                </a:extLst>
+              </p:cNvPr>
+              <p:cNvPicPr/>
+              <p:nvPr/>
+            </p:nvPicPr>
+            <p:blipFill>
+              <a:blip r:embed="rId4"/>
+              <a:stretch>
+                <a:fillRect/>
+              </a:stretch>
+            </p:blipFill>
+            <p:spPr>
+              <a:xfrm>
+                <a:off x="6239880" y="270000"/>
+                <a:ext cx="5937840" cy="2907720"/>
+              </a:xfrm>
+              <a:prstGeom prst="rect">
+                <a:avLst/>
+              </a:prstGeom>
+            </p:spPr>
+          </p:pic>
+        </mc:Fallback>
+      </mc:AlternateContent>
     </p:spTree>
     <p:extLst>
       <p:ext uri="{BB962C8B-B14F-4D97-AF65-F5344CB8AC3E}">
@@ -26608,6 +27812,57 @@
           </a:p>
         </p:txBody>
       </p:sp>
+      <mc:AlternateContent xmlns:mc="http://schemas.openxmlformats.org/markup-compatibility/2006">
+        <mc:Choice xmlns:p14="http://schemas.microsoft.com/office/powerpoint/2010/main" Requires="p14">
+          <p:contentPart p14:bwMode="auto" r:id="rId2">
+            <p14:nvContentPartPr>
+              <p14:cNvPr id="4" name="Ink 3">
+                <a:extLst>
+                  <a:ext uri="{FF2B5EF4-FFF2-40B4-BE49-F238E27FC236}">
+                    <a16:creationId xmlns:a16="http://schemas.microsoft.com/office/drawing/2014/main" id="{DC8F3783-1757-DBE1-526E-741D70CBF9AB}"/>
+                  </a:ext>
+                </a:extLst>
+              </p14:cNvPr>
+              <p14:cNvContentPartPr/>
+              <p14:nvPr/>
+            </p14:nvContentPartPr>
+            <p14:xfrm>
+              <a:off x="3308400" y="4299120"/>
+              <a:ext cx="6045480" cy="140040"/>
+            </p14:xfrm>
+          </p:contentPart>
+        </mc:Choice>
+        <mc:Fallback>
+          <p:pic>
+            <p:nvPicPr>
+              <p:cNvPr id="4" name="Ink 3">
+                <a:extLst>
+                  <a:ext uri="{FF2B5EF4-FFF2-40B4-BE49-F238E27FC236}">
+                    <a16:creationId xmlns:a16="http://schemas.microsoft.com/office/drawing/2014/main" id="{DC8F3783-1757-DBE1-526E-741D70CBF9AB}"/>
+                  </a:ext>
+                </a:extLst>
+              </p:cNvPr>
+              <p:cNvPicPr/>
+              <p:nvPr/>
+            </p:nvPicPr>
+            <p:blipFill>
+              <a:blip r:embed="rId3"/>
+              <a:stretch>
+                <a:fillRect/>
+              </a:stretch>
+            </p:blipFill>
+            <p:spPr>
+              <a:xfrm>
+                <a:off x="3299040" y="4289760"/>
+                <a:ext cx="6064200" cy="158760"/>
+              </a:xfrm>
+              <a:prstGeom prst="rect">
+                <a:avLst/>
+              </a:prstGeom>
+            </p:spPr>
+          </p:pic>
+        </mc:Fallback>
+      </mc:AlternateContent>
     </p:spTree>
     <p:extLst>
       <p:ext uri="{BB962C8B-B14F-4D97-AF65-F5344CB8AC3E}">

--- a/lectures/lecture12_13_14/lecture_trees.pptx
+++ b/lectures/lecture12_13_14/lecture_trees.pptx
@@ -41,6 +41,10 @@
     <p:sldId id="290" r:id="rId35"/>
     <p:sldId id="288" r:id="rId36"/>
     <p:sldId id="289" r:id="rId37"/>
+    <p:sldId id="292" r:id="rId38"/>
+    <p:sldId id="293" r:id="rId39"/>
+    <p:sldId id="294" r:id="rId40"/>
+    <p:sldId id="295" r:id="rId41"/>
   </p:sldIdLst>
   <p:sldSz cx="12192000" cy="6858000"/>
   <p:notesSz cx="6858000" cy="9144000"/>
@@ -150,7 +154,7 @@
 <file path=ppt/revisionInfo.xml><?xml version="1.0" encoding="utf-8"?>
 <p1510:revInfo xmlns:a="http://schemas.openxmlformats.org/drawingml/2006/main" xmlns:r="http://schemas.openxmlformats.org/officeDocument/2006/relationships" xmlns:p1510="http://schemas.microsoft.com/office/powerpoint/2015/10/main">
   <p1510:revLst>
-    <p1510:client id="{6FCAF34C-9882-874F-A274-460BA42E4592}" v="104" dt="2026-06-09T21:36:42.642"/>
+    <p1510:client id="{6FCAF34C-9882-874F-A274-460BA42E4592}" v="119" dt="2026-06-11T18:53:20.165"/>
   </p1510:revLst>
 </p1510:revInfo>
 </file>
@@ -160,7 +164,7 @@
   <pc:docChgLst>
     <pc:chgData name="Toby Donaldson" userId="2e6e5431-bb17-4c41-9985-d39c50d83c73" providerId="ADAL" clId="{F31BC264-820E-54C4-A6D1-F92AF9CC222E}"/>
     <pc:docChg chg="undo custSel addSld delSld modSld sldOrd">
-      <pc:chgData name="Toby Donaldson" userId="2e6e5431-bb17-4c41-9985-d39c50d83c73" providerId="ADAL" clId="{F31BC264-820E-54C4-A6D1-F92AF9CC222E}" dt="2026-06-09T21:36:42.635" v="6319"/>
+      <pc:chgData name="Toby Donaldson" userId="2e6e5431-bb17-4c41-9985-d39c50d83c73" providerId="ADAL" clId="{F31BC264-820E-54C4-A6D1-F92AF9CC222E}" dt="2026-06-11T18:55:40.822" v="6824" actId="20577"/>
       <pc:docMkLst>
         <pc:docMk/>
       </pc:docMkLst>
@@ -201,14 +205,6 @@
             <ac:spMk id="2" creationId="{FF2F0E47-4721-635A-BDEF-4F1DBFB27E73}"/>
           </ac:spMkLst>
         </pc:spChg>
-        <pc:spChg chg="del">
-          <ac:chgData name="Toby Donaldson" userId="2e6e5431-bb17-4c41-9985-d39c50d83c73" providerId="ADAL" clId="{F31BC264-820E-54C4-A6D1-F92AF9CC222E}" dt="2026-06-09T03:33:16.421" v="292" actId="21"/>
-          <ac:spMkLst>
-            <pc:docMk/>
-            <pc:sldMk cId="2141975521" sldId="257"/>
-            <ac:spMk id="3" creationId="{9A37E640-1064-A205-B5B8-5E8E1DC372E5}"/>
-          </ac:spMkLst>
-        </pc:spChg>
         <pc:picChg chg="add mod">
           <ac:chgData name="Toby Donaldson" userId="2e6e5431-bb17-4c41-9985-d39c50d83c73" providerId="ADAL" clId="{F31BC264-820E-54C4-A6D1-F92AF9CC222E}" dt="2026-06-09T03:34:14.054" v="308" actId="1076"/>
           <ac:picMkLst>
@@ -240,14 +236,6 @@
             <ac:picMk id="3" creationId="{5CF60146-163C-3151-FA02-439FC10CCC11}"/>
           </ac:picMkLst>
         </pc:picChg>
-        <pc:picChg chg="del">
-          <ac:chgData name="Toby Donaldson" userId="2e6e5431-bb17-4c41-9985-d39c50d83c73" providerId="ADAL" clId="{F31BC264-820E-54C4-A6D1-F92AF9CC222E}" dt="2026-06-09T03:35:10.308" v="312" actId="21"/>
-          <ac:picMkLst>
-            <pc:docMk/>
-            <pc:sldMk cId="840441275" sldId="258"/>
-            <ac:picMk id="4" creationId="{DA84F4DB-40D6-CDBF-333A-EB6405DCD5D2}"/>
-          </ac:picMkLst>
-        </pc:picChg>
       </pc:sldChg>
       <pc:sldChg chg="addSp delSp modSp add mod">
         <pc:chgData name="Toby Donaldson" userId="2e6e5431-bb17-4c41-9985-d39c50d83c73" providerId="ADAL" clId="{F31BC264-820E-54C4-A6D1-F92AF9CC222E}" dt="2026-06-09T03:36:49.403" v="363" actId="14100"/>
@@ -263,14 +251,6 @@
             <ac:spMk id="2" creationId="{02F5C6F7-3FA8-8C5C-ED13-52E0126BB4FD}"/>
           </ac:spMkLst>
         </pc:spChg>
-        <pc:picChg chg="del">
-          <ac:chgData name="Toby Donaldson" userId="2e6e5431-bb17-4c41-9985-d39c50d83c73" providerId="ADAL" clId="{F31BC264-820E-54C4-A6D1-F92AF9CC222E}" dt="2026-06-09T03:36:21.563" v="348" actId="21"/>
-          <ac:picMkLst>
-            <pc:docMk/>
-            <pc:sldMk cId="3263256051" sldId="259"/>
-            <ac:picMk id="3" creationId="{ECEEA8A5-7E37-E373-6F9A-AED2F8E52713}"/>
-          </ac:picMkLst>
-        </pc:picChg>
         <pc:picChg chg="add mod">
           <ac:chgData name="Toby Donaldson" userId="2e6e5431-bb17-4c41-9985-d39c50d83c73" providerId="ADAL" clId="{F31BC264-820E-54C4-A6D1-F92AF9CC222E}" dt="2026-06-09T03:36:49.403" v="363" actId="14100"/>
           <ac:picMkLst>
@@ -294,36 +274,12 @@
             <ac:spMk id="2" creationId="{4ADD3EE6-7A9D-ED20-881A-337FEA6F5AEA}"/>
           </ac:spMkLst>
         </pc:spChg>
-        <pc:spChg chg="add del mod">
-          <ac:chgData name="Toby Donaldson" userId="2e6e5431-bb17-4c41-9985-d39c50d83c73" providerId="ADAL" clId="{F31BC264-820E-54C4-A6D1-F92AF9CC222E}" dt="2026-06-09T04:36:50.942" v="2234" actId="478"/>
-          <ac:spMkLst>
-            <pc:docMk/>
-            <pc:sldMk cId="3184262657" sldId="260"/>
-            <ac:spMk id="5" creationId="{490233CB-E0D6-EFD7-3ED0-7BB106C3734D}"/>
-          </ac:spMkLst>
-        </pc:spChg>
-        <pc:spChg chg="add del mod">
-          <ac:chgData name="Toby Donaldson" userId="2e6e5431-bb17-4c41-9985-d39c50d83c73" providerId="ADAL" clId="{F31BC264-820E-54C4-A6D1-F92AF9CC222E}" dt="2026-06-09T04:05:11.848" v="932"/>
-          <ac:spMkLst>
-            <pc:docMk/>
-            <pc:sldMk cId="3184262657" sldId="260"/>
-            <ac:spMk id="6" creationId="{139518F2-191C-9660-7CC2-30ABA1DFB34A}"/>
-          </ac:spMkLst>
-        </pc:spChg>
         <pc:picChg chg="add mod">
           <ac:chgData name="Toby Donaldson" userId="2e6e5431-bb17-4c41-9985-d39c50d83c73" providerId="ADAL" clId="{F31BC264-820E-54C4-A6D1-F92AF9CC222E}" dt="2026-06-09T03:37:55.230" v="369" actId="14100"/>
           <ac:picMkLst>
             <pc:docMk/>
             <pc:sldMk cId="3184262657" sldId="260"/>
             <ac:picMk id="3" creationId="{F3C13234-1BF8-7305-47B1-F804BC85C2EA}"/>
-          </ac:picMkLst>
-        </pc:picChg>
-        <pc:picChg chg="del">
-          <ac:chgData name="Toby Donaldson" userId="2e6e5431-bb17-4c41-9985-d39c50d83c73" providerId="ADAL" clId="{F31BC264-820E-54C4-A6D1-F92AF9CC222E}" dt="2026-06-09T03:37:09.574" v="365" actId="21"/>
-          <ac:picMkLst>
-            <pc:docMk/>
-            <pc:sldMk cId="3184262657" sldId="260"/>
-            <ac:picMk id="4" creationId="{11AA7C07-5D90-A312-B831-58790417119C}"/>
           </ac:picMkLst>
         </pc:picChg>
       </pc:sldChg>
@@ -357,14 +313,6 @@
             <ac:picMk id="3" creationId="{B0335EB4-E47C-3247-030D-FF98C0AF6898}"/>
           </ac:picMkLst>
         </pc:picChg>
-        <pc:picChg chg="del mod ord">
-          <ac:chgData name="Toby Donaldson" userId="2e6e5431-bb17-4c41-9985-d39c50d83c73" providerId="ADAL" clId="{F31BC264-820E-54C4-A6D1-F92AF9CC222E}" dt="2026-06-09T03:42:30.342" v="480" actId="21"/>
-          <ac:picMkLst>
-            <pc:docMk/>
-            <pc:sldMk cId="2378066371" sldId="261"/>
-            <ac:picMk id="4" creationId="{E4FDFC02-A8FC-4020-4C88-03A1A7C35652}"/>
-          </ac:picMkLst>
-        </pc:picChg>
       </pc:sldChg>
       <pc:sldChg chg="addSp delSp modSp add mod">
         <pc:chgData name="Toby Donaldson" userId="2e6e5431-bb17-4c41-9985-d39c50d83c73" providerId="ADAL" clId="{F31BC264-820E-54C4-A6D1-F92AF9CC222E}" dt="2026-06-09T03:44:16.524" v="510" actId="20577"/>
@@ -380,14 +328,6 @@
             <ac:spMk id="2" creationId="{D530E52A-453C-E632-2F8B-AD12C359ACF5}"/>
           </ac:spMkLst>
         </pc:spChg>
-        <pc:picChg chg="del">
-          <ac:chgData name="Toby Donaldson" userId="2e6e5431-bb17-4c41-9985-d39c50d83c73" providerId="ADAL" clId="{F31BC264-820E-54C4-A6D1-F92AF9CC222E}" dt="2026-06-09T03:43:56.995" v="502" actId="21"/>
-          <ac:picMkLst>
-            <pc:docMk/>
-            <pc:sldMk cId="2501075412" sldId="262"/>
-            <ac:picMk id="3" creationId="{DEA0FB82-88DA-6923-F512-61009C35E650}"/>
-          </ac:picMkLst>
-        </pc:picChg>
         <pc:picChg chg="add mod">
           <ac:chgData name="Toby Donaldson" userId="2e6e5431-bb17-4c41-9985-d39c50d83c73" providerId="ADAL" clId="{F31BC264-820E-54C4-A6D1-F92AF9CC222E}" dt="2026-06-09T03:44:13.684" v="505" actId="14100"/>
           <ac:picMkLst>
@@ -433,22 +373,6 @@
             <pc:docMk/>
             <pc:sldMk cId="1091161656" sldId="263"/>
             <ac:spMk id="7" creationId="{F9AB903C-A7F1-BF08-1F3D-4D87095CBEFE}"/>
-          </ac:spMkLst>
-        </pc:spChg>
-        <pc:spChg chg="add del mod">
-          <ac:chgData name="Toby Donaldson" userId="2e6e5431-bb17-4c41-9985-d39c50d83c73" providerId="ADAL" clId="{F31BC264-820E-54C4-A6D1-F92AF9CC222E}" dt="2026-06-09T03:52:37.133" v="563" actId="21"/>
-          <ac:spMkLst>
-            <pc:docMk/>
-            <pc:sldMk cId="1091161656" sldId="263"/>
-            <ac:spMk id="8" creationId="{DB62CF31-52E8-9187-0A60-9D1C29BC1988}"/>
-          </ac:spMkLst>
-        </pc:spChg>
-        <pc:spChg chg="add del mod">
-          <ac:chgData name="Toby Donaldson" userId="2e6e5431-bb17-4c41-9985-d39c50d83c73" providerId="ADAL" clId="{F31BC264-820E-54C4-A6D1-F92AF9CC222E}" dt="2026-06-09T03:52:33.379" v="562" actId="21"/>
-          <ac:spMkLst>
-            <pc:docMk/>
-            <pc:sldMk cId="1091161656" sldId="263"/>
-            <ac:spMk id="10" creationId="{8D673B68-8E1F-4615-66BF-E2D04F1A82EF}"/>
           </ac:spMkLst>
         </pc:spChg>
         <pc:spChg chg="mod">
@@ -611,22 +535,6 @@
             <ac:grpSpMk id="51" creationId="{8BDA2F83-8214-E0CC-6F30-89920F4ECC0B}"/>
           </ac:grpSpMkLst>
         </pc:grpChg>
-        <pc:picChg chg="add del mod">
-          <ac:chgData name="Toby Donaldson" userId="2e6e5431-bb17-4c41-9985-d39c50d83c73" providerId="ADAL" clId="{F31BC264-820E-54C4-A6D1-F92AF9CC222E}" dt="2026-06-09T03:56:06.125" v="605" actId="21"/>
-          <ac:picMkLst>
-            <pc:docMk/>
-            <pc:sldMk cId="1091161656" sldId="263"/>
-            <ac:picMk id="3" creationId="{2BEA7AC8-41B3-20F7-D3D3-FE8B5BFE6E55}"/>
-          </ac:picMkLst>
-        </pc:picChg>
-        <pc:picChg chg="del">
-          <ac:chgData name="Toby Donaldson" userId="2e6e5431-bb17-4c41-9985-d39c50d83c73" providerId="ADAL" clId="{F31BC264-820E-54C4-A6D1-F92AF9CC222E}" dt="2026-06-09T03:48:44.203" v="514" actId="21"/>
-          <ac:picMkLst>
-            <pc:docMk/>
-            <pc:sldMk cId="1091161656" sldId="263"/>
-            <ac:picMk id="4" creationId="{6BE97DBB-1CF0-0CAB-1563-F5E9272D4E32}"/>
-          </ac:picMkLst>
-        </pc:picChg>
         <pc:cxnChg chg="add mod">
           <ac:chgData name="Toby Donaldson" userId="2e6e5431-bb17-4c41-9985-d39c50d83c73" providerId="ADAL" clId="{F31BC264-820E-54C4-A6D1-F92AF9CC222E}" dt="2026-06-09T03:55:26.215" v="597" actId="14100"/>
           <ac:cxnSpMkLst>
@@ -676,13 +584,6 @@
           </ac:cxnSpMkLst>
         </pc:cxnChg>
       </pc:sldChg>
-      <pc:sldChg chg="addSp delSp modSp del mod">
-        <pc:chgData name="Toby Donaldson" userId="2e6e5431-bb17-4c41-9985-d39c50d83c73" providerId="ADAL" clId="{F31BC264-820E-54C4-A6D1-F92AF9CC222E}" dt="2026-06-09T03:27:21.325" v="249" actId="2696"/>
-        <pc:sldMkLst>
-          <pc:docMk/>
-          <pc:sldMk cId="1207579823" sldId="263"/>
-        </pc:sldMkLst>
-      </pc:sldChg>
       <pc:sldChg chg="modSp new mod">
         <pc:chgData name="Toby Donaldson" userId="2e6e5431-bb17-4c41-9985-d39c50d83c73" providerId="ADAL" clId="{F31BC264-820E-54C4-A6D1-F92AF9CC222E}" dt="2026-06-09T19:27:29.300" v="6302" actId="20577"/>
         <pc:sldMkLst>
@@ -705,13 +606,6 @@
             <ac:spMk id="3" creationId="{51439C22-30C6-2BF5-70B2-93CB1683F8C5}"/>
           </ac:spMkLst>
         </pc:spChg>
-      </pc:sldChg>
-      <pc:sldChg chg="del">
-        <pc:chgData name="Toby Donaldson" userId="2e6e5431-bb17-4c41-9985-d39c50d83c73" providerId="ADAL" clId="{F31BC264-820E-54C4-A6D1-F92AF9CC222E}" dt="2026-06-09T03:27:15.290" v="248" actId="2696"/>
-        <pc:sldMkLst>
-          <pc:docMk/>
-          <pc:sldMk cId="808696199" sldId="265"/>
-        </pc:sldMkLst>
       </pc:sldChg>
       <pc:sldChg chg="addSp delSp modSp add mod">
         <pc:chgData name="Toby Donaldson" userId="2e6e5431-bb17-4c41-9985-d39c50d83c73" providerId="ADAL" clId="{F31BC264-820E-54C4-A6D1-F92AF9CC222E}" dt="2026-06-09T21:36:42.635" v="6319"/>
@@ -847,14 +741,6 @@
             <ac:spMk id="40" creationId="{7D86CAD0-20AB-4000-6D5E-2BA8B4E03423}"/>
           </ac:spMkLst>
         </pc:spChg>
-        <pc:grpChg chg="del">
-          <ac:chgData name="Toby Donaldson" userId="2e6e5431-bb17-4c41-9985-d39c50d83c73" providerId="ADAL" clId="{F31BC264-820E-54C4-A6D1-F92AF9CC222E}" dt="2026-06-09T04:02:29.374" v="908" actId="165"/>
-          <ac:grpSpMkLst>
-            <pc:docMk/>
-            <pc:sldMk cId="2251480560" sldId="265"/>
-            <ac:grpSpMk id="4" creationId="{D44EA82B-5A69-2E3B-95A7-3D74193D8973}"/>
-          </ac:grpSpMkLst>
-        </pc:grpChg>
         <pc:grpChg chg="mod topLvl">
           <ac:chgData name="Toby Donaldson" userId="2e6e5431-bb17-4c41-9985-d39c50d83c73" providerId="ADAL" clId="{F31BC264-820E-54C4-A6D1-F92AF9CC222E}" dt="2026-06-09T04:04:27.913" v="922" actId="1076"/>
           <ac:grpSpMkLst>
@@ -968,13 +854,6 @@
           </ac:cxnSpMkLst>
         </pc:cxnChg>
       </pc:sldChg>
-      <pc:sldChg chg="del">
-        <pc:chgData name="Toby Donaldson" userId="2e6e5431-bb17-4c41-9985-d39c50d83c73" providerId="ADAL" clId="{F31BC264-820E-54C4-A6D1-F92AF9CC222E}" dt="2026-06-09T03:27:15.290" v="248" actId="2696"/>
-        <pc:sldMkLst>
-          <pc:docMk/>
-          <pc:sldMk cId="383429740" sldId="266"/>
-        </pc:sldMkLst>
-      </pc:sldChg>
       <pc:sldChg chg="addSp delSp modSp add mod ord">
         <pc:chgData name="Toby Donaldson" userId="2e6e5431-bb17-4c41-9985-d39c50d83c73" providerId="ADAL" clId="{F31BC264-820E-54C4-A6D1-F92AF9CC222E}" dt="2026-06-09T04:14:18.012" v="1433" actId="20578"/>
         <pc:sldMkLst>
@@ -989,14 +868,6 @@
             <ac:spMk id="3" creationId="{74B7E22E-A9A4-7914-BB92-AECA5EF204E8}"/>
           </ac:spMkLst>
         </pc:spChg>
-        <pc:spChg chg="add del mod">
-          <ac:chgData name="Toby Donaldson" userId="2e6e5431-bb17-4c41-9985-d39c50d83c73" providerId="ADAL" clId="{F31BC264-820E-54C4-A6D1-F92AF9CC222E}" dt="2026-06-09T04:12:54.102" v="1426" actId="21"/>
-          <ac:spMkLst>
-            <pc:docMk/>
-            <pc:sldMk cId="564830593" sldId="266"/>
-            <ac:spMk id="4" creationId="{CDF1BE14-38C8-8434-B9B4-A8F190A9C9E3}"/>
-          </ac:spMkLst>
-        </pc:spChg>
         <pc:spChg chg="mod">
           <ac:chgData name="Toby Donaldson" userId="2e6e5431-bb17-4c41-9985-d39c50d83c73" providerId="ADAL" clId="{F31BC264-820E-54C4-A6D1-F92AF9CC222E}" dt="2026-06-09T04:11:46.939" v="1331" actId="1076"/>
           <ac:spMkLst>
@@ -1005,50 +876,12 @@
             <ac:spMk id="38" creationId="{0DCEC58B-1BF4-A3B5-60A2-9FF7E251C438}"/>
           </ac:spMkLst>
         </pc:spChg>
-        <pc:spChg chg="del">
-          <ac:chgData name="Toby Donaldson" userId="2e6e5431-bb17-4c41-9985-d39c50d83c73" providerId="ADAL" clId="{F31BC264-820E-54C4-A6D1-F92AF9CC222E}" dt="2026-06-09T04:11:28.981" v="1309" actId="21"/>
-          <ac:spMkLst>
-            <pc:docMk/>
-            <pc:sldMk cId="564830593" sldId="266"/>
-            <ac:spMk id="39" creationId="{910E4EA8-7C56-F04A-209B-51B2A9B85149}"/>
-          </ac:spMkLst>
-        </pc:spChg>
-        <pc:spChg chg="del">
-          <ac:chgData name="Toby Donaldson" userId="2e6e5431-bb17-4c41-9985-d39c50d83c73" providerId="ADAL" clId="{F31BC264-820E-54C4-A6D1-F92AF9CC222E}" dt="2026-06-09T04:11:28.981" v="1309" actId="21"/>
-          <ac:spMkLst>
-            <pc:docMk/>
-            <pc:sldMk cId="564830593" sldId="266"/>
-            <ac:spMk id="40" creationId="{6D9B88BF-EE30-B82F-D554-4C44B278139D}"/>
-          </ac:spMkLst>
-        </pc:spChg>
-        <pc:cxnChg chg="del mod">
-          <ac:chgData name="Toby Donaldson" userId="2e6e5431-bb17-4c41-9985-d39c50d83c73" providerId="ADAL" clId="{F31BC264-820E-54C4-A6D1-F92AF9CC222E}" dt="2026-06-09T04:11:52.758" v="1332" actId="21"/>
-          <ac:cxnSpMkLst>
-            <pc:docMk/>
-            <pc:sldMk cId="564830593" sldId="266"/>
-            <ac:cxnSpMk id="13" creationId="{658A91AE-B80F-A98D-12FF-F3FE1586A2FD}"/>
-          </ac:cxnSpMkLst>
-        </pc:cxnChg>
-      </pc:sldChg>
-      <pc:sldChg chg="del">
-        <pc:chgData name="Toby Donaldson" userId="2e6e5431-bb17-4c41-9985-d39c50d83c73" providerId="ADAL" clId="{F31BC264-820E-54C4-A6D1-F92AF9CC222E}" dt="2026-06-09T03:27:15.290" v="248" actId="2696"/>
-        <pc:sldMkLst>
-          <pc:docMk/>
-          <pc:sldMk cId="1940584518" sldId="267"/>
-        </pc:sldMkLst>
       </pc:sldChg>
       <pc:sldChg chg="add ord">
         <pc:chgData name="Toby Donaldson" userId="2e6e5431-bb17-4c41-9985-d39c50d83c73" providerId="ADAL" clId="{F31BC264-820E-54C4-A6D1-F92AF9CC222E}" dt="2026-06-09T04:13:27.729" v="1431" actId="20578"/>
         <pc:sldMkLst>
           <pc:docMk/>
           <pc:sldMk cId="3448458330" sldId="267"/>
-        </pc:sldMkLst>
-      </pc:sldChg>
-      <pc:sldChg chg="add del">
-        <pc:chgData name="Toby Donaldson" userId="2e6e5431-bb17-4c41-9985-d39c50d83c73" providerId="ADAL" clId="{F31BC264-820E-54C4-A6D1-F92AF9CC222E}" dt="2026-06-09T04:13:10.176" v="1428" actId="2696"/>
-        <pc:sldMkLst>
-          <pc:docMk/>
-          <pc:sldMk cId="416897547" sldId="268"/>
         </pc:sldMkLst>
       </pc:sldChg>
       <pc:sldChg chg="addSp delSp modSp add mod ord">
@@ -1063,38 +896,6 @@
             <pc:docMk/>
             <pc:sldMk cId="2786486047" sldId="268"/>
             <ac:spMk id="4" creationId="{3EA1B574-4384-1C7A-680D-2A63AF4C36CB}"/>
-          </ac:spMkLst>
-        </pc:spChg>
-        <pc:spChg chg="add del mod">
-          <ac:chgData name="Toby Donaldson" userId="2e6e5431-bb17-4c41-9985-d39c50d83c73" providerId="ADAL" clId="{F31BC264-820E-54C4-A6D1-F92AF9CC222E}" dt="2026-06-09T04:15:49.761" v="1512" actId="21"/>
-          <ac:spMkLst>
-            <pc:docMk/>
-            <pc:sldMk cId="2786486047" sldId="268"/>
-            <ac:spMk id="32" creationId="{FEE119D0-820A-8049-927C-697EC6B9F786}"/>
-          </ac:spMkLst>
-        </pc:spChg>
-        <pc:spChg chg="del">
-          <ac:chgData name="Toby Donaldson" userId="2e6e5431-bb17-4c41-9985-d39c50d83c73" providerId="ADAL" clId="{F31BC264-820E-54C4-A6D1-F92AF9CC222E}" dt="2026-06-09T04:13:35.131" v="1432" actId="21"/>
-          <ac:spMkLst>
-            <pc:docMk/>
-            <pc:sldMk cId="2786486047" sldId="268"/>
-            <ac:spMk id="38" creationId="{2858C701-245B-0A9C-849E-DA03F155E52A}"/>
-          </ac:spMkLst>
-        </pc:spChg>
-        <pc:spChg chg="del">
-          <ac:chgData name="Toby Donaldson" userId="2e6e5431-bb17-4c41-9985-d39c50d83c73" providerId="ADAL" clId="{F31BC264-820E-54C4-A6D1-F92AF9CC222E}" dt="2026-06-09T04:13:35.131" v="1432" actId="21"/>
-          <ac:spMkLst>
-            <pc:docMk/>
-            <pc:sldMk cId="2786486047" sldId="268"/>
-            <ac:spMk id="39" creationId="{224DEC1D-10DA-B00C-9C12-F9A7A2A7D2EC}"/>
-          </ac:spMkLst>
-        </pc:spChg>
-        <pc:spChg chg="del">
-          <ac:chgData name="Toby Donaldson" userId="2e6e5431-bb17-4c41-9985-d39c50d83c73" providerId="ADAL" clId="{F31BC264-820E-54C4-A6D1-F92AF9CC222E}" dt="2026-06-09T04:13:35.131" v="1432" actId="21"/>
-          <ac:spMkLst>
-            <pc:docMk/>
-            <pc:sldMk cId="2786486047" sldId="268"/>
-            <ac:spMk id="40" creationId="{B134AB46-7D4C-497F-A4AE-EAEFFD21EDB6}"/>
           </ac:spMkLst>
         </pc:spChg>
         <pc:cxnChg chg="mod">
@@ -1114,55 +915,11 @@
           </ac:cxnSpMkLst>
         </pc:cxnChg>
       </pc:sldChg>
-      <pc:sldChg chg="del">
-        <pc:chgData name="Toby Donaldson" userId="2e6e5431-bb17-4c41-9985-d39c50d83c73" providerId="ADAL" clId="{F31BC264-820E-54C4-A6D1-F92AF9CC222E}" dt="2026-06-09T03:27:15.290" v="248" actId="2696"/>
-        <pc:sldMkLst>
-          <pc:docMk/>
-          <pc:sldMk cId="2891476017" sldId="268"/>
-        </pc:sldMkLst>
-      </pc:sldChg>
       <pc:sldChg chg="add">
         <pc:chgData name="Toby Donaldson" userId="2e6e5431-bb17-4c41-9985-d39c50d83c73" providerId="ADAL" clId="{F31BC264-820E-54C4-A6D1-F92AF9CC222E}" dt="2026-06-09T04:15:43.502" v="1511" actId="2890"/>
         <pc:sldMkLst>
           <pc:docMk/>
           <pc:sldMk cId="1775365488" sldId="269"/>
-        </pc:sldMkLst>
-      </pc:sldChg>
-      <pc:sldChg chg="del">
-        <pc:chgData name="Toby Donaldson" userId="2e6e5431-bb17-4c41-9985-d39c50d83c73" providerId="ADAL" clId="{F31BC264-820E-54C4-A6D1-F92AF9CC222E}" dt="2026-06-09T03:27:15.290" v="248" actId="2696"/>
-        <pc:sldMkLst>
-          <pc:docMk/>
-          <pc:sldMk cId="2347613437" sldId="269"/>
-        </pc:sldMkLst>
-      </pc:sldChg>
-      <pc:sldChg chg="modSp add del mod">
-        <pc:chgData name="Toby Donaldson" userId="2e6e5431-bb17-4c41-9985-d39c50d83c73" providerId="ADAL" clId="{F31BC264-820E-54C4-A6D1-F92AF9CC222E}" dt="2026-06-09T04:17:01.523" v="1589" actId="2696"/>
-        <pc:sldMkLst>
-          <pc:docMk/>
-          <pc:sldMk cId="118295643" sldId="270"/>
-        </pc:sldMkLst>
-        <pc:spChg chg="mod">
-          <ac:chgData name="Toby Donaldson" userId="2e6e5431-bb17-4c41-9985-d39c50d83c73" providerId="ADAL" clId="{F31BC264-820E-54C4-A6D1-F92AF9CC222E}" dt="2026-06-09T04:16:46.564" v="1588" actId="20577"/>
-          <ac:spMkLst>
-            <pc:docMk/>
-            <pc:sldMk cId="118295643" sldId="270"/>
-            <ac:spMk id="32" creationId="{4EEC3806-1EB9-D86F-E003-AF639FB89F69}"/>
-          </ac:spMkLst>
-        </pc:spChg>
-        <pc:cxnChg chg="mod">
-          <ac:chgData name="Toby Donaldson" userId="2e6e5431-bb17-4c41-9985-d39c50d83c73" providerId="ADAL" clId="{F31BC264-820E-54C4-A6D1-F92AF9CC222E}" dt="2026-06-09T04:16:23.710" v="1517" actId="14100"/>
-          <ac:cxnSpMkLst>
-            <pc:docMk/>
-            <pc:sldMk cId="118295643" sldId="270"/>
-            <ac:cxnSpMk id="33" creationId="{87AAE3C2-257B-8294-77EB-EC423CA9A666}"/>
-          </ac:cxnSpMkLst>
-        </pc:cxnChg>
-      </pc:sldChg>
-      <pc:sldChg chg="del">
-        <pc:chgData name="Toby Donaldson" userId="2e6e5431-bb17-4c41-9985-d39c50d83c73" providerId="ADAL" clId="{F31BC264-820E-54C4-A6D1-F92AF9CC222E}" dt="2026-06-09T03:27:15.290" v="248" actId="2696"/>
-        <pc:sldMkLst>
-          <pc:docMk/>
-          <pc:sldMk cId="264488919" sldId="270"/>
         </pc:sldMkLst>
       </pc:sldChg>
       <pc:sldChg chg="addSp modSp add mod">
@@ -1202,28 +959,12 @@
           <pc:docMk/>
           <pc:sldMk cId="1717266924" sldId="271"/>
         </pc:sldMkLst>
-        <pc:spChg chg="del">
-          <ac:chgData name="Toby Donaldson" userId="2e6e5431-bb17-4c41-9985-d39c50d83c73" providerId="ADAL" clId="{F31BC264-820E-54C4-A6D1-F92AF9CC222E}" dt="2026-06-09T04:20:27.279" v="1661" actId="21"/>
-          <ac:spMkLst>
-            <pc:docMk/>
-            <pc:sldMk cId="1717266924" sldId="271"/>
-            <ac:spMk id="3" creationId="{1C04D1C6-6E15-1841-91B3-31FEAC3AE807}"/>
-          </ac:spMkLst>
-        </pc:spChg>
         <pc:spChg chg="mod">
           <ac:chgData name="Toby Donaldson" userId="2e6e5431-bb17-4c41-9985-d39c50d83c73" providerId="ADAL" clId="{F31BC264-820E-54C4-A6D1-F92AF9CC222E}" dt="2026-06-09T19:36:46.591" v="6303" actId="14100"/>
           <ac:spMkLst>
             <pc:docMk/>
             <pc:sldMk cId="1717266924" sldId="271"/>
             <ac:spMk id="5" creationId="{2CF0A960-160C-157F-B85B-747CB4087ACD}"/>
-          </ac:spMkLst>
-        </pc:spChg>
-        <pc:spChg chg="add del">
-          <ac:chgData name="Toby Donaldson" userId="2e6e5431-bb17-4c41-9985-d39c50d83c73" providerId="ADAL" clId="{F31BC264-820E-54C4-A6D1-F92AF9CC222E}" dt="2026-06-09T04:21:28.925" v="1663" actId="21"/>
-          <ac:spMkLst>
-            <pc:docMk/>
-            <pc:sldMk cId="1717266924" sldId="271"/>
-            <ac:spMk id="6" creationId="{A29D6B4E-A9CD-CC92-4D1B-C9804A5C8C38}"/>
           </ac:spMkLst>
         </pc:spChg>
         <pc:spChg chg="add mod">
@@ -1250,20 +991,6 @@
             <ac:inkMk id="8" creationId="{C0FE7310-64AA-F9FA-E8EF-DD638D6A01DC}"/>
           </ac:inkMkLst>
         </pc:inkChg>
-      </pc:sldChg>
-      <pc:sldChg chg="del">
-        <pc:chgData name="Toby Donaldson" userId="2e6e5431-bb17-4c41-9985-d39c50d83c73" providerId="ADAL" clId="{F31BC264-820E-54C4-A6D1-F92AF9CC222E}" dt="2026-06-09T03:27:15.290" v="248" actId="2696"/>
-        <pc:sldMkLst>
-          <pc:docMk/>
-          <pc:sldMk cId="2913241967" sldId="271"/>
-        </pc:sldMkLst>
-      </pc:sldChg>
-      <pc:sldChg chg="del">
-        <pc:chgData name="Toby Donaldson" userId="2e6e5431-bb17-4c41-9985-d39c50d83c73" providerId="ADAL" clId="{F31BC264-820E-54C4-A6D1-F92AF9CC222E}" dt="2026-06-09T03:27:15.290" v="248" actId="2696"/>
-        <pc:sldMkLst>
-          <pc:docMk/>
-          <pc:sldMk cId="1338478413" sldId="272"/>
-        </pc:sldMkLst>
       </pc:sldChg>
       <pc:sldChg chg="addSp modSp add mod">
         <pc:chgData name="Toby Donaldson" userId="2e6e5431-bb17-4c41-9985-d39c50d83c73" providerId="ADAL" clId="{F31BC264-820E-54C4-A6D1-F92AF9CC222E}" dt="2026-06-09T21:36:42.635" v="6319"/>
@@ -1296,54 +1023,6 @@
           </ac:spMkLst>
         </pc:spChg>
         <pc:spChg chg="add mod">
-          <ac:chgData name="Toby Donaldson" userId="2e6e5431-bb17-4c41-9985-d39c50d83c73" providerId="ADAL" clId="{F31BC264-820E-54C4-A6D1-F92AF9CC222E}" dt="2026-06-09T04:27:50.403" v="1866"/>
-          <ac:spMkLst>
-            <pc:docMk/>
-            <pc:sldMk cId="1403331413" sldId="272"/>
-            <ac:spMk id="8" creationId="{E51930BF-0B92-06FC-D918-CF0E7AB8322F}"/>
-          </ac:spMkLst>
-        </pc:spChg>
-        <pc:spChg chg="add mod">
-          <ac:chgData name="Toby Donaldson" userId="2e6e5431-bb17-4c41-9985-d39c50d83c73" providerId="ADAL" clId="{F31BC264-820E-54C4-A6D1-F92AF9CC222E}" dt="2026-06-09T04:27:50.403" v="1866"/>
-          <ac:spMkLst>
-            <pc:docMk/>
-            <pc:sldMk cId="1403331413" sldId="272"/>
-            <ac:spMk id="9" creationId="{91994030-A06D-F331-E7DC-4E9348020BA7}"/>
-          </ac:spMkLst>
-        </pc:spChg>
-        <pc:spChg chg="add mod">
-          <ac:chgData name="Toby Donaldson" userId="2e6e5431-bb17-4c41-9985-d39c50d83c73" providerId="ADAL" clId="{F31BC264-820E-54C4-A6D1-F92AF9CC222E}" dt="2026-06-09T04:27:50.403" v="1866"/>
-          <ac:spMkLst>
-            <pc:docMk/>
-            <pc:sldMk cId="1403331413" sldId="272"/>
-            <ac:spMk id="10" creationId="{25B23472-9815-0556-F8B0-2863E59A7754}"/>
-          </ac:spMkLst>
-        </pc:spChg>
-        <pc:spChg chg="add mod">
-          <ac:chgData name="Toby Donaldson" userId="2e6e5431-bb17-4c41-9985-d39c50d83c73" providerId="ADAL" clId="{F31BC264-820E-54C4-A6D1-F92AF9CC222E}" dt="2026-06-09T04:27:59.008" v="1867"/>
-          <ac:spMkLst>
-            <pc:docMk/>
-            <pc:sldMk cId="1403331413" sldId="272"/>
-            <ac:spMk id="12" creationId="{32099AC1-0B0B-7662-02B5-87811B9A1045}"/>
-          </ac:spMkLst>
-        </pc:spChg>
-        <pc:spChg chg="add mod">
-          <ac:chgData name="Toby Donaldson" userId="2e6e5431-bb17-4c41-9985-d39c50d83c73" providerId="ADAL" clId="{F31BC264-820E-54C4-A6D1-F92AF9CC222E}" dt="2026-06-09T04:27:59.008" v="1867"/>
-          <ac:spMkLst>
-            <pc:docMk/>
-            <pc:sldMk cId="1403331413" sldId="272"/>
-            <ac:spMk id="13" creationId="{CEEACB2C-CDD0-B121-5E2F-0C3D082FD11B}"/>
-          </ac:spMkLst>
-        </pc:spChg>
-        <pc:spChg chg="add mod">
-          <ac:chgData name="Toby Donaldson" userId="2e6e5431-bb17-4c41-9985-d39c50d83c73" providerId="ADAL" clId="{F31BC264-820E-54C4-A6D1-F92AF9CC222E}" dt="2026-06-09T04:27:59.008" v="1867"/>
-          <ac:spMkLst>
-            <pc:docMk/>
-            <pc:sldMk cId="1403331413" sldId="272"/>
-            <ac:spMk id="14" creationId="{335BA3BD-52FE-FC1A-0B5E-2A57CC33F676}"/>
-          </ac:spMkLst>
-        </pc:spChg>
-        <pc:spChg chg="add mod">
           <ac:chgData name="Toby Donaldson" userId="2e6e5431-bb17-4c41-9985-d39c50d83c73" providerId="ADAL" clId="{F31BC264-820E-54C4-A6D1-F92AF9CC222E}" dt="2026-06-09T04:31:12.106" v="2028" actId="1076"/>
           <ac:spMkLst>
             <pc:docMk/>
@@ -1365,22 +1044,6 @@
             <pc:docMk/>
             <pc:sldMk cId="1403331413" sldId="272"/>
             <ac:picMk id="4" creationId="{9CE7EF84-C4DA-68B0-7B91-D5ABD826E845}"/>
-          </ac:picMkLst>
-        </pc:picChg>
-        <pc:picChg chg="add mod">
-          <ac:chgData name="Toby Donaldson" userId="2e6e5431-bb17-4c41-9985-d39c50d83c73" providerId="ADAL" clId="{F31BC264-820E-54C4-A6D1-F92AF9CC222E}" dt="2026-06-09T04:27:50.403" v="1866"/>
-          <ac:picMkLst>
-            <pc:docMk/>
-            <pc:sldMk cId="1403331413" sldId="272"/>
-            <ac:picMk id="7" creationId="{9DBCF49A-88E9-EAD1-926C-E695754AD39D}"/>
-          </ac:picMkLst>
-        </pc:picChg>
-        <pc:picChg chg="add mod">
-          <ac:chgData name="Toby Donaldson" userId="2e6e5431-bb17-4c41-9985-d39c50d83c73" providerId="ADAL" clId="{F31BC264-820E-54C4-A6D1-F92AF9CC222E}" dt="2026-06-09T04:27:59.008" v="1867"/>
-          <ac:picMkLst>
-            <pc:docMk/>
-            <pc:sldMk cId="1403331413" sldId="272"/>
-            <ac:picMk id="11" creationId="{8CE70EF5-9E5F-3AA5-23C1-75D757D7C089}"/>
           </ac:picMkLst>
         </pc:picChg>
         <pc:inkChg chg="add">
@@ -1414,14 +1077,6 @@
             <ac:spMk id="5" creationId="{4EFC3613-D0F3-5F43-7AE5-A6EE29FA9BC7}"/>
           </ac:spMkLst>
         </pc:spChg>
-        <pc:spChg chg="add del">
-          <ac:chgData name="Toby Donaldson" userId="2e6e5431-bb17-4c41-9985-d39c50d83c73" providerId="ADAL" clId="{F31BC264-820E-54C4-A6D1-F92AF9CC222E}" dt="2026-06-09T04:35:19.105" v="2214" actId="11529"/>
-          <ac:spMkLst>
-            <pc:docMk/>
-            <pc:sldMk cId="1675940344" sldId="273"/>
-            <ac:spMk id="6" creationId="{BC5ED10D-0C04-345B-53F9-FB7397A1C1E8}"/>
-          </ac:spMkLst>
-        </pc:spChg>
         <pc:spChg chg="add mod">
           <ac:chgData name="Toby Donaldson" userId="2e6e5431-bb17-4c41-9985-d39c50d83c73" providerId="ADAL" clId="{F31BC264-820E-54C4-A6D1-F92AF9CC222E}" dt="2026-06-09T04:36:00.337" v="2233" actId="692"/>
           <ac:spMkLst>
@@ -1447,20 +1102,6 @@
           </ac:inkMkLst>
         </pc:inkChg>
       </pc:sldChg>
-      <pc:sldChg chg="del">
-        <pc:chgData name="Toby Donaldson" userId="2e6e5431-bb17-4c41-9985-d39c50d83c73" providerId="ADAL" clId="{F31BC264-820E-54C4-A6D1-F92AF9CC222E}" dt="2026-06-09T03:27:15.290" v="248" actId="2696"/>
-        <pc:sldMkLst>
-          <pc:docMk/>
-          <pc:sldMk cId="2123719014" sldId="273"/>
-        </pc:sldMkLst>
-      </pc:sldChg>
-      <pc:sldChg chg="del">
-        <pc:chgData name="Toby Donaldson" userId="2e6e5431-bb17-4c41-9985-d39c50d83c73" providerId="ADAL" clId="{F31BC264-820E-54C4-A6D1-F92AF9CC222E}" dt="2026-06-09T03:27:15.290" v="248" actId="2696"/>
-        <pc:sldMkLst>
-          <pc:docMk/>
-          <pc:sldMk cId="2286729824" sldId="274"/>
-        </pc:sldMkLst>
-      </pc:sldChg>
       <pc:sldChg chg="addSp add">
         <pc:chgData name="Toby Donaldson" userId="2e6e5431-bb17-4c41-9985-d39c50d83c73" providerId="ADAL" clId="{F31BC264-820E-54C4-A6D1-F92AF9CC222E}" dt="2026-06-09T21:36:42.635" v="6319"/>
         <pc:sldMkLst>
@@ -1475,20 +1116,6 @@
             <ac:inkMk id="4" creationId="{772A9A47-9788-6967-F4E8-F7A76298BC22}"/>
           </ac:inkMkLst>
         </pc:inkChg>
-      </pc:sldChg>
-      <pc:sldChg chg="add del">
-        <pc:chgData name="Toby Donaldson" userId="2e6e5431-bb17-4c41-9985-d39c50d83c73" providerId="ADAL" clId="{F31BC264-820E-54C4-A6D1-F92AF9CC222E}" dt="2026-06-09T04:33:19.156" v="2037"/>
-        <pc:sldMkLst>
-          <pc:docMk/>
-          <pc:sldMk cId="3371374990" sldId="274"/>
-        </pc:sldMkLst>
-      </pc:sldChg>
-      <pc:sldChg chg="del">
-        <pc:chgData name="Toby Donaldson" userId="2e6e5431-bb17-4c41-9985-d39c50d83c73" providerId="ADAL" clId="{F31BC264-820E-54C4-A6D1-F92AF9CC222E}" dt="2026-06-09T03:27:15.290" v="248" actId="2696"/>
-        <pc:sldMkLst>
-          <pc:docMk/>
-          <pc:sldMk cId="594134466" sldId="275"/>
-        </pc:sldMkLst>
       </pc:sldChg>
       <pc:sldChg chg="addSp modSp new mod">
         <pc:chgData name="Toby Donaldson" userId="2e6e5431-bb17-4c41-9985-d39c50d83c73" providerId="ADAL" clId="{F31BC264-820E-54C4-A6D1-F92AF9CC222E}" dt="2026-06-09T21:36:42.635" v="6319"/>
@@ -1679,14 +1306,6 @@
             <ac:spMk id="39" creationId="{C85B7EA3-C443-DB97-569D-1CEFC58223E9}"/>
           </ac:spMkLst>
         </pc:spChg>
-        <pc:grpChg chg="del mod">
-          <ac:chgData name="Toby Donaldson" userId="2e6e5431-bb17-4c41-9985-d39c50d83c73" providerId="ADAL" clId="{F31BC264-820E-54C4-A6D1-F92AF9CC222E}" dt="2026-06-09T04:42:57.573" v="2491" actId="21"/>
-          <ac:grpSpMkLst>
-            <pc:docMk/>
-            <pc:sldMk cId="1525370219" sldId="276"/>
-            <ac:grpSpMk id="4" creationId="{EF5EED8C-83AE-D984-E254-985A45C27609}"/>
-          </ac:grpSpMkLst>
-        </pc:grpChg>
         <pc:picChg chg="add mod">
           <ac:chgData name="Toby Donaldson" userId="2e6e5431-bb17-4c41-9985-d39c50d83c73" providerId="ADAL" clId="{F31BC264-820E-54C4-A6D1-F92AF9CC222E}" dt="2026-06-09T04:46:46.802" v="2630" actId="1076"/>
           <ac:picMkLst>
@@ -1703,68 +1322,6 @@
             <ac:inkMk id="40" creationId="{7E787FCB-3BD6-2E6E-8461-39D82D9C5C26}"/>
           </ac:inkMkLst>
         </pc:inkChg>
-        <pc:cxnChg chg="mod">
-          <ac:chgData name="Toby Donaldson" userId="2e6e5431-bb17-4c41-9985-d39c50d83c73" providerId="ADAL" clId="{F31BC264-820E-54C4-A6D1-F92AF9CC222E}" dt="2026-06-09T04:42:57.573" v="2491" actId="21"/>
-          <ac:cxnSpMkLst>
-            <pc:docMk/>
-            <pc:sldMk cId="1525370219" sldId="276"/>
-            <ac:cxnSpMk id="12" creationId="{89CDADD9-8033-3378-9F75-87673DE2F0C5}"/>
-          </ac:cxnSpMkLst>
-        </pc:cxnChg>
-        <pc:cxnChg chg="mod">
-          <ac:chgData name="Toby Donaldson" userId="2e6e5431-bb17-4c41-9985-d39c50d83c73" providerId="ADAL" clId="{F31BC264-820E-54C4-A6D1-F92AF9CC222E}" dt="2026-06-09T04:42:57.573" v="2491" actId="21"/>
-          <ac:cxnSpMkLst>
-            <pc:docMk/>
-            <pc:sldMk cId="1525370219" sldId="276"/>
-            <ac:cxnSpMk id="13" creationId="{9085773A-FA8B-4E65-05A6-9E12033073CF}"/>
-          </ac:cxnSpMkLst>
-        </pc:cxnChg>
-        <pc:cxnChg chg="mod">
-          <ac:chgData name="Toby Donaldson" userId="2e6e5431-bb17-4c41-9985-d39c50d83c73" providerId="ADAL" clId="{F31BC264-820E-54C4-A6D1-F92AF9CC222E}" dt="2026-06-09T04:42:57.573" v="2491" actId="21"/>
-          <ac:cxnSpMkLst>
-            <pc:docMk/>
-            <pc:sldMk cId="1525370219" sldId="276"/>
-            <ac:cxnSpMk id="14" creationId="{1B4323E2-7293-0211-45B0-75F8EF834A76}"/>
-          </ac:cxnSpMkLst>
-        </pc:cxnChg>
-        <pc:cxnChg chg="mod">
-          <ac:chgData name="Toby Donaldson" userId="2e6e5431-bb17-4c41-9985-d39c50d83c73" providerId="ADAL" clId="{F31BC264-820E-54C4-A6D1-F92AF9CC222E}" dt="2026-06-09T04:42:57.573" v="2491" actId="21"/>
-          <ac:cxnSpMkLst>
-            <pc:docMk/>
-            <pc:sldMk cId="1525370219" sldId="276"/>
-            <ac:cxnSpMk id="15" creationId="{8B3541AB-CA40-2022-5298-16BAC5B832EF}"/>
-          </ac:cxnSpMkLst>
-        </pc:cxnChg>
-        <pc:cxnChg chg="mod">
-          <ac:chgData name="Toby Donaldson" userId="2e6e5431-bb17-4c41-9985-d39c50d83c73" providerId="ADAL" clId="{F31BC264-820E-54C4-A6D1-F92AF9CC222E}" dt="2026-06-09T04:42:57.573" v="2491" actId="21"/>
-          <ac:cxnSpMkLst>
-            <pc:docMk/>
-            <pc:sldMk cId="1525370219" sldId="276"/>
-            <ac:cxnSpMk id="16" creationId="{A2F01C9C-E73F-06BC-937F-B2B84D96D793}"/>
-          </ac:cxnSpMkLst>
-        </pc:cxnChg>
-        <pc:cxnChg chg="mod">
-          <ac:chgData name="Toby Donaldson" userId="2e6e5431-bb17-4c41-9985-d39c50d83c73" providerId="ADAL" clId="{F31BC264-820E-54C4-A6D1-F92AF9CC222E}" dt="2026-06-09T04:42:57.573" v="2491" actId="21"/>
-          <ac:cxnSpMkLst>
-            <pc:docMk/>
-            <pc:sldMk cId="1525370219" sldId="276"/>
-            <ac:cxnSpMk id="17" creationId="{53B8ACEE-64F2-31CB-F421-361FE8891286}"/>
-          </ac:cxnSpMkLst>
-        </pc:cxnChg>
-      </pc:sldChg>
-      <pc:sldChg chg="del">
-        <pc:chgData name="Toby Donaldson" userId="2e6e5431-bb17-4c41-9985-d39c50d83c73" providerId="ADAL" clId="{F31BC264-820E-54C4-A6D1-F92AF9CC222E}" dt="2026-06-09T03:27:15.290" v="248" actId="2696"/>
-        <pc:sldMkLst>
-          <pc:docMk/>
-          <pc:sldMk cId="3770763274" sldId="276"/>
-        </pc:sldMkLst>
-      </pc:sldChg>
-      <pc:sldChg chg="del">
-        <pc:chgData name="Toby Donaldson" userId="2e6e5431-bb17-4c41-9985-d39c50d83c73" providerId="ADAL" clId="{F31BC264-820E-54C4-A6D1-F92AF9CC222E}" dt="2026-06-09T03:27:15.290" v="248" actId="2696"/>
-        <pc:sldMkLst>
-          <pc:docMk/>
-          <pc:sldMk cId="2386869099" sldId="277"/>
-        </pc:sldMkLst>
       </pc:sldChg>
       <pc:sldChg chg="modSp add">
         <pc:chgData name="Toby Donaldson" userId="2e6e5431-bb17-4c41-9985-d39c50d83c73" providerId="ADAL" clId="{F31BC264-820E-54C4-A6D1-F92AF9CC222E}" dt="2026-06-09T05:05:31.877" v="3413"/>
@@ -1780,13 +1337,6 @@
             <ac:spMk id="3" creationId="{13D2A35C-B3F9-A5EE-5A52-29E991973E23}"/>
           </ac:spMkLst>
         </pc:spChg>
-      </pc:sldChg>
-      <pc:sldChg chg="del">
-        <pc:chgData name="Toby Donaldson" userId="2e6e5431-bb17-4c41-9985-d39c50d83c73" providerId="ADAL" clId="{F31BC264-820E-54C4-A6D1-F92AF9CC222E}" dt="2026-06-09T03:27:15.290" v="248" actId="2696"/>
-        <pc:sldMkLst>
-          <pc:docMk/>
-          <pc:sldMk cId="1918093263" sldId="278"/>
-        </pc:sldMkLst>
       </pc:sldChg>
       <pc:sldChg chg="addSp delSp modSp add mod">
         <pc:chgData name="Toby Donaldson" userId="2e6e5431-bb17-4c41-9985-d39c50d83c73" providerId="ADAL" clId="{F31BC264-820E-54C4-A6D1-F92AF9CC222E}" dt="2026-06-09T04:58:30.368" v="3049" actId="207"/>
@@ -1890,30 +1440,6 @@
             <ac:spMk id="26" creationId="{9D1FD7EE-3A84-2DA9-7AA2-C601F08E82FD}"/>
           </ac:spMkLst>
         </pc:spChg>
-        <pc:spChg chg="del">
-          <ac:chgData name="Toby Donaldson" userId="2e6e5431-bb17-4c41-9985-d39c50d83c73" providerId="ADAL" clId="{F31BC264-820E-54C4-A6D1-F92AF9CC222E}" dt="2026-06-09T04:52:41.160" v="2847" actId="21"/>
-          <ac:spMkLst>
-            <pc:docMk/>
-            <pc:sldMk cId="2979288468" sldId="278"/>
-            <ac:spMk id="34" creationId="{FD258299-5DBD-C1FB-A72A-7BAFCEA677B8}"/>
-          </ac:spMkLst>
-        </pc:spChg>
-        <pc:spChg chg="del">
-          <ac:chgData name="Toby Donaldson" userId="2e6e5431-bb17-4c41-9985-d39c50d83c73" providerId="ADAL" clId="{F31BC264-820E-54C4-A6D1-F92AF9CC222E}" dt="2026-06-09T04:52:44.100" v="2848" actId="21"/>
-          <ac:spMkLst>
-            <pc:docMk/>
-            <pc:sldMk cId="2979288468" sldId="278"/>
-            <ac:spMk id="35" creationId="{F9A4400B-DB79-8563-F3FA-0B53DA2A656B}"/>
-          </ac:spMkLst>
-        </pc:spChg>
-        <pc:spChg chg="del">
-          <ac:chgData name="Toby Donaldson" userId="2e6e5431-bb17-4c41-9985-d39c50d83c73" providerId="ADAL" clId="{F31BC264-820E-54C4-A6D1-F92AF9CC222E}" dt="2026-06-09T04:52:44.100" v="2848" actId="21"/>
-          <ac:spMkLst>
-            <pc:docMk/>
-            <pc:sldMk cId="2979288468" sldId="278"/>
-            <ac:spMk id="37" creationId="{D1E49FD8-F572-9CC9-E2CE-709DF81DC023}"/>
-          </ac:spMkLst>
-        </pc:spChg>
         <pc:spChg chg="mod">
           <ac:chgData name="Toby Donaldson" userId="2e6e5431-bb17-4c41-9985-d39c50d83c73" providerId="ADAL" clId="{F31BC264-820E-54C4-A6D1-F92AF9CC222E}" dt="2026-06-09T04:53:11.752" v="2926" actId="113"/>
           <ac:spMkLst>
@@ -1930,22 +1456,6 @@
             <ac:spMk id="39" creationId="{2BBCA046-0041-314C-5E4F-3CDCB26A6EE2}"/>
           </ac:spMkLst>
         </pc:spChg>
-        <pc:picChg chg="add mod">
-          <ac:chgData name="Toby Donaldson" userId="2e6e5431-bb17-4c41-9985-d39c50d83c73" providerId="ADAL" clId="{F31BC264-820E-54C4-A6D1-F92AF9CC222E}" dt="2026-06-09T04:53:35.212" v="2927"/>
-          <ac:picMkLst>
-            <pc:docMk/>
-            <pc:sldMk cId="2979288468" sldId="278"/>
-            <ac:picMk id="4" creationId="{95636737-7AB0-DD5F-48F5-6C18AAF99358}"/>
-          </ac:picMkLst>
-        </pc:picChg>
-        <pc:picChg chg="del">
-          <ac:chgData name="Toby Donaldson" userId="2e6e5431-bb17-4c41-9985-d39c50d83c73" providerId="ADAL" clId="{F31BC264-820E-54C4-A6D1-F92AF9CC222E}" dt="2026-06-09T04:52:38.119" v="2846" actId="21"/>
-          <ac:picMkLst>
-            <pc:docMk/>
-            <pc:sldMk cId="2979288468" sldId="278"/>
-            <ac:picMk id="32" creationId="{DAC79E39-A0F0-72BC-2D6A-A40A366219AF}"/>
-          </ac:picMkLst>
-        </pc:picChg>
         <pc:cxnChg chg="add">
           <ac:chgData name="Toby Donaldson" userId="2e6e5431-bb17-4c41-9985-d39c50d83c73" providerId="ADAL" clId="{F31BC264-820E-54C4-A6D1-F92AF9CC222E}" dt="2026-06-09T04:54:47.519" v="2946" actId="11529"/>
           <ac:cxnSpMkLst>
@@ -1970,14 +1480,6 @@
             <ac:cxnSpMk id="15" creationId="{8E805267-925F-17CD-03D5-6F297D3143E2}"/>
           </ac:cxnSpMkLst>
         </pc:cxnChg>
-        <pc:cxnChg chg="add del mod">
-          <ac:chgData name="Toby Donaldson" userId="2e6e5431-bb17-4c41-9985-d39c50d83c73" providerId="ADAL" clId="{F31BC264-820E-54C4-A6D1-F92AF9CC222E}" dt="2026-06-09T04:55:15.447" v="2951" actId="21"/>
-          <ac:cxnSpMkLst>
-            <pc:docMk/>
-            <pc:sldMk cId="2979288468" sldId="278"/>
-            <ac:cxnSpMk id="18" creationId="{DAD0F4ED-1578-2AB8-F018-5DFF99C4F105}"/>
-          </ac:cxnSpMkLst>
-        </pc:cxnChg>
         <pc:cxnChg chg="add">
           <ac:chgData name="Toby Donaldson" userId="2e6e5431-bb17-4c41-9985-d39c50d83c73" providerId="ADAL" clId="{F31BC264-820E-54C4-A6D1-F92AF9CC222E}" dt="2026-06-09T04:55:28.971" v="2952" actId="11529"/>
           <ac:cxnSpMkLst>
@@ -1987,107 +1489,12 @@
           </ac:cxnSpMkLst>
         </pc:cxnChg>
       </pc:sldChg>
-      <pc:sldChg chg="del">
-        <pc:chgData name="Toby Donaldson" userId="2e6e5431-bb17-4c41-9985-d39c50d83c73" providerId="ADAL" clId="{F31BC264-820E-54C4-A6D1-F92AF9CC222E}" dt="2026-06-09T03:27:15.290" v="248" actId="2696"/>
-        <pc:sldMkLst>
-          <pc:docMk/>
-          <pc:sldMk cId="1039424125" sldId="279"/>
-        </pc:sldMkLst>
-      </pc:sldChg>
       <pc:sldChg chg="delSp modSp add mod ord">
         <pc:chgData name="Toby Donaldson" userId="2e6e5431-bb17-4c41-9985-d39c50d83c73" providerId="ADAL" clId="{F31BC264-820E-54C4-A6D1-F92AF9CC222E}" dt="2026-06-09T19:56:36.999" v="6305" actId="21"/>
         <pc:sldMkLst>
           <pc:docMk/>
           <pc:sldMk cId="3867704620" sldId="279"/>
         </pc:sldMkLst>
-        <pc:spChg chg="del">
-          <ac:chgData name="Toby Donaldson" userId="2e6e5431-bb17-4c41-9985-d39c50d83c73" providerId="ADAL" clId="{F31BC264-820E-54C4-A6D1-F92AF9CC222E}" dt="2026-06-09T19:56:36.999" v="6305" actId="21"/>
-          <ac:spMkLst>
-            <pc:docMk/>
-            <pc:sldMk cId="3867704620" sldId="279"/>
-            <ac:spMk id="5" creationId="{FEE32E2D-BE15-1257-E158-B5B61ACB122F}"/>
-          </ac:spMkLst>
-        </pc:spChg>
-        <pc:spChg chg="del">
-          <ac:chgData name="Toby Donaldson" userId="2e6e5431-bb17-4c41-9985-d39c50d83c73" providerId="ADAL" clId="{F31BC264-820E-54C4-A6D1-F92AF9CC222E}" dt="2026-06-09T19:56:36.999" v="6305" actId="21"/>
-          <ac:spMkLst>
-            <pc:docMk/>
-            <pc:sldMk cId="3867704620" sldId="279"/>
-            <ac:spMk id="6" creationId="{98D2C4AA-5106-A9B6-B183-FF21DBF16704}"/>
-          </ac:spMkLst>
-        </pc:spChg>
-        <pc:spChg chg="del">
-          <ac:chgData name="Toby Donaldson" userId="2e6e5431-bb17-4c41-9985-d39c50d83c73" providerId="ADAL" clId="{F31BC264-820E-54C4-A6D1-F92AF9CC222E}" dt="2026-06-09T19:56:36.999" v="6305" actId="21"/>
-          <ac:spMkLst>
-            <pc:docMk/>
-            <pc:sldMk cId="3867704620" sldId="279"/>
-            <ac:spMk id="7" creationId="{61A275E0-7CF1-86E3-AD83-C558F0D82F64}"/>
-          </ac:spMkLst>
-        </pc:spChg>
-        <pc:spChg chg="del">
-          <ac:chgData name="Toby Donaldson" userId="2e6e5431-bb17-4c41-9985-d39c50d83c73" providerId="ADAL" clId="{F31BC264-820E-54C4-A6D1-F92AF9CC222E}" dt="2026-06-09T19:56:36.999" v="6305" actId="21"/>
-          <ac:spMkLst>
-            <pc:docMk/>
-            <pc:sldMk cId="3867704620" sldId="279"/>
-            <ac:spMk id="8" creationId="{8CEDBB7E-832B-CB44-7D27-16995A9F24D5}"/>
-          </ac:spMkLst>
-        </pc:spChg>
-        <pc:spChg chg="del">
-          <ac:chgData name="Toby Donaldson" userId="2e6e5431-bb17-4c41-9985-d39c50d83c73" providerId="ADAL" clId="{F31BC264-820E-54C4-A6D1-F92AF9CC222E}" dt="2026-06-09T19:56:36.999" v="6305" actId="21"/>
-          <ac:spMkLst>
-            <pc:docMk/>
-            <pc:sldMk cId="3867704620" sldId="279"/>
-            <ac:spMk id="9" creationId="{8C9735E2-4A70-68A3-47B5-F7E25D17B7E3}"/>
-          </ac:spMkLst>
-        </pc:spChg>
-        <pc:spChg chg="del">
-          <ac:chgData name="Toby Donaldson" userId="2e6e5431-bb17-4c41-9985-d39c50d83c73" providerId="ADAL" clId="{F31BC264-820E-54C4-A6D1-F92AF9CC222E}" dt="2026-06-09T04:58:47.009" v="3052" actId="21"/>
-          <ac:spMkLst>
-            <pc:docMk/>
-            <pc:sldMk cId="3867704620" sldId="279"/>
-            <ac:spMk id="21" creationId="{A1109FE0-922F-D82D-C047-232AF75FFE2B}"/>
-          </ac:spMkLst>
-        </pc:spChg>
-        <pc:spChg chg="del">
-          <ac:chgData name="Toby Donaldson" userId="2e6e5431-bb17-4c41-9985-d39c50d83c73" providerId="ADAL" clId="{F31BC264-820E-54C4-A6D1-F92AF9CC222E}" dt="2026-06-09T04:58:47.009" v="3052" actId="21"/>
-          <ac:spMkLst>
-            <pc:docMk/>
-            <pc:sldMk cId="3867704620" sldId="279"/>
-            <ac:spMk id="22" creationId="{4F3B946B-1CDB-C4E7-27E0-23E3E4891586}"/>
-          </ac:spMkLst>
-        </pc:spChg>
-        <pc:spChg chg="del">
-          <ac:chgData name="Toby Donaldson" userId="2e6e5431-bb17-4c41-9985-d39c50d83c73" providerId="ADAL" clId="{F31BC264-820E-54C4-A6D1-F92AF9CC222E}" dt="2026-06-09T04:58:47.009" v="3052" actId="21"/>
-          <ac:spMkLst>
-            <pc:docMk/>
-            <pc:sldMk cId="3867704620" sldId="279"/>
-            <ac:spMk id="23" creationId="{118D37D8-6B2E-2A97-FB51-205C26FE2F63}"/>
-          </ac:spMkLst>
-        </pc:spChg>
-        <pc:spChg chg="del">
-          <ac:chgData name="Toby Donaldson" userId="2e6e5431-bb17-4c41-9985-d39c50d83c73" providerId="ADAL" clId="{F31BC264-820E-54C4-A6D1-F92AF9CC222E}" dt="2026-06-09T04:58:41.992" v="3051" actId="21"/>
-          <ac:spMkLst>
-            <pc:docMk/>
-            <pc:sldMk cId="3867704620" sldId="279"/>
-            <ac:spMk id="24" creationId="{CB2AA3B9-741F-D3C0-2898-E0EDE679D183}"/>
-          </ac:spMkLst>
-        </pc:spChg>
-        <pc:spChg chg="del">
-          <ac:chgData name="Toby Donaldson" userId="2e6e5431-bb17-4c41-9985-d39c50d83c73" providerId="ADAL" clId="{F31BC264-820E-54C4-A6D1-F92AF9CC222E}" dt="2026-06-09T04:58:47.009" v="3052" actId="21"/>
-          <ac:spMkLst>
-            <pc:docMk/>
-            <pc:sldMk cId="3867704620" sldId="279"/>
-            <ac:spMk id="25" creationId="{0343E19F-3DE2-306E-3623-FD5EF5E80453}"/>
-          </ac:spMkLst>
-        </pc:spChg>
-        <pc:spChg chg="del">
-          <ac:chgData name="Toby Donaldson" userId="2e6e5431-bb17-4c41-9985-d39c50d83c73" providerId="ADAL" clId="{F31BC264-820E-54C4-A6D1-F92AF9CC222E}" dt="2026-06-09T04:58:41.992" v="3051" actId="21"/>
-          <ac:spMkLst>
-            <pc:docMk/>
-            <pc:sldMk cId="3867704620" sldId="279"/>
-            <ac:spMk id="26" creationId="{79F68514-A5BA-C4B9-069C-DCB27E724F19}"/>
-          </ac:spMkLst>
-        </pc:spChg>
         <pc:spChg chg="mod">
           <ac:chgData name="Toby Donaldson" userId="2e6e5431-bb17-4c41-9985-d39c50d83c73" providerId="ADAL" clId="{F31BC264-820E-54C4-A6D1-F92AF9CC222E}" dt="2026-06-09T04:58:53.313" v="3056" actId="20577"/>
           <ac:spMkLst>
@@ -2096,38 +1503,6 @@
             <ac:spMk id="39" creationId="{7B43E780-571A-2A94-C657-A0D6BF801814}"/>
           </ac:spMkLst>
         </pc:spChg>
-        <pc:cxnChg chg="del mod">
-          <ac:chgData name="Toby Donaldson" userId="2e6e5431-bb17-4c41-9985-d39c50d83c73" providerId="ADAL" clId="{F31BC264-820E-54C4-A6D1-F92AF9CC222E}" dt="2026-06-09T19:56:36.999" v="6305" actId="21"/>
-          <ac:cxnSpMkLst>
-            <pc:docMk/>
-            <pc:sldMk cId="3867704620" sldId="279"/>
-            <ac:cxnSpMk id="11" creationId="{A03A6E5A-13DB-7BEC-C50C-8A71D880F91F}"/>
-          </ac:cxnSpMkLst>
-        </pc:cxnChg>
-        <pc:cxnChg chg="del mod">
-          <ac:chgData name="Toby Donaldson" userId="2e6e5431-bb17-4c41-9985-d39c50d83c73" providerId="ADAL" clId="{F31BC264-820E-54C4-A6D1-F92AF9CC222E}" dt="2026-06-09T19:56:36.999" v="6305" actId="21"/>
-          <ac:cxnSpMkLst>
-            <pc:docMk/>
-            <pc:sldMk cId="3867704620" sldId="279"/>
-            <ac:cxnSpMk id="13" creationId="{2CAA00A0-2578-D150-662C-AB6227BC23A9}"/>
-          </ac:cxnSpMkLst>
-        </pc:cxnChg>
-        <pc:cxnChg chg="del mod">
-          <ac:chgData name="Toby Donaldson" userId="2e6e5431-bb17-4c41-9985-d39c50d83c73" providerId="ADAL" clId="{F31BC264-820E-54C4-A6D1-F92AF9CC222E}" dt="2026-06-09T19:56:36.999" v="6305" actId="21"/>
-          <ac:cxnSpMkLst>
-            <pc:docMk/>
-            <pc:sldMk cId="3867704620" sldId="279"/>
-            <ac:cxnSpMk id="15" creationId="{54C3CECE-9CB7-866B-68B4-8BBE8C5744C3}"/>
-          </ac:cxnSpMkLst>
-        </pc:cxnChg>
-        <pc:cxnChg chg="del mod">
-          <ac:chgData name="Toby Donaldson" userId="2e6e5431-bb17-4c41-9985-d39c50d83c73" providerId="ADAL" clId="{F31BC264-820E-54C4-A6D1-F92AF9CC222E}" dt="2026-06-09T19:56:36.999" v="6305" actId="21"/>
-          <ac:cxnSpMkLst>
-            <pc:docMk/>
-            <pc:sldMk cId="3867704620" sldId="279"/>
-            <ac:cxnSpMk id="20" creationId="{16C79E98-8BEF-234D-735D-CD988A278AF1}"/>
-          </ac:cxnSpMkLst>
-        </pc:cxnChg>
       </pc:sldChg>
       <pc:sldChg chg="addSp delSp modSp new mod">
         <pc:chgData name="Toby Donaldson" userId="2e6e5431-bb17-4c41-9985-d39c50d83c73" providerId="ADAL" clId="{F31BC264-820E-54C4-A6D1-F92AF9CC222E}" dt="2026-06-09T05:08:46.690" v="3630" actId="21"/>
@@ -2239,38 +1614,6 @@
             <ac:spMk id="28" creationId="{B5651C18-D74B-A8AA-C3A9-DD169606A934}"/>
           </ac:spMkLst>
         </pc:spChg>
-        <pc:spChg chg="add del mod">
-          <ac:chgData name="Toby Donaldson" userId="2e6e5431-bb17-4c41-9985-d39c50d83c73" providerId="ADAL" clId="{F31BC264-820E-54C4-A6D1-F92AF9CC222E}" dt="2026-06-09T05:07:07.163" v="3441" actId="21"/>
-          <ac:spMkLst>
-            <pc:docMk/>
-            <pc:sldMk cId="2002583262" sldId="280"/>
-            <ac:spMk id="33" creationId="{DEE2FD50-B879-3D31-2DE7-FDB7D03399D1}"/>
-          </ac:spMkLst>
-        </pc:spChg>
-        <pc:spChg chg="add del mod">
-          <ac:chgData name="Toby Donaldson" userId="2e6e5431-bb17-4c41-9985-d39c50d83c73" providerId="ADAL" clId="{F31BC264-820E-54C4-A6D1-F92AF9CC222E}" dt="2026-06-09T05:06:59.401" v="3440" actId="21"/>
-          <ac:spMkLst>
-            <pc:docMk/>
-            <pc:sldMk cId="2002583262" sldId="280"/>
-            <ac:spMk id="34" creationId="{3758D166-C4C8-95C6-0CAF-F2BF5F96D43A}"/>
-          </ac:spMkLst>
-        </pc:spChg>
-        <pc:spChg chg="add del mod">
-          <ac:chgData name="Toby Donaldson" userId="2e6e5431-bb17-4c41-9985-d39c50d83c73" providerId="ADAL" clId="{F31BC264-820E-54C4-A6D1-F92AF9CC222E}" dt="2026-06-09T05:07:31.725" v="3446" actId="21"/>
-          <ac:spMkLst>
-            <pc:docMk/>
-            <pc:sldMk cId="2002583262" sldId="280"/>
-            <ac:spMk id="35" creationId="{7920657E-423A-D362-E4AA-055AA55825FD}"/>
-          </ac:spMkLst>
-        </pc:spChg>
-        <pc:spChg chg="add del mod">
-          <ac:chgData name="Toby Donaldson" userId="2e6e5431-bb17-4c41-9985-d39c50d83c73" providerId="ADAL" clId="{F31BC264-820E-54C4-A6D1-F92AF9CC222E}" dt="2026-06-09T05:08:46.690" v="3630" actId="21"/>
-          <ac:spMkLst>
-            <pc:docMk/>
-            <pc:sldMk cId="2002583262" sldId="280"/>
-            <ac:spMk id="36" creationId="{EF785FCF-0CB9-A7D4-3397-EB0F0797448F}"/>
-          </ac:spMkLst>
-        </pc:spChg>
         <pc:grpChg chg="mod">
           <ac:chgData name="Toby Donaldson" userId="2e6e5431-bb17-4c41-9985-d39c50d83c73" providerId="ADAL" clId="{F31BC264-820E-54C4-A6D1-F92AF9CC222E}" dt="2026-06-09T05:04:02.881" v="3370" actId="1076"/>
           <ac:grpSpMkLst>
@@ -2280,27 +1623,12 @@
           </ac:grpSpMkLst>
         </pc:grpChg>
       </pc:sldChg>
-      <pc:sldChg chg="del">
-        <pc:chgData name="Toby Donaldson" userId="2e6e5431-bb17-4c41-9985-d39c50d83c73" providerId="ADAL" clId="{F31BC264-820E-54C4-A6D1-F92AF9CC222E}" dt="2026-06-09T03:27:15.290" v="248" actId="2696"/>
-        <pc:sldMkLst>
-          <pc:docMk/>
-          <pc:sldMk cId="3639072880" sldId="280"/>
-        </pc:sldMkLst>
-      </pc:sldChg>
       <pc:sldChg chg="addSp delSp modSp add mod">
         <pc:chgData name="Toby Donaldson" userId="2e6e5431-bb17-4c41-9985-d39c50d83c73" providerId="ADAL" clId="{F31BC264-820E-54C4-A6D1-F92AF9CC222E}" dt="2026-06-09T21:36:42.635" v="6319"/>
         <pc:sldMkLst>
           <pc:docMk/>
           <pc:sldMk cId="851915149" sldId="281"/>
         </pc:sldMkLst>
-        <pc:spChg chg="del">
-          <ac:chgData name="Toby Donaldson" userId="2e6e5431-bb17-4c41-9985-d39c50d83c73" providerId="ADAL" clId="{F31BC264-820E-54C4-A6D1-F92AF9CC222E}" dt="2026-06-09T05:08:56.799" v="3631" actId="21"/>
-          <ac:spMkLst>
-            <pc:docMk/>
-            <pc:sldMk cId="851915149" sldId="281"/>
-            <ac:spMk id="4" creationId="{92C124E0-45DB-DEE5-5FF6-55D0A15FE9E2}"/>
-          </ac:spMkLst>
-        </pc:spChg>
         <pc:spChg chg="add mod">
           <ac:chgData name="Toby Donaldson" userId="2e6e5431-bb17-4c41-9985-d39c50d83c73" providerId="ADAL" clId="{F31BC264-820E-54C4-A6D1-F92AF9CC222E}" dt="2026-06-09T19:57:52.259" v="6306" actId="207"/>
           <ac:spMkLst>
@@ -2342,20 +1670,6 @@
           </ac:inkMkLst>
         </pc:inkChg>
       </pc:sldChg>
-      <pc:sldChg chg="del">
-        <pc:chgData name="Toby Donaldson" userId="2e6e5431-bb17-4c41-9985-d39c50d83c73" providerId="ADAL" clId="{F31BC264-820E-54C4-A6D1-F92AF9CC222E}" dt="2026-06-09T03:27:15.290" v="248" actId="2696"/>
-        <pc:sldMkLst>
-          <pc:docMk/>
-          <pc:sldMk cId="4083257196" sldId="281"/>
-        </pc:sldMkLst>
-      </pc:sldChg>
-      <pc:sldChg chg="del">
-        <pc:chgData name="Toby Donaldson" userId="2e6e5431-bb17-4c41-9985-d39c50d83c73" providerId="ADAL" clId="{F31BC264-820E-54C4-A6D1-F92AF9CC222E}" dt="2026-06-09T03:27:15.290" v="248" actId="2696"/>
-        <pc:sldMkLst>
-          <pc:docMk/>
-          <pc:sldMk cId="3063321410" sldId="282"/>
-        </pc:sldMkLst>
-      </pc:sldChg>
       <pc:sldChg chg="addSp modSp add mod">
         <pc:chgData name="Toby Donaldson" userId="2e6e5431-bb17-4c41-9985-d39c50d83c73" providerId="ADAL" clId="{F31BC264-820E-54C4-A6D1-F92AF9CC222E}" dt="2026-06-09T21:36:42.635" v="6319"/>
         <pc:sldMkLst>
@@ -2378,13 +1692,6 @@
             <ac:inkMk id="38" creationId="{C16120D3-233B-3D42-2A56-CAF926169AD0}"/>
           </ac:inkMkLst>
         </pc:inkChg>
-      </pc:sldChg>
-      <pc:sldChg chg="del">
-        <pc:chgData name="Toby Donaldson" userId="2e6e5431-bb17-4c41-9985-d39c50d83c73" providerId="ADAL" clId="{F31BC264-820E-54C4-A6D1-F92AF9CC222E}" dt="2026-06-09T03:27:15.290" v="248" actId="2696"/>
-        <pc:sldMkLst>
-          <pc:docMk/>
-          <pc:sldMk cId="534491349" sldId="283"/>
-        </pc:sldMkLst>
       </pc:sldChg>
       <pc:sldChg chg="addSp modSp add mod">
         <pc:chgData name="Toby Donaldson" userId="2e6e5431-bb17-4c41-9985-d39c50d83c73" providerId="ADAL" clId="{F31BC264-820E-54C4-A6D1-F92AF9CC222E}" dt="2026-06-09T19:58:29.404" v="6312" actId="207"/>
@@ -2415,14 +1722,6 @@
           <pc:docMk/>
           <pc:sldMk cId="4229251929" sldId="284"/>
         </pc:sldMkLst>
-        <pc:spChg chg="del">
-          <ac:chgData name="Toby Donaldson" userId="2e6e5431-bb17-4c41-9985-d39c50d83c73" providerId="ADAL" clId="{F31BC264-820E-54C4-A6D1-F92AF9CC222E}" dt="2026-06-09T05:21:57.657" v="3999" actId="21"/>
-          <ac:spMkLst>
-            <pc:docMk/>
-            <pc:sldMk cId="4229251929" sldId="284"/>
-            <ac:spMk id="4" creationId="{BEDDF5F6-73A5-B988-E6BE-0C48C703B27F}"/>
-          </ac:spMkLst>
-        </pc:spChg>
         <pc:spChg chg="add mod">
           <ac:chgData name="Toby Donaldson" userId="2e6e5431-bb17-4c41-9985-d39c50d83c73" providerId="ADAL" clId="{F31BC264-820E-54C4-A6D1-F92AF9CC222E}" dt="2026-06-09T05:16:24.414" v="3848" actId="1076"/>
           <ac:spMkLst>
@@ -2439,14 +1738,6 @@
             <ac:spMk id="35" creationId="{EAD940CB-0151-39AA-99CA-E9ED8C097992}"/>
           </ac:spMkLst>
         </pc:spChg>
-        <pc:grpChg chg="del">
-          <ac:chgData name="Toby Donaldson" userId="2e6e5431-bb17-4c41-9985-d39c50d83c73" providerId="ADAL" clId="{F31BC264-820E-54C4-A6D1-F92AF9CC222E}" dt="2026-06-09T05:12:36.900" v="3678" actId="21"/>
-          <ac:grpSpMkLst>
-            <pc:docMk/>
-            <pc:sldMk cId="4229251929" sldId="284"/>
-            <ac:grpSpMk id="5" creationId="{CBF52386-D77B-D6A1-6D56-DEF6D9FD27A4}"/>
-          </ac:grpSpMkLst>
-        </pc:grpChg>
         <pc:picChg chg="add mod">
           <ac:chgData name="Toby Donaldson" userId="2e6e5431-bb17-4c41-9985-d39c50d83c73" providerId="ADAL" clId="{F31BC264-820E-54C4-A6D1-F92AF9CC222E}" dt="2026-06-09T05:16:39.515" v="3850" actId="1076"/>
           <ac:picMkLst>
@@ -2455,54 +1746,6 @@
             <ac:picMk id="34" creationId="{1401EE15-3FE8-96FF-B8FA-0F94C28C58EB}"/>
           </ac:picMkLst>
         </pc:picChg>
-        <pc:cxnChg chg="mod">
-          <ac:chgData name="Toby Donaldson" userId="2e6e5431-bb17-4c41-9985-d39c50d83c73" providerId="ADAL" clId="{F31BC264-820E-54C4-A6D1-F92AF9CC222E}" dt="2026-06-09T05:12:36.900" v="3678" actId="21"/>
-          <ac:cxnSpMkLst>
-            <pc:docMk/>
-            <pc:sldMk cId="4229251929" sldId="284"/>
-            <ac:cxnSpMk id="13" creationId="{5C2ACB0A-AE47-1469-2EE5-6B67DCDC3F49}"/>
-          </ac:cxnSpMkLst>
-        </pc:cxnChg>
-        <pc:cxnChg chg="mod">
-          <ac:chgData name="Toby Donaldson" userId="2e6e5431-bb17-4c41-9985-d39c50d83c73" providerId="ADAL" clId="{F31BC264-820E-54C4-A6D1-F92AF9CC222E}" dt="2026-06-09T05:12:36.900" v="3678" actId="21"/>
-          <ac:cxnSpMkLst>
-            <pc:docMk/>
-            <pc:sldMk cId="4229251929" sldId="284"/>
-            <ac:cxnSpMk id="14" creationId="{66D8143F-8681-A2C4-F5FB-119E0E713CE0}"/>
-          </ac:cxnSpMkLst>
-        </pc:cxnChg>
-        <pc:cxnChg chg="mod">
-          <ac:chgData name="Toby Donaldson" userId="2e6e5431-bb17-4c41-9985-d39c50d83c73" providerId="ADAL" clId="{F31BC264-820E-54C4-A6D1-F92AF9CC222E}" dt="2026-06-09T05:12:36.900" v="3678" actId="21"/>
-          <ac:cxnSpMkLst>
-            <pc:docMk/>
-            <pc:sldMk cId="4229251929" sldId="284"/>
-            <ac:cxnSpMk id="15" creationId="{E2BD8C73-A7AD-65F5-C2E5-CB9E3FE7BD95}"/>
-          </ac:cxnSpMkLst>
-        </pc:cxnChg>
-        <pc:cxnChg chg="mod">
-          <ac:chgData name="Toby Donaldson" userId="2e6e5431-bb17-4c41-9985-d39c50d83c73" providerId="ADAL" clId="{F31BC264-820E-54C4-A6D1-F92AF9CC222E}" dt="2026-06-09T05:12:36.900" v="3678" actId="21"/>
-          <ac:cxnSpMkLst>
-            <pc:docMk/>
-            <pc:sldMk cId="4229251929" sldId="284"/>
-            <ac:cxnSpMk id="16" creationId="{9EB2B756-637C-39CF-93BF-F9C09AC05C03}"/>
-          </ac:cxnSpMkLst>
-        </pc:cxnChg>
-        <pc:cxnChg chg="mod">
-          <ac:chgData name="Toby Donaldson" userId="2e6e5431-bb17-4c41-9985-d39c50d83c73" providerId="ADAL" clId="{F31BC264-820E-54C4-A6D1-F92AF9CC222E}" dt="2026-06-09T05:12:36.900" v="3678" actId="21"/>
-          <ac:cxnSpMkLst>
-            <pc:docMk/>
-            <pc:sldMk cId="4229251929" sldId="284"/>
-            <ac:cxnSpMk id="17" creationId="{98773A24-E73F-7D69-15E6-94E79C22DEF3}"/>
-          </ac:cxnSpMkLst>
-        </pc:cxnChg>
-        <pc:cxnChg chg="mod">
-          <ac:chgData name="Toby Donaldson" userId="2e6e5431-bb17-4c41-9985-d39c50d83c73" providerId="ADAL" clId="{F31BC264-820E-54C4-A6D1-F92AF9CC222E}" dt="2026-06-09T05:12:36.900" v="3678" actId="21"/>
-          <ac:cxnSpMkLst>
-            <pc:docMk/>
-            <pc:sldMk cId="4229251929" sldId="284"/>
-            <ac:cxnSpMk id="18" creationId="{07897EC6-E6CB-7A13-24A6-F76909299728}"/>
-          </ac:cxnSpMkLst>
-        </pc:cxnChg>
       </pc:sldChg>
       <pc:sldChg chg="addSp modSp add mod ord">
         <pc:chgData name="Toby Donaldson" userId="2e6e5431-bb17-4c41-9985-d39c50d83c73" providerId="ADAL" clId="{F31BC264-820E-54C4-A6D1-F92AF9CC222E}" dt="2026-06-09T21:36:42.635" v="6319"/>
@@ -2566,13 +1809,6 @@
           </ac:inkMkLst>
         </pc:inkChg>
       </pc:sldChg>
-      <pc:sldChg chg="del">
-        <pc:chgData name="Toby Donaldson" userId="2e6e5431-bb17-4c41-9985-d39c50d83c73" providerId="ADAL" clId="{F31BC264-820E-54C4-A6D1-F92AF9CC222E}" dt="2026-06-09T03:27:15.290" v="248" actId="2696"/>
-        <pc:sldMkLst>
-          <pc:docMk/>
-          <pc:sldMk cId="2793532074" sldId="286"/>
-        </pc:sldMkLst>
-      </pc:sldChg>
       <pc:sldChg chg="addSp modSp add mod">
         <pc:chgData name="Toby Donaldson" userId="2e6e5431-bb17-4c41-9985-d39c50d83c73" providerId="ADAL" clId="{F31BC264-820E-54C4-A6D1-F92AF9CC222E}" dt="2026-06-09T21:36:42.635" v="6319"/>
         <pc:sldMkLst>
@@ -2612,13 +1848,6 @@
           </ac:inkMkLst>
         </pc:inkChg>
       </pc:sldChg>
-      <pc:sldChg chg="del">
-        <pc:chgData name="Toby Donaldson" userId="2e6e5431-bb17-4c41-9985-d39c50d83c73" providerId="ADAL" clId="{F31BC264-820E-54C4-A6D1-F92AF9CC222E}" dt="2026-06-09T03:27:15.290" v="248" actId="2696"/>
-        <pc:sldMkLst>
-          <pc:docMk/>
-          <pc:sldMk cId="3380164597" sldId="287"/>
-        </pc:sldMkLst>
-      </pc:sldChg>
       <pc:sldChg chg="addSp delSp modSp new mod">
         <pc:chgData name="Toby Donaldson" userId="2e6e5431-bb17-4c41-9985-d39c50d83c73" providerId="ADAL" clId="{F31BC264-820E-54C4-A6D1-F92AF9CC222E}" dt="2026-06-09T05:46:23.605" v="5061" actId="1076"/>
         <pc:sldMkLst>
@@ -2641,14 +1870,6 @@
             <ac:spMk id="3" creationId="{CD3AF14E-264E-689E-2A8F-3CFC24B27E14}"/>
           </ac:spMkLst>
         </pc:spChg>
-        <pc:spChg chg="add del mod">
-          <ac:chgData name="Toby Donaldson" userId="2e6e5431-bb17-4c41-9985-d39c50d83c73" providerId="ADAL" clId="{F31BC264-820E-54C4-A6D1-F92AF9CC222E}" dt="2026-06-09T05:44:08.194" v="4883" actId="21"/>
-          <ac:spMkLst>
-            <pc:docMk/>
-            <pc:sldMk cId="455429676" sldId="288"/>
-            <ac:spMk id="4" creationId="{8E198091-6BF8-0A4D-9543-C51256D46E14}"/>
-          </ac:spMkLst>
-        </pc:spChg>
         <pc:spChg chg="add mod">
           <ac:chgData name="Toby Donaldson" userId="2e6e5431-bb17-4c41-9985-d39c50d83c73" providerId="ADAL" clId="{F31BC264-820E-54C4-A6D1-F92AF9CC222E}" dt="2026-06-09T05:46:23.605" v="5061" actId="1076"/>
           <ac:spMkLst>
@@ -2665,20 +1886,6 @@
             <ac:picMk id="5" creationId="{22EF6ED8-CCF2-6126-E21E-A6556573F811}"/>
           </ac:picMkLst>
         </pc:picChg>
-      </pc:sldChg>
-      <pc:sldChg chg="del">
-        <pc:chgData name="Toby Donaldson" userId="2e6e5431-bb17-4c41-9985-d39c50d83c73" providerId="ADAL" clId="{F31BC264-820E-54C4-A6D1-F92AF9CC222E}" dt="2026-06-09T03:27:15.290" v="248" actId="2696"/>
-        <pc:sldMkLst>
-          <pc:docMk/>
-          <pc:sldMk cId="3227732428" sldId="288"/>
-        </pc:sldMkLst>
-      </pc:sldChg>
-      <pc:sldChg chg="del">
-        <pc:chgData name="Toby Donaldson" userId="2e6e5431-bb17-4c41-9985-d39c50d83c73" providerId="ADAL" clId="{F31BC264-820E-54C4-A6D1-F92AF9CC222E}" dt="2026-06-09T03:27:15.290" v="248" actId="2696"/>
-        <pc:sldMkLst>
-          <pc:docMk/>
-          <pc:sldMk cId="484083101" sldId="289"/>
-        </pc:sldMkLst>
       </pc:sldChg>
       <pc:sldChg chg="modSp new mod">
         <pc:chgData name="Toby Donaldson" userId="2e6e5431-bb17-4c41-9985-d39c50d83c73" providerId="ADAL" clId="{F31BC264-820E-54C4-A6D1-F92AF9CC222E}" dt="2026-06-09T06:07:39.679" v="5325" actId="20577"/>
@@ -2702,13 +1909,6 @@
             <ac:spMk id="3" creationId="{615C2A9D-9CDB-6525-D18D-780832F2BF55}"/>
           </ac:spMkLst>
         </pc:spChg>
-      </pc:sldChg>
-      <pc:sldChg chg="del">
-        <pc:chgData name="Toby Donaldson" userId="2e6e5431-bb17-4c41-9985-d39c50d83c73" providerId="ADAL" clId="{F31BC264-820E-54C4-A6D1-F92AF9CC222E}" dt="2026-06-09T03:27:15.290" v="248" actId="2696"/>
-        <pc:sldMkLst>
-          <pc:docMk/>
-          <pc:sldMk cId="3609491912" sldId="290"/>
-        </pc:sldMkLst>
       </pc:sldChg>
       <pc:sldChg chg="addSp modSp new mod">
         <pc:chgData name="Toby Donaldson" userId="2e6e5431-bb17-4c41-9985-d39c50d83c73" providerId="ADAL" clId="{F31BC264-820E-54C4-A6D1-F92AF9CC222E}" dt="2026-06-09T21:36:42.635" v="6319"/>
@@ -2748,186 +1948,208 @@
           <pc:sldMk cId="334443577" sldId="291"/>
         </pc:sldMkLst>
       </pc:sldChg>
-      <pc:sldChg chg="modSp del mod">
-        <pc:chgData name="Toby Donaldson" userId="2e6e5431-bb17-4c41-9985-d39c50d83c73" providerId="ADAL" clId="{F31BC264-820E-54C4-A6D1-F92AF9CC222E}" dt="2026-06-09T03:27:15.290" v="248" actId="2696"/>
+      <pc:sldChg chg="addSp delSp modSp new mod">
+        <pc:chgData name="Toby Donaldson" userId="2e6e5431-bb17-4c41-9985-d39c50d83c73" providerId="ADAL" clId="{F31BC264-820E-54C4-A6D1-F92AF9CC222E}" dt="2026-06-11T18:45:39.817" v="6645" actId="20577"/>
         <pc:sldMkLst>
           <pc:docMk/>
-          <pc:sldMk cId="4086174843" sldId="292"/>
+          <pc:sldMk cId="2925061429" sldId="292"/>
         </pc:sldMkLst>
+        <pc:spChg chg="mod">
+          <ac:chgData name="Toby Donaldson" userId="2e6e5431-bb17-4c41-9985-d39c50d83c73" providerId="ADAL" clId="{F31BC264-820E-54C4-A6D1-F92AF9CC222E}" dt="2026-06-11T18:28:19.231" v="6385" actId="20577"/>
+          <ac:spMkLst>
+            <pc:docMk/>
+            <pc:sldMk cId="2925061429" sldId="292"/>
+            <ac:spMk id="2" creationId="{4E9A307D-7E3C-CBB6-D880-3BF064EE84C9}"/>
+          </ac:spMkLst>
+        </pc:spChg>
+        <pc:spChg chg="del">
+          <ac:chgData name="Toby Donaldson" userId="2e6e5431-bb17-4c41-9985-d39c50d83c73" providerId="ADAL" clId="{F31BC264-820E-54C4-A6D1-F92AF9CC222E}" dt="2026-06-11T18:23:32.307" v="6334" actId="21"/>
+          <ac:spMkLst>
+            <pc:docMk/>
+            <pc:sldMk cId="2925061429" sldId="292"/>
+            <ac:spMk id="3" creationId="{682D478B-2B8A-F71B-ECA2-5918719E7FDD}"/>
+          </ac:spMkLst>
+        </pc:spChg>
+        <pc:spChg chg="add">
+          <ac:chgData name="Toby Donaldson" userId="2e6e5431-bb17-4c41-9985-d39c50d83c73" providerId="ADAL" clId="{F31BC264-820E-54C4-A6D1-F92AF9CC222E}" dt="2026-06-11T18:23:01.992" v="6330"/>
+          <ac:spMkLst>
+            <pc:docMk/>
+            <pc:sldMk cId="2925061429" sldId="292"/>
+            <ac:spMk id="5" creationId="{EEC28342-515A-1B24-409A-A8CD5261AAA1}"/>
+          </ac:spMkLst>
+        </pc:spChg>
+        <pc:spChg chg="add">
+          <ac:chgData name="Toby Donaldson" userId="2e6e5431-bb17-4c41-9985-d39c50d83c73" providerId="ADAL" clId="{F31BC264-820E-54C4-A6D1-F92AF9CC222E}" dt="2026-06-11T18:23:07.857" v="6332"/>
+          <ac:spMkLst>
+            <pc:docMk/>
+            <pc:sldMk cId="2925061429" sldId="292"/>
+            <ac:spMk id="7" creationId="{C55DEEC4-6007-EFCD-B31C-04F3BD86FAC2}"/>
+          </ac:spMkLst>
+        </pc:spChg>
+        <pc:spChg chg="add mod">
+          <ac:chgData name="Toby Donaldson" userId="2e6e5431-bb17-4c41-9985-d39c50d83c73" providerId="ADAL" clId="{F31BC264-820E-54C4-A6D1-F92AF9CC222E}" dt="2026-06-11T18:30:27.807" v="6516" actId="27636"/>
+          <ac:spMkLst>
+            <pc:docMk/>
+            <pc:sldMk cId="2925061429" sldId="292"/>
+            <ac:spMk id="9" creationId="{62A8830A-E3B1-61AA-EA09-09ED11209B29}"/>
+          </ac:spMkLst>
+        </pc:spChg>
+        <pc:spChg chg="add del mod">
+          <ac:chgData name="Toby Donaldson" userId="2e6e5431-bb17-4c41-9985-d39c50d83c73" providerId="ADAL" clId="{F31BC264-820E-54C4-A6D1-F92AF9CC222E}" dt="2026-06-11T18:30:29.732" v="6518"/>
+          <ac:spMkLst>
+            <pc:docMk/>
+            <pc:sldMk cId="2925061429" sldId="292"/>
+            <ac:spMk id="10" creationId="{9DE559A8-6945-0D8F-EF29-8F80860061D6}"/>
+          </ac:spMkLst>
+        </pc:spChg>
+        <pc:spChg chg="add mod">
+          <ac:chgData name="Toby Donaldson" userId="2e6e5431-bb17-4c41-9985-d39c50d83c73" providerId="ADAL" clId="{F31BC264-820E-54C4-A6D1-F92AF9CC222E}" dt="2026-06-11T18:45:39.817" v="6645" actId="20577"/>
+          <ac:spMkLst>
+            <pc:docMk/>
+            <pc:sldMk cId="2925061429" sldId="292"/>
+            <ac:spMk id="11" creationId="{FE6072F2-872B-0AF3-EF5F-8351FE7359BD}"/>
+          </ac:spMkLst>
+        </pc:spChg>
+        <pc:picChg chg="add del mod modCrop">
+          <ac:chgData name="Toby Donaldson" userId="2e6e5431-bb17-4c41-9985-d39c50d83c73" providerId="ADAL" clId="{F31BC264-820E-54C4-A6D1-F92AF9CC222E}" dt="2026-06-11T18:38:28.705" v="6521" actId="21"/>
+          <ac:picMkLst>
+            <pc:docMk/>
+            <pc:sldMk cId="2925061429" sldId="292"/>
+            <ac:picMk id="8" creationId="{709F22DC-45C0-62AD-83FD-4B0673E332E8}"/>
+          </ac:picMkLst>
+        </pc:picChg>
+        <pc:picChg chg="add mod modCrop">
+          <ac:chgData name="Toby Donaldson" userId="2e6e5431-bb17-4c41-9985-d39c50d83c73" providerId="ADAL" clId="{F31BC264-820E-54C4-A6D1-F92AF9CC222E}" dt="2026-06-11T18:39:03.264" v="6530" actId="1076"/>
+          <ac:picMkLst>
+            <pc:docMk/>
+            <pc:sldMk cId="2925061429" sldId="292"/>
+            <ac:picMk id="12" creationId="{5EEB0CD4-3259-9433-CEAF-151E153ACAC4}"/>
+          </ac:picMkLst>
+        </pc:picChg>
       </pc:sldChg>
-      <pc:sldChg chg="del">
-        <pc:chgData name="Toby Donaldson" userId="2e6e5431-bb17-4c41-9985-d39c50d83c73" providerId="ADAL" clId="{F31BC264-820E-54C4-A6D1-F92AF9CC222E}" dt="2026-06-09T03:27:15.290" v="248" actId="2696"/>
+      <pc:sldChg chg="addSp modSp add mod ord">
+        <pc:chgData name="Toby Donaldson" userId="2e6e5431-bb17-4c41-9985-d39c50d83c73" providerId="ADAL" clId="{F31BC264-820E-54C4-A6D1-F92AF9CC222E}" dt="2026-06-11T18:52:48.961" v="6647" actId="20578"/>
         <pc:sldMkLst>
           <pc:docMk/>
-          <pc:sldMk cId="3629156923" sldId="293"/>
+          <pc:sldMk cId="1314648312" sldId="293"/>
         </pc:sldMkLst>
+        <pc:spChg chg="add mod">
+          <ac:chgData name="Toby Donaldson" userId="2e6e5431-bb17-4c41-9985-d39c50d83c73" providerId="ADAL" clId="{F31BC264-820E-54C4-A6D1-F92AF9CC222E}" dt="2026-06-11T18:43:31.816" v="6586" actId="1076"/>
+          <ac:spMkLst>
+            <pc:docMk/>
+            <pc:sldMk cId="1314648312" sldId="293"/>
+            <ac:spMk id="3" creationId="{CF3AB293-9013-08D7-6562-9C1D6985A1F8}"/>
+          </ac:spMkLst>
+        </pc:spChg>
+        <pc:spChg chg="add mod">
+          <ac:chgData name="Toby Donaldson" userId="2e6e5431-bb17-4c41-9985-d39c50d83c73" providerId="ADAL" clId="{F31BC264-820E-54C4-A6D1-F92AF9CC222E}" dt="2026-06-11T18:43:39.314" v="6588" actId="1076"/>
+          <ac:spMkLst>
+            <pc:docMk/>
+            <pc:sldMk cId="1314648312" sldId="293"/>
+            <ac:spMk id="4" creationId="{59C55D4A-3B98-9F98-4013-59A88C24E6BC}"/>
+          </ac:spMkLst>
+        </pc:spChg>
+        <pc:spChg chg="add mod">
+          <ac:chgData name="Toby Donaldson" userId="2e6e5431-bb17-4c41-9985-d39c50d83c73" providerId="ADAL" clId="{F31BC264-820E-54C4-A6D1-F92AF9CC222E}" dt="2026-06-11T18:43:45.164" v="6590" actId="1076"/>
+          <ac:spMkLst>
+            <pc:docMk/>
+            <pc:sldMk cId="1314648312" sldId="293"/>
+            <ac:spMk id="6" creationId="{8D4C3A36-D837-6F98-9D93-170F29D28BE7}"/>
+          </ac:spMkLst>
+        </pc:spChg>
+        <pc:spChg chg="add mod">
+          <ac:chgData name="Toby Donaldson" userId="2e6e5431-bb17-4c41-9985-d39c50d83c73" providerId="ADAL" clId="{F31BC264-820E-54C4-A6D1-F92AF9CC222E}" dt="2026-06-11T18:43:52.714" v="6592" actId="1076"/>
+          <ac:spMkLst>
+            <pc:docMk/>
+            <pc:sldMk cId="1314648312" sldId="293"/>
+            <ac:spMk id="8" creationId="{DD7B9DD0-89CF-F0F9-C3D2-7708215B343D}"/>
+          </ac:spMkLst>
+        </pc:spChg>
+        <pc:spChg chg="add mod">
+          <ac:chgData name="Toby Donaldson" userId="2e6e5431-bb17-4c41-9985-d39c50d83c73" providerId="ADAL" clId="{F31BC264-820E-54C4-A6D1-F92AF9CC222E}" dt="2026-06-11T18:44:11.531" v="6596" actId="20577"/>
+          <ac:spMkLst>
+            <pc:docMk/>
+            <pc:sldMk cId="1314648312" sldId="293"/>
+            <ac:spMk id="10" creationId="{A8CDAEF4-06EA-E81D-C355-6800CCB1FFD7}"/>
+          </ac:spMkLst>
+        </pc:spChg>
+        <pc:spChg chg="mod">
+          <ac:chgData name="Toby Donaldson" userId="2e6e5431-bb17-4c41-9985-d39c50d83c73" providerId="ADAL" clId="{F31BC264-820E-54C4-A6D1-F92AF9CC222E}" dt="2026-06-11T18:45:26.853" v="6629" actId="20577"/>
+          <ac:spMkLst>
+            <pc:docMk/>
+            <pc:sldMk cId="1314648312" sldId="293"/>
+            <ac:spMk id="11" creationId="{AC99E9E9-5C06-DEA1-4B68-CE9277AF3DCC}"/>
+          </ac:spMkLst>
+        </pc:spChg>
+        <pc:spChg chg="add mod">
+          <ac:chgData name="Toby Donaldson" userId="2e6e5431-bb17-4c41-9985-d39c50d83c73" providerId="ADAL" clId="{F31BC264-820E-54C4-A6D1-F92AF9CC222E}" dt="2026-06-11T18:44:31.764" v="6602" actId="1076"/>
+          <ac:spMkLst>
+            <pc:docMk/>
+            <pc:sldMk cId="1314648312" sldId="293"/>
+            <ac:spMk id="13" creationId="{6AA09B4B-7DC8-0D63-1EEA-B25E1F95563C}"/>
+          </ac:spMkLst>
+        </pc:spChg>
+        <pc:spChg chg="add mod">
+          <ac:chgData name="Toby Donaldson" userId="2e6e5431-bb17-4c41-9985-d39c50d83c73" providerId="ADAL" clId="{F31BC264-820E-54C4-A6D1-F92AF9CC222E}" dt="2026-06-11T18:44:59.809" v="6607" actId="20577"/>
+          <ac:spMkLst>
+            <pc:docMk/>
+            <pc:sldMk cId="1314648312" sldId="293"/>
+            <ac:spMk id="14" creationId="{CCE0E802-EEB1-FE59-D41D-E86597C286D9}"/>
+          </ac:spMkLst>
+        </pc:spChg>
+        <pc:spChg chg="add mod">
+          <ac:chgData name="Toby Donaldson" userId="2e6e5431-bb17-4c41-9985-d39c50d83c73" providerId="ADAL" clId="{F31BC264-820E-54C4-A6D1-F92AF9CC222E}" dt="2026-06-11T18:45:13.333" v="6612" actId="20577"/>
+          <ac:spMkLst>
+            <pc:docMk/>
+            <pc:sldMk cId="1314648312" sldId="293"/>
+            <ac:spMk id="15" creationId="{E8A75DFD-D020-5541-9899-372000DB54D6}"/>
+          </ac:spMkLst>
+        </pc:spChg>
+        <pc:picChg chg="mod">
+          <ac:chgData name="Toby Donaldson" userId="2e6e5431-bb17-4c41-9985-d39c50d83c73" providerId="ADAL" clId="{F31BC264-820E-54C4-A6D1-F92AF9CC222E}" dt="2026-06-11T18:45:05.382" v="6610" actId="1076"/>
+          <ac:picMkLst>
+            <pc:docMk/>
+            <pc:sldMk cId="1314648312" sldId="293"/>
+            <ac:picMk id="12" creationId="{39A514C0-AE2C-ACB3-FDAD-F6C43F629E6F}"/>
+          </ac:picMkLst>
+        </pc:picChg>
       </pc:sldChg>
-      <pc:sldChg chg="del">
-        <pc:chgData name="Toby Donaldson" userId="2e6e5431-bb17-4c41-9985-d39c50d83c73" providerId="ADAL" clId="{F31BC264-820E-54C4-A6D1-F92AF9CC222E}" dt="2026-06-09T03:27:15.290" v="248" actId="2696"/>
+      <pc:sldChg chg="addSp delSp modSp add mod">
+        <pc:chgData name="Toby Donaldson" userId="2e6e5431-bb17-4c41-9985-d39c50d83c73" providerId="ADAL" clId="{F31BC264-820E-54C4-A6D1-F92AF9CC222E}" dt="2026-06-11T18:55:40.822" v="6824" actId="20577"/>
         <pc:sldMkLst>
           <pc:docMk/>
-          <pc:sldMk cId="957830208" sldId="294"/>
+          <pc:sldMk cId="2266727789" sldId="294"/>
         </pc:sldMkLst>
+        <pc:spChg chg="add del mod">
+          <ac:chgData name="Toby Donaldson" userId="2e6e5431-bb17-4c41-9985-d39c50d83c73" providerId="ADAL" clId="{F31BC264-820E-54C4-A6D1-F92AF9CC222E}" dt="2026-06-11T18:52:57.859" v="6649" actId="21"/>
+          <ac:spMkLst>
+            <pc:docMk/>
+            <pc:sldMk cId="2266727789" sldId="294"/>
+            <ac:spMk id="4" creationId="{B07AC5F2-9072-559A-18A3-E00A7511A3BE}"/>
+          </ac:spMkLst>
+        </pc:spChg>
+        <pc:spChg chg="del">
+          <ac:chgData name="Toby Donaldson" userId="2e6e5431-bb17-4c41-9985-d39c50d83c73" providerId="ADAL" clId="{F31BC264-820E-54C4-A6D1-F92AF9CC222E}" dt="2026-06-11T18:52:53.253" v="6648" actId="21"/>
+          <ac:spMkLst>
+            <pc:docMk/>
+            <pc:sldMk cId="2266727789" sldId="294"/>
+            <ac:spMk id="9" creationId="{D05F2FBE-A357-08F3-A279-F6459D65533E}"/>
+          </ac:spMkLst>
+        </pc:spChg>
+        <pc:spChg chg="mod">
+          <ac:chgData name="Toby Donaldson" userId="2e6e5431-bb17-4c41-9985-d39c50d83c73" providerId="ADAL" clId="{F31BC264-820E-54C4-A6D1-F92AF9CC222E}" dt="2026-06-11T18:55:40.822" v="6824" actId="20577"/>
+          <ac:spMkLst>
+            <pc:docMk/>
+            <pc:sldMk cId="2266727789" sldId="294"/>
+            <ac:spMk id="11" creationId="{A6AC563B-AF20-66AA-AFD3-D5FE267BE5E8}"/>
+          </ac:spMkLst>
+        </pc:spChg>
       </pc:sldChg>
-      <pc:sldChg chg="del">
-        <pc:chgData name="Toby Donaldson" userId="2e6e5431-bb17-4c41-9985-d39c50d83c73" providerId="ADAL" clId="{F31BC264-820E-54C4-A6D1-F92AF9CC222E}" dt="2026-06-09T03:27:15.290" v="248" actId="2696"/>
+      <pc:sldChg chg="add">
+        <pc:chgData name="Toby Donaldson" userId="2e6e5431-bb17-4c41-9985-d39c50d83c73" providerId="ADAL" clId="{F31BC264-820E-54C4-A6D1-F92AF9CC222E}" dt="2026-06-11T18:55:20.420" v="6792" actId="2890"/>
         <pc:sldMkLst>
           <pc:docMk/>
-          <pc:sldMk cId="524802182" sldId="295"/>
-        </pc:sldMkLst>
-      </pc:sldChg>
-      <pc:sldChg chg="del">
-        <pc:chgData name="Toby Donaldson" userId="2e6e5431-bb17-4c41-9985-d39c50d83c73" providerId="ADAL" clId="{F31BC264-820E-54C4-A6D1-F92AF9CC222E}" dt="2026-06-09T03:27:15.290" v="248" actId="2696"/>
-        <pc:sldMkLst>
-          <pc:docMk/>
-          <pc:sldMk cId="701392879" sldId="296"/>
-        </pc:sldMkLst>
-      </pc:sldChg>
-      <pc:sldChg chg="del">
-        <pc:chgData name="Toby Donaldson" userId="2e6e5431-bb17-4c41-9985-d39c50d83c73" providerId="ADAL" clId="{F31BC264-820E-54C4-A6D1-F92AF9CC222E}" dt="2026-06-09T03:27:15.290" v="248" actId="2696"/>
-        <pc:sldMkLst>
-          <pc:docMk/>
-          <pc:sldMk cId="2382837325" sldId="297"/>
-        </pc:sldMkLst>
-      </pc:sldChg>
-      <pc:sldChg chg="del">
-        <pc:chgData name="Toby Donaldson" userId="2e6e5431-bb17-4c41-9985-d39c50d83c73" providerId="ADAL" clId="{F31BC264-820E-54C4-A6D1-F92AF9CC222E}" dt="2026-06-09T03:27:15.290" v="248" actId="2696"/>
-        <pc:sldMkLst>
-          <pc:docMk/>
-          <pc:sldMk cId="2057144973" sldId="298"/>
-        </pc:sldMkLst>
-      </pc:sldChg>
-      <pc:sldChg chg="del">
-        <pc:chgData name="Toby Donaldson" userId="2e6e5431-bb17-4c41-9985-d39c50d83c73" providerId="ADAL" clId="{F31BC264-820E-54C4-A6D1-F92AF9CC222E}" dt="2026-06-09T03:27:15.290" v="248" actId="2696"/>
-        <pc:sldMkLst>
-          <pc:docMk/>
-          <pc:sldMk cId="2910315310" sldId="299"/>
-        </pc:sldMkLst>
-      </pc:sldChg>
-      <pc:sldChg chg="del">
-        <pc:chgData name="Toby Donaldson" userId="2e6e5431-bb17-4c41-9985-d39c50d83c73" providerId="ADAL" clId="{F31BC264-820E-54C4-A6D1-F92AF9CC222E}" dt="2026-06-09T03:27:15.290" v="248" actId="2696"/>
-        <pc:sldMkLst>
-          <pc:docMk/>
-          <pc:sldMk cId="1695117310" sldId="300"/>
-        </pc:sldMkLst>
-      </pc:sldChg>
-      <pc:sldChg chg="del">
-        <pc:chgData name="Toby Donaldson" userId="2e6e5431-bb17-4c41-9985-d39c50d83c73" providerId="ADAL" clId="{F31BC264-820E-54C4-A6D1-F92AF9CC222E}" dt="2026-06-09T03:27:15.290" v="248" actId="2696"/>
-        <pc:sldMkLst>
-          <pc:docMk/>
-          <pc:sldMk cId="2872223574" sldId="301"/>
-        </pc:sldMkLst>
-      </pc:sldChg>
-      <pc:sldChg chg="del">
-        <pc:chgData name="Toby Donaldson" userId="2e6e5431-bb17-4c41-9985-d39c50d83c73" providerId="ADAL" clId="{F31BC264-820E-54C4-A6D1-F92AF9CC222E}" dt="2026-06-09T03:27:15.290" v="248" actId="2696"/>
-        <pc:sldMkLst>
-          <pc:docMk/>
-          <pc:sldMk cId="662432706" sldId="302"/>
-        </pc:sldMkLst>
-      </pc:sldChg>
-      <pc:sldChg chg="del">
-        <pc:chgData name="Toby Donaldson" userId="2e6e5431-bb17-4c41-9985-d39c50d83c73" providerId="ADAL" clId="{F31BC264-820E-54C4-A6D1-F92AF9CC222E}" dt="2026-06-09T03:27:15.290" v="248" actId="2696"/>
-        <pc:sldMkLst>
-          <pc:docMk/>
-          <pc:sldMk cId="3016989900" sldId="303"/>
-        </pc:sldMkLst>
-      </pc:sldChg>
-      <pc:sldChg chg="del">
-        <pc:chgData name="Toby Donaldson" userId="2e6e5431-bb17-4c41-9985-d39c50d83c73" providerId="ADAL" clId="{F31BC264-820E-54C4-A6D1-F92AF9CC222E}" dt="2026-06-09T03:27:15.290" v="248" actId="2696"/>
-        <pc:sldMkLst>
-          <pc:docMk/>
-          <pc:sldMk cId="912738942" sldId="304"/>
-        </pc:sldMkLst>
-      </pc:sldChg>
-      <pc:sldChg chg="del">
-        <pc:chgData name="Toby Donaldson" userId="2e6e5431-bb17-4c41-9985-d39c50d83c73" providerId="ADAL" clId="{F31BC264-820E-54C4-A6D1-F92AF9CC222E}" dt="2026-06-09T03:27:15.290" v="248" actId="2696"/>
-        <pc:sldMkLst>
-          <pc:docMk/>
-          <pc:sldMk cId="3364763837" sldId="305"/>
-        </pc:sldMkLst>
-      </pc:sldChg>
-      <pc:sldChg chg="del">
-        <pc:chgData name="Toby Donaldson" userId="2e6e5431-bb17-4c41-9985-d39c50d83c73" providerId="ADAL" clId="{F31BC264-820E-54C4-A6D1-F92AF9CC222E}" dt="2026-06-09T03:27:15.290" v="248" actId="2696"/>
-        <pc:sldMkLst>
-          <pc:docMk/>
-          <pc:sldMk cId="3397604499" sldId="306"/>
-        </pc:sldMkLst>
-      </pc:sldChg>
-      <pc:sldChg chg="del">
-        <pc:chgData name="Toby Donaldson" userId="2e6e5431-bb17-4c41-9985-d39c50d83c73" providerId="ADAL" clId="{F31BC264-820E-54C4-A6D1-F92AF9CC222E}" dt="2026-06-09T03:27:15.290" v="248" actId="2696"/>
-        <pc:sldMkLst>
-          <pc:docMk/>
-          <pc:sldMk cId="145551948" sldId="307"/>
-        </pc:sldMkLst>
-      </pc:sldChg>
-      <pc:sldChg chg="del">
-        <pc:chgData name="Toby Donaldson" userId="2e6e5431-bb17-4c41-9985-d39c50d83c73" providerId="ADAL" clId="{F31BC264-820E-54C4-A6D1-F92AF9CC222E}" dt="2026-06-09T03:27:15.290" v="248" actId="2696"/>
-        <pc:sldMkLst>
-          <pc:docMk/>
-          <pc:sldMk cId="1782430822" sldId="308"/>
-        </pc:sldMkLst>
-      </pc:sldChg>
-      <pc:sldChg chg="del">
-        <pc:chgData name="Toby Donaldson" userId="2e6e5431-bb17-4c41-9985-d39c50d83c73" providerId="ADAL" clId="{F31BC264-820E-54C4-A6D1-F92AF9CC222E}" dt="2026-06-09T03:27:15.290" v="248" actId="2696"/>
-        <pc:sldMkLst>
-          <pc:docMk/>
-          <pc:sldMk cId="2206279283" sldId="309"/>
-        </pc:sldMkLst>
-      </pc:sldChg>
-      <pc:sldChg chg="del">
-        <pc:chgData name="Toby Donaldson" userId="2e6e5431-bb17-4c41-9985-d39c50d83c73" providerId="ADAL" clId="{F31BC264-820E-54C4-A6D1-F92AF9CC222E}" dt="2026-06-09T03:27:15.290" v="248" actId="2696"/>
-        <pc:sldMkLst>
-          <pc:docMk/>
-          <pc:sldMk cId="2559814096" sldId="310"/>
-        </pc:sldMkLst>
-      </pc:sldChg>
-      <pc:sldChg chg="del">
-        <pc:chgData name="Toby Donaldson" userId="2e6e5431-bb17-4c41-9985-d39c50d83c73" providerId="ADAL" clId="{F31BC264-820E-54C4-A6D1-F92AF9CC222E}" dt="2026-06-09T03:27:15.290" v="248" actId="2696"/>
-        <pc:sldMkLst>
-          <pc:docMk/>
-          <pc:sldMk cId="2111329952" sldId="311"/>
-        </pc:sldMkLst>
-      </pc:sldChg>
-      <pc:sldChg chg="del">
-        <pc:chgData name="Toby Donaldson" userId="2e6e5431-bb17-4c41-9985-d39c50d83c73" providerId="ADAL" clId="{F31BC264-820E-54C4-A6D1-F92AF9CC222E}" dt="2026-06-09T03:27:15.290" v="248" actId="2696"/>
-        <pc:sldMkLst>
-          <pc:docMk/>
-          <pc:sldMk cId="2227623225" sldId="312"/>
-        </pc:sldMkLst>
-      </pc:sldChg>
-      <pc:sldChg chg="del">
-        <pc:chgData name="Toby Donaldson" userId="2e6e5431-bb17-4c41-9985-d39c50d83c73" providerId="ADAL" clId="{F31BC264-820E-54C4-A6D1-F92AF9CC222E}" dt="2026-06-09T03:27:15.290" v="248" actId="2696"/>
-        <pc:sldMkLst>
-          <pc:docMk/>
-          <pc:sldMk cId="1599179371" sldId="313"/>
-        </pc:sldMkLst>
-      </pc:sldChg>
-      <pc:sldChg chg="del">
-        <pc:chgData name="Toby Donaldson" userId="2e6e5431-bb17-4c41-9985-d39c50d83c73" providerId="ADAL" clId="{F31BC264-820E-54C4-A6D1-F92AF9CC222E}" dt="2026-06-09T03:27:15.290" v="248" actId="2696"/>
-        <pc:sldMkLst>
-          <pc:docMk/>
-          <pc:sldMk cId="2168196056" sldId="314"/>
-        </pc:sldMkLst>
-      </pc:sldChg>
-      <pc:sldChg chg="del">
-        <pc:chgData name="Toby Donaldson" userId="2e6e5431-bb17-4c41-9985-d39c50d83c73" providerId="ADAL" clId="{F31BC264-820E-54C4-A6D1-F92AF9CC222E}" dt="2026-06-09T03:27:15.290" v="248" actId="2696"/>
-        <pc:sldMkLst>
-          <pc:docMk/>
-          <pc:sldMk cId="140079861" sldId="315"/>
-        </pc:sldMkLst>
-      </pc:sldChg>
-      <pc:sldChg chg="modSp del mod">
-        <pc:chgData name="Toby Donaldson" userId="2e6e5431-bb17-4c41-9985-d39c50d83c73" providerId="ADAL" clId="{F31BC264-820E-54C4-A6D1-F92AF9CC222E}" dt="2026-06-09T03:27:15.290" v="248" actId="2696"/>
-        <pc:sldMkLst>
-          <pc:docMk/>
-          <pc:sldMk cId="1726942880" sldId="316"/>
-        </pc:sldMkLst>
-      </pc:sldChg>
-      <pc:sldChg chg="add del">
-        <pc:chgData name="Toby Donaldson" userId="2e6e5431-bb17-4c41-9985-d39c50d83c73" providerId="ADAL" clId="{F31BC264-820E-54C4-A6D1-F92AF9CC222E}" dt="2026-06-09T03:27:25.246" v="250" actId="2696"/>
-        <pc:sldMkLst>
-          <pc:docMk/>
-          <pc:sldMk cId="3544150045" sldId="317"/>
+          <pc:sldMk cId="1343814238" sldId="295"/>
         </pc:sldMkLst>
       </pc:sldChg>
     </pc:docChg>
@@ -3520,7 +2742,7 @@
           <a:p>
             <a:fld id="{889F9635-12D6-CA48-83F0-27F24E8721A6}" type="datetimeFigureOut">
               <a:rPr lang="en-US" smtClean="0"/>
-              <a:t>6/8/26</a:t>
+              <a:t>6/11/26</a:t>
             </a:fld>
             <a:endParaRPr lang="en-US"/>
           </a:p>
@@ -3718,7 +2940,7 @@
           <a:p>
             <a:fld id="{889F9635-12D6-CA48-83F0-27F24E8721A6}" type="datetimeFigureOut">
               <a:rPr lang="en-US" smtClean="0"/>
-              <a:t>6/8/26</a:t>
+              <a:t>6/11/26</a:t>
             </a:fld>
             <a:endParaRPr lang="en-US"/>
           </a:p>
@@ -3926,7 +3148,7 @@
           <a:p>
             <a:fld id="{889F9635-12D6-CA48-83F0-27F24E8721A6}" type="datetimeFigureOut">
               <a:rPr lang="en-US" smtClean="0"/>
-              <a:t>6/8/26</a:t>
+              <a:t>6/11/26</a:t>
             </a:fld>
             <a:endParaRPr lang="en-US"/>
           </a:p>
@@ -4124,7 +3346,7 @@
           <a:p>
             <a:fld id="{889F9635-12D6-CA48-83F0-27F24E8721A6}" type="datetimeFigureOut">
               <a:rPr lang="en-US" smtClean="0"/>
-              <a:t>6/8/26</a:t>
+              <a:t>6/11/26</a:t>
             </a:fld>
             <a:endParaRPr lang="en-US"/>
           </a:p>
@@ -4399,7 +3621,7 @@
           <a:p>
             <a:fld id="{889F9635-12D6-CA48-83F0-27F24E8721A6}" type="datetimeFigureOut">
               <a:rPr lang="en-US" smtClean="0"/>
-              <a:t>6/8/26</a:t>
+              <a:t>6/11/26</a:t>
             </a:fld>
             <a:endParaRPr lang="en-US"/>
           </a:p>
@@ -4664,7 +3886,7 @@
           <a:p>
             <a:fld id="{889F9635-12D6-CA48-83F0-27F24E8721A6}" type="datetimeFigureOut">
               <a:rPr lang="en-US" smtClean="0"/>
-              <a:t>6/8/26</a:t>
+              <a:t>6/11/26</a:t>
             </a:fld>
             <a:endParaRPr lang="en-US"/>
           </a:p>
@@ -5076,7 +4298,7 @@
           <a:p>
             <a:fld id="{889F9635-12D6-CA48-83F0-27F24E8721A6}" type="datetimeFigureOut">
               <a:rPr lang="en-US" smtClean="0"/>
-              <a:t>6/8/26</a:t>
+              <a:t>6/11/26</a:t>
             </a:fld>
             <a:endParaRPr lang="en-US"/>
           </a:p>
@@ -5217,7 +4439,7 @@
           <a:p>
             <a:fld id="{889F9635-12D6-CA48-83F0-27F24E8721A6}" type="datetimeFigureOut">
               <a:rPr lang="en-US" smtClean="0"/>
-              <a:t>6/8/26</a:t>
+              <a:t>6/11/26</a:t>
             </a:fld>
             <a:endParaRPr lang="en-US"/>
           </a:p>
@@ -5330,7 +4552,7 @@
           <a:p>
             <a:fld id="{889F9635-12D6-CA48-83F0-27F24E8721A6}" type="datetimeFigureOut">
               <a:rPr lang="en-US" smtClean="0"/>
-              <a:t>6/8/26</a:t>
+              <a:t>6/11/26</a:t>
             </a:fld>
             <a:endParaRPr lang="en-US"/>
           </a:p>
@@ -5641,7 +4863,7 @@
           <a:p>
             <a:fld id="{889F9635-12D6-CA48-83F0-27F24E8721A6}" type="datetimeFigureOut">
               <a:rPr lang="en-US" smtClean="0"/>
-              <a:t>6/8/26</a:t>
+              <a:t>6/11/26</a:t>
             </a:fld>
             <a:endParaRPr lang="en-US"/>
           </a:p>
@@ -5929,7 +5151,7 @@
           <a:p>
             <a:fld id="{889F9635-12D6-CA48-83F0-27F24E8721A6}" type="datetimeFigureOut">
               <a:rPr lang="en-US" smtClean="0"/>
-              <a:t>6/8/26</a:t>
+              <a:t>6/11/26</a:t>
             </a:fld>
             <a:endParaRPr lang="en-US"/>
           </a:p>
@@ -6170,7 +5392,7 @@
           <a:p>
             <a:fld id="{889F9635-12D6-CA48-83F0-27F24E8721A6}" type="datetimeFigureOut">
               <a:rPr lang="en-US" smtClean="0"/>
-              <a:t>6/8/26</a:t>
+              <a:t>6/11/26</a:t>
             </a:fld>
             <a:endParaRPr lang="en-US"/>
           </a:p>
@@ -8122,8 +7344,8 @@
           </a:p>
         </p:txBody>
       </p:sp>
-      <mc:AlternateContent xmlns:mc="http://schemas.openxmlformats.org/markup-compatibility/2006">
-        <mc:Choice xmlns:p14="http://schemas.microsoft.com/office/powerpoint/2010/main" Requires="p14">
+      <mc:AlternateContent xmlns:mc="http://schemas.openxmlformats.org/markup-compatibility/2006" xmlns:p14="http://schemas.microsoft.com/office/powerpoint/2010/main">
+        <mc:Choice Requires="p14">
           <p:contentPart p14:bwMode="auto" r:id="rId2">
             <p14:nvContentPartPr>
               <p14:cNvPr id="41" name="Ink 40">
@@ -8142,7 +7364,7 @@
             </p14:xfrm>
           </p:contentPart>
         </mc:Choice>
-        <mc:Fallback>
+        <mc:Fallback xmlns="">
           <p:pic>
             <p:nvPicPr>
               <p:cNvPr id="41" name="Ink 40">
@@ -13782,8 +13004,8 @@
           </a:p>
         </p:txBody>
       </p:sp>
-      <mc:AlternateContent xmlns:mc="http://schemas.openxmlformats.org/markup-compatibility/2006">
-        <mc:Choice xmlns:p14="http://schemas.microsoft.com/office/powerpoint/2010/main" Requires="p14">
+      <mc:AlternateContent xmlns:mc="http://schemas.openxmlformats.org/markup-compatibility/2006" xmlns:p14="http://schemas.microsoft.com/office/powerpoint/2010/main">
+        <mc:Choice Requires="p14">
           <p:contentPart p14:bwMode="auto" r:id="rId3">
             <p14:nvContentPartPr>
               <p14:cNvPr id="6" name="Ink 5">
@@ -13802,7 +13024,7 @@
             </p14:xfrm>
           </p:contentPart>
         </mc:Choice>
-        <mc:Fallback>
+        <mc:Fallback xmlns="">
           <p:pic>
             <p:nvPicPr>
               <p:cNvPr id="6" name="Ink 5">
@@ -14169,8 +13391,8 @@
           </a:p>
         </p:txBody>
       </p:sp>
-      <mc:AlternateContent xmlns:mc="http://schemas.openxmlformats.org/markup-compatibility/2006">
-        <mc:Choice xmlns:p14="http://schemas.microsoft.com/office/powerpoint/2010/main" Requires="p14">
+      <mc:AlternateContent xmlns:mc="http://schemas.openxmlformats.org/markup-compatibility/2006" xmlns:p14="http://schemas.microsoft.com/office/powerpoint/2010/main">
+        <mc:Choice Requires="p14">
           <p:contentPart p14:bwMode="auto" r:id="rId3">
             <p14:nvContentPartPr>
               <p14:cNvPr id="8" name="Ink 7">
@@ -14189,7 +13411,7 @@
             </p14:xfrm>
           </p:contentPart>
         </mc:Choice>
-        <mc:Fallback>
+        <mc:Fallback xmlns="">
           <p:pic>
             <p:nvPicPr>
               <p:cNvPr id="8" name="Ink 7">
@@ -14619,8 +13841,8 @@
           </a:p>
         </p:txBody>
       </p:sp>
-      <mc:AlternateContent xmlns:mc="http://schemas.openxmlformats.org/markup-compatibility/2006">
-        <mc:Choice xmlns:p14="http://schemas.microsoft.com/office/powerpoint/2010/main" Requires="p14">
+      <mc:AlternateContent xmlns:mc="http://schemas.openxmlformats.org/markup-compatibility/2006" xmlns:p14="http://schemas.microsoft.com/office/powerpoint/2010/main">
+        <mc:Choice Requires="p14">
           <p:contentPart p14:bwMode="auto" r:id="rId3">
             <p14:nvContentPartPr>
               <p14:cNvPr id="17" name="Ink 16">
@@ -14639,7 +13861,7 @@
             </p14:xfrm>
           </p:contentPart>
         </mc:Choice>
-        <mc:Fallback>
+        <mc:Fallback xmlns="">
           <p:pic>
             <p:nvPicPr>
               <p:cNvPr id="17" name="Ink 16">
@@ -14964,8 +14186,8 @@
           </a:p>
         </p:txBody>
       </p:sp>
-      <mc:AlternateContent xmlns:mc="http://schemas.openxmlformats.org/markup-compatibility/2006">
-        <mc:Choice xmlns:p14="http://schemas.microsoft.com/office/powerpoint/2010/main" Requires="p14">
+      <mc:AlternateContent xmlns:mc="http://schemas.openxmlformats.org/markup-compatibility/2006" xmlns:p14="http://schemas.microsoft.com/office/powerpoint/2010/main">
+        <mc:Choice Requires="p14">
           <p:contentPart p14:bwMode="auto" r:id="rId3">
             <p14:nvContentPartPr>
               <p14:cNvPr id="8" name="Ink 7">
@@ -14984,7 +14206,7 @@
             </p14:xfrm>
           </p:contentPart>
         </mc:Choice>
-        <mc:Fallback>
+        <mc:Fallback xmlns="">
           <p:pic>
             <p:nvPicPr>
               <p:cNvPr id="8" name="Ink 7">
@@ -15162,8 +14384,8 @@
           </a:p>
         </p:txBody>
       </p:sp>
-      <mc:AlternateContent xmlns:mc="http://schemas.openxmlformats.org/markup-compatibility/2006">
-        <mc:Choice xmlns:p14="http://schemas.microsoft.com/office/powerpoint/2010/main" Requires="p14">
+      <mc:AlternateContent xmlns:mc="http://schemas.openxmlformats.org/markup-compatibility/2006" xmlns:p14="http://schemas.microsoft.com/office/powerpoint/2010/main">
+        <mc:Choice Requires="p14">
           <p:contentPart p14:bwMode="auto" r:id="rId3">
             <p14:nvContentPartPr>
               <p14:cNvPr id="4" name="Ink 3">
@@ -15182,7 +14404,7 @@
             </p14:xfrm>
           </p:contentPart>
         </mc:Choice>
-        <mc:Fallback>
+        <mc:Fallback xmlns="">
           <p:pic>
             <p:nvPicPr>
               <p:cNvPr id="4" name="Ink 3">
@@ -16530,8 +15752,8 @@
           </p:style>
         </p:cxnSp>
       </p:grpSp>
-      <mc:AlternateContent xmlns:mc="http://schemas.openxmlformats.org/markup-compatibility/2006">
-        <mc:Choice xmlns:p14="http://schemas.microsoft.com/office/powerpoint/2010/main" Requires="p14">
+      <mc:AlternateContent xmlns:mc="http://schemas.openxmlformats.org/markup-compatibility/2006" xmlns:p14="http://schemas.microsoft.com/office/powerpoint/2010/main">
+        <mc:Choice Requires="p14">
           <p:contentPart p14:bwMode="auto" r:id="rId2">
             <p14:nvContentPartPr>
               <p14:cNvPr id="32" name="Ink 31">
@@ -16550,7 +15772,7 @@
             </p14:xfrm>
           </p:contentPart>
         </mc:Choice>
-        <mc:Fallback>
+        <mc:Fallback xmlns="">
           <p:pic>
             <p:nvPicPr>
               <p:cNvPr id="32" name="Ink 31">
@@ -17254,8 +16476,8 @@
           </a:p>
         </p:txBody>
       </p:sp>
-      <mc:AlternateContent xmlns:mc="http://schemas.openxmlformats.org/markup-compatibility/2006">
-        <mc:Choice xmlns:p14="http://schemas.microsoft.com/office/powerpoint/2010/main" Requires="p14">
+      <mc:AlternateContent xmlns:mc="http://schemas.openxmlformats.org/markup-compatibility/2006" xmlns:p14="http://schemas.microsoft.com/office/powerpoint/2010/main">
+        <mc:Choice Requires="p14">
           <p:contentPart p14:bwMode="auto" r:id="rId3">
             <p14:nvContentPartPr>
               <p14:cNvPr id="40" name="Ink 39">
@@ -17274,7 +16496,7 @@
             </p14:xfrm>
           </p:contentPart>
         </mc:Choice>
-        <mc:Fallback>
+        <mc:Fallback xmlns="">
           <p:pic>
             <p:nvPicPr>
               <p:cNvPr id="40" name="Ink 39">
@@ -22954,8 +22176,8 @@
           </a:p>
         </p:txBody>
       </p:sp>
-      <mc:AlternateContent xmlns:mc="http://schemas.openxmlformats.org/markup-compatibility/2006">
-        <mc:Choice xmlns:p14="http://schemas.microsoft.com/office/powerpoint/2010/main" Requires="p14">
+      <mc:AlternateContent xmlns:mc="http://schemas.openxmlformats.org/markup-compatibility/2006" xmlns:p14="http://schemas.microsoft.com/office/powerpoint/2010/main">
+        <mc:Choice Requires="p14">
           <p:contentPart p14:bwMode="auto" r:id="rId2">
             <p14:nvContentPartPr>
               <p14:cNvPr id="38" name="Ink 37">
@@ -22974,7 +22196,7 @@
             </p14:xfrm>
           </p:contentPart>
         </mc:Choice>
-        <mc:Fallback>
+        <mc:Fallback xmlns="">
           <p:pic>
             <p:nvPicPr>
               <p:cNvPr id="38" name="Ink 37">
@@ -24457,8 +23679,8 @@
           </a:p>
         </p:txBody>
       </p:sp>
-      <mc:AlternateContent xmlns:mc="http://schemas.openxmlformats.org/markup-compatibility/2006">
-        <mc:Choice xmlns:p14="http://schemas.microsoft.com/office/powerpoint/2010/main" Requires="p14">
+      <mc:AlternateContent xmlns:mc="http://schemas.openxmlformats.org/markup-compatibility/2006" xmlns:p14="http://schemas.microsoft.com/office/powerpoint/2010/main">
+        <mc:Choice Requires="p14">
           <p:contentPart p14:bwMode="auto" r:id="rId2">
             <p14:nvContentPartPr>
               <p14:cNvPr id="38" name="Ink 37">
@@ -24477,7 +23699,7 @@
             </p14:xfrm>
           </p:contentPart>
         </mc:Choice>
-        <mc:Fallback>
+        <mc:Fallback xmlns="">
           <p:pic>
             <p:nvPicPr>
               <p:cNvPr id="38" name="Ink 37">
@@ -26527,8 +25749,8 @@
           </a:p>
         </p:txBody>
       </p:sp>
-      <mc:AlternateContent xmlns:mc="http://schemas.openxmlformats.org/markup-compatibility/2006">
-        <mc:Choice xmlns:p14="http://schemas.microsoft.com/office/powerpoint/2010/main" Requires="p14">
+      <mc:AlternateContent xmlns:mc="http://schemas.openxmlformats.org/markup-compatibility/2006" xmlns:p14="http://schemas.microsoft.com/office/powerpoint/2010/main">
+        <mc:Choice Requires="p14">
           <p:contentPart p14:bwMode="auto" r:id="rId3">
             <p14:nvContentPartPr>
               <p14:cNvPr id="4" name="Ink 3">
@@ -26547,7 +25769,7 @@
             </p14:xfrm>
           </p:contentPart>
         </mc:Choice>
-        <mc:Fallback>
+        <mc:Fallback xmlns="">
           <p:pic>
             <p:nvPicPr>
               <p:cNvPr id="4" name="Ink 3">
@@ -27140,8 +26362,8 @@
           </a:prstGeom>
         </p:spPr>
       </p:pic>
-      <mc:AlternateContent xmlns:mc="http://schemas.openxmlformats.org/markup-compatibility/2006">
-        <mc:Choice xmlns:p14="http://schemas.microsoft.com/office/powerpoint/2010/main" Requires="p14">
+      <mc:AlternateContent xmlns:mc="http://schemas.openxmlformats.org/markup-compatibility/2006" xmlns:p14="http://schemas.microsoft.com/office/powerpoint/2010/main">
+        <mc:Choice Requires="p14">
           <p:contentPart p14:bwMode="auto" r:id="rId3">
             <p14:nvContentPartPr>
               <p14:cNvPr id="5" name="Ink 4">
@@ -27160,7 +26382,7 @@
             </p14:xfrm>
           </p:contentPart>
         </mc:Choice>
-        <mc:Fallback>
+        <mc:Fallback xmlns="">
           <p:pic>
             <p:nvPicPr>
               <p:cNvPr id="5" name="Ink 4">
@@ -27610,8 +26832,8 @@
           </a:p>
         </p:txBody>
       </p:sp>
-      <mc:AlternateContent xmlns:mc="http://schemas.openxmlformats.org/markup-compatibility/2006">
-        <mc:Choice xmlns:p14="http://schemas.microsoft.com/office/powerpoint/2010/main" Requires="p14">
+      <mc:AlternateContent xmlns:mc="http://schemas.openxmlformats.org/markup-compatibility/2006" xmlns:p14="http://schemas.microsoft.com/office/powerpoint/2010/main">
+        <mc:Choice Requires="p14">
           <p:contentPart p14:bwMode="auto" r:id="rId3">
             <p14:nvContentPartPr>
               <p14:cNvPr id="6" name="Ink 5">
@@ -27630,7 +26852,7 @@
             </p14:xfrm>
           </p:contentPart>
         </mc:Choice>
-        <mc:Fallback>
+        <mc:Fallback xmlns="">
           <p:pic>
             <p:nvPicPr>
               <p:cNvPr id="6" name="Ink 5">
@@ -27812,8 +27034,8 @@
           </a:p>
         </p:txBody>
       </p:sp>
-      <mc:AlternateContent xmlns:mc="http://schemas.openxmlformats.org/markup-compatibility/2006">
-        <mc:Choice xmlns:p14="http://schemas.microsoft.com/office/powerpoint/2010/main" Requires="p14">
+      <mc:AlternateContent xmlns:mc="http://schemas.openxmlformats.org/markup-compatibility/2006" xmlns:p14="http://schemas.microsoft.com/office/powerpoint/2010/main">
+        <mc:Choice Requires="p14">
           <p:contentPart p14:bwMode="auto" r:id="rId2">
             <p14:nvContentPartPr>
               <p14:cNvPr id="4" name="Ink 3">
@@ -27832,7 +27054,7 @@
             </p14:xfrm>
           </p:contentPart>
         </mc:Choice>
-        <mc:Fallback>
+        <mc:Fallback xmlns="">
           <p:pic>
             <p:nvPicPr>
               <p:cNvPr id="4" name="Ink 3">
@@ -28302,6 +27524,1323 @@
     <p:extLst>
       <p:ext uri="{BB962C8B-B14F-4D97-AF65-F5344CB8AC3E}">
         <p14:creationId xmlns:p14="http://schemas.microsoft.com/office/powerpoint/2010/main" val="2026226063"/>
+      </p:ext>
+    </p:extLst>
+  </p:cSld>
+  <p:clrMapOvr>
+    <a:masterClrMapping/>
+  </p:clrMapOvr>
+</p:sld>
+</file>
+
+<file path=ppt/slides/slide37.xml><?xml version="1.0" encoding="utf-8"?>
+<p:sld xmlns:a="http://schemas.openxmlformats.org/drawingml/2006/main" xmlns:r="http://schemas.openxmlformats.org/officeDocument/2006/relationships" xmlns:p="http://schemas.openxmlformats.org/presentationml/2006/main">
+  <p:cSld>
+    <p:spTree>
+      <p:nvGrpSpPr>
+        <p:cNvPr id="1" name=""/>
+        <p:cNvGrpSpPr/>
+        <p:nvPr/>
+      </p:nvGrpSpPr>
+      <p:grpSpPr>
+        <a:xfrm>
+          <a:off x="0" y="0"/>
+          <a:ext cx="0" cy="0"/>
+          <a:chOff x="0" y="0"/>
+          <a:chExt cx="0" cy="0"/>
+        </a:xfrm>
+      </p:grpSpPr>
+      <p:sp>
+        <p:nvSpPr>
+          <p:cNvPr id="2" name="Title 1">
+            <a:extLst>
+              <a:ext uri="{FF2B5EF4-FFF2-40B4-BE49-F238E27FC236}">
+                <a16:creationId xmlns:a16="http://schemas.microsoft.com/office/drawing/2014/main" id="{4E9A307D-7E3C-CBB6-D880-3BF064EE84C9}"/>
+              </a:ext>
+            </a:extLst>
+          </p:cNvPr>
+          <p:cNvSpPr>
+            <a:spLocks noGrp="1"/>
+          </p:cNvSpPr>
+          <p:nvPr>
+            <p:ph type="title"/>
+          </p:nvPr>
+        </p:nvSpPr>
+        <p:spPr>
+          <a:xfrm>
+            <a:off x="838200" y="365125"/>
+            <a:ext cx="5100376" cy="1325563"/>
+          </a:xfrm>
+        </p:spPr>
+        <p:txBody>
+          <a:bodyPr/>
+          <a:lstStyle/>
+          <a:p>
+            <a:r>
+              <a:rPr lang="en-US" dirty="0"/>
+              <a:t>Try this!</a:t>
+            </a:r>
+          </a:p>
+        </p:txBody>
+      </p:sp>
+      <p:sp>
+        <p:nvSpPr>
+          <p:cNvPr id="5" name="TextBox 4">
+            <a:extLst>
+              <a:ext uri="{FF2B5EF4-FFF2-40B4-BE49-F238E27FC236}">
+                <a16:creationId xmlns:a16="http://schemas.microsoft.com/office/drawing/2014/main" id="{EEC28342-515A-1B24-409A-A8CD5261AAA1}"/>
+              </a:ext>
+            </a:extLst>
+          </p:cNvPr>
+          <p:cNvSpPr txBox="1"/>
+          <p:nvPr/>
+        </p:nvSpPr>
+        <p:spPr>
+          <a:xfrm>
+            <a:off x="3049675" y="3246846"/>
+            <a:ext cx="6099348" cy="369332"/>
+          </a:xfrm>
+          <a:prstGeom prst="rect">
+            <a:avLst/>
+          </a:prstGeom>
+          <a:noFill/>
+        </p:spPr>
+        <p:txBody>
+          <a:bodyPr wrap="square">
+            <a:spAutoFit/>
+          </a:bodyPr>
+          <a:lstStyle/>
+          <a:p>
+            <a:endParaRPr lang="en-US" dirty="0"/>
+          </a:p>
+        </p:txBody>
+      </p:sp>
+      <p:sp>
+        <p:nvSpPr>
+          <p:cNvPr id="7" name="TextBox 6">
+            <a:extLst>
+              <a:ext uri="{FF2B5EF4-FFF2-40B4-BE49-F238E27FC236}">
+                <a16:creationId xmlns:a16="http://schemas.microsoft.com/office/drawing/2014/main" id="{C55DEEC4-6007-EFCD-B31C-04F3BD86FAC2}"/>
+              </a:ext>
+            </a:extLst>
+          </p:cNvPr>
+          <p:cNvSpPr txBox="1"/>
+          <p:nvPr/>
+        </p:nvSpPr>
+        <p:spPr>
+          <a:xfrm>
+            <a:off x="3049675" y="3246846"/>
+            <a:ext cx="6099348" cy="369332"/>
+          </a:xfrm>
+          <a:prstGeom prst="rect">
+            <a:avLst/>
+          </a:prstGeom>
+          <a:noFill/>
+        </p:spPr>
+        <p:txBody>
+          <a:bodyPr wrap="square">
+            <a:spAutoFit/>
+          </a:bodyPr>
+          <a:lstStyle/>
+          <a:p>
+            <a:endParaRPr lang="en-US" dirty="0"/>
+          </a:p>
+        </p:txBody>
+      </p:sp>
+      <p:sp>
+        <p:nvSpPr>
+          <p:cNvPr id="9" name="Content Placeholder 2">
+            <a:extLst>
+              <a:ext uri="{FF2B5EF4-FFF2-40B4-BE49-F238E27FC236}">
+                <a16:creationId xmlns:a16="http://schemas.microsoft.com/office/drawing/2014/main" id="{62A8830A-E3B1-61AA-EA09-09ED11209B29}"/>
+              </a:ext>
+            </a:extLst>
+          </p:cNvPr>
+          <p:cNvSpPr>
+            <a:spLocks noGrp="1"/>
+          </p:cNvSpPr>
+          <p:nvPr>
+            <p:ph idx="1"/>
+          </p:nvPr>
+        </p:nvSpPr>
+        <p:spPr>
+          <a:xfrm>
+            <a:off x="7104185" y="3655034"/>
+            <a:ext cx="4947975" cy="3034603"/>
+          </a:xfrm>
+        </p:spPr>
+        <p:txBody>
+          <a:bodyPr>
+            <a:normAutofit fontScale="92500" lnSpcReduction="10000"/>
+          </a:bodyPr>
+          <a:lstStyle/>
+          <a:p>
+            <a:pPr marL="0" indent="0">
+              <a:buNone/>
+            </a:pPr>
+            <a:r>
+              <a:rPr lang="en-CA" dirty="0"/>
+              <a:t>The </a:t>
+            </a:r>
+            <a:r>
+              <a:rPr lang="en-CA" b="1" dirty="0"/>
+              <a:t>height</a:t>
+            </a:r>
+            <a:r>
+              <a:rPr lang="en-CA" dirty="0"/>
+              <a:t> of a node p in a tree is:</a:t>
+            </a:r>
+          </a:p>
+          <a:p>
+            <a:r>
+              <a:rPr lang="en-CA" dirty="0"/>
+              <a:t>If p</a:t>
+            </a:r>
+            <a:r>
+              <a:rPr lang="en-CA" i="1" dirty="0"/>
+              <a:t> </a:t>
+            </a:r>
+            <a:r>
+              <a:rPr lang="en-CA" dirty="0"/>
+              <a:t>is a leaf, then the </a:t>
+            </a:r>
+            <a:r>
+              <a:rPr lang="en-CA" b="1" dirty="0"/>
+              <a:t>height</a:t>
+            </a:r>
+            <a:r>
+              <a:rPr lang="en-CA" dirty="0"/>
+              <a:t> of p</a:t>
+            </a:r>
+            <a:r>
+              <a:rPr lang="en-CA" i="1" dirty="0"/>
+              <a:t> </a:t>
+            </a:r>
+            <a:r>
+              <a:rPr lang="en-CA" dirty="0"/>
+              <a:t>is 0</a:t>
+            </a:r>
+          </a:p>
+          <a:p>
+            <a:r>
+              <a:rPr lang="en-CA" dirty="0"/>
+              <a:t>Otherwise, the </a:t>
+            </a:r>
+            <a:r>
+              <a:rPr lang="en-CA" b="1" dirty="0"/>
+              <a:t>height</a:t>
+            </a:r>
+            <a:r>
+              <a:rPr lang="en-CA" dirty="0"/>
+              <a:t> of p</a:t>
+            </a:r>
+            <a:r>
+              <a:rPr lang="en-CA" i="1" dirty="0"/>
+              <a:t> </a:t>
+            </a:r>
+            <a:r>
+              <a:rPr lang="en-CA" dirty="0"/>
+              <a:t>is 1 plus the </a:t>
+            </a:r>
+            <a:r>
+              <a:rPr lang="en-CA" i="1" dirty="0"/>
+              <a:t>maximum</a:t>
+            </a:r>
+            <a:r>
+              <a:rPr lang="en-CA" dirty="0"/>
+              <a:t> height of a child of p</a:t>
+            </a:r>
+          </a:p>
+          <a:p>
+            <a:pPr marL="0" indent="0">
+              <a:buNone/>
+            </a:pPr>
+            <a:r>
+              <a:rPr lang="en-US" dirty="0"/>
+              <a:t>The </a:t>
+            </a:r>
+            <a:r>
+              <a:rPr lang="en-US" b="1" dirty="0"/>
+              <a:t>height of a tree </a:t>
+            </a:r>
+            <a:r>
+              <a:rPr lang="en-US" dirty="0"/>
+              <a:t>T is the the height of T’s root node.</a:t>
+            </a:r>
+          </a:p>
+        </p:txBody>
+      </p:sp>
+      <p:sp>
+        <p:nvSpPr>
+          <p:cNvPr id="11" name="TextBox 10">
+            <a:extLst>
+              <a:ext uri="{FF2B5EF4-FFF2-40B4-BE49-F238E27FC236}">
+                <a16:creationId xmlns:a16="http://schemas.microsoft.com/office/drawing/2014/main" id="{FE6072F2-872B-0AF3-EF5F-8351FE7359BD}"/>
+              </a:ext>
+            </a:extLst>
+          </p:cNvPr>
+          <p:cNvSpPr txBox="1"/>
+          <p:nvPr/>
+        </p:nvSpPr>
+        <p:spPr>
+          <a:xfrm>
+            <a:off x="469095" y="1859340"/>
+            <a:ext cx="4480907" cy="3785652"/>
+          </a:xfrm>
+          <a:prstGeom prst="rect">
+            <a:avLst/>
+          </a:prstGeom>
+          <a:noFill/>
+        </p:spPr>
+        <p:txBody>
+          <a:bodyPr wrap="none" rtlCol="0">
+            <a:spAutoFit/>
+          </a:bodyPr>
+          <a:lstStyle/>
+          <a:p>
+            <a:r>
+              <a:rPr lang="en-US" sz="2400" dirty="0"/>
+              <a:t>Is it a binary tree?</a:t>
+            </a:r>
+          </a:p>
+          <a:p>
+            <a:endParaRPr lang="en-US" sz="2400" dirty="0">
+              <a:solidFill>
+                <a:srgbClr val="00B050"/>
+              </a:solidFill>
+            </a:endParaRPr>
+          </a:p>
+          <a:p>
+            <a:endParaRPr lang="en-US" sz="2400" dirty="0"/>
+          </a:p>
+          <a:p>
+            <a:r>
+              <a:rPr lang="en-US" sz="2400" dirty="0"/>
+              <a:t>Is it a proper tree?</a:t>
+            </a:r>
+          </a:p>
+          <a:p>
+            <a:endParaRPr lang="en-US" sz="2400" dirty="0">
+              <a:solidFill>
+                <a:srgbClr val="00B050"/>
+              </a:solidFill>
+            </a:endParaRPr>
+          </a:p>
+          <a:p>
+            <a:endParaRPr lang="en-US" sz="2400" dirty="0"/>
+          </a:p>
+          <a:p>
+            <a:r>
+              <a:rPr lang="en-US" sz="2400" dirty="0"/>
+              <a:t>What are its leaves?</a:t>
+            </a:r>
+          </a:p>
+          <a:p>
+            <a:endParaRPr lang="en-US" sz="2400" dirty="0">
+              <a:solidFill>
+                <a:srgbClr val="00B050"/>
+              </a:solidFill>
+            </a:endParaRPr>
+          </a:p>
+          <a:p>
+            <a:endParaRPr lang="en-US" sz="2400" dirty="0"/>
+          </a:p>
+          <a:p>
+            <a:r>
+              <a:rPr lang="en-US" sz="2400" dirty="0"/>
+              <a:t>What is the height of each node?</a:t>
+            </a:r>
+          </a:p>
+        </p:txBody>
+      </p:sp>
+      <p:pic>
+        <p:nvPicPr>
+          <p:cNvPr id="12" name="Picture 11">
+            <a:extLst>
+              <a:ext uri="{FF2B5EF4-FFF2-40B4-BE49-F238E27FC236}">
+                <a16:creationId xmlns:a16="http://schemas.microsoft.com/office/drawing/2014/main" id="{5EEB0CD4-3259-9433-CEAF-151E153ACAC4}"/>
+              </a:ext>
+            </a:extLst>
+          </p:cNvPr>
+          <p:cNvPicPr>
+            <a:picLocks noChangeAspect="1"/>
+          </p:cNvPicPr>
+          <p:nvPr/>
+        </p:nvPicPr>
+        <p:blipFill>
+          <a:blip r:embed="rId2"/>
+          <a:srcRect l="13427" t="9200" r="12734" b="7368"/>
+          <a:stretch>
+            <a:fillRect/>
+          </a:stretch>
+        </p:blipFill>
+        <p:spPr>
+          <a:xfrm>
+            <a:off x="7530582" y="342038"/>
+            <a:ext cx="3746725" cy="3034604"/>
+          </a:xfrm>
+          <a:prstGeom prst="rect">
+            <a:avLst/>
+          </a:prstGeom>
+        </p:spPr>
+      </p:pic>
+    </p:spTree>
+    <p:extLst>
+      <p:ext uri="{BB962C8B-B14F-4D97-AF65-F5344CB8AC3E}">
+        <p14:creationId xmlns:p14="http://schemas.microsoft.com/office/powerpoint/2010/main" val="2925061429"/>
+      </p:ext>
+    </p:extLst>
+  </p:cSld>
+  <p:clrMapOvr>
+    <a:masterClrMapping/>
+  </p:clrMapOvr>
+</p:sld>
+</file>
+
+<file path=ppt/slides/slide38.xml><?xml version="1.0" encoding="utf-8"?>
+<p:sld xmlns:a="http://schemas.openxmlformats.org/drawingml/2006/main" xmlns:r="http://schemas.openxmlformats.org/officeDocument/2006/relationships" xmlns:p="http://schemas.openxmlformats.org/presentationml/2006/main">
+  <p:cSld>
+    <p:spTree>
+      <p:nvGrpSpPr>
+        <p:cNvPr id="1" name="">
+          <a:extLst>
+            <a:ext uri="{FF2B5EF4-FFF2-40B4-BE49-F238E27FC236}">
+              <a16:creationId xmlns:a16="http://schemas.microsoft.com/office/drawing/2014/main" id="{2E534588-DFF4-7960-4D19-F49D78DC0CAD}"/>
+            </a:ext>
+          </a:extLst>
+        </p:cNvPr>
+        <p:cNvGrpSpPr/>
+        <p:nvPr/>
+      </p:nvGrpSpPr>
+      <p:grpSpPr>
+        <a:xfrm>
+          <a:off x="0" y="0"/>
+          <a:ext cx="0" cy="0"/>
+          <a:chOff x="0" y="0"/>
+          <a:chExt cx="0" cy="0"/>
+        </a:xfrm>
+      </p:grpSpPr>
+      <p:sp>
+        <p:nvSpPr>
+          <p:cNvPr id="2" name="Title 1">
+            <a:extLst>
+              <a:ext uri="{FF2B5EF4-FFF2-40B4-BE49-F238E27FC236}">
+                <a16:creationId xmlns:a16="http://schemas.microsoft.com/office/drawing/2014/main" id="{27C0B5B3-BE65-32BC-FF43-2EE88073689A}"/>
+              </a:ext>
+            </a:extLst>
+          </p:cNvPr>
+          <p:cNvSpPr>
+            <a:spLocks noGrp="1"/>
+          </p:cNvSpPr>
+          <p:nvPr>
+            <p:ph type="title"/>
+          </p:nvPr>
+        </p:nvSpPr>
+        <p:spPr>
+          <a:xfrm>
+            <a:off x="838200" y="365125"/>
+            <a:ext cx="5100376" cy="1325563"/>
+          </a:xfrm>
+        </p:spPr>
+        <p:txBody>
+          <a:bodyPr/>
+          <a:lstStyle/>
+          <a:p>
+            <a:r>
+              <a:rPr lang="en-US" dirty="0"/>
+              <a:t>Try this!</a:t>
+            </a:r>
+          </a:p>
+        </p:txBody>
+      </p:sp>
+      <p:sp>
+        <p:nvSpPr>
+          <p:cNvPr id="5" name="TextBox 4">
+            <a:extLst>
+              <a:ext uri="{FF2B5EF4-FFF2-40B4-BE49-F238E27FC236}">
+                <a16:creationId xmlns:a16="http://schemas.microsoft.com/office/drawing/2014/main" id="{B2CB782C-295C-3787-1161-4C836F4E06E0}"/>
+              </a:ext>
+            </a:extLst>
+          </p:cNvPr>
+          <p:cNvSpPr txBox="1"/>
+          <p:nvPr/>
+        </p:nvSpPr>
+        <p:spPr>
+          <a:xfrm>
+            <a:off x="3049675" y="3246846"/>
+            <a:ext cx="6099348" cy="369332"/>
+          </a:xfrm>
+          <a:prstGeom prst="rect">
+            <a:avLst/>
+          </a:prstGeom>
+          <a:noFill/>
+        </p:spPr>
+        <p:txBody>
+          <a:bodyPr wrap="square">
+            <a:spAutoFit/>
+          </a:bodyPr>
+          <a:lstStyle/>
+          <a:p>
+            <a:endParaRPr lang="en-US" dirty="0"/>
+          </a:p>
+        </p:txBody>
+      </p:sp>
+      <p:sp>
+        <p:nvSpPr>
+          <p:cNvPr id="7" name="TextBox 6">
+            <a:extLst>
+              <a:ext uri="{FF2B5EF4-FFF2-40B4-BE49-F238E27FC236}">
+                <a16:creationId xmlns:a16="http://schemas.microsoft.com/office/drawing/2014/main" id="{3F7DF010-601A-7B58-2D1C-A4E3FC32E183}"/>
+              </a:ext>
+            </a:extLst>
+          </p:cNvPr>
+          <p:cNvSpPr txBox="1"/>
+          <p:nvPr/>
+        </p:nvSpPr>
+        <p:spPr>
+          <a:xfrm>
+            <a:off x="3049675" y="3246846"/>
+            <a:ext cx="6099348" cy="369332"/>
+          </a:xfrm>
+          <a:prstGeom prst="rect">
+            <a:avLst/>
+          </a:prstGeom>
+          <a:noFill/>
+        </p:spPr>
+        <p:txBody>
+          <a:bodyPr wrap="square">
+            <a:spAutoFit/>
+          </a:bodyPr>
+          <a:lstStyle/>
+          <a:p>
+            <a:endParaRPr lang="en-US" dirty="0"/>
+          </a:p>
+        </p:txBody>
+      </p:sp>
+      <p:sp>
+        <p:nvSpPr>
+          <p:cNvPr id="9" name="Content Placeholder 2">
+            <a:extLst>
+              <a:ext uri="{FF2B5EF4-FFF2-40B4-BE49-F238E27FC236}">
+                <a16:creationId xmlns:a16="http://schemas.microsoft.com/office/drawing/2014/main" id="{CF0B6AFD-38A3-3779-9A9D-97FF7F279641}"/>
+              </a:ext>
+            </a:extLst>
+          </p:cNvPr>
+          <p:cNvSpPr>
+            <a:spLocks noGrp="1"/>
+          </p:cNvSpPr>
+          <p:nvPr>
+            <p:ph idx="1"/>
+          </p:nvPr>
+        </p:nvSpPr>
+        <p:spPr>
+          <a:xfrm>
+            <a:off x="7104185" y="3655034"/>
+            <a:ext cx="4947975" cy="3034603"/>
+          </a:xfrm>
+        </p:spPr>
+        <p:txBody>
+          <a:bodyPr>
+            <a:normAutofit fontScale="92500" lnSpcReduction="10000"/>
+          </a:bodyPr>
+          <a:lstStyle/>
+          <a:p>
+            <a:pPr marL="0" indent="0">
+              <a:buNone/>
+            </a:pPr>
+            <a:r>
+              <a:rPr lang="en-CA" dirty="0"/>
+              <a:t>The </a:t>
+            </a:r>
+            <a:r>
+              <a:rPr lang="en-CA" b="1" dirty="0"/>
+              <a:t>height</a:t>
+            </a:r>
+            <a:r>
+              <a:rPr lang="en-CA" dirty="0"/>
+              <a:t> of a node p in a tree is:</a:t>
+            </a:r>
+          </a:p>
+          <a:p>
+            <a:r>
+              <a:rPr lang="en-CA" dirty="0"/>
+              <a:t>If p</a:t>
+            </a:r>
+            <a:r>
+              <a:rPr lang="en-CA" i="1" dirty="0"/>
+              <a:t> </a:t>
+            </a:r>
+            <a:r>
+              <a:rPr lang="en-CA" dirty="0"/>
+              <a:t>is a leaf, then the </a:t>
+            </a:r>
+            <a:r>
+              <a:rPr lang="en-CA" b="1" dirty="0"/>
+              <a:t>height</a:t>
+            </a:r>
+            <a:r>
+              <a:rPr lang="en-CA" dirty="0"/>
+              <a:t> of p</a:t>
+            </a:r>
+            <a:r>
+              <a:rPr lang="en-CA" i="1" dirty="0"/>
+              <a:t> </a:t>
+            </a:r>
+            <a:r>
+              <a:rPr lang="en-CA" dirty="0"/>
+              <a:t>is 0</a:t>
+            </a:r>
+          </a:p>
+          <a:p>
+            <a:r>
+              <a:rPr lang="en-CA" dirty="0"/>
+              <a:t>Otherwise, the </a:t>
+            </a:r>
+            <a:r>
+              <a:rPr lang="en-CA" b="1" dirty="0"/>
+              <a:t>height</a:t>
+            </a:r>
+            <a:r>
+              <a:rPr lang="en-CA" dirty="0"/>
+              <a:t> of p</a:t>
+            </a:r>
+            <a:r>
+              <a:rPr lang="en-CA" i="1" dirty="0"/>
+              <a:t> </a:t>
+            </a:r>
+            <a:r>
+              <a:rPr lang="en-CA" dirty="0"/>
+              <a:t>is 1 plus the </a:t>
+            </a:r>
+            <a:r>
+              <a:rPr lang="en-CA" i="1" dirty="0"/>
+              <a:t>maximum</a:t>
+            </a:r>
+            <a:r>
+              <a:rPr lang="en-CA" dirty="0"/>
+              <a:t> height of a child of p</a:t>
+            </a:r>
+          </a:p>
+          <a:p>
+            <a:pPr marL="0" indent="0">
+              <a:buNone/>
+            </a:pPr>
+            <a:r>
+              <a:rPr lang="en-US" dirty="0"/>
+              <a:t>The </a:t>
+            </a:r>
+            <a:r>
+              <a:rPr lang="en-US" b="1" dirty="0"/>
+              <a:t>height of a tree </a:t>
+            </a:r>
+            <a:r>
+              <a:rPr lang="en-US" dirty="0"/>
+              <a:t>T is the the height of T’s root node.</a:t>
+            </a:r>
+          </a:p>
+        </p:txBody>
+      </p:sp>
+      <p:sp>
+        <p:nvSpPr>
+          <p:cNvPr id="11" name="TextBox 10">
+            <a:extLst>
+              <a:ext uri="{FF2B5EF4-FFF2-40B4-BE49-F238E27FC236}">
+                <a16:creationId xmlns:a16="http://schemas.microsoft.com/office/drawing/2014/main" id="{AC99E9E9-5C06-DEA1-4B68-CE9277AF3DCC}"/>
+              </a:ext>
+            </a:extLst>
+          </p:cNvPr>
+          <p:cNvSpPr txBox="1"/>
+          <p:nvPr/>
+        </p:nvSpPr>
+        <p:spPr>
+          <a:xfrm>
+            <a:off x="469095" y="1859340"/>
+            <a:ext cx="4480907" cy="4154984"/>
+          </a:xfrm>
+          <a:prstGeom prst="rect">
+            <a:avLst/>
+          </a:prstGeom>
+          <a:noFill/>
+        </p:spPr>
+        <p:txBody>
+          <a:bodyPr wrap="none" rtlCol="0">
+            <a:spAutoFit/>
+          </a:bodyPr>
+          <a:lstStyle/>
+          <a:p>
+            <a:r>
+              <a:rPr lang="en-US" sz="2400" dirty="0"/>
+              <a:t>Is it a binary tree?</a:t>
+            </a:r>
+          </a:p>
+          <a:p>
+            <a:r>
+              <a:rPr lang="en-US" sz="2400" dirty="0">
+                <a:solidFill>
+                  <a:srgbClr val="00B050"/>
+                </a:solidFill>
+              </a:rPr>
+              <a:t>yes</a:t>
+            </a:r>
+          </a:p>
+          <a:p>
+            <a:endParaRPr lang="en-US" sz="2400" dirty="0"/>
+          </a:p>
+          <a:p>
+            <a:r>
+              <a:rPr lang="en-US" sz="2400" dirty="0"/>
+              <a:t>Is it a proper tree?</a:t>
+            </a:r>
+          </a:p>
+          <a:p>
+            <a:r>
+              <a:rPr lang="en-US" sz="2400" dirty="0">
+                <a:solidFill>
+                  <a:srgbClr val="00B050"/>
+                </a:solidFill>
+              </a:rPr>
+              <a:t>No (node 10 has 1 child)</a:t>
+            </a:r>
+          </a:p>
+          <a:p>
+            <a:endParaRPr lang="en-US" sz="2400" dirty="0"/>
+          </a:p>
+          <a:p>
+            <a:r>
+              <a:rPr lang="en-US" sz="2400" dirty="0"/>
+              <a:t>What are its leaves?</a:t>
+            </a:r>
+          </a:p>
+          <a:p>
+            <a:r>
+              <a:rPr lang="en-US" sz="2400" dirty="0">
+                <a:solidFill>
+                  <a:srgbClr val="00B050"/>
+                </a:solidFill>
+              </a:rPr>
+              <a:t>0, 3, 11, 15</a:t>
+            </a:r>
+          </a:p>
+          <a:p>
+            <a:endParaRPr lang="en-US" sz="2400" dirty="0"/>
+          </a:p>
+          <a:p>
+            <a:r>
+              <a:rPr lang="en-US" sz="2400" dirty="0"/>
+              <a:t>What is the height of each node?</a:t>
+            </a:r>
+          </a:p>
+          <a:p>
+            <a:r>
+              <a:rPr lang="en-US" sz="2400" dirty="0">
+                <a:solidFill>
+                  <a:srgbClr val="00B050"/>
+                </a:solidFill>
+              </a:rPr>
+              <a:t>see the tree</a:t>
+            </a:r>
+          </a:p>
+        </p:txBody>
+      </p:sp>
+      <p:pic>
+        <p:nvPicPr>
+          <p:cNvPr id="12" name="Picture 11">
+            <a:extLst>
+              <a:ext uri="{FF2B5EF4-FFF2-40B4-BE49-F238E27FC236}">
+                <a16:creationId xmlns:a16="http://schemas.microsoft.com/office/drawing/2014/main" id="{39A514C0-AE2C-ACB3-FDAD-F6C43F629E6F}"/>
+              </a:ext>
+            </a:extLst>
+          </p:cNvPr>
+          <p:cNvPicPr>
+            <a:picLocks noChangeAspect="1"/>
+          </p:cNvPicPr>
+          <p:nvPr/>
+        </p:nvPicPr>
+        <p:blipFill>
+          <a:blip r:embed="rId2"/>
+          <a:srcRect l="13427" t="9200" r="12734" b="7368"/>
+          <a:stretch>
+            <a:fillRect/>
+          </a:stretch>
+        </p:blipFill>
+        <p:spPr>
+          <a:xfrm>
+            <a:off x="7530582" y="342038"/>
+            <a:ext cx="3746725" cy="3034604"/>
+          </a:xfrm>
+          <a:prstGeom prst="rect">
+            <a:avLst/>
+          </a:prstGeom>
+        </p:spPr>
+      </p:pic>
+      <p:sp>
+        <p:nvSpPr>
+          <p:cNvPr id="3" name="TextBox 2">
+            <a:extLst>
+              <a:ext uri="{FF2B5EF4-FFF2-40B4-BE49-F238E27FC236}">
+                <a16:creationId xmlns:a16="http://schemas.microsoft.com/office/drawing/2014/main" id="{CF3AB293-9013-08D7-6562-9C1D6985A1F8}"/>
+              </a:ext>
+            </a:extLst>
+          </p:cNvPr>
+          <p:cNvSpPr txBox="1"/>
+          <p:nvPr/>
+        </p:nvSpPr>
+        <p:spPr>
+          <a:xfrm>
+            <a:off x="7727183" y="2564929"/>
+            <a:ext cx="308098" cy="369332"/>
+          </a:xfrm>
+          <a:prstGeom prst="rect">
+            <a:avLst/>
+          </a:prstGeom>
+          <a:noFill/>
+        </p:spPr>
+        <p:txBody>
+          <a:bodyPr wrap="none" rtlCol="0">
+            <a:spAutoFit/>
+          </a:bodyPr>
+          <a:lstStyle/>
+          <a:p>
+            <a:r>
+              <a:rPr lang="en-US" dirty="0">
+                <a:solidFill>
+                  <a:srgbClr val="00B050"/>
+                </a:solidFill>
+              </a:rPr>
+              <a:t>0</a:t>
+            </a:r>
+          </a:p>
+        </p:txBody>
+      </p:sp>
+      <p:sp>
+        <p:nvSpPr>
+          <p:cNvPr id="4" name="TextBox 3">
+            <a:extLst>
+              <a:ext uri="{FF2B5EF4-FFF2-40B4-BE49-F238E27FC236}">
+                <a16:creationId xmlns:a16="http://schemas.microsoft.com/office/drawing/2014/main" id="{59C55D4A-3B98-9F98-4013-59A88C24E6BC}"/>
+              </a:ext>
+            </a:extLst>
+          </p:cNvPr>
+          <p:cNvSpPr txBox="1"/>
+          <p:nvPr/>
+        </p:nvSpPr>
+        <p:spPr>
+          <a:xfrm>
+            <a:off x="8753790" y="2553652"/>
+            <a:ext cx="308098" cy="369332"/>
+          </a:xfrm>
+          <a:prstGeom prst="rect">
+            <a:avLst/>
+          </a:prstGeom>
+          <a:noFill/>
+        </p:spPr>
+        <p:txBody>
+          <a:bodyPr wrap="none" rtlCol="0">
+            <a:spAutoFit/>
+          </a:bodyPr>
+          <a:lstStyle/>
+          <a:p>
+            <a:r>
+              <a:rPr lang="en-US" dirty="0">
+                <a:solidFill>
+                  <a:srgbClr val="00B050"/>
+                </a:solidFill>
+              </a:rPr>
+              <a:t>0</a:t>
+            </a:r>
+          </a:p>
+        </p:txBody>
+      </p:sp>
+      <p:sp>
+        <p:nvSpPr>
+          <p:cNvPr id="6" name="TextBox 5">
+            <a:extLst>
+              <a:ext uri="{FF2B5EF4-FFF2-40B4-BE49-F238E27FC236}">
+                <a16:creationId xmlns:a16="http://schemas.microsoft.com/office/drawing/2014/main" id="{8D4C3A36-D837-6F98-9D93-170F29D28BE7}"/>
+              </a:ext>
+            </a:extLst>
+          </p:cNvPr>
+          <p:cNvSpPr txBox="1"/>
+          <p:nvPr/>
+        </p:nvSpPr>
+        <p:spPr>
+          <a:xfrm>
+            <a:off x="9751018" y="3285702"/>
+            <a:ext cx="308098" cy="369332"/>
+          </a:xfrm>
+          <a:prstGeom prst="rect">
+            <a:avLst/>
+          </a:prstGeom>
+          <a:noFill/>
+        </p:spPr>
+        <p:txBody>
+          <a:bodyPr wrap="none" rtlCol="0">
+            <a:spAutoFit/>
+          </a:bodyPr>
+          <a:lstStyle/>
+          <a:p>
+            <a:r>
+              <a:rPr lang="en-US" dirty="0">
+                <a:solidFill>
+                  <a:srgbClr val="00B050"/>
+                </a:solidFill>
+              </a:rPr>
+              <a:t>0</a:t>
+            </a:r>
+          </a:p>
+        </p:txBody>
+      </p:sp>
+      <p:sp>
+        <p:nvSpPr>
+          <p:cNvPr id="8" name="TextBox 7">
+            <a:extLst>
+              <a:ext uri="{FF2B5EF4-FFF2-40B4-BE49-F238E27FC236}">
+                <a16:creationId xmlns:a16="http://schemas.microsoft.com/office/drawing/2014/main" id="{DD7B9DD0-89CF-F0F9-C3D2-7708215B343D}"/>
+              </a:ext>
+            </a:extLst>
+          </p:cNvPr>
+          <p:cNvSpPr txBox="1"/>
+          <p:nvPr/>
+        </p:nvSpPr>
+        <p:spPr>
+          <a:xfrm>
+            <a:off x="10747540" y="3285702"/>
+            <a:ext cx="308098" cy="369332"/>
+          </a:xfrm>
+          <a:prstGeom prst="rect">
+            <a:avLst/>
+          </a:prstGeom>
+          <a:noFill/>
+        </p:spPr>
+        <p:txBody>
+          <a:bodyPr wrap="none" rtlCol="0">
+            <a:spAutoFit/>
+          </a:bodyPr>
+          <a:lstStyle/>
+          <a:p>
+            <a:r>
+              <a:rPr lang="en-US" dirty="0">
+                <a:solidFill>
+                  <a:srgbClr val="00B050"/>
+                </a:solidFill>
+              </a:rPr>
+              <a:t>0</a:t>
+            </a:r>
+          </a:p>
+        </p:txBody>
+      </p:sp>
+      <p:sp>
+        <p:nvSpPr>
+          <p:cNvPr id="10" name="TextBox 9">
+            <a:extLst>
+              <a:ext uri="{FF2B5EF4-FFF2-40B4-BE49-F238E27FC236}">
+                <a16:creationId xmlns:a16="http://schemas.microsoft.com/office/drawing/2014/main" id="{A8CDAEF4-06EA-E81D-C355-6800CCB1FFD7}"/>
+              </a:ext>
+            </a:extLst>
+          </p:cNvPr>
+          <p:cNvSpPr txBox="1"/>
+          <p:nvPr/>
+        </p:nvSpPr>
+        <p:spPr>
+          <a:xfrm>
+            <a:off x="7809245" y="1317178"/>
+            <a:ext cx="308098" cy="369332"/>
+          </a:xfrm>
+          <a:prstGeom prst="rect">
+            <a:avLst/>
+          </a:prstGeom>
+          <a:noFill/>
+        </p:spPr>
+        <p:txBody>
+          <a:bodyPr wrap="none" rtlCol="0">
+            <a:spAutoFit/>
+          </a:bodyPr>
+          <a:lstStyle/>
+          <a:p>
+            <a:r>
+              <a:rPr lang="en-US" dirty="0">
+                <a:solidFill>
+                  <a:srgbClr val="00B050"/>
+                </a:solidFill>
+              </a:rPr>
+              <a:t>1</a:t>
+            </a:r>
+          </a:p>
+        </p:txBody>
+      </p:sp>
+      <p:sp>
+        <p:nvSpPr>
+          <p:cNvPr id="13" name="TextBox 12">
+            <a:extLst>
+              <a:ext uri="{FF2B5EF4-FFF2-40B4-BE49-F238E27FC236}">
+                <a16:creationId xmlns:a16="http://schemas.microsoft.com/office/drawing/2014/main" id="{6AA09B4B-7DC8-0D63-1EEA-B25E1F95563C}"/>
+              </a:ext>
+            </a:extLst>
+          </p:cNvPr>
+          <p:cNvSpPr txBox="1"/>
+          <p:nvPr/>
+        </p:nvSpPr>
+        <p:spPr>
+          <a:xfrm>
+            <a:off x="9868198" y="2143742"/>
+            <a:ext cx="308098" cy="369332"/>
+          </a:xfrm>
+          <a:prstGeom prst="rect">
+            <a:avLst/>
+          </a:prstGeom>
+          <a:noFill/>
+        </p:spPr>
+        <p:txBody>
+          <a:bodyPr wrap="none" rtlCol="0">
+            <a:spAutoFit/>
+          </a:bodyPr>
+          <a:lstStyle/>
+          <a:p>
+            <a:r>
+              <a:rPr lang="en-US" dirty="0">
+                <a:solidFill>
+                  <a:srgbClr val="00B050"/>
+                </a:solidFill>
+              </a:rPr>
+              <a:t>1</a:t>
+            </a:r>
+          </a:p>
+        </p:txBody>
+      </p:sp>
+      <p:sp>
+        <p:nvSpPr>
+          <p:cNvPr id="14" name="TextBox 13">
+            <a:extLst>
+              <a:ext uri="{FF2B5EF4-FFF2-40B4-BE49-F238E27FC236}">
+                <a16:creationId xmlns:a16="http://schemas.microsoft.com/office/drawing/2014/main" id="{CCE0E802-EEB1-FE59-D41D-E86597C286D9}"/>
+              </a:ext>
+            </a:extLst>
+          </p:cNvPr>
+          <p:cNvSpPr txBox="1"/>
+          <p:nvPr/>
+        </p:nvSpPr>
+        <p:spPr>
+          <a:xfrm>
+            <a:off x="9758383" y="1353617"/>
+            <a:ext cx="308098" cy="369332"/>
+          </a:xfrm>
+          <a:prstGeom prst="rect">
+            <a:avLst/>
+          </a:prstGeom>
+          <a:noFill/>
+        </p:spPr>
+        <p:txBody>
+          <a:bodyPr wrap="none" rtlCol="0">
+            <a:spAutoFit/>
+          </a:bodyPr>
+          <a:lstStyle/>
+          <a:p>
+            <a:r>
+              <a:rPr lang="en-US" dirty="0">
+                <a:solidFill>
+                  <a:srgbClr val="00B050"/>
+                </a:solidFill>
+              </a:rPr>
+              <a:t>2</a:t>
+            </a:r>
+          </a:p>
+        </p:txBody>
+      </p:sp>
+      <p:sp>
+        <p:nvSpPr>
+          <p:cNvPr id="15" name="TextBox 14">
+            <a:extLst>
+              <a:ext uri="{FF2B5EF4-FFF2-40B4-BE49-F238E27FC236}">
+                <a16:creationId xmlns:a16="http://schemas.microsoft.com/office/drawing/2014/main" id="{E8A75DFD-D020-5541-9899-372000DB54D6}"/>
+              </a:ext>
+            </a:extLst>
+          </p:cNvPr>
+          <p:cNvSpPr txBox="1"/>
+          <p:nvPr/>
+        </p:nvSpPr>
+        <p:spPr>
+          <a:xfrm>
+            <a:off x="8757830" y="517389"/>
+            <a:ext cx="308098" cy="369332"/>
+          </a:xfrm>
+          <a:prstGeom prst="rect">
+            <a:avLst/>
+          </a:prstGeom>
+          <a:noFill/>
+        </p:spPr>
+        <p:txBody>
+          <a:bodyPr wrap="none" rtlCol="0">
+            <a:spAutoFit/>
+          </a:bodyPr>
+          <a:lstStyle/>
+          <a:p>
+            <a:r>
+              <a:rPr lang="en-US" dirty="0">
+                <a:solidFill>
+                  <a:srgbClr val="00B050"/>
+                </a:solidFill>
+              </a:rPr>
+              <a:t>3</a:t>
+            </a:r>
+          </a:p>
+        </p:txBody>
+      </p:sp>
+    </p:spTree>
+    <p:extLst>
+      <p:ext uri="{BB962C8B-B14F-4D97-AF65-F5344CB8AC3E}">
+        <p14:creationId xmlns:p14="http://schemas.microsoft.com/office/powerpoint/2010/main" val="1314648312"/>
+      </p:ext>
+    </p:extLst>
+  </p:cSld>
+  <p:clrMapOvr>
+    <a:masterClrMapping/>
+  </p:clrMapOvr>
+</p:sld>
+</file>
+
+<file path=ppt/slides/slide39.xml><?xml version="1.0" encoding="utf-8"?>
+<p:sld xmlns:a="http://schemas.openxmlformats.org/drawingml/2006/main" xmlns:r="http://schemas.openxmlformats.org/officeDocument/2006/relationships" xmlns:p="http://schemas.openxmlformats.org/presentationml/2006/main">
+  <p:cSld>
+    <p:spTree>
+      <p:nvGrpSpPr>
+        <p:cNvPr id="1" name="">
+          <a:extLst>
+            <a:ext uri="{FF2B5EF4-FFF2-40B4-BE49-F238E27FC236}">
+              <a16:creationId xmlns:a16="http://schemas.microsoft.com/office/drawing/2014/main" id="{8AA335A1-CDF4-95B7-8AEE-527AA248675C}"/>
+            </a:ext>
+          </a:extLst>
+        </p:cNvPr>
+        <p:cNvGrpSpPr/>
+        <p:nvPr/>
+      </p:nvGrpSpPr>
+      <p:grpSpPr>
+        <a:xfrm>
+          <a:off x="0" y="0"/>
+          <a:ext cx="0" cy="0"/>
+          <a:chOff x="0" y="0"/>
+          <a:chExt cx="0" cy="0"/>
+        </a:xfrm>
+      </p:grpSpPr>
+      <p:sp>
+        <p:nvSpPr>
+          <p:cNvPr id="2" name="Title 1">
+            <a:extLst>
+              <a:ext uri="{FF2B5EF4-FFF2-40B4-BE49-F238E27FC236}">
+                <a16:creationId xmlns:a16="http://schemas.microsoft.com/office/drawing/2014/main" id="{99243172-7410-4720-EBF4-6B5AFA0ED4F1}"/>
+              </a:ext>
+            </a:extLst>
+          </p:cNvPr>
+          <p:cNvSpPr>
+            <a:spLocks noGrp="1"/>
+          </p:cNvSpPr>
+          <p:nvPr>
+            <p:ph type="title"/>
+          </p:nvPr>
+        </p:nvSpPr>
+        <p:spPr>
+          <a:xfrm>
+            <a:off x="838200" y="365125"/>
+            <a:ext cx="5100376" cy="1325563"/>
+          </a:xfrm>
+        </p:spPr>
+        <p:txBody>
+          <a:bodyPr/>
+          <a:lstStyle/>
+          <a:p>
+            <a:r>
+              <a:rPr lang="en-US" dirty="0"/>
+              <a:t>Try this!</a:t>
+            </a:r>
+          </a:p>
+        </p:txBody>
+      </p:sp>
+      <p:sp>
+        <p:nvSpPr>
+          <p:cNvPr id="5" name="TextBox 4">
+            <a:extLst>
+              <a:ext uri="{FF2B5EF4-FFF2-40B4-BE49-F238E27FC236}">
+                <a16:creationId xmlns:a16="http://schemas.microsoft.com/office/drawing/2014/main" id="{4A8B415F-20A6-0932-A10C-0279885E0ADD}"/>
+              </a:ext>
+            </a:extLst>
+          </p:cNvPr>
+          <p:cNvSpPr txBox="1"/>
+          <p:nvPr/>
+        </p:nvSpPr>
+        <p:spPr>
+          <a:xfrm>
+            <a:off x="3049675" y="3246846"/>
+            <a:ext cx="6099348" cy="369332"/>
+          </a:xfrm>
+          <a:prstGeom prst="rect">
+            <a:avLst/>
+          </a:prstGeom>
+          <a:noFill/>
+        </p:spPr>
+        <p:txBody>
+          <a:bodyPr wrap="square">
+            <a:spAutoFit/>
+          </a:bodyPr>
+          <a:lstStyle/>
+          <a:p>
+            <a:endParaRPr lang="en-US" dirty="0"/>
+          </a:p>
+        </p:txBody>
+      </p:sp>
+      <p:sp>
+        <p:nvSpPr>
+          <p:cNvPr id="7" name="TextBox 6">
+            <a:extLst>
+              <a:ext uri="{FF2B5EF4-FFF2-40B4-BE49-F238E27FC236}">
+                <a16:creationId xmlns:a16="http://schemas.microsoft.com/office/drawing/2014/main" id="{C5136E02-E73B-5BD7-7071-D22CB4272863}"/>
+              </a:ext>
+            </a:extLst>
+          </p:cNvPr>
+          <p:cNvSpPr txBox="1"/>
+          <p:nvPr/>
+        </p:nvSpPr>
+        <p:spPr>
+          <a:xfrm>
+            <a:off x="3049675" y="3246846"/>
+            <a:ext cx="6099348" cy="369332"/>
+          </a:xfrm>
+          <a:prstGeom prst="rect">
+            <a:avLst/>
+          </a:prstGeom>
+          <a:noFill/>
+        </p:spPr>
+        <p:txBody>
+          <a:bodyPr wrap="square">
+            <a:spAutoFit/>
+          </a:bodyPr>
+          <a:lstStyle/>
+          <a:p>
+            <a:endParaRPr lang="en-US" dirty="0"/>
+          </a:p>
+        </p:txBody>
+      </p:sp>
+      <p:sp>
+        <p:nvSpPr>
+          <p:cNvPr id="11" name="TextBox 10">
+            <a:extLst>
+              <a:ext uri="{FF2B5EF4-FFF2-40B4-BE49-F238E27FC236}">
+                <a16:creationId xmlns:a16="http://schemas.microsoft.com/office/drawing/2014/main" id="{A6AC563B-AF20-66AA-AFD3-D5FE267BE5E8}"/>
+              </a:ext>
+            </a:extLst>
+          </p:cNvPr>
+          <p:cNvSpPr txBox="1"/>
+          <p:nvPr/>
+        </p:nvSpPr>
+        <p:spPr>
+          <a:xfrm>
+            <a:off x="469095" y="1859340"/>
+            <a:ext cx="2762872" cy="3785652"/>
+          </a:xfrm>
+          <a:prstGeom prst="rect">
+            <a:avLst/>
+          </a:prstGeom>
+          <a:noFill/>
+        </p:spPr>
+        <p:txBody>
+          <a:bodyPr wrap="none" rtlCol="0">
+            <a:spAutoFit/>
+          </a:bodyPr>
+          <a:lstStyle/>
+          <a:p>
+            <a:r>
+              <a:rPr lang="en-US" sz="2400" b="1" dirty="0"/>
+              <a:t>Preorder</a:t>
+            </a:r>
+            <a:r>
+              <a:rPr lang="en-US" sz="2400" dirty="0"/>
+              <a:t> traversal</a:t>
+            </a:r>
+          </a:p>
+          <a:p>
+            <a:endParaRPr lang="en-US" sz="2400" dirty="0"/>
+          </a:p>
+          <a:p>
+            <a:endParaRPr lang="en-US" sz="2400" dirty="0"/>
+          </a:p>
+          <a:p>
+            <a:r>
+              <a:rPr lang="en-US" sz="2400" b="1" dirty="0" err="1"/>
+              <a:t>Inorder</a:t>
+            </a:r>
+            <a:r>
+              <a:rPr lang="en-US" sz="2400" dirty="0"/>
+              <a:t> traversal</a:t>
+            </a:r>
+          </a:p>
+          <a:p>
+            <a:endParaRPr lang="en-US" sz="2400" dirty="0">
+              <a:solidFill>
+                <a:srgbClr val="00B050"/>
+              </a:solidFill>
+            </a:endParaRPr>
+          </a:p>
+          <a:p>
+            <a:endParaRPr lang="en-US" sz="2400" dirty="0"/>
+          </a:p>
+          <a:p>
+            <a:r>
+              <a:rPr lang="en-US" sz="2400" b="1" dirty="0" err="1"/>
+              <a:t>Postorder</a:t>
+            </a:r>
+            <a:r>
+              <a:rPr lang="en-US" sz="2400" dirty="0"/>
+              <a:t> traversal</a:t>
+            </a:r>
+          </a:p>
+          <a:p>
+            <a:endParaRPr lang="en-US" sz="2400" dirty="0">
+              <a:solidFill>
+                <a:srgbClr val="00B050"/>
+              </a:solidFill>
+            </a:endParaRPr>
+          </a:p>
+          <a:p>
+            <a:endParaRPr lang="en-US" sz="2400" dirty="0"/>
+          </a:p>
+          <a:p>
+            <a:endParaRPr lang="en-US" sz="2400" dirty="0"/>
+          </a:p>
+        </p:txBody>
+      </p:sp>
+      <p:pic>
+        <p:nvPicPr>
+          <p:cNvPr id="12" name="Picture 11">
+            <a:extLst>
+              <a:ext uri="{FF2B5EF4-FFF2-40B4-BE49-F238E27FC236}">
+                <a16:creationId xmlns:a16="http://schemas.microsoft.com/office/drawing/2014/main" id="{C4EE94B5-F01A-55F3-5047-47F165F47F1B}"/>
+              </a:ext>
+            </a:extLst>
+          </p:cNvPr>
+          <p:cNvPicPr>
+            <a:picLocks noChangeAspect="1"/>
+          </p:cNvPicPr>
+          <p:nvPr/>
+        </p:nvPicPr>
+        <p:blipFill>
+          <a:blip r:embed="rId2"/>
+          <a:srcRect l="13427" t="9200" r="12734" b="7368"/>
+          <a:stretch>
+            <a:fillRect/>
+          </a:stretch>
+        </p:blipFill>
+        <p:spPr>
+          <a:xfrm>
+            <a:off x="7530582" y="342038"/>
+            <a:ext cx="3746725" cy="3034604"/>
+          </a:xfrm>
+          <a:prstGeom prst="rect">
+            <a:avLst/>
+          </a:prstGeom>
+        </p:spPr>
+      </p:pic>
+    </p:spTree>
+    <p:extLst>
+      <p:ext uri="{BB962C8B-B14F-4D97-AF65-F5344CB8AC3E}">
+        <p14:creationId xmlns:p14="http://schemas.microsoft.com/office/powerpoint/2010/main" val="2266727789"/>
       </p:ext>
     </p:extLst>
   </p:cSld>
@@ -28401,6 +28940,271 @@
     <p:extLst>
       <p:ext uri="{BB962C8B-B14F-4D97-AF65-F5344CB8AC3E}">
         <p14:creationId xmlns:p14="http://schemas.microsoft.com/office/powerpoint/2010/main" val="3263256051"/>
+      </p:ext>
+    </p:extLst>
+  </p:cSld>
+  <p:clrMapOvr>
+    <a:masterClrMapping/>
+  </p:clrMapOvr>
+</p:sld>
+</file>
+
+<file path=ppt/slides/slide40.xml><?xml version="1.0" encoding="utf-8"?>
+<p:sld xmlns:a="http://schemas.openxmlformats.org/drawingml/2006/main" xmlns:r="http://schemas.openxmlformats.org/officeDocument/2006/relationships" xmlns:p="http://schemas.openxmlformats.org/presentationml/2006/main">
+  <p:cSld>
+    <p:spTree>
+      <p:nvGrpSpPr>
+        <p:cNvPr id="1" name="">
+          <a:extLst>
+            <a:ext uri="{FF2B5EF4-FFF2-40B4-BE49-F238E27FC236}">
+              <a16:creationId xmlns:a16="http://schemas.microsoft.com/office/drawing/2014/main" id="{FC96361A-8143-7371-8CF2-D0F2A2A37A77}"/>
+            </a:ext>
+          </a:extLst>
+        </p:cNvPr>
+        <p:cNvGrpSpPr/>
+        <p:nvPr/>
+      </p:nvGrpSpPr>
+      <p:grpSpPr>
+        <a:xfrm>
+          <a:off x="0" y="0"/>
+          <a:ext cx="0" cy="0"/>
+          <a:chOff x="0" y="0"/>
+          <a:chExt cx="0" cy="0"/>
+        </a:xfrm>
+      </p:grpSpPr>
+      <p:sp>
+        <p:nvSpPr>
+          <p:cNvPr id="2" name="Title 1">
+            <a:extLst>
+              <a:ext uri="{FF2B5EF4-FFF2-40B4-BE49-F238E27FC236}">
+                <a16:creationId xmlns:a16="http://schemas.microsoft.com/office/drawing/2014/main" id="{DB908683-7991-7096-04FE-A6F9864D1A3A}"/>
+              </a:ext>
+            </a:extLst>
+          </p:cNvPr>
+          <p:cNvSpPr>
+            <a:spLocks noGrp="1"/>
+          </p:cNvSpPr>
+          <p:nvPr>
+            <p:ph type="title"/>
+          </p:nvPr>
+        </p:nvSpPr>
+        <p:spPr>
+          <a:xfrm>
+            <a:off x="838200" y="365125"/>
+            <a:ext cx="5100376" cy="1325563"/>
+          </a:xfrm>
+        </p:spPr>
+        <p:txBody>
+          <a:bodyPr/>
+          <a:lstStyle/>
+          <a:p>
+            <a:r>
+              <a:rPr lang="en-US" dirty="0"/>
+              <a:t>Try this!</a:t>
+            </a:r>
+          </a:p>
+        </p:txBody>
+      </p:sp>
+      <p:sp>
+        <p:nvSpPr>
+          <p:cNvPr id="5" name="TextBox 4">
+            <a:extLst>
+              <a:ext uri="{FF2B5EF4-FFF2-40B4-BE49-F238E27FC236}">
+                <a16:creationId xmlns:a16="http://schemas.microsoft.com/office/drawing/2014/main" id="{0F5E640E-CC67-45D5-DB2A-C2284C72DB03}"/>
+              </a:ext>
+            </a:extLst>
+          </p:cNvPr>
+          <p:cNvSpPr txBox="1"/>
+          <p:nvPr/>
+        </p:nvSpPr>
+        <p:spPr>
+          <a:xfrm>
+            <a:off x="3049675" y="3246846"/>
+            <a:ext cx="6099348" cy="369332"/>
+          </a:xfrm>
+          <a:prstGeom prst="rect">
+            <a:avLst/>
+          </a:prstGeom>
+          <a:noFill/>
+        </p:spPr>
+        <p:txBody>
+          <a:bodyPr wrap="square">
+            <a:spAutoFit/>
+          </a:bodyPr>
+          <a:lstStyle/>
+          <a:p>
+            <a:endParaRPr lang="en-US" dirty="0"/>
+          </a:p>
+        </p:txBody>
+      </p:sp>
+      <p:sp>
+        <p:nvSpPr>
+          <p:cNvPr id="7" name="TextBox 6">
+            <a:extLst>
+              <a:ext uri="{FF2B5EF4-FFF2-40B4-BE49-F238E27FC236}">
+                <a16:creationId xmlns:a16="http://schemas.microsoft.com/office/drawing/2014/main" id="{2D191C7D-D842-C2DD-463A-A7351CCD8A36}"/>
+              </a:ext>
+            </a:extLst>
+          </p:cNvPr>
+          <p:cNvSpPr txBox="1"/>
+          <p:nvPr/>
+        </p:nvSpPr>
+        <p:spPr>
+          <a:xfrm>
+            <a:off x="3049675" y="3246846"/>
+            <a:ext cx="6099348" cy="369332"/>
+          </a:xfrm>
+          <a:prstGeom prst="rect">
+            <a:avLst/>
+          </a:prstGeom>
+          <a:noFill/>
+        </p:spPr>
+        <p:txBody>
+          <a:bodyPr wrap="square">
+            <a:spAutoFit/>
+          </a:bodyPr>
+          <a:lstStyle/>
+          <a:p>
+            <a:endParaRPr lang="en-US" dirty="0"/>
+          </a:p>
+        </p:txBody>
+      </p:sp>
+      <p:sp>
+        <p:nvSpPr>
+          <p:cNvPr id="11" name="TextBox 10">
+            <a:extLst>
+              <a:ext uri="{FF2B5EF4-FFF2-40B4-BE49-F238E27FC236}">
+                <a16:creationId xmlns:a16="http://schemas.microsoft.com/office/drawing/2014/main" id="{163C4AA2-AE1B-302D-6446-8EAB01ACDB05}"/>
+              </a:ext>
+            </a:extLst>
+          </p:cNvPr>
+          <p:cNvSpPr txBox="1"/>
+          <p:nvPr/>
+        </p:nvSpPr>
+        <p:spPr>
+          <a:xfrm>
+            <a:off x="469095" y="1859340"/>
+            <a:ext cx="3220753" cy="3785652"/>
+          </a:xfrm>
+          <a:prstGeom prst="rect">
+            <a:avLst/>
+          </a:prstGeom>
+          <a:noFill/>
+        </p:spPr>
+        <p:txBody>
+          <a:bodyPr wrap="none" rtlCol="0">
+            <a:spAutoFit/>
+          </a:bodyPr>
+          <a:lstStyle/>
+          <a:p>
+            <a:r>
+              <a:rPr lang="en-US" sz="2400" b="1" dirty="0"/>
+              <a:t>Preorder</a:t>
+            </a:r>
+            <a:r>
+              <a:rPr lang="en-US" sz="2400" dirty="0"/>
+              <a:t> traversal</a:t>
+            </a:r>
+          </a:p>
+          <a:p>
+            <a:r>
+              <a:rPr lang="en-US" sz="2400" dirty="0">
+                <a:solidFill>
+                  <a:srgbClr val="00B050"/>
+                </a:solidFill>
+              </a:rPr>
+              <a:t>7, 2, 0, 3, 10, 12, 11, 15</a:t>
+            </a:r>
+          </a:p>
+          <a:p>
+            <a:endParaRPr lang="en-US" sz="2400" dirty="0"/>
+          </a:p>
+          <a:p>
+            <a:r>
+              <a:rPr lang="en-US" sz="2400" b="1" dirty="0" err="1"/>
+              <a:t>Inorder</a:t>
+            </a:r>
+            <a:r>
+              <a:rPr lang="en-US" sz="2400" dirty="0"/>
+              <a:t> traversal</a:t>
+            </a:r>
+          </a:p>
+          <a:p>
+            <a:r>
+              <a:rPr lang="en-US" sz="2400" dirty="0">
+                <a:solidFill>
+                  <a:srgbClr val="00B050"/>
+                </a:solidFill>
+              </a:rPr>
+              <a:t>0, 2, 3, 7, 10, 11, 12, 15</a:t>
+            </a:r>
+          </a:p>
+          <a:p>
+            <a:endParaRPr lang="en-US" sz="2400" dirty="0"/>
+          </a:p>
+          <a:p>
+            <a:r>
+              <a:rPr lang="en-US" sz="2400" b="1" dirty="0" err="1"/>
+              <a:t>Postorder</a:t>
+            </a:r>
+            <a:r>
+              <a:rPr lang="en-US" sz="2400" dirty="0"/>
+              <a:t> traversal</a:t>
+            </a:r>
+          </a:p>
+          <a:p>
+            <a:r>
+              <a:rPr lang="en-US" sz="2400" dirty="0">
+                <a:solidFill>
+                  <a:srgbClr val="00B050"/>
+                </a:solidFill>
+              </a:rPr>
+              <a:t>0, 3, 2, 11, 15, 12, 10, 7</a:t>
+            </a:r>
+          </a:p>
+          <a:p>
+            <a:endParaRPr lang="en-US" sz="2400" dirty="0"/>
+          </a:p>
+          <a:p>
+            <a:endParaRPr lang="en-US" sz="2400" dirty="0"/>
+          </a:p>
+        </p:txBody>
+      </p:sp>
+      <p:pic>
+        <p:nvPicPr>
+          <p:cNvPr id="12" name="Picture 11">
+            <a:extLst>
+              <a:ext uri="{FF2B5EF4-FFF2-40B4-BE49-F238E27FC236}">
+                <a16:creationId xmlns:a16="http://schemas.microsoft.com/office/drawing/2014/main" id="{D0257375-DF45-5D9D-6E08-1F1ADE7AE610}"/>
+              </a:ext>
+            </a:extLst>
+          </p:cNvPr>
+          <p:cNvPicPr>
+            <a:picLocks noChangeAspect="1"/>
+          </p:cNvPicPr>
+          <p:nvPr/>
+        </p:nvPicPr>
+        <p:blipFill>
+          <a:blip r:embed="rId2"/>
+          <a:srcRect l="13427" t="9200" r="12734" b="7368"/>
+          <a:stretch>
+            <a:fillRect/>
+          </a:stretch>
+        </p:blipFill>
+        <p:spPr>
+          <a:xfrm>
+            <a:off x="7530582" y="342038"/>
+            <a:ext cx="3746725" cy="3034604"/>
+          </a:xfrm>
+          <a:prstGeom prst="rect">
+            <a:avLst/>
+          </a:prstGeom>
+        </p:spPr>
+      </p:pic>
+    </p:spTree>
+    <p:extLst>
+      <p:ext uri="{BB962C8B-B14F-4D97-AF65-F5344CB8AC3E}">
+        <p14:creationId xmlns:p14="http://schemas.microsoft.com/office/powerpoint/2010/main" val="1343814238"/>
       </p:ext>
     </p:extLst>
   </p:cSld>
